--- a/docs/pptx/whole/jx-linsubhr-ratio-anemia3.pptx
+++ b/docs/pptx/whole/jx-linsubhr-ratio-anemia3.pptx
@@ -2271,7 +2271,7 @@
           </p:nvSpPr>
           <p:spPr>
             <a:xfrm>
-              <a:off x="817517" y="5114368"/>
+              <a:off x="817517" y="5142518"/>
               <a:ext cx="7799693" cy="0"/>
             </a:xfrm>
             <a:custGeom>
@@ -2314,7 +2314,7 @@
           </p:nvSpPr>
           <p:spPr>
             <a:xfrm>
-              <a:off x="817517" y="4244691"/>
+              <a:off x="817517" y="4313054"/>
               <a:ext cx="7799693" cy="0"/>
             </a:xfrm>
             <a:custGeom>
@@ -2357,7 +2357,7 @@
           </p:nvSpPr>
           <p:spPr>
             <a:xfrm>
-              <a:off x="817517" y="3375014"/>
+              <a:off x="817517" y="3483591"/>
               <a:ext cx="7799693" cy="0"/>
             </a:xfrm>
             <a:custGeom>
@@ -2400,7 +2400,7 @@
           </p:nvSpPr>
           <p:spPr>
             <a:xfrm>
-              <a:off x="817517" y="2505337"/>
+              <a:off x="817517" y="2654127"/>
               <a:ext cx="7799693" cy="0"/>
             </a:xfrm>
             <a:custGeom>
@@ -2443,15 +2443,15 @@
           </p:nvSpPr>
           <p:spPr>
             <a:xfrm>
-              <a:off x="1615213" y="1896563"/>
-              <a:ext cx="0" cy="3826579"/>
+              <a:off x="1615213" y="2073503"/>
+              <a:ext cx="0" cy="3649639"/>
             </a:xfrm>
             <a:custGeom>
               <a:avLst/>
               <a:pathLst>
-                <a:path w="0" h="3826579">
+                <a:path w="0" h="3649639">
                   <a:moveTo>
-                    <a:pt x="0" y="3826579"/>
+                    <a:pt x="0" y="3649639"/>
                   </a:moveTo>
                   <a:lnTo>
                     <a:pt x="0" y="0"/>
@@ -2486,15 +2486,15 @@
           </p:nvSpPr>
           <p:spPr>
             <a:xfrm>
-              <a:off x="3387871" y="1896563"/>
-              <a:ext cx="0" cy="3826579"/>
+              <a:off x="3387871" y="2073503"/>
+              <a:ext cx="0" cy="3649639"/>
             </a:xfrm>
             <a:custGeom>
               <a:avLst/>
               <a:pathLst>
-                <a:path w="0" h="3826579">
+                <a:path w="0" h="3649639">
                   <a:moveTo>
-                    <a:pt x="0" y="3826579"/>
+                    <a:pt x="0" y="3649639"/>
                   </a:moveTo>
                   <a:lnTo>
                     <a:pt x="0" y="0"/>
@@ -2529,15 +2529,15 @@
           </p:nvSpPr>
           <p:spPr>
             <a:xfrm>
-              <a:off x="5160528" y="1896563"/>
-              <a:ext cx="0" cy="3826579"/>
+              <a:off x="5160528" y="2073503"/>
+              <a:ext cx="0" cy="3649639"/>
             </a:xfrm>
             <a:custGeom>
               <a:avLst/>
               <a:pathLst>
-                <a:path w="0" h="3826579">
+                <a:path w="0" h="3649639">
                   <a:moveTo>
-                    <a:pt x="0" y="3826579"/>
+                    <a:pt x="0" y="3649639"/>
                   </a:moveTo>
                   <a:lnTo>
                     <a:pt x="0" y="0"/>
@@ -2572,15 +2572,15 @@
           </p:nvSpPr>
           <p:spPr>
             <a:xfrm>
-              <a:off x="6933186" y="1896563"/>
-              <a:ext cx="0" cy="3826579"/>
+              <a:off x="6933186" y="2073503"/>
+              <a:ext cx="0" cy="3649639"/>
             </a:xfrm>
             <a:custGeom>
               <a:avLst/>
               <a:pathLst>
-                <a:path w="0" h="3826579">
+                <a:path w="0" h="3649639">
                   <a:moveTo>
-                    <a:pt x="0" y="3826579"/>
+                    <a:pt x="0" y="3649639"/>
                   </a:moveTo>
                   <a:lnTo>
                     <a:pt x="0" y="0"/>
@@ -2615,7 +2615,7 @@
           </p:nvSpPr>
           <p:spPr>
             <a:xfrm>
-              <a:off x="817517" y="5549207"/>
+              <a:off x="817517" y="5557249"/>
               <a:ext cx="7799693" cy="0"/>
             </a:xfrm>
             <a:custGeom>
@@ -2658,7 +2658,7 @@
           </p:nvSpPr>
           <p:spPr>
             <a:xfrm>
-              <a:off x="817517" y="4679530"/>
+              <a:off x="817517" y="4727786"/>
               <a:ext cx="7799693" cy="0"/>
             </a:xfrm>
             <a:custGeom>
@@ -2701,7 +2701,7 @@
           </p:nvSpPr>
           <p:spPr>
             <a:xfrm>
-              <a:off x="817517" y="3809853"/>
+              <a:off x="817517" y="3898322"/>
               <a:ext cx="7799693" cy="0"/>
             </a:xfrm>
             <a:custGeom>
@@ -2744,7 +2744,7 @@
           </p:nvSpPr>
           <p:spPr>
             <a:xfrm>
-              <a:off x="817517" y="2940175"/>
+              <a:off x="817517" y="3068859"/>
               <a:ext cx="7799693" cy="0"/>
             </a:xfrm>
             <a:custGeom>
@@ -2787,7 +2787,7 @@
           </p:nvSpPr>
           <p:spPr>
             <a:xfrm>
-              <a:off x="817517" y="2070498"/>
+              <a:off x="817517" y="2239395"/>
               <a:ext cx="7799693" cy="0"/>
             </a:xfrm>
             <a:custGeom>
@@ -2830,15 +2830,15 @@
           </p:nvSpPr>
           <p:spPr>
             <a:xfrm>
-              <a:off x="2501542" y="1896563"/>
-              <a:ext cx="0" cy="3826579"/>
+              <a:off x="2501542" y="2073503"/>
+              <a:ext cx="0" cy="3649639"/>
             </a:xfrm>
             <a:custGeom>
               <a:avLst/>
               <a:pathLst>
-                <a:path w="0" h="3826579">
+                <a:path w="0" h="3649639">
                   <a:moveTo>
-                    <a:pt x="0" y="3826579"/>
+                    <a:pt x="0" y="3649639"/>
                   </a:moveTo>
                   <a:lnTo>
                     <a:pt x="0" y="0"/>
@@ -2873,15 +2873,15 @@
           </p:nvSpPr>
           <p:spPr>
             <a:xfrm>
-              <a:off x="4274200" y="1896563"/>
-              <a:ext cx="0" cy="3826579"/>
+              <a:off x="4274200" y="2073503"/>
+              <a:ext cx="0" cy="3649639"/>
             </a:xfrm>
             <a:custGeom>
               <a:avLst/>
               <a:pathLst>
-                <a:path w="0" h="3826579">
+                <a:path w="0" h="3649639">
                   <a:moveTo>
-                    <a:pt x="0" y="3826579"/>
+                    <a:pt x="0" y="3649639"/>
                   </a:moveTo>
                   <a:lnTo>
                     <a:pt x="0" y="0"/>
@@ -2916,15 +2916,15 @@
           </p:nvSpPr>
           <p:spPr>
             <a:xfrm>
-              <a:off x="6046857" y="1896563"/>
-              <a:ext cx="0" cy="3826579"/>
+              <a:off x="6046857" y="2073503"/>
+              <a:ext cx="0" cy="3649639"/>
             </a:xfrm>
             <a:custGeom>
               <a:avLst/>
               <a:pathLst>
-                <a:path w="0" h="3826579">
+                <a:path w="0" h="3649639">
                   <a:moveTo>
-                    <a:pt x="0" y="3826579"/>
+                    <a:pt x="0" y="3649639"/>
                   </a:moveTo>
                   <a:lnTo>
                     <a:pt x="0" y="0"/>
@@ -2959,15 +2959,15 @@
           </p:nvSpPr>
           <p:spPr>
             <a:xfrm>
-              <a:off x="7819515" y="1896563"/>
-              <a:ext cx="0" cy="3826579"/>
+              <a:off x="7819515" y="2073503"/>
+              <a:ext cx="0" cy="3649639"/>
             </a:xfrm>
             <a:custGeom>
               <a:avLst/>
               <a:pathLst>
-                <a:path w="0" h="3826579">
+                <a:path w="0" h="3649639">
                   <a:moveTo>
-                    <a:pt x="0" y="3826579"/>
+                    <a:pt x="0" y="3649639"/>
                   </a:moveTo>
                   <a:lnTo>
                     <a:pt x="0" y="0"/>
@@ -3002,585 +3002,585 @@
           </p:nvSpPr>
           <p:spPr>
             <a:xfrm>
-              <a:off x="817517" y="1896563"/>
-              <a:ext cx="7235830" cy="3526824"/>
+              <a:off x="817517" y="2073503"/>
+              <a:ext cx="7235830" cy="3363745"/>
             </a:xfrm>
             <a:custGeom>
               <a:avLst/>
               <a:pathLst>
-                <a:path w="7235830" h="3526824">
+                <a:path w="7235830" h="3363745">
                   <a:moveTo>
                     <a:pt x="642940" y="0"/>
                   </a:moveTo>
                   <a:lnTo>
-                    <a:pt x="671187" y="52939"/>
-                  </a:lnTo>
-                  <a:lnTo>
-                    <a:pt x="744947" y="186062"/>
-                  </a:lnTo>
-                  <a:lnTo>
-                    <a:pt x="818707" y="314261"/>
-                  </a:lnTo>
-                  <a:lnTo>
-                    <a:pt x="892467" y="437720"/>
-                  </a:lnTo>
-                  <a:lnTo>
-                    <a:pt x="966227" y="556613"/>
-                  </a:lnTo>
-                  <a:lnTo>
-                    <a:pt x="1039987" y="671109"/>
-                  </a:lnTo>
-                  <a:lnTo>
-                    <a:pt x="1113747" y="781371"/>
-                  </a:lnTo>
-                  <a:lnTo>
-                    <a:pt x="1187508" y="887555"/>
-                  </a:lnTo>
-                  <a:lnTo>
-                    <a:pt x="1261268" y="989812"/>
-                  </a:lnTo>
-                  <a:lnTo>
-                    <a:pt x="1335028" y="1088288"/>
-                  </a:lnTo>
-                  <a:lnTo>
-                    <a:pt x="1408788" y="1183122"/>
-                  </a:lnTo>
-                  <a:lnTo>
-                    <a:pt x="1482548" y="1274448"/>
-                  </a:lnTo>
-                  <a:lnTo>
-                    <a:pt x="1556308" y="1362398"/>
-                  </a:lnTo>
-                  <a:lnTo>
-                    <a:pt x="1630068" y="1447095"/>
-                  </a:lnTo>
-                  <a:lnTo>
-                    <a:pt x="1703828" y="1528659"/>
-                  </a:lnTo>
-                  <a:lnTo>
-                    <a:pt x="1777588" y="1607208"/>
-                  </a:lnTo>
-                  <a:lnTo>
-                    <a:pt x="1851348" y="1682851"/>
-                  </a:lnTo>
-                  <a:lnTo>
-                    <a:pt x="1925108" y="1755697"/>
-                  </a:lnTo>
-                  <a:lnTo>
-                    <a:pt x="1998868" y="1825849"/>
-                  </a:lnTo>
-                  <a:lnTo>
-                    <a:pt x="2072628" y="1893407"/>
-                  </a:lnTo>
-                  <a:lnTo>
-                    <a:pt x="2146388" y="1958466"/>
-                  </a:lnTo>
-                  <a:lnTo>
-                    <a:pt x="2220148" y="2021119"/>
-                  </a:lnTo>
-                  <a:lnTo>
-                    <a:pt x="2293908" y="2081456"/>
-                  </a:lnTo>
-                  <a:lnTo>
-                    <a:pt x="2367668" y="2139561"/>
-                  </a:lnTo>
-                  <a:lnTo>
-                    <a:pt x="2441428" y="2195517"/>
-                  </a:lnTo>
-                  <a:lnTo>
-                    <a:pt x="2515188" y="2249404"/>
-                  </a:lnTo>
-                  <a:lnTo>
-                    <a:pt x="2588948" y="2301298"/>
-                  </a:lnTo>
-                  <a:lnTo>
-                    <a:pt x="2662708" y="2351273"/>
-                  </a:lnTo>
-                  <a:lnTo>
-                    <a:pt x="2736468" y="2399399"/>
-                  </a:lnTo>
-                  <a:lnTo>
-                    <a:pt x="2810228" y="2445746"/>
-                  </a:lnTo>
-                  <a:lnTo>
-                    <a:pt x="2883988" y="2490379"/>
-                  </a:lnTo>
-                  <a:lnTo>
-                    <a:pt x="2957748" y="2533362"/>
-                  </a:lnTo>
-                  <a:lnTo>
-                    <a:pt x="3031508" y="2574754"/>
-                  </a:lnTo>
-                  <a:lnTo>
-                    <a:pt x="3105268" y="2614616"/>
-                  </a:lnTo>
-                  <a:lnTo>
-                    <a:pt x="3179028" y="2653004"/>
-                  </a:lnTo>
-                  <a:lnTo>
-                    <a:pt x="3252788" y="2689972"/>
-                  </a:lnTo>
-                  <a:lnTo>
-                    <a:pt x="3326548" y="2725573"/>
-                  </a:lnTo>
-                  <a:lnTo>
-                    <a:pt x="3400308" y="2759858"/>
-                  </a:lnTo>
-                  <a:lnTo>
-                    <a:pt x="3474068" y="2786596"/>
-                  </a:lnTo>
-                  <a:lnTo>
-                    <a:pt x="3547828" y="2798427"/>
-                  </a:lnTo>
-                  <a:lnTo>
-                    <a:pt x="3621588" y="2810095"/>
-                  </a:lnTo>
-                  <a:lnTo>
-                    <a:pt x="3695348" y="2821605"/>
-                  </a:lnTo>
-                  <a:lnTo>
-                    <a:pt x="3769108" y="2832957"/>
-                  </a:lnTo>
-                  <a:lnTo>
-                    <a:pt x="3842868" y="2844154"/>
-                  </a:lnTo>
-                  <a:lnTo>
-                    <a:pt x="3916628" y="2855199"/>
-                  </a:lnTo>
-                  <a:lnTo>
-                    <a:pt x="3990388" y="2866092"/>
-                  </a:lnTo>
-                  <a:lnTo>
-                    <a:pt x="4064149" y="2876837"/>
-                  </a:lnTo>
-                  <a:lnTo>
-                    <a:pt x="4137909" y="2887434"/>
-                  </a:lnTo>
-                  <a:lnTo>
-                    <a:pt x="4211669" y="2897887"/>
-                  </a:lnTo>
-                  <a:lnTo>
-                    <a:pt x="4285429" y="2908198"/>
-                  </a:lnTo>
-                  <a:lnTo>
-                    <a:pt x="4359189" y="2918367"/>
-                  </a:lnTo>
-                  <a:lnTo>
-                    <a:pt x="4432949" y="2928398"/>
-                  </a:lnTo>
-                  <a:lnTo>
-                    <a:pt x="4506709" y="2938291"/>
-                  </a:lnTo>
-                  <a:lnTo>
-                    <a:pt x="4580469" y="2948049"/>
-                  </a:lnTo>
-                  <a:lnTo>
-                    <a:pt x="4654229" y="2957674"/>
-                  </a:lnTo>
-                  <a:lnTo>
-                    <a:pt x="4727989" y="2967168"/>
-                  </a:lnTo>
-                  <a:lnTo>
-                    <a:pt x="4801749" y="2976532"/>
-                  </a:lnTo>
-                  <a:lnTo>
-                    <a:pt x="4875509" y="2985768"/>
-                  </a:lnTo>
-                  <a:lnTo>
-                    <a:pt x="4949269" y="2994877"/>
-                  </a:lnTo>
-                  <a:lnTo>
-                    <a:pt x="5023029" y="3003863"/>
-                  </a:lnTo>
-                  <a:lnTo>
-                    <a:pt x="5096789" y="3012725"/>
-                  </a:lnTo>
-                  <a:lnTo>
-                    <a:pt x="5170549" y="3021467"/>
-                  </a:lnTo>
-                  <a:lnTo>
-                    <a:pt x="5244309" y="3030089"/>
-                  </a:lnTo>
-                  <a:lnTo>
-                    <a:pt x="5318069" y="3038593"/>
-                  </a:lnTo>
-                  <a:lnTo>
-                    <a:pt x="5391829" y="3046981"/>
-                  </a:lnTo>
-                  <a:lnTo>
-                    <a:pt x="5465589" y="3055255"/>
-                  </a:lnTo>
-                  <a:lnTo>
-                    <a:pt x="5539349" y="3063415"/>
-                  </a:lnTo>
-                  <a:lnTo>
-                    <a:pt x="5613109" y="3071464"/>
-                  </a:lnTo>
-                  <a:lnTo>
-                    <a:pt x="5686869" y="3079404"/>
-                  </a:lnTo>
-                  <a:lnTo>
-                    <a:pt x="5760629" y="3087234"/>
-                  </a:lnTo>
-                  <a:lnTo>
-                    <a:pt x="5834389" y="3094958"/>
-                  </a:lnTo>
-                  <a:lnTo>
-                    <a:pt x="5908149" y="3102576"/>
-                  </a:lnTo>
-                  <a:lnTo>
-                    <a:pt x="5981909" y="3110090"/>
-                  </a:lnTo>
-                  <a:lnTo>
-                    <a:pt x="6055669" y="3117502"/>
-                  </a:lnTo>
-                  <a:lnTo>
-                    <a:pt x="6129429" y="3124812"/>
-                  </a:lnTo>
-                  <a:lnTo>
-                    <a:pt x="6203189" y="3132022"/>
-                  </a:lnTo>
-                  <a:lnTo>
-                    <a:pt x="6276949" y="3139134"/>
-                  </a:lnTo>
-                  <a:lnTo>
-                    <a:pt x="6350709" y="3146149"/>
-                  </a:lnTo>
-                  <a:lnTo>
-                    <a:pt x="6424469" y="3153068"/>
-                  </a:lnTo>
-                  <a:lnTo>
-                    <a:pt x="6498229" y="3159892"/>
-                  </a:lnTo>
-                  <a:lnTo>
-                    <a:pt x="6571989" y="3166623"/>
-                  </a:lnTo>
-                  <a:lnTo>
-                    <a:pt x="6645749" y="3173262"/>
-                  </a:lnTo>
-                  <a:lnTo>
-                    <a:pt x="6719509" y="3179811"/>
-                  </a:lnTo>
-                  <a:lnTo>
-                    <a:pt x="6793269" y="3186270"/>
-                  </a:lnTo>
-                  <a:lnTo>
-                    <a:pt x="6867029" y="3192641"/>
-                  </a:lnTo>
-                  <a:lnTo>
-                    <a:pt x="6940789" y="3198925"/>
-                  </a:lnTo>
-                  <a:lnTo>
-                    <a:pt x="7014550" y="3205123"/>
-                  </a:lnTo>
-                  <a:lnTo>
-                    <a:pt x="7088310" y="3211236"/>
-                  </a:lnTo>
-                  <a:lnTo>
-                    <a:pt x="7162070" y="3217266"/>
-                  </a:lnTo>
-                  <a:lnTo>
-                    <a:pt x="7235830" y="3223213"/>
-                  </a:lnTo>
-                  <a:lnTo>
-                    <a:pt x="7235830" y="3526824"/>
-                  </a:lnTo>
-                  <a:lnTo>
-                    <a:pt x="7162070" y="3521993"/>
-                  </a:lnTo>
-                  <a:lnTo>
-                    <a:pt x="7088310" y="3516975"/>
-                  </a:lnTo>
-                  <a:lnTo>
-                    <a:pt x="7014550" y="3511766"/>
-                  </a:lnTo>
-                  <a:lnTo>
-                    <a:pt x="6940789" y="3506356"/>
-                  </a:lnTo>
-                  <a:lnTo>
-                    <a:pt x="6867029" y="3500738"/>
-                  </a:lnTo>
-                  <a:lnTo>
-                    <a:pt x="6793269" y="3494904"/>
-                  </a:lnTo>
-                  <a:lnTo>
-                    <a:pt x="6719509" y="3488847"/>
-                  </a:lnTo>
-                  <a:lnTo>
-                    <a:pt x="6645749" y="3482557"/>
-                  </a:lnTo>
-                  <a:lnTo>
-                    <a:pt x="6571989" y="3476025"/>
-                  </a:lnTo>
-                  <a:lnTo>
-                    <a:pt x="6498229" y="3469243"/>
-                  </a:lnTo>
-                  <a:lnTo>
-                    <a:pt x="6424469" y="3462200"/>
-                  </a:lnTo>
-                  <a:lnTo>
-                    <a:pt x="6350709" y="3454887"/>
-                  </a:lnTo>
-                  <a:lnTo>
-                    <a:pt x="6276949" y="3447292"/>
-                  </a:lnTo>
-                  <a:lnTo>
-                    <a:pt x="6203189" y="3439407"/>
-                  </a:lnTo>
-                  <a:lnTo>
-                    <a:pt x="6129429" y="3431218"/>
-                  </a:lnTo>
-                  <a:lnTo>
-                    <a:pt x="6055669" y="3422715"/>
-                  </a:lnTo>
-                  <a:lnTo>
-                    <a:pt x="5981909" y="3413885"/>
-                  </a:lnTo>
-                  <a:lnTo>
-                    <a:pt x="5908149" y="3404717"/>
-                  </a:lnTo>
-                  <a:lnTo>
-                    <a:pt x="5834389" y="3395196"/>
-                  </a:lnTo>
-                  <a:lnTo>
-                    <a:pt x="5760629" y="3385309"/>
-                  </a:lnTo>
-                  <a:lnTo>
-                    <a:pt x="5686869" y="3375043"/>
-                  </a:lnTo>
-                  <a:lnTo>
-                    <a:pt x="5613109" y="3364383"/>
-                  </a:lnTo>
-                  <a:lnTo>
-                    <a:pt x="5539349" y="3353313"/>
-                  </a:lnTo>
-                  <a:lnTo>
-                    <a:pt x="5465589" y="3341818"/>
-                  </a:lnTo>
-                  <a:lnTo>
-                    <a:pt x="5391829" y="3329882"/>
-                  </a:lnTo>
-                  <a:lnTo>
-                    <a:pt x="5318069" y="3317488"/>
-                  </a:lnTo>
-                  <a:lnTo>
-                    <a:pt x="5244309" y="3304617"/>
-                  </a:lnTo>
-                  <a:lnTo>
-                    <a:pt x="5170549" y="3291252"/>
-                  </a:lnTo>
-                  <a:lnTo>
-                    <a:pt x="5096789" y="3277374"/>
-                  </a:lnTo>
-                  <a:lnTo>
-                    <a:pt x="5023029" y="3262963"/>
-                  </a:lnTo>
-                  <a:lnTo>
-                    <a:pt x="4949269" y="3247999"/>
-                  </a:lnTo>
-                  <a:lnTo>
-                    <a:pt x="4875509" y="3232460"/>
-                  </a:lnTo>
-                  <a:lnTo>
-                    <a:pt x="4801749" y="3216324"/>
-                  </a:lnTo>
-                  <a:lnTo>
-                    <a:pt x="4727989" y="3199569"/>
-                  </a:lnTo>
-                  <a:lnTo>
-                    <a:pt x="4654229" y="3182170"/>
-                  </a:lnTo>
-                  <a:lnTo>
-                    <a:pt x="4580469" y="3164103"/>
-                  </a:lnTo>
-                  <a:lnTo>
-                    <a:pt x="4506709" y="3145342"/>
-                  </a:lnTo>
-                  <a:lnTo>
-                    <a:pt x="4432949" y="3125861"/>
-                  </a:lnTo>
-                  <a:lnTo>
-                    <a:pt x="4359189" y="3105631"/>
-                  </a:lnTo>
-                  <a:lnTo>
-                    <a:pt x="4285429" y="3084625"/>
-                  </a:lnTo>
-                  <a:lnTo>
-                    <a:pt x="4211669" y="3062812"/>
-                  </a:lnTo>
-                  <a:lnTo>
-                    <a:pt x="4137909" y="3040162"/>
-                  </a:lnTo>
-                  <a:lnTo>
-                    <a:pt x="4064149" y="3016641"/>
-                  </a:lnTo>
-                  <a:lnTo>
-                    <a:pt x="3990388" y="2992218"/>
-                  </a:lnTo>
-                  <a:lnTo>
-                    <a:pt x="3916628" y="2966856"/>
-                  </a:lnTo>
-                  <a:lnTo>
-                    <a:pt x="3842868" y="2940521"/>
-                  </a:lnTo>
-                  <a:lnTo>
-                    <a:pt x="3769108" y="2913174"/>
-                  </a:lnTo>
-                  <a:lnTo>
-                    <a:pt x="3695348" y="2884777"/>
-                  </a:lnTo>
-                  <a:lnTo>
-                    <a:pt x="3621588" y="2855290"/>
-                  </a:lnTo>
-                  <a:lnTo>
-                    <a:pt x="3547828" y="2824670"/>
-                  </a:lnTo>
-                  <a:lnTo>
-                    <a:pt x="3474068" y="2792875"/>
-                  </a:lnTo>
-                  <a:lnTo>
-                    <a:pt x="3400308" y="2774602"/>
-                  </a:lnTo>
-                  <a:lnTo>
-                    <a:pt x="3326548" y="2762441"/>
-                  </a:lnTo>
-                  <a:lnTo>
-                    <a:pt x="3252788" y="2750112"/>
-                  </a:lnTo>
-                  <a:lnTo>
-                    <a:pt x="3179028" y="2737613"/>
-                  </a:lnTo>
-                  <a:lnTo>
-                    <a:pt x="3105268" y="2724940"/>
-                  </a:lnTo>
-                  <a:lnTo>
-                    <a:pt x="3031508" y="2712092"/>
-                  </a:lnTo>
-                  <a:lnTo>
-                    <a:pt x="2957748" y="2699065"/>
-                  </a:lnTo>
-                  <a:lnTo>
-                    <a:pt x="2883988" y="2685859"/>
-                  </a:lnTo>
-                  <a:lnTo>
-                    <a:pt x="2810228" y="2672469"/>
-                  </a:lnTo>
-                  <a:lnTo>
-                    <a:pt x="2736468" y="2658894"/>
-                  </a:lnTo>
-                  <a:lnTo>
-                    <a:pt x="2662708" y="2645131"/>
-                  </a:lnTo>
-                  <a:lnTo>
-                    <a:pt x="2588948" y="2631178"/>
-                  </a:lnTo>
-                  <a:lnTo>
-                    <a:pt x="2515188" y="2617031"/>
-                  </a:lnTo>
-                  <a:lnTo>
-                    <a:pt x="2441428" y="2602688"/>
-                  </a:lnTo>
-                  <a:lnTo>
-                    <a:pt x="2367668" y="2588147"/>
-                  </a:lnTo>
-                  <a:lnTo>
-                    <a:pt x="2293908" y="2573404"/>
-                  </a:lnTo>
-                  <a:lnTo>
-                    <a:pt x="2220148" y="2558457"/>
-                  </a:lnTo>
-                  <a:lnTo>
-                    <a:pt x="2146388" y="2543303"/>
-                  </a:lnTo>
-                  <a:lnTo>
-                    <a:pt x="2072628" y="2527939"/>
-                  </a:lnTo>
-                  <a:lnTo>
-                    <a:pt x="1998868" y="2512363"/>
-                  </a:lnTo>
-                  <a:lnTo>
-                    <a:pt x="1925108" y="2496570"/>
-                  </a:lnTo>
-                  <a:lnTo>
-                    <a:pt x="1851348" y="2480559"/>
-                  </a:lnTo>
-                  <a:lnTo>
-                    <a:pt x="1777588" y="2464326"/>
-                  </a:lnTo>
-                  <a:lnTo>
-                    <a:pt x="1703828" y="2447869"/>
-                  </a:lnTo>
-                  <a:lnTo>
-                    <a:pt x="1630068" y="2431183"/>
-                  </a:lnTo>
-                  <a:lnTo>
-                    <a:pt x="1556308" y="2414266"/>
-                  </a:lnTo>
-                  <a:lnTo>
-                    <a:pt x="1482548" y="2397115"/>
-                  </a:lnTo>
-                  <a:lnTo>
-                    <a:pt x="1408788" y="2379727"/>
-                  </a:lnTo>
-                  <a:lnTo>
-                    <a:pt x="1335028" y="2362098"/>
-                  </a:lnTo>
-                  <a:lnTo>
-                    <a:pt x="1261268" y="2344224"/>
-                  </a:lnTo>
-                  <a:lnTo>
-                    <a:pt x="1187508" y="2326103"/>
-                  </a:lnTo>
-                  <a:lnTo>
-                    <a:pt x="1113747" y="2307731"/>
-                  </a:lnTo>
-                  <a:lnTo>
-                    <a:pt x="1039987" y="2289105"/>
-                  </a:lnTo>
-                  <a:lnTo>
-                    <a:pt x="966227" y="2270220"/>
-                  </a:lnTo>
-                  <a:lnTo>
-                    <a:pt x="892467" y="2251074"/>
-                  </a:lnTo>
-                  <a:lnTo>
-                    <a:pt x="818707" y="2231663"/>
-                  </a:lnTo>
-                  <a:lnTo>
-                    <a:pt x="744947" y="2211983"/>
-                  </a:lnTo>
-                  <a:lnTo>
-                    <a:pt x="671187" y="2192031"/>
-                  </a:lnTo>
-                  <a:lnTo>
-                    <a:pt x="597427" y="2171802"/>
-                  </a:lnTo>
-                  <a:lnTo>
-                    <a:pt x="523667" y="2151293"/>
-                  </a:lnTo>
-                  <a:lnTo>
-                    <a:pt x="449907" y="2130500"/>
-                  </a:lnTo>
-                  <a:lnTo>
-                    <a:pt x="376147" y="2109419"/>
-                  </a:lnTo>
-                  <a:lnTo>
-                    <a:pt x="302387" y="2088046"/>
-                  </a:lnTo>
-                  <a:lnTo>
-                    <a:pt x="228627" y="2066377"/>
-                  </a:lnTo>
-                  <a:lnTo>
-                    <a:pt x="154867" y="2044408"/>
-                  </a:lnTo>
-                  <a:lnTo>
-                    <a:pt x="81107" y="2022135"/>
-                  </a:lnTo>
-                  <a:lnTo>
-                    <a:pt x="7347" y="1999553"/>
-                  </a:lnTo>
-                  <a:lnTo>
-                    <a:pt x="0" y="1997272"/>
+                    <a:pt x="671187" y="50491"/>
+                  </a:lnTo>
+                  <a:lnTo>
+                    <a:pt x="744947" y="177458"/>
+                  </a:lnTo>
+                  <a:lnTo>
+                    <a:pt x="818707" y="299730"/>
+                  </a:lnTo>
+                  <a:lnTo>
+                    <a:pt x="892467" y="417480"/>
+                  </a:lnTo>
+                  <a:lnTo>
+                    <a:pt x="966227" y="530875"/>
+                  </a:lnTo>
+                  <a:lnTo>
+                    <a:pt x="1039987" y="640077"/>
+                  </a:lnTo>
+                  <a:lnTo>
+                    <a:pt x="1113747" y="745240"/>
+                  </a:lnTo>
+                  <a:lnTo>
+                    <a:pt x="1187508" y="846514"/>
+                  </a:lnTo>
+                  <a:lnTo>
+                    <a:pt x="1261268" y="944043"/>
+                  </a:lnTo>
+                  <a:lnTo>
+                    <a:pt x="1335028" y="1037966"/>
+                  </a:lnTo>
+                  <a:lnTo>
+                    <a:pt x="1408788" y="1128414"/>
+                  </a:lnTo>
+                  <a:lnTo>
+                    <a:pt x="1482548" y="1215518"/>
+                  </a:lnTo>
+                  <a:lnTo>
+                    <a:pt x="1556308" y="1299401"/>
+                  </a:lnTo>
+                  <a:lnTo>
+                    <a:pt x="1630068" y="1380181"/>
+                  </a:lnTo>
+                  <a:lnTo>
+                    <a:pt x="1703828" y="1457975"/>
+                  </a:lnTo>
+                  <a:lnTo>
+                    <a:pt x="1777588" y="1532891"/>
+                  </a:lnTo>
+                  <a:lnTo>
+                    <a:pt x="1851348" y="1605037"/>
+                  </a:lnTo>
+                  <a:lnTo>
+                    <a:pt x="1925108" y="1674514"/>
+                  </a:lnTo>
+                  <a:lnTo>
+                    <a:pt x="1998868" y="1741422"/>
+                  </a:lnTo>
+                  <a:lnTo>
+                    <a:pt x="2072628" y="1805856"/>
+                  </a:lnTo>
+                  <a:lnTo>
+                    <a:pt x="2146388" y="1867907"/>
+                  </a:lnTo>
+                  <a:lnTo>
+                    <a:pt x="2220148" y="1927664"/>
+                  </a:lnTo>
+                  <a:lnTo>
+                    <a:pt x="2293908" y="1985210"/>
+                  </a:lnTo>
+                  <a:lnTo>
+                    <a:pt x="2367668" y="2040628"/>
+                  </a:lnTo>
+                  <a:lnTo>
+                    <a:pt x="2441428" y="2093997"/>
+                  </a:lnTo>
+                  <a:lnTo>
+                    <a:pt x="2515188" y="2145392"/>
+                  </a:lnTo>
+                  <a:lnTo>
+                    <a:pt x="2588948" y="2194886"/>
+                  </a:lnTo>
+                  <a:lnTo>
+                    <a:pt x="2662708" y="2242551"/>
+                  </a:lnTo>
+                  <a:lnTo>
+                    <a:pt x="2736468" y="2288452"/>
+                  </a:lnTo>
+                  <a:lnTo>
+                    <a:pt x="2810228" y="2332656"/>
+                  </a:lnTo>
+                  <a:lnTo>
+                    <a:pt x="2883988" y="2375225"/>
+                  </a:lnTo>
+                  <a:lnTo>
+                    <a:pt x="2957748" y="2416220"/>
+                  </a:lnTo>
+                  <a:lnTo>
+                    <a:pt x="3031508" y="2455699"/>
+                  </a:lnTo>
+                  <a:lnTo>
+                    <a:pt x="3105268" y="2493717"/>
+                  </a:lnTo>
+                  <a:lnTo>
+                    <a:pt x="3179028" y="2530330"/>
+                  </a:lnTo>
+                  <a:lnTo>
+                    <a:pt x="3252788" y="2565589"/>
+                  </a:lnTo>
+                  <a:lnTo>
+                    <a:pt x="3326548" y="2599544"/>
+                  </a:lnTo>
+                  <a:lnTo>
+                    <a:pt x="3400308" y="2632243"/>
+                  </a:lnTo>
+                  <a:lnTo>
+                    <a:pt x="3474068" y="2657745"/>
+                  </a:lnTo>
+                  <a:lnTo>
+                    <a:pt x="3547828" y="2669028"/>
+                  </a:lnTo>
+                  <a:lnTo>
+                    <a:pt x="3621588" y="2680158"/>
+                  </a:lnTo>
+                  <a:lnTo>
+                    <a:pt x="3695348" y="2691135"/>
+                  </a:lnTo>
+                  <a:lnTo>
+                    <a:pt x="3769108" y="2701962"/>
+                  </a:lnTo>
+                  <a:lnTo>
+                    <a:pt x="3842868" y="2712642"/>
+                  </a:lnTo>
+                  <a:lnTo>
+                    <a:pt x="3916628" y="2723175"/>
+                  </a:lnTo>
+                  <a:lnTo>
+                    <a:pt x="3990388" y="2733565"/>
+                  </a:lnTo>
+                  <a:lnTo>
+                    <a:pt x="4064149" y="2743813"/>
+                  </a:lnTo>
+                  <a:lnTo>
+                    <a:pt x="4137909" y="2753920"/>
+                  </a:lnTo>
+                  <a:lnTo>
+                    <a:pt x="4211669" y="2763890"/>
+                  </a:lnTo>
+                  <a:lnTo>
+                    <a:pt x="4285429" y="2773724"/>
+                  </a:lnTo>
+                  <a:lnTo>
+                    <a:pt x="4359189" y="2783423"/>
+                  </a:lnTo>
+                  <a:lnTo>
+                    <a:pt x="4432949" y="2792989"/>
+                  </a:lnTo>
+                  <a:lnTo>
+                    <a:pt x="4506709" y="2802425"/>
+                  </a:lnTo>
+                  <a:lnTo>
+                    <a:pt x="4580469" y="2811733"/>
+                  </a:lnTo>
+                  <a:lnTo>
+                    <a:pt x="4654229" y="2820912"/>
+                  </a:lnTo>
+                  <a:lnTo>
+                    <a:pt x="4727989" y="2829967"/>
+                  </a:lnTo>
+                  <a:lnTo>
+                    <a:pt x="4801749" y="2838898"/>
+                  </a:lnTo>
+                  <a:lnTo>
+                    <a:pt x="4875509" y="2847707"/>
+                  </a:lnTo>
+                  <a:lnTo>
+                    <a:pt x="4949269" y="2856395"/>
+                  </a:lnTo>
+                  <a:lnTo>
+                    <a:pt x="5023029" y="2864965"/>
+                  </a:lnTo>
+                  <a:lnTo>
+                    <a:pt x="5096789" y="2873418"/>
+                  </a:lnTo>
+                  <a:lnTo>
+                    <a:pt x="5170549" y="2881755"/>
+                  </a:lnTo>
+                  <a:lnTo>
+                    <a:pt x="5244309" y="2889979"/>
+                  </a:lnTo>
+                  <a:lnTo>
+                    <a:pt x="5318069" y="2898090"/>
+                  </a:lnTo>
+                  <a:lnTo>
+                    <a:pt x="5391829" y="2906090"/>
+                  </a:lnTo>
+                  <a:lnTo>
+                    <a:pt x="5465589" y="2913981"/>
+                  </a:lnTo>
+                  <a:lnTo>
+                    <a:pt x="5539349" y="2921764"/>
+                  </a:lnTo>
+                  <a:lnTo>
+                    <a:pt x="5613109" y="2929441"/>
+                  </a:lnTo>
+                  <a:lnTo>
+                    <a:pt x="5686869" y="2937013"/>
+                  </a:lnTo>
+                  <a:lnTo>
+                    <a:pt x="5760629" y="2944482"/>
+                  </a:lnTo>
+                  <a:lnTo>
+                    <a:pt x="5834389" y="2951848"/>
+                  </a:lnTo>
+                  <a:lnTo>
+                    <a:pt x="5908149" y="2959114"/>
+                  </a:lnTo>
+                  <a:lnTo>
+                    <a:pt x="5981909" y="2966281"/>
+                  </a:lnTo>
+                  <a:lnTo>
+                    <a:pt x="6055669" y="2973349"/>
+                  </a:lnTo>
+                  <a:lnTo>
+                    <a:pt x="6129429" y="2980322"/>
+                  </a:lnTo>
+                  <a:lnTo>
+                    <a:pt x="6203189" y="2987199"/>
+                  </a:lnTo>
+                  <a:lnTo>
+                    <a:pt x="6276949" y="2993982"/>
+                  </a:lnTo>
+                  <a:lnTo>
+                    <a:pt x="6350709" y="3000672"/>
+                  </a:lnTo>
+                  <a:lnTo>
+                    <a:pt x="6424469" y="3007271"/>
+                  </a:lnTo>
+                  <a:lnTo>
+                    <a:pt x="6498229" y="3013780"/>
+                  </a:lnTo>
+                  <a:lnTo>
+                    <a:pt x="6571989" y="3020200"/>
+                  </a:lnTo>
+                  <a:lnTo>
+                    <a:pt x="6645749" y="3026532"/>
+                  </a:lnTo>
+                  <a:lnTo>
+                    <a:pt x="6719509" y="3032778"/>
+                  </a:lnTo>
+                  <a:lnTo>
+                    <a:pt x="6793269" y="3038938"/>
+                  </a:lnTo>
+                  <a:lnTo>
+                    <a:pt x="6867029" y="3045014"/>
+                  </a:lnTo>
+                  <a:lnTo>
+                    <a:pt x="6940789" y="3051008"/>
+                  </a:lnTo>
+                  <a:lnTo>
+                    <a:pt x="7014550" y="3056919"/>
+                  </a:lnTo>
+                  <a:lnTo>
+                    <a:pt x="7088310" y="3062749"/>
+                  </a:lnTo>
+                  <a:lnTo>
+                    <a:pt x="7162070" y="3068500"/>
+                  </a:lnTo>
+                  <a:lnTo>
+                    <a:pt x="7235830" y="3074173"/>
+                  </a:lnTo>
+                  <a:lnTo>
+                    <a:pt x="7235830" y="3363745"/>
+                  </a:lnTo>
+                  <a:lnTo>
+                    <a:pt x="7162070" y="3359137"/>
+                  </a:lnTo>
+                  <a:lnTo>
+                    <a:pt x="7088310" y="3354352"/>
+                  </a:lnTo>
+                  <a:lnTo>
+                    <a:pt x="7014550" y="3349383"/>
+                  </a:lnTo>
+                  <a:lnTo>
+                    <a:pt x="6940789" y="3344223"/>
+                  </a:lnTo>
+                  <a:lnTo>
+                    <a:pt x="6867029" y="3338865"/>
+                  </a:lnTo>
+                  <a:lnTo>
+                    <a:pt x="6793269" y="3333301"/>
+                  </a:lnTo>
+                  <a:lnTo>
+                    <a:pt x="6719509" y="3327524"/>
+                  </a:lnTo>
+                  <a:lnTo>
+                    <a:pt x="6645749" y="3321525"/>
+                  </a:lnTo>
+                  <a:lnTo>
+                    <a:pt x="6571989" y="3315295"/>
+                  </a:lnTo>
+                  <a:lnTo>
+                    <a:pt x="6498229" y="3308826"/>
+                  </a:lnTo>
+                  <a:lnTo>
+                    <a:pt x="6424469" y="3302109"/>
+                  </a:lnTo>
+                  <a:lnTo>
+                    <a:pt x="6350709" y="3295134"/>
+                  </a:lnTo>
+                  <a:lnTo>
+                    <a:pt x="6276949" y="3287891"/>
+                  </a:lnTo>
+                  <a:lnTo>
+                    <a:pt x="6203189" y="3280370"/>
+                  </a:lnTo>
+                  <a:lnTo>
+                    <a:pt x="6129429" y="3272560"/>
+                  </a:lnTo>
+                  <a:lnTo>
+                    <a:pt x="6055669" y="3264450"/>
+                  </a:lnTo>
+                  <a:lnTo>
+                    <a:pt x="5981909" y="3256028"/>
+                  </a:lnTo>
+                  <a:lnTo>
+                    <a:pt x="5908149" y="3247284"/>
+                  </a:lnTo>
+                  <a:lnTo>
+                    <a:pt x="5834389" y="3238203"/>
+                  </a:lnTo>
+                  <a:lnTo>
+                    <a:pt x="5760629" y="3228774"/>
+                  </a:lnTo>
+                  <a:lnTo>
+                    <a:pt x="5686869" y="3218982"/>
+                  </a:lnTo>
+                  <a:lnTo>
+                    <a:pt x="5613109" y="3208815"/>
+                  </a:lnTo>
+                  <a:lnTo>
+                    <a:pt x="5539349" y="3198257"/>
+                  </a:lnTo>
+                  <a:lnTo>
+                    <a:pt x="5465589" y="3187294"/>
+                  </a:lnTo>
+                  <a:lnTo>
+                    <a:pt x="5391829" y="3175910"/>
+                  </a:lnTo>
+                  <a:lnTo>
+                    <a:pt x="5318069" y="3164088"/>
+                  </a:lnTo>
+                  <a:lnTo>
+                    <a:pt x="5244309" y="3151813"/>
+                  </a:lnTo>
+                  <a:lnTo>
+                    <a:pt x="5170549" y="3139066"/>
+                  </a:lnTo>
+                  <a:lnTo>
+                    <a:pt x="5096789" y="3125830"/>
+                  </a:lnTo>
+                  <a:lnTo>
+                    <a:pt x="5023029" y="3112085"/>
+                  </a:lnTo>
+                  <a:lnTo>
+                    <a:pt x="4949269" y="3097813"/>
+                  </a:lnTo>
+                  <a:lnTo>
+                    <a:pt x="4875509" y="3082992"/>
+                  </a:lnTo>
+                  <a:lnTo>
+                    <a:pt x="4801749" y="3067602"/>
+                  </a:lnTo>
+                  <a:lnTo>
+                    <a:pt x="4727989" y="3051622"/>
+                  </a:lnTo>
+                  <a:lnTo>
+                    <a:pt x="4654229" y="3035027"/>
+                  </a:lnTo>
+                  <a:lnTo>
+                    <a:pt x="4580469" y="3017796"/>
+                  </a:lnTo>
+                  <a:lnTo>
+                    <a:pt x="4506709" y="2999902"/>
+                  </a:lnTo>
+                  <a:lnTo>
+                    <a:pt x="4432949" y="2981322"/>
+                  </a:lnTo>
+                  <a:lnTo>
+                    <a:pt x="4359189" y="2962028"/>
+                  </a:lnTo>
+                  <a:lnTo>
+                    <a:pt x="4285429" y="2941993"/>
+                  </a:lnTo>
+                  <a:lnTo>
+                    <a:pt x="4211669" y="2921189"/>
+                  </a:lnTo>
+                  <a:lnTo>
+                    <a:pt x="4137909" y="2899586"/>
+                  </a:lnTo>
+                  <a:lnTo>
+                    <a:pt x="4064149" y="2877153"/>
+                  </a:lnTo>
+                  <a:lnTo>
+                    <a:pt x="3990388" y="2853859"/>
+                  </a:lnTo>
+                  <a:lnTo>
+                    <a:pt x="3916628" y="2829670"/>
+                  </a:lnTo>
+                  <a:lnTo>
+                    <a:pt x="3842868" y="2804552"/>
+                  </a:lnTo>
+                  <a:lnTo>
+                    <a:pt x="3769108" y="2778470"/>
+                  </a:lnTo>
+                  <a:lnTo>
+                    <a:pt x="3695348" y="2751386"/>
+                  </a:lnTo>
+                  <a:lnTo>
+                    <a:pt x="3621588" y="2723262"/>
+                  </a:lnTo>
+                  <a:lnTo>
+                    <a:pt x="3547828" y="2694058"/>
+                  </a:lnTo>
+                  <a:lnTo>
+                    <a:pt x="3474068" y="2663733"/>
+                  </a:lnTo>
+                  <a:lnTo>
+                    <a:pt x="3400308" y="2646305"/>
+                  </a:lnTo>
+                  <a:lnTo>
+                    <a:pt x="3326548" y="2634707"/>
+                  </a:lnTo>
+                  <a:lnTo>
+                    <a:pt x="3252788" y="2622948"/>
+                  </a:lnTo>
+                  <a:lnTo>
+                    <a:pt x="3179028" y="2611026"/>
+                  </a:lnTo>
+                  <a:lnTo>
+                    <a:pt x="3105268" y="2598940"/>
+                  </a:lnTo>
+                  <a:lnTo>
+                    <a:pt x="3031508" y="2586685"/>
+                  </a:lnTo>
+                  <a:lnTo>
+                    <a:pt x="2957748" y="2574262"/>
+                  </a:lnTo>
+                  <a:lnTo>
+                    <a:pt x="2883988" y="2561666"/>
+                  </a:lnTo>
+                  <a:lnTo>
+                    <a:pt x="2810228" y="2548895"/>
+                  </a:lnTo>
+                  <a:lnTo>
+                    <a:pt x="2736468" y="2535948"/>
+                  </a:lnTo>
+                  <a:lnTo>
+                    <a:pt x="2662708" y="2522821"/>
+                  </a:lnTo>
+                  <a:lnTo>
+                    <a:pt x="2588948" y="2509513"/>
+                  </a:lnTo>
+                  <a:lnTo>
+                    <a:pt x="2515188" y="2496020"/>
+                  </a:lnTo>
+                  <a:lnTo>
+                    <a:pt x="2441428" y="2482341"/>
+                  </a:lnTo>
+                  <a:lnTo>
+                    <a:pt x="2367668" y="2468472"/>
+                  </a:lnTo>
+                  <a:lnTo>
+                    <a:pt x="2293908" y="2454411"/>
+                  </a:lnTo>
+                  <a:lnTo>
+                    <a:pt x="2220148" y="2440155"/>
+                  </a:lnTo>
+                  <a:lnTo>
+                    <a:pt x="2146388" y="2425702"/>
+                  </a:lnTo>
+                  <a:lnTo>
+                    <a:pt x="2072628" y="2411048"/>
+                  </a:lnTo>
+                  <a:lnTo>
+                    <a:pt x="1998868" y="2396192"/>
+                  </a:lnTo>
+                  <a:lnTo>
+                    <a:pt x="1925108" y="2381130"/>
+                  </a:lnTo>
+                  <a:lnTo>
+                    <a:pt x="1851348" y="2365859"/>
+                  </a:lnTo>
+                  <a:lnTo>
+                    <a:pt x="1777588" y="2350377"/>
+                  </a:lnTo>
+                  <a:lnTo>
+                    <a:pt x="1703828" y="2334680"/>
+                  </a:lnTo>
+                  <a:lnTo>
+                    <a:pt x="1630068" y="2318766"/>
+                  </a:lnTo>
+                  <a:lnTo>
+                    <a:pt x="1556308" y="2302632"/>
+                  </a:lnTo>
+                  <a:lnTo>
+                    <a:pt x="1482548" y="2286274"/>
+                  </a:lnTo>
+                  <a:lnTo>
+                    <a:pt x="1408788" y="2269689"/>
+                  </a:lnTo>
+                  <a:lnTo>
+                    <a:pt x="1335028" y="2252875"/>
+                  </a:lnTo>
+                  <a:lnTo>
+                    <a:pt x="1261268" y="2235828"/>
+                  </a:lnTo>
+                  <a:lnTo>
+                    <a:pt x="1187508" y="2218545"/>
+                  </a:lnTo>
+                  <a:lnTo>
+                    <a:pt x="1113747" y="2201023"/>
+                  </a:lnTo>
+                  <a:lnTo>
+                    <a:pt x="1039987" y="2183257"/>
+                  </a:lnTo>
+                  <a:lnTo>
+                    <a:pt x="966227" y="2165246"/>
+                  </a:lnTo>
+                  <a:lnTo>
+                    <a:pt x="892467" y="2146986"/>
+                  </a:lnTo>
+                  <a:lnTo>
+                    <a:pt x="818707" y="2128472"/>
+                  </a:lnTo>
+                  <a:lnTo>
+                    <a:pt x="744947" y="2109702"/>
+                  </a:lnTo>
+                  <a:lnTo>
+                    <a:pt x="671187" y="2090672"/>
+                  </a:lnTo>
+                  <a:lnTo>
+                    <a:pt x="597427" y="2071379"/>
+                  </a:lnTo>
+                  <a:lnTo>
+                    <a:pt x="523667" y="2051818"/>
+                  </a:lnTo>
+                  <a:lnTo>
+                    <a:pt x="449907" y="2031987"/>
+                  </a:lnTo>
+                  <a:lnTo>
+                    <a:pt x="376147" y="2011880"/>
+                  </a:lnTo>
+                  <a:lnTo>
+                    <a:pt x="302387" y="1991496"/>
+                  </a:lnTo>
+                  <a:lnTo>
+                    <a:pt x="228627" y="1970829"/>
+                  </a:lnTo>
+                  <a:lnTo>
+                    <a:pt x="154867" y="1949875"/>
+                  </a:lnTo>
+                  <a:lnTo>
+                    <a:pt x="81107" y="1928632"/>
+                  </a:lnTo>
+                  <a:lnTo>
+                    <a:pt x="7347" y="1907094"/>
+                  </a:lnTo>
+                  <a:lnTo>
+                    <a:pt x="0" y="1904919"/>
                   </a:lnTo>
                   <a:close/>
                 </a:path>
@@ -3606,285 +3606,285 @@
           </p:nvSpPr>
           <p:spPr>
             <a:xfrm>
-              <a:off x="1460458" y="1896563"/>
-              <a:ext cx="6592889" cy="3223213"/>
+              <a:off x="1460458" y="2073503"/>
+              <a:ext cx="6592889" cy="3074173"/>
             </a:xfrm>
             <a:custGeom>
               <a:avLst/>
               <a:pathLst>
-                <a:path w="6592889" h="3223213">
+                <a:path w="6592889" h="3074173">
                   <a:moveTo>
                     <a:pt x="0" y="0"/>
                   </a:moveTo>
                   <a:lnTo>
-                    <a:pt x="28247" y="52939"/>
-                  </a:lnTo>
-                  <a:lnTo>
-                    <a:pt x="102007" y="186062"/>
-                  </a:lnTo>
-                  <a:lnTo>
-                    <a:pt x="175767" y="314261"/>
-                  </a:lnTo>
-                  <a:lnTo>
-                    <a:pt x="249527" y="437720"/>
-                  </a:lnTo>
-                  <a:lnTo>
-                    <a:pt x="323287" y="556613"/>
-                  </a:lnTo>
-                  <a:lnTo>
-                    <a:pt x="397047" y="671109"/>
-                  </a:lnTo>
-                  <a:lnTo>
-                    <a:pt x="470807" y="781371"/>
-                  </a:lnTo>
-                  <a:lnTo>
-                    <a:pt x="544567" y="887555"/>
-                  </a:lnTo>
-                  <a:lnTo>
-                    <a:pt x="618327" y="989812"/>
-                  </a:lnTo>
-                  <a:lnTo>
-                    <a:pt x="692087" y="1088288"/>
-                  </a:lnTo>
-                  <a:lnTo>
-                    <a:pt x="765847" y="1183122"/>
-                  </a:lnTo>
-                  <a:lnTo>
-                    <a:pt x="839607" y="1274448"/>
-                  </a:lnTo>
-                  <a:lnTo>
-                    <a:pt x="913367" y="1362398"/>
-                  </a:lnTo>
-                  <a:lnTo>
-                    <a:pt x="987127" y="1447095"/>
-                  </a:lnTo>
-                  <a:lnTo>
-                    <a:pt x="1060887" y="1528659"/>
-                  </a:lnTo>
-                  <a:lnTo>
-                    <a:pt x="1134647" y="1607208"/>
-                  </a:lnTo>
-                  <a:lnTo>
-                    <a:pt x="1208408" y="1682851"/>
-                  </a:lnTo>
-                  <a:lnTo>
-                    <a:pt x="1282168" y="1755697"/>
-                  </a:lnTo>
-                  <a:lnTo>
-                    <a:pt x="1355928" y="1825849"/>
-                  </a:lnTo>
-                  <a:lnTo>
-                    <a:pt x="1429688" y="1893407"/>
-                  </a:lnTo>
-                  <a:lnTo>
-                    <a:pt x="1503448" y="1958466"/>
-                  </a:lnTo>
-                  <a:lnTo>
-                    <a:pt x="1577208" y="2021119"/>
-                  </a:lnTo>
-                  <a:lnTo>
-                    <a:pt x="1650968" y="2081456"/>
-                  </a:lnTo>
-                  <a:lnTo>
-                    <a:pt x="1724728" y="2139561"/>
-                  </a:lnTo>
-                  <a:lnTo>
-                    <a:pt x="1798488" y="2195517"/>
-                  </a:lnTo>
-                  <a:lnTo>
-                    <a:pt x="1872248" y="2249404"/>
-                  </a:lnTo>
-                  <a:lnTo>
-                    <a:pt x="1946008" y="2301298"/>
-                  </a:lnTo>
-                  <a:lnTo>
-                    <a:pt x="2019768" y="2351273"/>
-                  </a:lnTo>
-                  <a:lnTo>
-                    <a:pt x="2093528" y="2399399"/>
-                  </a:lnTo>
-                  <a:lnTo>
-                    <a:pt x="2167288" y="2445746"/>
-                  </a:lnTo>
-                  <a:lnTo>
-                    <a:pt x="2241048" y="2490379"/>
-                  </a:lnTo>
-                  <a:lnTo>
-                    <a:pt x="2314808" y="2533362"/>
-                  </a:lnTo>
-                  <a:lnTo>
-                    <a:pt x="2388568" y="2574754"/>
-                  </a:lnTo>
-                  <a:lnTo>
-                    <a:pt x="2462328" y="2614616"/>
-                  </a:lnTo>
-                  <a:lnTo>
-                    <a:pt x="2536088" y="2653004"/>
-                  </a:lnTo>
-                  <a:lnTo>
-                    <a:pt x="2609848" y="2689972"/>
-                  </a:lnTo>
-                  <a:lnTo>
-                    <a:pt x="2683608" y="2725573"/>
-                  </a:lnTo>
-                  <a:lnTo>
-                    <a:pt x="2757368" y="2759858"/>
-                  </a:lnTo>
-                  <a:lnTo>
-                    <a:pt x="2831128" y="2786596"/>
-                  </a:lnTo>
-                  <a:lnTo>
-                    <a:pt x="2904888" y="2798427"/>
-                  </a:lnTo>
-                  <a:lnTo>
-                    <a:pt x="2978648" y="2810095"/>
-                  </a:lnTo>
-                  <a:lnTo>
-                    <a:pt x="3052408" y="2821605"/>
-                  </a:lnTo>
-                  <a:lnTo>
-                    <a:pt x="3126168" y="2832957"/>
-                  </a:lnTo>
-                  <a:lnTo>
-                    <a:pt x="3199928" y="2844154"/>
-                  </a:lnTo>
-                  <a:lnTo>
-                    <a:pt x="3273688" y="2855199"/>
-                  </a:lnTo>
-                  <a:lnTo>
-                    <a:pt x="3347448" y="2866092"/>
-                  </a:lnTo>
-                  <a:lnTo>
-                    <a:pt x="3421208" y="2876837"/>
-                  </a:lnTo>
-                  <a:lnTo>
-                    <a:pt x="3494968" y="2887434"/>
-                  </a:lnTo>
-                  <a:lnTo>
-                    <a:pt x="3568728" y="2897887"/>
-                  </a:lnTo>
-                  <a:lnTo>
-                    <a:pt x="3642488" y="2908198"/>
-                  </a:lnTo>
-                  <a:lnTo>
-                    <a:pt x="3716248" y="2918367"/>
-                  </a:lnTo>
-                  <a:lnTo>
-                    <a:pt x="3790008" y="2928398"/>
-                  </a:lnTo>
-                  <a:lnTo>
-                    <a:pt x="3863768" y="2938291"/>
-                  </a:lnTo>
-                  <a:lnTo>
-                    <a:pt x="3937528" y="2948049"/>
-                  </a:lnTo>
-                  <a:lnTo>
-                    <a:pt x="4011288" y="2957674"/>
-                  </a:lnTo>
-                  <a:lnTo>
-                    <a:pt x="4085048" y="2967168"/>
-                  </a:lnTo>
-                  <a:lnTo>
-                    <a:pt x="4158809" y="2976532"/>
-                  </a:lnTo>
-                  <a:lnTo>
-                    <a:pt x="4232569" y="2985768"/>
-                  </a:lnTo>
-                  <a:lnTo>
-                    <a:pt x="4306329" y="2994877"/>
-                  </a:lnTo>
-                  <a:lnTo>
-                    <a:pt x="4380089" y="3003863"/>
-                  </a:lnTo>
-                  <a:lnTo>
-                    <a:pt x="4453849" y="3012725"/>
-                  </a:lnTo>
-                  <a:lnTo>
-                    <a:pt x="4527609" y="3021467"/>
-                  </a:lnTo>
-                  <a:lnTo>
-                    <a:pt x="4601369" y="3030089"/>
-                  </a:lnTo>
-                  <a:lnTo>
-                    <a:pt x="4675129" y="3038593"/>
-                  </a:lnTo>
-                  <a:lnTo>
-                    <a:pt x="4748889" y="3046981"/>
-                  </a:lnTo>
-                  <a:lnTo>
-                    <a:pt x="4822649" y="3055255"/>
-                  </a:lnTo>
-                  <a:lnTo>
-                    <a:pt x="4896409" y="3063415"/>
-                  </a:lnTo>
-                  <a:lnTo>
-                    <a:pt x="4970169" y="3071464"/>
-                  </a:lnTo>
-                  <a:lnTo>
-                    <a:pt x="5043929" y="3079404"/>
-                  </a:lnTo>
-                  <a:lnTo>
-                    <a:pt x="5117689" y="3087234"/>
-                  </a:lnTo>
-                  <a:lnTo>
-                    <a:pt x="5191449" y="3094958"/>
-                  </a:lnTo>
-                  <a:lnTo>
-                    <a:pt x="5265209" y="3102576"/>
-                  </a:lnTo>
-                  <a:lnTo>
-                    <a:pt x="5338969" y="3110090"/>
-                  </a:lnTo>
-                  <a:lnTo>
-                    <a:pt x="5412729" y="3117502"/>
-                  </a:lnTo>
-                  <a:lnTo>
-                    <a:pt x="5486489" y="3124812"/>
-                  </a:lnTo>
-                  <a:lnTo>
-                    <a:pt x="5560249" y="3132022"/>
-                  </a:lnTo>
-                  <a:lnTo>
-                    <a:pt x="5634009" y="3139134"/>
-                  </a:lnTo>
-                  <a:lnTo>
-                    <a:pt x="5707769" y="3146149"/>
-                  </a:lnTo>
-                  <a:lnTo>
-                    <a:pt x="5781529" y="3153068"/>
-                  </a:lnTo>
-                  <a:lnTo>
-                    <a:pt x="5855289" y="3159892"/>
-                  </a:lnTo>
-                  <a:lnTo>
-                    <a:pt x="5929049" y="3166623"/>
-                  </a:lnTo>
-                  <a:lnTo>
-                    <a:pt x="6002809" y="3173262"/>
-                  </a:lnTo>
-                  <a:lnTo>
-                    <a:pt x="6076569" y="3179811"/>
-                  </a:lnTo>
-                  <a:lnTo>
-                    <a:pt x="6150329" y="3186270"/>
-                  </a:lnTo>
-                  <a:lnTo>
-                    <a:pt x="6224089" y="3192641"/>
-                  </a:lnTo>
-                  <a:lnTo>
-                    <a:pt x="6297849" y="3198925"/>
-                  </a:lnTo>
-                  <a:lnTo>
-                    <a:pt x="6371609" y="3205123"/>
-                  </a:lnTo>
-                  <a:lnTo>
-                    <a:pt x="6445369" y="3211236"/>
-                  </a:lnTo>
-                  <a:lnTo>
-                    <a:pt x="6519129" y="3217266"/>
-                  </a:lnTo>
-                  <a:lnTo>
-                    <a:pt x="6592889" y="3223213"/>
+                    <a:pt x="28247" y="50491"/>
+                  </a:lnTo>
+                  <a:lnTo>
+                    <a:pt x="102007" y="177458"/>
+                  </a:lnTo>
+                  <a:lnTo>
+                    <a:pt x="175767" y="299730"/>
+                  </a:lnTo>
+                  <a:lnTo>
+                    <a:pt x="249527" y="417480"/>
+                  </a:lnTo>
+                  <a:lnTo>
+                    <a:pt x="323287" y="530875"/>
+                  </a:lnTo>
+                  <a:lnTo>
+                    <a:pt x="397047" y="640077"/>
+                  </a:lnTo>
+                  <a:lnTo>
+                    <a:pt x="470807" y="745240"/>
+                  </a:lnTo>
+                  <a:lnTo>
+                    <a:pt x="544567" y="846514"/>
+                  </a:lnTo>
+                  <a:lnTo>
+                    <a:pt x="618327" y="944043"/>
+                  </a:lnTo>
+                  <a:lnTo>
+                    <a:pt x="692087" y="1037966"/>
+                  </a:lnTo>
+                  <a:lnTo>
+                    <a:pt x="765847" y="1128414"/>
+                  </a:lnTo>
+                  <a:lnTo>
+                    <a:pt x="839607" y="1215518"/>
+                  </a:lnTo>
+                  <a:lnTo>
+                    <a:pt x="913367" y="1299401"/>
+                  </a:lnTo>
+                  <a:lnTo>
+                    <a:pt x="987127" y="1380181"/>
+                  </a:lnTo>
+                  <a:lnTo>
+                    <a:pt x="1060887" y="1457975"/>
+                  </a:lnTo>
+                  <a:lnTo>
+                    <a:pt x="1134647" y="1532891"/>
+                  </a:lnTo>
+                  <a:lnTo>
+                    <a:pt x="1208408" y="1605037"/>
+                  </a:lnTo>
+                  <a:lnTo>
+                    <a:pt x="1282168" y="1674514"/>
+                  </a:lnTo>
+                  <a:lnTo>
+                    <a:pt x="1355928" y="1741422"/>
+                  </a:lnTo>
+                  <a:lnTo>
+                    <a:pt x="1429688" y="1805856"/>
+                  </a:lnTo>
+                  <a:lnTo>
+                    <a:pt x="1503448" y="1867907"/>
+                  </a:lnTo>
+                  <a:lnTo>
+                    <a:pt x="1577208" y="1927664"/>
+                  </a:lnTo>
+                  <a:lnTo>
+                    <a:pt x="1650968" y="1985210"/>
+                  </a:lnTo>
+                  <a:lnTo>
+                    <a:pt x="1724728" y="2040628"/>
+                  </a:lnTo>
+                  <a:lnTo>
+                    <a:pt x="1798488" y="2093997"/>
+                  </a:lnTo>
+                  <a:lnTo>
+                    <a:pt x="1872248" y="2145392"/>
+                  </a:lnTo>
+                  <a:lnTo>
+                    <a:pt x="1946008" y="2194886"/>
+                  </a:lnTo>
+                  <a:lnTo>
+                    <a:pt x="2019768" y="2242551"/>
+                  </a:lnTo>
+                  <a:lnTo>
+                    <a:pt x="2093528" y="2288452"/>
+                  </a:lnTo>
+                  <a:lnTo>
+                    <a:pt x="2167288" y="2332656"/>
+                  </a:lnTo>
+                  <a:lnTo>
+                    <a:pt x="2241048" y="2375225"/>
+                  </a:lnTo>
+                  <a:lnTo>
+                    <a:pt x="2314808" y="2416220"/>
+                  </a:lnTo>
+                  <a:lnTo>
+                    <a:pt x="2388568" y="2455699"/>
+                  </a:lnTo>
+                  <a:lnTo>
+                    <a:pt x="2462328" y="2493717"/>
+                  </a:lnTo>
+                  <a:lnTo>
+                    <a:pt x="2536088" y="2530330"/>
+                  </a:lnTo>
+                  <a:lnTo>
+                    <a:pt x="2609848" y="2565589"/>
+                  </a:lnTo>
+                  <a:lnTo>
+                    <a:pt x="2683608" y="2599544"/>
+                  </a:lnTo>
+                  <a:lnTo>
+                    <a:pt x="2757368" y="2632243"/>
+                  </a:lnTo>
+                  <a:lnTo>
+                    <a:pt x="2831128" y="2657745"/>
+                  </a:lnTo>
+                  <a:lnTo>
+                    <a:pt x="2904888" y="2669028"/>
+                  </a:lnTo>
+                  <a:lnTo>
+                    <a:pt x="2978648" y="2680158"/>
+                  </a:lnTo>
+                  <a:lnTo>
+                    <a:pt x="3052408" y="2691135"/>
+                  </a:lnTo>
+                  <a:lnTo>
+                    <a:pt x="3126168" y="2701962"/>
+                  </a:lnTo>
+                  <a:lnTo>
+                    <a:pt x="3199928" y="2712642"/>
+                  </a:lnTo>
+                  <a:lnTo>
+                    <a:pt x="3273688" y="2723175"/>
+                  </a:lnTo>
+                  <a:lnTo>
+                    <a:pt x="3347448" y="2733565"/>
+                  </a:lnTo>
+                  <a:lnTo>
+                    <a:pt x="3421208" y="2743813"/>
+                  </a:lnTo>
+                  <a:lnTo>
+                    <a:pt x="3494968" y="2753920"/>
+                  </a:lnTo>
+                  <a:lnTo>
+                    <a:pt x="3568728" y="2763890"/>
+                  </a:lnTo>
+                  <a:lnTo>
+                    <a:pt x="3642488" y="2773724"/>
+                  </a:lnTo>
+                  <a:lnTo>
+                    <a:pt x="3716248" y="2783423"/>
+                  </a:lnTo>
+                  <a:lnTo>
+                    <a:pt x="3790008" y="2792989"/>
+                  </a:lnTo>
+                  <a:lnTo>
+                    <a:pt x="3863768" y="2802425"/>
+                  </a:lnTo>
+                  <a:lnTo>
+                    <a:pt x="3937528" y="2811733"/>
+                  </a:lnTo>
+                  <a:lnTo>
+                    <a:pt x="4011288" y="2820912"/>
+                  </a:lnTo>
+                  <a:lnTo>
+                    <a:pt x="4085048" y="2829967"/>
+                  </a:lnTo>
+                  <a:lnTo>
+                    <a:pt x="4158809" y="2838898"/>
+                  </a:lnTo>
+                  <a:lnTo>
+                    <a:pt x="4232569" y="2847707"/>
+                  </a:lnTo>
+                  <a:lnTo>
+                    <a:pt x="4306329" y="2856395"/>
+                  </a:lnTo>
+                  <a:lnTo>
+                    <a:pt x="4380089" y="2864965"/>
+                  </a:lnTo>
+                  <a:lnTo>
+                    <a:pt x="4453849" y="2873418"/>
+                  </a:lnTo>
+                  <a:lnTo>
+                    <a:pt x="4527609" y="2881755"/>
+                  </a:lnTo>
+                  <a:lnTo>
+                    <a:pt x="4601369" y="2889979"/>
+                  </a:lnTo>
+                  <a:lnTo>
+                    <a:pt x="4675129" y="2898090"/>
+                  </a:lnTo>
+                  <a:lnTo>
+                    <a:pt x="4748889" y="2906090"/>
+                  </a:lnTo>
+                  <a:lnTo>
+                    <a:pt x="4822649" y="2913981"/>
+                  </a:lnTo>
+                  <a:lnTo>
+                    <a:pt x="4896409" y="2921764"/>
+                  </a:lnTo>
+                  <a:lnTo>
+                    <a:pt x="4970169" y="2929441"/>
+                  </a:lnTo>
+                  <a:lnTo>
+                    <a:pt x="5043929" y="2937013"/>
+                  </a:lnTo>
+                  <a:lnTo>
+                    <a:pt x="5117689" y="2944482"/>
+                  </a:lnTo>
+                  <a:lnTo>
+                    <a:pt x="5191449" y="2951848"/>
+                  </a:lnTo>
+                  <a:lnTo>
+                    <a:pt x="5265209" y="2959114"/>
+                  </a:lnTo>
+                  <a:lnTo>
+                    <a:pt x="5338969" y="2966281"/>
+                  </a:lnTo>
+                  <a:lnTo>
+                    <a:pt x="5412729" y="2973349"/>
+                  </a:lnTo>
+                  <a:lnTo>
+                    <a:pt x="5486489" y="2980322"/>
+                  </a:lnTo>
+                  <a:lnTo>
+                    <a:pt x="5560249" y="2987199"/>
+                  </a:lnTo>
+                  <a:lnTo>
+                    <a:pt x="5634009" y="2993982"/>
+                  </a:lnTo>
+                  <a:lnTo>
+                    <a:pt x="5707769" y="3000672"/>
+                  </a:lnTo>
+                  <a:lnTo>
+                    <a:pt x="5781529" y="3007271"/>
+                  </a:lnTo>
+                  <a:lnTo>
+                    <a:pt x="5855289" y="3013780"/>
+                  </a:lnTo>
+                  <a:lnTo>
+                    <a:pt x="5929049" y="3020200"/>
+                  </a:lnTo>
+                  <a:lnTo>
+                    <a:pt x="6002809" y="3026532"/>
+                  </a:lnTo>
+                  <a:lnTo>
+                    <a:pt x="6076569" y="3032778"/>
+                  </a:lnTo>
+                  <a:lnTo>
+                    <a:pt x="6150329" y="3038938"/>
+                  </a:lnTo>
+                  <a:lnTo>
+                    <a:pt x="6224089" y="3045014"/>
+                  </a:lnTo>
+                  <a:lnTo>
+                    <a:pt x="6297849" y="3051008"/>
+                  </a:lnTo>
+                  <a:lnTo>
+                    <a:pt x="6371609" y="3056919"/>
+                  </a:lnTo>
+                  <a:lnTo>
+                    <a:pt x="6445369" y="3062749"/>
+                  </a:lnTo>
+                  <a:lnTo>
+                    <a:pt x="6519129" y="3068500"/>
+                  </a:lnTo>
+                  <a:lnTo>
+                    <a:pt x="6592889" y="3074173"/>
                   </a:lnTo>
                 </a:path>
               </a:pathLst>
@@ -3904,309 +3904,309 @@
           </p:nvSpPr>
           <p:spPr>
             <a:xfrm>
-              <a:off x="817517" y="3893836"/>
-              <a:ext cx="7235830" cy="1529551"/>
+              <a:off x="817517" y="3978422"/>
+              <a:ext cx="7235830" cy="1458825"/>
             </a:xfrm>
             <a:custGeom>
               <a:avLst/>
               <a:pathLst>
-                <a:path w="7235830" h="1529551">
+                <a:path w="7235830" h="1458825">
                   <a:moveTo>
-                    <a:pt x="7235830" y="1529551"/>
+                    <a:pt x="7235830" y="1458825"/>
                   </a:moveTo>
                   <a:lnTo>
-                    <a:pt x="7162070" y="1524720"/>
-                  </a:lnTo>
-                  <a:lnTo>
-                    <a:pt x="7088310" y="1519702"/>
-                  </a:lnTo>
-                  <a:lnTo>
-                    <a:pt x="7014550" y="1514493"/>
-                  </a:lnTo>
-                  <a:lnTo>
-                    <a:pt x="6940789" y="1509083"/>
-                  </a:lnTo>
-                  <a:lnTo>
-                    <a:pt x="6867029" y="1503465"/>
-                  </a:lnTo>
-                  <a:lnTo>
-                    <a:pt x="6793269" y="1497632"/>
-                  </a:lnTo>
-                  <a:lnTo>
-                    <a:pt x="6719509" y="1491574"/>
-                  </a:lnTo>
-                  <a:lnTo>
-                    <a:pt x="6645749" y="1485284"/>
-                  </a:lnTo>
-                  <a:lnTo>
-                    <a:pt x="6571989" y="1478752"/>
-                  </a:lnTo>
-                  <a:lnTo>
-                    <a:pt x="6498229" y="1471970"/>
-                  </a:lnTo>
-                  <a:lnTo>
-                    <a:pt x="6424469" y="1464927"/>
-                  </a:lnTo>
-                  <a:lnTo>
-                    <a:pt x="6350709" y="1457614"/>
-                  </a:lnTo>
-                  <a:lnTo>
-                    <a:pt x="6276949" y="1450020"/>
-                  </a:lnTo>
-                  <a:lnTo>
-                    <a:pt x="6203189" y="1442134"/>
-                  </a:lnTo>
-                  <a:lnTo>
-                    <a:pt x="6129429" y="1433945"/>
-                  </a:lnTo>
-                  <a:lnTo>
-                    <a:pt x="6055669" y="1425442"/>
-                  </a:lnTo>
-                  <a:lnTo>
-                    <a:pt x="5981909" y="1416612"/>
-                  </a:lnTo>
-                  <a:lnTo>
-                    <a:pt x="5908149" y="1407444"/>
-                  </a:lnTo>
-                  <a:lnTo>
-                    <a:pt x="5834389" y="1397923"/>
-                  </a:lnTo>
-                  <a:lnTo>
-                    <a:pt x="5760629" y="1388036"/>
-                  </a:lnTo>
-                  <a:lnTo>
-                    <a:pt x="5686869" y="1377770"/>
-                  </a:lnTo>
-                  <a:lnTo>
-                    <a:pt x="5613109" y="1367110"/>
-                  </a:lnTo>
-                  <a:lnTo>
-                    <a:pt x="5539349" y="1356040"/>
-                  </a:lnTo>
-                  <a:lnTo>
-                    <a:pt x="5465589" y="1344545"/>
-                  </a:lnTo>
-                  <a:lnTo>
-                    <a:pt x="5391829" y="1332609"/>
-                  </a:lnTo>
-                  <a:lnTo>
-                    <a:pt x="5318069" y="1320215"/>
-                  </a:lnTo>
-                  <a:lnTo>
-                    <a:pt x="5244309" y="1307344"/>
-                  </a:lnTo>
-                  <a:lnTo>
-                    <a:pt x="5170549" y="1293979"/>
-                  </a:lnTo>
-                  <a:lnTo>
-                    <a:pt x="5096789" y="1280101"/>
-                  </a:lnTo>
-                  <a:lnTo>
-                    <a:pt x="5023029" y="1265690"/>
-                  </a:lnTo>
-                  <a:lnTo>
-                    <a:pt x="4949269" y="1250726"/>
-                  </a:lnTo>
-                  <a:lnTo>
-                    <a:pt x="4875509" y="1235187"/>
-                  </a:lnTo>
-                  <a:lnTo>
-                    <a:pt x="4801749" y="1219051"/>
-                  </a:lnTo>
-                  <a:lnTo>
-                    <a:pt x="4727989" y="1202296"/>
-                  </a:lnTo>
-                  <a:lnTo>
-                    <a:pt x="4654229" y="1184897"/>
-                  </a:lnTo>
-                  <a:lnTo>
-                    <a:pt x="4580469" y="1166830"/>
-                  </a:lnTo>
-                  <a:lnTo>
-                    <a:pt x="4506709" y="1148069"/>
-                  </a:lnTo>
-                  <a:lnTo>
-                    <a:pt x="4432949" y="1128588"/>
-                  </a:lnTo>
-                  <a:lnTo>
-                    <a:pt x="4359189" y="1108358"/>
-                  </a:lnTo>
-                  <a:lnTo>
-                    <a:pt x="4285429" y="1087352"/>
-                  </a:lnTo>
-                  <a:lnTo>
-                    <a:pt x="4211669" y="1065539"/>
-                  </a:lnTo>
-                  <a:lnTo>
-                    <a:pt x="4137909" y="1042889"/>
-                  </a:lnTo>
-                  <a:lnTo>
-                    <a:pt x="4064149" y="1019368"/>
-                  </a:lnTo>
-                  <a:lnTo>
-                    <a:pt x="3990388" y="994945"/>
-                  </a:lnTo>
-                  <a:lnTo>
-                    <a:pt x="3916628" y="969583"/>
-                  </a:lnTo>
-                  <a:lnTo>
-                    <a:pt x="3842868" y="943248"/>
-                  </a:lnTo>
-                  <a:lnTo>
-                    <a:pt x="3769108" y="915901"/>
-                  </a:lnTo>
-                  <a:lnTo>
-                    <a:pt x="3695348" y="887504"/>
-                  </a:lnTo>
-                  <a:lnTo>
-                    <a:pt x="3621588" y="858017"/>
-                  </a:lnTo>
-                  <a:lnTo>
-                    <a:pt x="3547828" y="827397"/>
-                  </a:lnTo>
-                  <a:lnTo>
-                    <a:pt x="3474068" y="795602"/>
-                  </a:lnTo>
-                  <a:lnTo>
-                    <a:pt x="3400308" y="777329"/>
-                  </a:lnTo>
-                  <a:lnTo>
-                    <a:pt x="3326548" y="765168"/>
-                  </a:lnTo>
-                  <a:lnTo>
-                    <a:pt x="3252788" y="752839"/>
-                  </a:lnTo>
-                  <a:lnTo>
-                    <a:pt x="3179028" y="740340"/>
-                  </a:lnTo>
-                  <a:lnTo>
-                    <a:pt x="3105268" y="727667"/>
-                  </a:lnTo>
-                  <a:lnTo>
-                    <a:pt x="3031508" y="714819"/>
-                  </a:lnTo>
-                  <a:lnTo>
-                    <a:pt x="2957748" y="701792"/>
-                  </a:lnTo>
-                  <a:lnTo>
-                    <a:pt x="2883988" y="688586"/>
-                  </a:lnTo>
-                  <a:lnTo>
-                    <a:pt x="2810228" y="675196"/>
-                  </a:lnTo>
-                  <a:lnTo>
-                    <a:pt x="2736468" y="661621"/>
-                  </a:lnTo>
-                  <a:lnTo>
-                    <a:pt x="2662708" y="647858"/>
-                  </a:lnTo>
-                  <a:lnTo>
-                    <a:pt x="2588948" y="633905"/>
-                  </a:lnTo>
-                  <a:lnTo>
-                    <a:pt x="2515188" y="619758"/>
-                  </a:lnTo>
-                  <a:lnTo>
-                    <a:pt x="2441428" y="605415"/>
-                  </a:lnTo>
-                  <a:lnTo>
-                    <a:pt x="2367668" y="590874"/>
-                  </a:lnTo>
-                  <a:lnTo>
-                    <a:pt x="2293908" y="576131"/>
-                  </a:lnTo>
-                  <a:lnTo>
-                    <a:pt x="2220148" y="561184"/>
-                  </a:lnTo>
-                  <a:lnTo>
-                    <a:pt x="2146388" y="546030"/>
-                  </a:lnTo>
-                  <a:lnTo>
-                    <a:pt x="2072628" y="530666"/>
-                  </a:lnTo>
-                  <a:lnTo>
-                    <a:pt x="1998868" y="515090"/>
-                  </a:lnTo>
-                  <a:lnTo>
-                    <a:pt x="1925108" y="499297"/>
-                  </a:lnTo>
-                  <a:lnTo>
-                    <a:pt x="1851348" y="483286"/>
-                  </a:lnTo>
-                  <a:lnTo>
-                    <a:pt x="1777588" y="467053"/>
-                  </a:lnTo>
-                  <a:lnTo>
-                    <a:pt x="1703828" y="450596"/>
-                  </a:lnTo>
-                  <a:lnTo>
-                    <a:pt x="1630068" y="433910"/>
-                  </a:lnTo>
-                  <a:lnTo>
-                    <a:pt x="1556308" y="416993"/>
-                  </a:lnTo>
-                  <a:lnTo>
-                    <a:pt x="1482548" y="399842"/>
-                  </a:lnTo>
-                  <a:lnTo>
-                    <a:pt x="1408788" y="382454"/>
-                  </a:lnTo>
-                  <a:lnTo>
-                    <a:pt x="1335028" y="364825"/>
-                  </a:lnTo>
-                  <a:lnTo>
-                    <a:pt x="1261268" y="346951"/>
-                  </a:lnTo>
-                  <a:lnTo>
-                    <a:pt x="1187508" y="328830"/>
-                  </a:lnTo>
-                  <a:lnTo>
-                    <a:pt x="1113747" y="310458"/>
-                  </a:lnTo>
-                  <a:lnTo>
-                    <a:pt x="1039987" y="291832"/>
-                  </a:lnTo>
-                  <a:lnTo>
-                    <a:pt x="966227" y="272947"/>
-                  </a:lnTo>
-                  <a:lnTo>
-                    <a:pt x="892467" y="253801"/>
-                  </a:lnTo>
-                  <a:lnTo>
-                    <a:pt x="818707" y="234390"/>
-                  </a:lnTo>
-                  <a:lnTo>
-                    <a:pt x="744947" y="214710"/>
-                  </a:lnTo>
-                  <a:lnTo>
-                    <a:pt x="671187" y="194758"/>
-                  </a:lnTo>
-                  <a:lnTo>
-                    <a:pt x="597427" y="174529"/>
-                  </a:lnTo>
-                  <a:lnTo>
-                    <a:pt x="523667" y="154020"/>
-                  </a:lnTo>
-                  <a:lnTo>
-                    <a:pt x="449907" y="133227"/>
-                  </a:lnTo>
-                  <a:lnTo>
-                    <a:pt x="376147" y="112146"/>
-                  </a:lnTo>
-                  <a:lnTo>
-                    <a:pt x="302387" y="90773"/>
-                  </a:lnTo>
-                  <a:lnTo>
-                    <a:pt x="228627" y="69104"/>
-                  </a:lnTo>
-                  <a:lnTo>
-                    <a:pt x="154867" y="47135"/>
-                  </a:lnTo>
-                  <a:lnTo>
-                    <a:pt x="81107" y="24862"/>
-                  </a:lnTo>
-                  <a:lnTo>
-                    <a:pt x="7347" y="2280"/>
+                    <a:pt x="7162070" y="1454217"/>
+                  </a:lnTo>
+                  <a:lnTo>
+                    <a:pt x="7088310" y="1449432"/>
+                  </a:lnTo>
+                  <a:lnTo>
+                    <a:pt x="7014550" y="1444463"/>
+                  </a:lnTo>
+                  <a:lnTo>
+                    <a:pt x="6940789" y="1439303"/>
+                  </a:lnTo>
+                  <a:lnTo>
+                    <a:pt x="6867029" y="1433945"/>
+                  </a:lnTo>
+                  <a:lnTo>
+                    <a:pt x="6793269" y="1428382"/>
+                  </a:lnTo>
+                  <a:lnTo>
+                    <a:pt x="6719509" y="1422604"/>
+                  </a:lnTo>
+                  <a:lnTo>
+                    <a:pt x="6645749" y="1416605"/>
+                  </a:lnTo>
+                  <a:lnTo>
+                    <a:pt x="6571989" y="1410375"/>
+                  </a:lnTo>
+                  <a:lnTo>
+                    <a:pt x="6498229" y="1403907"/>
+                  </a:lnTo>
+                  <a:lnTo>
+                    <a:pt x="6424469" y="1397189"/>
+                  </a:lnTo>
+                  <a:lnTo>
+                    <a:pt x="6350709" y="1390214"/>
+                  </a:lnTo>
+                  <a:lnTo>
+                    <a:pt x="6276949" y="1382971"/>
+                  </a:lnTo>
+                  <a:lnTo>
+                    <a:pt x="6203189" y="1375450"/>
+                  </a:lnTo>
+                  <a:lnTo>
+                    <a:pt x="6129429" y="1367640"/>
+                  </a:lnTo>
+                  <a:lnTo>
+                    <a:pt x="6055669" y="1359530"/>
+                  </a:lnTo>
+                  <a:lnTo>
+                    <a:pt x="5981909" y="1351109"/>
+                  </a:lnTo>
+                  <a:lnTo>
+                    <a:pt x="5908149" y="1342364"/>
+                  </a:lnTo>
+                  <a:lnTo>
+                    <a:pt x="5834389" y="1333283"/>
+                  </a:lnTo>
+                  <a:lnTo>
+                    <a:pt x="5760629" y="1323854"/>
+                  </a:lnTo>
+                  <a:lnTo>
+                    <a:pt x="5686869" y="1314063"/>
+                  </a:lnTo>
+                  <a:lnTo>
+                    <a:pt x="5613109" y="1303895"/>
+                  </a:lnTo>
+                  <a:lnTo>
+                    <a:pt x="5539349" y="1293337"/>
+                  </a:lnTo>
+                  <a:lnTo>
+                    <a:pt x="5465589" y="1282374"/>
+                  </a:lnTo>
+                  <a:lnTo>
+                    <a:pt x="5391829" y="1270990"/>
+                  </a:lnTo>
+                  <a:lnTo>
+                    <a:pt x="5318069" y="1259168"/>
+                  </a:lnTo>
+                  <a:lnTo>
+                    <a:pt x="5244309" y="1246893"/>
+                  </a:lnTo>
+                  <a:lnTo>
+                    <a:pt x="5170549" y="1234146"/>
+                  </a:lnTo>
+                  <a:lnTo>
+                    <a:pt x="5096789" y="1220910"/>
+                  </a:lnTo>
+                  <a:lnTo>
+                    <a:pt x="5023029" y="1207165"/>
+                  </a:lnTo>
+                  <a:lnTo>
+                    <a:pt x="4949269" y="1192893"/>
+                  </a:lnTo>
+                  <a:lnTo>
+                    <a:pt x="4875509" y="1178072"/>
+                  </a:lnTo>
+                  <a:lnTo>
+                    <a:pt x="4801749" y="1162683"/>
+                  </a:lnTo>
+                  <a:lnTo>
+                    <a:pt x="4727989" y="1146702"/>
+                  </a:lnTo>
+                  <a:lnTo>
+                    <a:pt x="4654229" y="1130108"/>
+                  </a:lnTo>
+                  <a:lnTo>
+                    <a:pt x="4580469" y="1112876"/>
+                  </a:lnTo>
+                  <a:lnTo>
+                    <a:pt x="4506709" y="1094983"/>
+                  </a:lnTo>
+                  <a:lnTo>
+                    <a:pt x="4432949" y="1076402"/>
+                  </a:lnTo>
+                  <a:lnTo>
+                    <a:pt x="4359189" y="1057108"/>
+                  </a:lnTo>
+                  <a:lnTo>
+                    <a:pt x="4285429" y="1037073"/>
+                  </a:lnTo>
+                  <a:lnTo>
+                    <a:pt x="4211669" y="1016269"/>
+                  </a:lnTo>
+                  <a:lnTo>
+                    <a:pt x="4137909" y="994666"/>
+                  </a:lnTo>
+                  <a:lnTo>
+                    <a:pt x="4064149" y="972233"/>
+                  </a:lnTo>
+                  <a:lnTo>
+                    <a:pt x="3990388" y="948939"/>
+                  </a:lnTo>
+                  <a:lnTo>
+                    <a:pt x="3916628" y="924750"/>
+                  </a:lnTo>
+                  <a:lnTo>
+                    <a:pt x="3842868" y="899633"/>
+                  </a:lnTo>
+                  <a:lnTo>
+                    <a:pt x="3769108" y="873550"/>
+                  </a:lnTo>
+                  <a:lnTo>
+                    <a:pt x="3695348" y="846466"/>
+                  </a:lnTo>
+                  <a:lnTo>
+                    <a:pt x="3621588" y="818343"/>
+                  </a:lnTo>
+                  <a:lnTo>
+                    <a:pt x="3547828" y="789139"/>
+                  </a:lnTo>
+                  <a:lnTo>
+                    <a:pt x="3474068" y="758813"/>
+                  </a:lnTo>
+                  <a:lnTo>
+                    <a:pt x="3400308" y="741385"/>
+                  </a:lnTo>
+                  <a:lnTo>
+                    <a:pt x="3326548" y="729787"/>
+                  </a:lnTo>
+                  <a:lnTo>
+                    <a:pt x="3252788" y="718028"/>
+                  </a:lnTo>
+                  <a:lnTo>
+                    <a:pt x="3179028" y="706107"/>
+                  </a:lnTo>
+                  <a:lnTo>
+                    <a:pt x="3105268" y="694020"/>
+                  </a:lnTo>
+                  <a:lnTo>
+                    <a:pt x="3031508" y="681766"/>
+                  </a:lnTo>
+                  <a:lnTo>
+                    <a:pt x="2957748" y="669342"/>
+                  </a:lnTo>
+                  <a:lnTo>
+                    <a:pt x="2883988" y="656746"/>
+                  </a:lnTo>
+                  <a:lnTo>
+                    <a:pt x="2810228" y="643975"/>
+                  </a:lnTo>
+                  <a:lnTo>
+                    <a:pt x="2736468" y="631028"/>
+                  </a:lnTo>
+                  <a:lnTo>
+                    <a:pt x="2662708" y="617902"/>
+                  </a:lnTo>
+                  <a:lnTo>
+                    <a:pt x="2588948" y="604593"/>
+                  </a:lnTo>
+                  <a:lnTo>
+                    <a:pt x="2515188" y="591101"/>
+                  </a:lnTo>
+                  <a:lnTo>
+                    <a:pt x="2441428" y="577421"/>
+                  </a:lnTo>
+                  <a:lnTo>
+                    <a:pt x="2367668" y="563552"/>
+                  </a:lnTo>
+                  <a:lnTo>
+                    <a:pt x="2293908" y="549491"/>
+                  </a:lnTo>
+                  <a:lnTo>
+                    <a:pt x="2220148" y="535235"/>
+                  </a:lnTo>
+                  <a:lnTo>
+                    <a:pt x="2146388" y="520782"/>
+                  </a:lnTo>
+                  <a:lnTo>
+                    <a:pt x="2072628" y="506128"/>
+                  </a:lnTo>
+                  <a:lnTo>
+                    <a:pt x="1998868" y="491272"/>
+                  </a:lnTo>
+                  <a:lnTo>
+                    <a:pt x="1925108" y="476210"/>
+                  </a:lnTo>
+                  <a:lnTo>
+                    <a:pt x="1851348" y="460939"/>
+                  </a:lnTo>
+                  <a:lnTo>
+                    <a:pt x="1777588" y="445457"/>
+                  </a:lnTo>
+                  <a:lnTo>
+                    <a:pt x="1703828" y="429760"/>
+                  </a:lnTo>
+                  <a:lnTo>
+                    <a:pt x="1630068" y="413846"/>
+                  </a:lnTo>
+                  <a:lnTo>
+                    <a:pt x="1556308" y="397712"/>
+                  </a:lnTo>
+                  <a:lnTo>
+                    <a:pt x="1482548" y="381354"/>
+                  </a:lnTo>
+                  <a:lnTo>
+                    <a:pt x="1408788" y="364769"/>
+                  </a:lnTo>
+                  <a:lnTo>
+                    <a:pt x="1335028" y="347955"/>
+                  </a:lnTo>
+                  <a:lnTo>
+                    <a:pt x="1261268" y="330908"/>
+                  </a:lnTo>
+                  <a:lnTo>
+                    <a:pt x="1187508" y="313625"/>
+                  </a:lnTo>
+                  <a:lnTo>
+                    <a:pt x="1113747" y="296103"/>
+                  </a:lnTo>
+                  <a:lnTo>
+                    <a:pt x="1039987" y="278338"/>
+                  </a:lnTo>
+                  <a:lnTo>
+                    <a:pt x="966227" y="260326"/>
+                  </a:lnTo>
+                  <a:lnTo>
+                    <a:pt x="892467" y="242066"/>
+                  </a:lnTo>
+                  <a:lnTo>
+                    <a:pt x="818707" y="223552"/>
+                  </a:lnTo>
+                  <a:lnTo>
+                    <a:pt x="744947" y="204782"/>
+                  </a:lnTo>
+                  <a:lnTo>
+                    <a:pt x="671187" y="185752"/>
+                  </a:lnTo>
+                  <a:lnTo>
+                    <a:pt x="597427" y="166459"/>
+                  </a:lnTo>
+                  <a:lnTo>
+                    <a:pt x="523667" y="146898"/>
+                  </a:lnTo>
+                  <a:lnTo>
+                    <a:pt x="449907" y="127067"/>
+                  </a:lnTo>
+                  <a:lnTo>
+                    <a:pt x="376147" y="106961"/>
+                  </a:lnTo>
+                  <a:lnTo>
+                    <a:pt x="302387" y="86576"/>
+                  </a:lnTo>
+                  <a:lnTo>
+                    <a:pt x="228627" y="65909"/>
+                  </a:lnTo>
+                  <a:lnTo>
+                    <a:pt x="154867" y="44956"/>
+                  </a:lnTo>
+                  <a:lnTo>
+                    <a:pt x="81107" y="23712"/>
+                  </a:lnTo>
+                  <a:lnTo>
+                    <a:pt x="7347" y="2175"/>
                   </a:lnTo>
                   <a:lnTo>
                     <a:pt x="0" y="0"/>
@@ -4229,312 +4229,312 @@
           </p:nvSpPr>
           <p:spPr>
             <a:xfrm>
-              <a:off x="817517" y="2651519"/>
-              <a:ext cx="7235830" cy="2665243"/>
+              <a:off x="817517" y="2793549"/>
+              <a:ext cx="7235830" cy="2542003"/>
             </a:xfrm>
             <a:custGeom>
               <a:avLst/>
               <a:pathLst>
-                <a:path w="7235830" h="2665243">
+                <a:path w="7235830" h="2542003">
                   <a:moveTo>
                     <a:pt x="0" y="0"/>
                   </a:moveTo>
                   <a:lnTo>
-                    <a:pt x="7347" y="7500"/>
-                  </a:lnTo>
-                  <a:lnTo>
-                    <a:pt x="81107" y="80884"/>
-                  </a:lnTo>
-                  <a:lnTo>
-                    <a:pt x="154867" y="152405"/>
-                  </a:lnTo>
-                  <a:lnTo>
-                    <a:pt x="228627" y="222109"/>
-                  </a:lnTo>
-                  <a:lnTo>
-                    <a:pt x="302387" y="290044"/>
-                  </a:lnTo>
-                  <a:lnTo>
-                    <a:pt x="376147" y="356254"/>
-                  </a:lnTo>
-                  <a:lnTo>
-                    <a:pt x="449907" y="420783"/>
-                  </a:lnTo>
-                  <a:lnTo>
-                    <a:pt x="523667" y="483673"/>
-                  </a:lnTo>
-                  <a:lnTo>
-                    <a:pt x="597427" y="544967"/>
-                  </a:lnTo>
-                  <a:lnTo>
-                    <a:pt x="671187" y="604704"/>
-                  </a:lnTo>
-                  <a:lnTo>
-                    <a:pt x="744947" y="662925"/>
-                  </a:lnTo>
-                  <a:lnTo>
-                    <a:pt x="818707" y="719667"/>
-                  </a:lnTo>
-                  <a:lnTo>
-                    <a:pt x="892467" y="774968"/>
-                  </a:lnTo>
-                  <a:lnTo>
-                    <a:pt x="966227" y="828866"/>
-                  </a:lnTo>
-                  <a:lnTo>
-                    <a:pt x="1039987" y="881395"/>
-                  </a:lnTo>
-                  <a:lnTo>
-                    <a:pt x="1113747" y="932590"/>
-                  </a:lnTo>
-                  <a:lnTo>
-                    <a:pt x="1187508" y="982485"/>
-                  </a:lnTo>
-                  <a:lnTo>
-                    <a:pt x="1261268" y="1031113"/>
-                  </a:lnTo>
-                  <a:lnTo>
-                    <a:pt x="1335028" y="1078507"/>
-                  </a:lnTo>
-                  <a:lnTo>
-                    <a:pt x="1408788" y="1124697"/>
-                  </a:lnTo>
-                  <a:lnTo>
-                    <a:pt x="1482548" y="1169715"/>
-                  </a:lnTo>
-                  <a:lnTo>
-                    <a:pt x="1556308" y="1213589"/>
-                  </a:lnTo>
-                  <a:lnTo>
-                    <a:pt x="1630068" y="1256350"/>
-                  </a:lnTo>
-                  <a:lnTo>
-                    <a:pt x="1703828" y="1298024"/>
-                  </a:lnTo>
-                  <a:lnTo>
-                    <a:pt x="1777588" y="1338641"/>
-                  </a:lnTo>
-                  <a:lnTo>
-                    <a:pt x="1851348" y="1378226"/>
-                  </a:lnTo>
-                  <a:lnTo>
-                    <a:pt x="1925108" y="1416806"/>
-                  </a:lnTo>
-                  <a:lnTo>
-                    <a:pt x="1998868" y="1454407"/>
-                  </a:lnTo>
-                  <a:lnTo>
-                    <a:pt x="2072628" y="1491053"/>
-                  </a:lnTo>
-                  <a:lnTo>
-                    <a:pt x="2146388" y="1526768"/>
-                  </a:lnTo>
-                  <a:lnTo>
-                    <a:pt x="2220148" y="1561577"/>
-                  </a:lnTo>
-                  <a:lnTo>
-                    <a:pt x="2293908" y="1595502"/>
-                  </a:lnTo>
-                  <a:lnTo>
-                    <a:pt x="2367668" y="1628565"/>
-                  </a:lnTo>
-                  <a:lnTo>
-                    <a:pt x="2441428" y="1660789"/>
-                  </a:lnTo>
-                  <a:lnTo>
-                    <a:pt x="2515188" y="1692195"/>
-                  </a:lnTo>
-                  <a:lnTo>
-                    <a:pt x="2588948" y="1722803"/>
-                  </a:lnTo>
-                  <a:lnTo>
-                    <a:pt x="2662708" y="1752634"/>
-                  </a:lnTo>
-                  <a:lnTo>
-                    <a:pt x="2736468" y="1781708"/>
-                  </a:lnTo>
-                  <a:lnTo>
-                    <a:pt x="2810228" y="1810044"/>
-                  </a:lnTo>
-                  <a:lnTo>
-                    <a:pt x="2883988" y="1837660"/>
-                  </a:lnTo>
-                  <a:lnTo>
-                    <a:pt x="2957748" y="1864575"/>
-                  </a:lnTo>
-                  <a:lnTo>
-                    <a:pt x="3031508" y="1890806"/>
-                  </a:lnTo>
-                  <a:lnTo>
-                    <a:pt x="3105268" y="1916371"/>
-                  </a:lnTo>
-                  <a:lnTo>
-                    <a:pt x="3179028" y="1941288"/>
-                  </a:lnTo>
-                  <a:lnTo>
-                    <a:pt x="3252788" y="1965571"/>
-                  </a:lnTo>
-                  <a:lnTo>
-                    <a:pt x="3326548" y="1989239"/>
-                  </a:lnTo>
-                  <a:lnTo>
-                    <a:pt x="3400308" y="2012305"/>
-                  </a:lnTo>
-                  <a:lnTo>
-                    <a:pt x="3474068" y="2034785"/>
-                  </a:lnTo>
-                  <a:lnTo>
-                    <a:pt x="3547828" y="2056695"/>
-                  </a:lnTo>
-                  <a:lnTo>
-                    <a:pt x="3621588" y="2078048"/>
-                  </a:lnTo>
-                  <a:lnTo>
-                    <a:pt x="3695348" y="2098860"/>
-                  </a:lnTo>
-                  <a:lnTo>
-                    <a:pt x="3769108" y="2119142"/>
-                  </a:lnTo>
-                  <a:lnTo>
-                    <a:pt x="3842868" y="2138910"/>
-                  </a:lnTo>
-                  <a:lnTo>
-                    <a:pt x="3916628" y="2158176"/>
-                  </a:lnTo>
-                  <a:lnTo>
-                    <a:pt x="3990388" y="2176953"/>
-                  </a:lnTo>
-                  <a:lnTo>
-                    <a:pt x="4064149" y="2195253"/>
-                  </a:lnTo>
-                  <a:lnTo>
-                    <a:pt x="4137909" y="2213088"/>
-                  </a:lnTo>
-                  <a:lnTo>
-                    <a:pt x="4211669" y="2230471"/>
-                  </a:lnTo>
-                  <a:lnTo>
-                    <a:pt x="4285429" y="2247412"/>
-                  </a:lnTo>
-                  <a:lnTo>
-                    <a:pt x="4359189" y="2263923"/>
-                  </a:lnTo>
-                  <a:lnTo>
-                    <a:pt x="4432949" y="2280014"/>
-                  </a:lnTo>
-                  <a:lnTo>
-                    <a:pt x="4506709" y="2295698"/>
-                  </a:lnTo>
-                  <a:lnTo>
-                    <a:pt x="4580469" y="2310982"/>
-                  </a:lnTo>
-                  <a:lnTo>
-                    <a:pt x="4654229" y="2325879"/>
-                  </a:lnTo>
-                  <a:lnTo>
-                    <a:pt x="4727989" y="2340398"/>
-                  </a:lnTo>
-                  <a:lnTo>
-                    <a:pt x="4801749" y="2354548"/>
-                  </a:lnTo>
-                  <a:lnTo>
-                    <a:pt x="4875509" y="2368339"/>
-                  </a:lnTo>
-                  <a:lnTo>
-                    <a:pt x="4949269" y="2381779"/>
-                  </a:lnTo>
-                  <a:lnTo>
-                    <a:pt x="5023029" y="2394878"/>
-                  </a:lnTo>
-                  <a:lnTo>
-                    <a:pt x="5096789" y="2407645"/>
-                  </a:lnTo>
-                  <a:lnTo>
-                    <a:pt x="5170549" y="2420088"/>
-                  </a:lnTo>
-                  <a:lnTo>
-                    <a:pt x="5244309" y="2432214"/>
-                  </a:lnTo>
-                  <a:lnTo>
-                    <a:pt x="5318069" y="2444033"/>
-                  </a:lnTo>
-                  <a:lnTo>
-                    <a:pt x="5391829" y="2455552"/>
-                  </a:lnTo>
-                  <a:lnTo>
-                    <a:pt x="5465589" y="2466778"/>
-                  </a:lnTo>
-                  <a:lnTo>
-                    <a:pt x="5539349" y="2477719"/>
-                  </a:lnTo>
-                  <a:lnTo>
-                    <a:pt x="5613109" y="2488382"/>
-                  </a:lnTo>
-                  <a:lnTo>
-                    <a:pt x="5686869" y="2498775"/>
-                  </a:lnTo>
-                  <a:lnTo>
-                    <a:pt x="5760629" y="2508903"/>
-                  </a:lnTo>
-                  <a:lnTo>
-                    <a:pt x="5834389" y="2518775"/>
-                  </a:lnTo>
-                  <a:lnTo>
-                    <a:pt x="5908149" y="2528396"/>
-                  </a:lnTo>
-                  <a:lnTo>
-                    <a:pt x="5981909" y="2537772"/>
-                  </a:lnTo>
-                  <a:lnTo>
-                    <a:pt x="6055669" y="2546911"/>
-                  </a:lnTo>
-                  <a:lnTo>
-                    <a:pt x="6129429" y="2555817"/>
-                  </a:lnTo>
-                  <a:lnTo>
-                    <a:pt x="6203189" y="2564498"/>
-                  </a:lnTo>
-                  <a:lnTo>
-                    <a:pt x="6276949" y="2572958"/>
-                  </a:lnTo>
-                  <a:lnTo>
-                    <a:pt x="6350709" y="2581203"/>
-                  </a:lnTo>
-                  <a:lnTo>
-                    <a:pt x="6424469" y="2589238"/>
-                  </a:lnTo>
-                  <a:lnTo>
-                    <a:pt x="6498229" y="2597070"/>
-                  </a:lnTo>
-                  <a:lnTo>
-                    <a:pt x="6571989" y="2604703"/>
-                  </a:lnTo>
-                  <a:lnTo>
-                    <a:pt x="6645749" y="2612142"/>
-                  </a:lnTo>
-                  <a:lnTo>
-                    <a:pt x="6719509" y="2619392"/>
-                  </a:lnTo>
-                  <a:lnTo>
-                    <a:pt x="6793269" y="2626458"/>
-                  </a:lnTo>
-                  <a:lnTo>
-                    <a:pt x="6867029" y="2633345"/>
-                  </a:lnTo>
-                  <a:lnTo>
-                    <a:pt x="6940789" y="2640057"/>
-                  </a:lnTo>
-                  <a:lnTo>
-                    <a:pt x="7014550" y="2646598"/>
-                  </a:lnTo>
-                  <a:lnTo>
-                    <a:pt x="7088310" y="2652974"/>
-                  </a:lnTo>
-                  <a:lnTo>
-                    <a:pt x="7162070" y="2659187"/>
-                  </a:lnTo>
-                  <a:lnTo>
-                    <a:pt x="7235830" y="2665243"/>
+                    <a:pt x="7347" y="7153"/>
+                  </a:lnTo>
+                  <a:lnTo>
+                    <a:pt x="81107" y="77144"/>
+                  </a:lnTo>
+                  <a:lnTo>
+                    <a:pt x="154867" y="145358"/>
+                  </a:lnTo>
+                  <a:lnTo>
+                    <a:pt x="228627" y="211839"/>
+                  </a:lnTo>
+                  <a:lnTo>
+                    <a:pt x="302387" y="276633"/>
+                  </a:lnTo>
+                  <a:lnTo>
+                    <a:pt x="376147" y="339781"/>
+                  </a:lnTo>
+                  <a:lnTo>
+                    <a:pt x="449907" y="401326"/>
+                  </a:lnTo>
+                  <a:lnTo>
+                    <a:pt x="523667" y="461308"/>
+                  </a:lnTo>
+                  <a:lnTo>
+                    <a:pt x="597427" y="519768"/>
+                  </a:lnTo>
+                  <a:lnTo>
+                    <a:pt x="671187" y="576743"/>
+                  </a:lnTo>
+                  <a:lnTo>
+                    <a:pt x="744947" y="632271"/>
+                  </a:lnTo>
+                  <a:lnTo>
+                    <a:pt x="818707" y="686390"/>
+                  </a:lnTo>
+                  <a:lnTo>
+                    <a:pt x="892467" y="739134"/>
+                  </a:lnTo>
+                  <a:lnTo>
+                    <a:pt x="966227" y="790539"/>
+                  </a:lnTo>
+                  <a:lnTo>
+                    <a:pt x="1039987" y="840639"/>
+                  </a:lnTo>
+                  <a:lnTo>
+                    <a:pt x="1113747" y="889467"/>
+                  </a:lnTo>
+                  <a:lnTo>
+                    <a:pt x="1187508" y="937055"/>
+                  </a:lnTo>
+                  <a:lnTo>
+                    <a:pt x="1261268" y="983435"/>
+                  </a:lnTo>
+                  <a:lnTo>
+                    <a:pt x="1335028" y="1028637"/>
+                  </a:lnTo>
+                  <a:lnTo>
+                    <a:pt x="1408788" y="1072692"/>
+                  </a:lnTo>
+                  <a:lnTo>
+                    <a:pt x="1482548" y="1115627"/>
+                  </a:lnTo>
+                  <a:lnTo>
+                    <a:pt x="1556308" y="1157473"/>
+                  </a:lnTo>
+                  <a:lnTo>
+                    <a:pt x="1630068" y="1198256"/>
+                  </a:lnTo>
+                  <a:lnTo>
+                    <a:pt x="1703828" y="1238004"/>
+                  </a:lnTo>
+                  <a:lnTo>
+                    <a:pt x="1777588" y="1276743"/>
+                  </a:lnTo>
+                  <a:lnTo>
+                    <a:pt x="1851348" y="1314498"/>
+                  </a:lnTo>
+                  <a:lnTo>
+                    <a:pt x="1925108" y="1351294"/>
+                  </a:lnTo>
+                  <a:lnTo>
+                    <a:pt x="1998868" y="1387156"/>
+                  </a:lnTo>
+                  <a:lnTo>
+                    <a:pt x="2072628" y="1422107"/>
+                  </a:lnTo>
+                  <a:lnTo>
+                    <a:pt x="2146388" y="1456171"/>
+                  </a:lnTo>
+                  <a:lnTo>
+                    <a:pt x="2220148" y="1489370"/>
+                  </a:lnTo>
+                  <a:lnTo>
+                    <a:pt x="2293908" y="1521726"/>
+                  </a:lnTo>
+                  <a:lnTo>
+                    <a:pt x="2367668" y="1553261"/>
+                  </a:lnTo>
+                  <a:lnTo>
+                    <a:pt x="2441428" y="1583995"/>
+                  </a:lnTo>
+                  <a:lnTo>
+                    <a:pt x="2515188" y="1613948"/>
+                  </a:lnTo>
+                  <a:lnTo>
+                    <a:pt x="2588948" y="1643141"/>
+                  </a:lnTo>
+                  <a:lnTo>
+                    <a:pt x="2662708" y="1671593"/>
+                  </a:lnTo>
+                  <a:lnTo>
+                    <a:pt x="2736468" y="1699323"/>
+                  </a:lnTo>
+                  <a:lnTo>
+                    <a:pt x="2810228" y="1726348"/>
+                  </a:lnTo>
+                  <a:lnTo>
+                    <a:pt x="2883988" y="1752687"/>
+                  </a:lnTo>
+                  <a:lnTo>
+                    <a:pt x="2957748" y="1778357"/>
+                  </a:lnTo>
+                  <a:lnTo>
+                    <a:pt x="3031508" y="1803376"/>
+                  </a:lnTo>
+                  <a:lnTo>
+                    <a:pt x="3105268" y="1827759"/>
+                  </a:lnTo>
+                  <a:lnTo>
+                    <a:pt x="3179028" y="1851523"/>
+                  </a:lnTo>
+                  <a:lnTo>
+                    <a:pt x="3252788" y="1874684"/>
+                  </a:lnTo>
+                  <a:lnTo>
+                    <a:pt x="3326548" y="1897257"/>
+                  </a:lnTo>
+                  <a:lnTo>
+                    <a:pt x="3400308" y="1919256"/>
+                  </a:lnTo>
+                  <a:lnTo>
+                    <a:pt x="3474068" y="1940697"/>
+                  </a:lnTo>
+                  <a:lnTo>
+                    <a:pt x="3547828" y="1961594"/>
+                  </a:lnTo>
+                  <a:lnTo>
+                    <a:pt x="3621588" y="1981960"/>
+                  </a:lnTo>
+                  <a:lnTo>
+                    <a:pt x="3695348" y="2001809"/>
+                  </a:lnTo>
+                  <a:lnTo>
+                    <a:pt x="3769108" y="2021154"/>
+                  </a:lnTo>
+                  <a:lnTo>
+                    <a:pt x="3842868" y="2040008"/>
+                  </a:lnTo>
+                  <a:lnTo>
+                    <a:pt x="3916628" y="2058383"/>
+                  </a:lnTo>
+                  <a:lnTo>
+                    <a:pt x="3990388" y="2076291"/>
+                  </a:lnTo>
+                  <a:lnTo>
+                    <a:pt x="4064149" y="2093745"/>
+                  </a:lnTo>
+                  <a:lnTo>
+                    <a:pt x="4137909" y="2110756"/>
+                  </a:lnTo>
+                  <a:lnTo>
+                    <a:pt x="4211669" y="2127334"/>
+                  </a:lnTo>
+                  <a:lnTo>
+                    <a:pt x="4285429" y="2143492"/>
+                  </a:lnTo>
+                  <a:lnTo>
+                    <a:pt x="4359189" y="2159240"/>
+                  </a:lnTo>
+                  <a:lnTo>
+                    <a:pt x="4432949" y="2174587"/>
+                  </a:lnTo>
+                  <a:lnTo>
+                    <a:pt x="4506709" y="2189545"/>
+                  </a:lnTo>
+                  <a:lnTo>
+                    <a:pt x="4580469" y="2204124"/>
+                  </a:lnTo>
+                  <a:lnTo>
+                    <a:pt x="4654229" y="2218332"/>
+                  </a:lnTo>
+                  <a:lnTo>
+                    <a:pt x="4727989" y="2232179"/>
+                  </a:lnTo>
+                  <a:lnTo>
+                    <a:pt x="4801749" y="2245675"/>
+                  </a:lnTo>
+                  <a:lnTo>
+                    <a:pt x="4875509" y="2258828"/>
+                  </a:lnTo>
+                  <a:lnTo>
+                    <a:pt x="4949269" y="2271647"/>
+                  </a:lnTo>
+                  <a:lnTo>
+                    <a:pt x="5023029" y="2284140"/>
+                  </a:lnTo>
+                  <a:lnTo>
+                    <a:pt x="5096789" y="2296317"/>
+                  </a:lnTo>
+                  <a:lnTo>
+                    <a:pt x="5170549" y="2308184"/>
+                  </a:lnTo>
+                  <a:lnTo>
+                    <a:pt x="5244309" y="2319750"/>
+                  </a:lnTo>
+                  <a:lnTo>
+                    <a:pt x="5318069" y="2331022"/>
+                  </a:lnTo>
+                  <a:lnTo>
+                    <a:pt x="5391829" y="2342008"/>
+                  </a:lnTo>
+                  <a:lnTo>
+                    <a:pt x="5465589" y="2352715"/>
+                  </a:lnTo>
+                  <a:lnTo>
+                    <a:pt x="5539349" y="2363150"/>
+                  </a:lnTo>
+                  <a:lnTo>
+                    <a:pt x="5613109" y="2373320"/>
+                  </a:lnTo>
+                  <a:lnTo>
+                    <a:pt x="5686869" y="2383232"/>
+                  </a:lnTo>
+                  <a:lnTo>
+                    <a:pt x="5760629" y="2392893"/>
+                  </a:lnTo>
+                  <a:lnTo>
+                    <a:pt x="5834389" y="2402308"/>
+                  </a:lnTo>
+                  <a:lnTo>
+                    <a:pt x="5908149" y="2411484"/>
+                  </a:lnTo>
+                  <a:lnTo>
+                    <a:pt x="5981909" y="2420427"/>
+                  </a:lnTo>
+                  <a:lnTo>
+                    <a:pt x="6055669" y="2429143"/>
+                  </a:lnTo>
+                  <a:lnTo>
+                    <a:pt x="6129429" y="2437637"/>
+                  </a:lnTo>
+                  <a:lnTo>
+                    <a:pt x="6203189" y="2445916"/>
+                  </a:lnTo>
+                  <a:lnTo>
+                    <a:pt x="6276949" y="2453985"/>
+                  </a:lnTo>
+                  <a:lnTo>
+                    <a:pt x="6350709" y="2461849"/>
+                  </a:lnTo>
+                  <a:lnTo>
+                    <a:pt x="6424469" y="2469513"/>
+                  </a:lnTo>
+                  <a:lnTo>
+                    <a:pt x="6498229" y="2476983"/>
+                  </a:lnTo>
+                  <a:lnTo>
+                    <a:pt x="6571989" y="2484263"/>
+                  </a:lnTo>
+                  <a:lnTo>
+                    <a:pt x="6645749" y="2491358"/>
+                  </a:lnTo>
+                  <a:lnTo>
+                    <a:pt x="6719509" y="2498273"/>
+                  </a:lnTo>
+                  <a:lnTo>
+                    <a:pt x="6793269" y="2505012"/>
+                  </a:lnTo>
+                  <a:lnTo>
+                    <a:pt x="6867029" y="2511580"/>
+                  </a:lnTo>
+                  <a:lnTo>
+                    <a:pt x="6940789" y="2517982"/>
+                  </a:lnTo>
+                  <a:lnTo>
+                    <a:pt x="7014550" y="2524221"/>
+                  </a:lnTo>
+                  <a:lnTo>
+                    <a:pt x="7088310" y="2530301"/>
+                  </a:lnTo>
+                  <a:lnTo>
+                    <a:pt x="7162070" y="2536227"/>
+                  </a:lnTo>
+                  <a:lnTo>
+                    <a:pt x="7235830" y="2542003"/>
                   </a:lnTo>
                 </a:path>
               </a:pathLst>
@@ -4563,7 +4563,7 @@
           </p:nvSpPr>
           <p:spPr>
             <a:xfrm>
-              <a:off x="817517" y="4679530"/>
+              <a:off x="817517" y="4727786"/>
               <a:ext cx="7799693" cy="0"/>
             </a:xfrm>
             <a:custGeom>
@@ -4606,15 +4606,15 @@
           </p:nvSpPr>
           <p:spPr>
             <a:xfrm>
-              <a:off x="4269157" y="1896563"/>
-              <a:ext cx="0" cy="3826579"/>
+              <a:off x="4269157" y="2073503"/>
+              <a:ext cx="0" cy="3649639"/>
             </a:xfrm>
             <a:custGeom>
               <a:avLst/>
               <a:pathLst>
-                <a:path w="0" h="3826579">
+                <a:path w="0" h="3649639">
                   <a:moveTo>
-                    <a:pt x="0" y="3826579"/>
+                    <a:pt x="0" y="3649639"/>
                   </a:moveTo>
                   <a:lnTo>
                     <a:pt x="0" y="0"/>
@@ -4649,7 +4649,7 @@
           </p:nvSpPr>
           <p:spPr>
             <a:xfrm>
-              <a:off x="692708" y="5509156"/>
+              <a:off x="692708" y="5517199"/>
               <a:ext cx="62179" cy="80101"/>
             </a:xfrm>
             <a:prstGeom prst="rect">
@@ -4695,7 +4695,7 @@
           </p:nvSpPr>
           <p:spPr>
             <a:xfrm>
-              <a:off x="692708" y="4639479"/>
+              <a:off x="692708" y="4687735"/>
               <a:ext cx="62179" cy="80101"/>
             </a:xfrm>
             <a:prstGeom prst="rect">
@@ -4741,7 +4741,7 @@
           </p:nvSpPr>
           <p:spPr>
             <a:xfrm>
-              <a:off x="692708" y="3769802"/>
+              <a:off x="692708" y="3858272"/>
               <a:ext cx="62179" cy="80101"/>
             </a:xfrm>
             <a:prstGeom prst="rect">
@@ -4787,7 +4787,7 @@
           </p:nvSpPr>
           <p:spPr>
             <a:xfrm>
-              <a:off x="692708" y="2900125"/>
+              <a:off x="692708" y="3028808"/>
               <a:ext cx="62179" cy="80101"/>
             </a:xfrm>
             <a:prstGeom prst="rect">
@@ -4833,7 +4833,7 @@
           </p:nvSpPr>
           <p:spPr>
             <a:xfrm>
-              <a:off x="692708" y="2030448"/>
+              <a:off x="692708" y="2199345"/>
               <a:ext cx="62179" cy="80101"/>
             </a:xfrm>
             <a:prstGeom prst="rect">
@@ -5109,7 +5109,7 @@
           </p:nvSpPr>
           <p:spPr>
             <a:xfrm rot="-5400000">
-              <a:off x="68446" y="3759743"/>
+              <a:off x="68446" y="3848213"/>
               <a:ext cx="1016904" cy="100218"/>
             </a:xfrm>
             <a:prstGeom prst="rect">
@@ -5150,6 +5150,52 @@
         <p:sp>
           <p:nvSpPr>
             <p:cNvPr id="38" name="tx38"/>
+            <p:cNvSpPr/>
+            <p:nvPr/>
+          </p:nvSpPr>
+          <p:spPr>
+            <a:xfrm>
+              <a:off x="817517" y="1896563"/>
+              <a:ext cx="5626211" cy="82021"/>
+            </a:xfrm>
+            <a:prstGeom prst="rect">
+              <a:avLst/>
+            </a:prstGeom>
+            <a:noFill/>
+          </p:spPr>
+          <p:txBody>
+            <a:bodyPr lIns="0" rIns="0" tIns="0" bIns="0" anchorCtr="1" anchor="ctr" wrap="none"/>
+            <a:lstStyle/>
+            <a:p>
+              <a:pPr algn="l" marL="0" marR="0" indent="0">
+                <a:lnSpc>
+                  <a:spcPts val="900"/>
+                </a:lnSpc>
+                <a:spcBef>
+                  <a:spcPts val="0"/>
+                </a:spcBef>
+                <a:spcAft>
+                  <a:spcPts val="0"/>
+                </a:spcAft>
+              </a:pPr>
+              <a:r>
+                <a:rPr sz="900">
+                  <a:solidFill>
+                    <a:srgbClr val="404040">
+                      <a:alpha val="100000"/>
+                    </a:srgbClr>
+                  </a:solidFill>
+                  <a:latin typeface="Helvetica"/>
+                  <a:cs typeface="Helvetica"/>
+                </a:rPr>
+                <a:t>subHR per 0.1 ratio decline: 1.36 (1.18-1.57)  |  per IQR decline (Δ = 0.29): 2.47 (1.62-3.76)  |  IQR: [0.85, 1.15]</a:t>
+              </a:r>
+            </a:p>
+          </p:txBody>
+        </p:sp>
+        <p:sp>
+          <p:nvSpPr>
+            <p:cNvPr id="39" name="tx39"/>
             <p:cNvSpPr/>
             <p:nvPr/>
           </p:nvSpPr>

--- a/docs/pptx/whole/jx-linsubhr-ratio-anemia3.pptx
+++ b/docs/pptx/whole/jx-linsubhr-ratio-anemia3.pptx
@@ -5156,7 +5156,7 @@
           <p:spPr>
             <a:xfrm>
               <a:off x="817517" y="1896563"/>
-              <a:ext cx="5626211" cy="82021"/>
+              <a:ext cx="6236116" cy="82021"/>
             </a:xfrm>
             <a:prstGeom prst="rect">
               <a:avLst/>
@@ -5188,7 +5188,7 @@
                   <a:latin typeface="Helvetica"/>
                   <a:cs typeface="Helvetica"/>
                 </a:rPr>
-                <a:t>subHR per 0.1 ratio decline: 1.36 (1.18-1.57)  |  per IQR decline (Δ = 0.29): 2.47 (1.62-3.76)  |  IQR: [0.85, 1.15]</a:t>
+                <a:t>subHR per 0.1 ratio decline: 1.36 (1.18-1.57), p = &lt;0.001  |  per IQR decline (Δ = 0.29): 2.47 (1.62-3.76)  |  IQR: [0.85, 1.15]</a:t>
               </a:r>
             </a:p>
           </p:txBody>

--- a/docs/pptx/whole/jx-linsubhr-ratio-anemia3.pptx
+++ b/docs/pptx/whole/jx-linsubhr-ratio-anemia3.pptx
@@ -5156,7 +5156,7 @@
           <p:spPr>
             <a:xfrm>
               <a:off x="817517" y="1896563"/>
-              <a:ext cx="6236116" cy="82021"/>
+              <a:ext cx="6899879" cy="82021"/>
             </a:xfrm>
             <a:prstGeom prst="rect">
               <a:avLst/>
@@ -5188,7 +5188,7 @@
                   <a:latin typeface="Helvetica"/>
                   <a:cs typeface="Helvetica"/>
                 </a:rPr>
-                <a:t>subHR per 0.1 ratio decline: 1.36 (1.18-1.57), p = &lt;0.001  |  per IQR decline (Δ = 0.29): 2.47 (1.62-3.76)  |  IQR: [0.85, 1.15]</a:t>
+                <a:t>subHR per 0.1 ratio decline: 1.36 (1.18-1.57), p_Bonf = &lt;0.001 (n = 6)  |  per IQR decline (Δ = 0.29): 2.47 (1.62-3.76)  |  IQR: [0.85, 1.15]</a:t>
               </a:r>
             </a:p>
           </p:txBody>

--- a/docs/pptx/whole/jx-linsubhr-ratio-anemia3.pptx
+++ b/docs/pptx/whole/jx-linsubhr-ratio-anemia3.pptx
@@ -2443,7 +2443,7 @@
           </p:nvSpPr>
           <p:spPr>
             <a:xfrm>
-              <a:off x="1615213" y="2073503"/>
+              <a:off x="1365633" y="2073503"/>
               <a:ext cx="0" cy="3649639"/>
             </a:xfrm>
             <a:custGeom>
@@ -2486,7 +2486,7 @@
           </p:nvSpPr>
           <p:spPr>
             <a:xfrm>
-              <a:off x="3387871" y="2073503"/>
+              <a:off x="3517243" y="2073503"/>
               <a:ext cx="0" cy="3649639"/>
             </a:xfrm>
             <a:custGeom>
@@ -2529,7 +2529,7 @@
           </p:nvSpPr>
           <p:spPr>
             <a:xfrm>
-              <a:off x="5160528" y="2073503"/>
+              <a:off x="5668852" y="2073503"/>
               <a:ext cx="0" cy="3649639"/>
             </a:xfrm>
             <a:custGeom>
@@ -2572,7 +2572,7 @@
           </p:nvSpPr>
           <p:spPr>
             <a:xfrm>
-              <a:off x="6933186" y="2073503"/>
+              <a:off x="7820461" y="2073503"/>
               <a:ext cx="0" cy="3649639"/>
             </a:xfrm>
             <a:custGeom>
@@ -2830,7 +2830,7 @@
           </p:nvSpPr>
           <p:spPr>
             <a:xfrm>
-              <a:off x="2501542" y="2073503"/>
+              <a:off x="2441438" y="2073503"/>
               <a:ext cx="0" cy="3649639"/>
             </a:xfrm>
             <a:custGeom>
@@ -2873,7 +2873,7 @@
           </p:nvSpPr>
           <p:spPr>
             <a:xfrm>
-              <a:off x="4274200" y="2073503"/>
+              <a:off x="4593047" y="2073503"/>
               <a:ext cx="0" cy="3649639"/>
             </a:xfrm>
             <a:custGeom>
@@ -2916,7 +2916,7 @@
           </p:nvSpPr>
           <p:spPr>
             <a:xfrm>
-              <a:off x="6046857" y="2073503"/>
+              <a:off x="6744657" y="2073503"/>
               <a:ext cx="0" cy="3649639"/>
             </a:xfrm>
             <a:custGeom>
@@ -2953,634 +2953,591 @@
         </p:sp>
         <p:sp>
           <p:nvSpPr>
-            <p:cNvPr id="20" name="pl20"/>
+            <p:cNvPr id="20" name="pg20"/>
             <p:cNvSpPr/>
             <p:nvPr/>
           </p:nvSpPr>
           <p:spPr>
             <a:xfrm>
-              <a:off x="7819515" y="2073503"/>
-              <a:ext cx="0" cy="3649639"/>
+              <a:off x="1172049" y="2073503"/>
+              <a:ext cx="7090630" cy="3363745"/>
             </a:xfrm>
             <a:custGeom>
               <a:avLst/>
               <a:pathLst>
-                <a:path w="0" h="3649639">
+                <a:path w="7090630" h="3363745">
                   <a:moveTo>
-                    <a:pt x="0" y="3649639"/>
+                    <a:pt x="688796" y="0"/>
                   </a:moveTo>
                   <a:lnTo>
-                    <a:pt x="0" y="0"/>
-                  </a:lnTo>
-                  <a:lnTo>
-                    <a:pt x="0" y="0"/>
-                  </a:lnTo>
-                </a:path>
-              </a:pathLst>
-            </a:custGeom>
-            <a:ln w="13550" cap="flat">
-              <a:solidFill>
-                <a:srgbClr val="EBEBEB">
-                  <a:alpha val="100000"/>
-                </a:srgbClr>
-              </a:solidFill>
-              <a:prstDash val="solid"/>
-              <a:round/>
-            </a:ln>
-          </p:spPr>
-          <p:txBody>
-            <a:bodyPr/>
-            <a:lstStyle/>
-            <a:p/>
-          </p:txBody>
-        </p:sp>
-        <p:sp>
-          <p:nvSpPr>
-            <p:cNvPr id="21" name="pg21"/>
-            <p:cNvSpPr/>
-            <p:nvPr/>
-          </p:nvSpPr>
-          <p:spPr>
-            <a:xfrm>
-              <a:off x="817517" y="2073503"/>
-              <a:ext cx="7235830" cy="3363745"/>
-            </a:xfrm>
-            <a:custGeom>
-              <a:avLst/>
-              <a:pathLst>
-                <a:path w="7235830" h="3363745">
-                  <a:moveTo>
-                    <a:pt x="642940" y="0"/>
-                  </a:moveTo>
-                  <a:lnTo>
-                    <a:pt x="671187" y="50491"/>
-                  </a:lnTo>
-                  <a:lnTo>
-                    <a:pt x="744947" y="177458"/>
-                  </a:lnTo>
-                  <a:lnTo>
-                    <a:pt x="818707" y="299730"/>
-                  </a:lnTo>
-                  <a:lnTo>
-                    <a:pt x="892467" y="417480"/>
-                  </a:lnTo>
-                  <a:lnTo>
-                    <a:pt x="966227" y="530875"/>
-                  </a:lnTo>
-                  <a:lnTo>
-                    <a:pt x="1039987" y="640077"/>
-                  </a:lnTo>
-                  <a:lnTo>
-                    <a:pt x="1113747" y="745240"/>
-                  </a:lnTo>
-                  <a:lnTo>
-                    <a:pt x="1187508" y="846514"/>
-                  </a:lnTo>
-                  <a:lnTo>
-                    <a:pt x="1261268" y="944043"/>
-                  </a:lnTo>
-                  <a:lnTo>
-                    <a:pt x="1335028" y="1037966"/>
-                  </a:lnTo>
-                  <a:lnTo>
-                    <a:pt x="1408788" y="1128414"/>
-                  </a:lnTo>
-                  <a:lnTo>
-                    <a:pt x="1482548" y="1215518"/>
-                  </a:lnTo>
-                  <a:lnTo>
-                    <a:pt x="1556308" y="1299401"/>
-                  </a:lnTo>
-                  <a:lnTo>
-                    <a:pt x="1630068" y="1380181"/>
-                  </a:lnTo>
-                  <a:lnTo>
-                    <a:pt x="1703828" y="1457975"/>
-                  </a:lnTo>
-                  <a:lnTo>
-                    <a:pt x="1777588" y="1532891"/>
-                  </a:lnTo>
-                  <a:lnTo>
-                    <a:pt x="1851348" y="1605037"/>
-                  </a:lnTo>
-                  <a:lnTo>
-                    <a:pt x="1925108" y="1674514"/>
-                  </a:lnTo>
-                  <a:lnTo>
-                    <a:pt x="1998868" y="1741422"/>
-                  </a:lnTo>
-                  <a:lnTo>
-                    <a:pt x="2072628" y="1805856"/>
-                  </a:lnTo>
-                  <a:lnTo>
-                    <a:pt x="2146388" y="1867907"/>
-                  </a:lnTo>
-                  <a:lnTo>
-                    <a:pt x="2220148" y="1927664"/>
-                  </a:lnTo>
-                  <a:lnTo>
-                    <a:pt x="2293908" y="1985210"/>
-                  </a:lnTo>
-                  <a:lnTo>
-                    <a:pt x="2367668" y="2040628"/>
-                  </a:lnTo>
-                  <a:lnTo>
-                    <a:pt x="2441428" y="2093997"/>
-                  </a:lnTo>
-                  <a:lnTo>
-                    <a:pt x="2515188" y="2145392"/>
-                  </a:lnTo>
-                  <a:lnTo>
-                    <a:pt x="2588948" y="2194886"/>
-                  </a:lnTo>
-                  <a:lnTo>
-                    <a:pt x="2662708" y="2242551"/>
-                  </a:lnTo>
-                  <a:lnTo>
-                    <a:pt x="2736468" y="2288452"/>
-                  </a:lnTo>
-                  <a:lnTo>
-                    <a:pt x="2810228" y="2332656"/>
-                  </a:lnTo>
-                  <a:lnTo>
-                    <a:pt x="2883988" y="2375225"/>
-                  </a:lnTo>
-                  <a:lnTo>
-                    <a:pt x="2957748" y="2416220"/>
-                  </a:lnTo>
-                  <a:lnTo>
-                    <a:pt x="3031508" y="2455699"/>
-                  </a:lnTo>
-                  <a:lnTo>
-                    <a:pt x="3105268" y="2493717"/>
-                  </a:lnTo>
-                  <a:lnTo>
-                    <a:pt x="3179028" y="2530330"/>
-                  </a:lnTo>
-                  <a:lnTo>
-                    <a:pt x="3252788" y="2565589"/>
-                  </a:lnTo>
-                  <a:lnTo>
-                    <a:pt x="3326548" y="2599544"/>
-                  </a:lnTo>
-                  <a:lnTo>
-                    <a:pt x="3400308" y="2632243"/>
-                  </a:lnTo>
-                  <a:lnTo>
-                    <a:pt x="3474068" y="2657745"/>
-                  </a:lnTo>
-                  <a:lnTo>
-                    <a:pt x="3547828" y="2669028"/>
-                  </a:lnTo>
-                  <a:lnTo>
-                    <a:pt x="3621588" y="2680158"/>
-                  </a:lnTo>
-                  <a:lnTo>
-                    <a:pt x="3695348" y="2691135"/>
-                  </a:lnTo>
-                  <a:lnTo>
-                    <a:pt x="3769108" y="2701962"/>
-                  </a:lnTo>
-                  <a:lnTo>
-                    <a:pt x="3842868" y="2712642"/>
-                  </a:lnTo>
-                  <a:lnTo>
-                    <a:pt x="3916628" y="2723175"/>
-                  </a:lnTo>
-                  <a:lnTo>
-                    <a:pt x="3990388" y="2733565"/>
-                  </a:lnTo>
-                  <a:lnTo>
-                    <a:pt x="4064149" y="2743813"/>
-                  </a:lnTo>
-                  <a:lnTo>
-                    <a:pt x="4137909" y="2753920"/>
-                  </a:lnTo>
-                  <a:lnTo>
-                    <a:pt x="4211669" y="2763890"/>
-                  </a:lnTo>
-                  <a:lnTo>
-                    <a:pt x="4285429" y="2773724"/>
-                  </a:lnTo>
-                  <a:lnTo>
-                    <a:pt x="4359189" y="2783423"/>
-                  </a:lnTo>
-                  <a:lnTo>
-                    <a:pt x="4432949" y="2792989"/>
-                  </a:lnTo>
-                  <a:lnTo>
-                    <a:pt x="4506709" y="2802425"/>
-                  </a:lnTo>
-                  <a:lnTo>
-                    <a:pt x="4580469" y="2811733"/>
-                  </a:lnTo>
-                  <a:lnTo>
-                    <a:pt x="4654229" y="2820912"/>
-                  </a:lnTo>
-                  <a:lnTo>
-                    <a:pt x="4727989" y="2829967"/>
-                  </a:lnTo>
-                  <a:lnTo>
-                    <a:pt x="4801749" y="2838898"/>
-                  </a:lnTo>
-                  <a:lnTo>
-                    <a:pt x="4875509" y="2847707"/>
-                  </a:lnTo>
-                  <a:lnTo>
-                    <a:pt x="4949269" y="2856395"/>
-                  </a:lnTo>
-                  <a:lnTo>
-                    <a:pt x="5023029" y="2864965"/>
-                  </a:lnTo>
-                  <a:lnTo>
-                    <a:pt x="5096789" y="2873418"/>
-                  </a:lnTo>
-                  <a:lnTo>
-                    <a:pt x="5170549" y="2881755"/>
-                  </a:lnTo>
-                  <a:lnTo>
-                    <a:pt x="5244309" y="2889979"/>
-                  </a:lnTo>
-                  <a:lnTo>
-                    <a:pt x="5318069" y="2898090"/>
-                  </a:lnTo>
-                  <a:lnTo>
-                    <a:pt x="5391829" y="2906090"/>
-                  </a:lnTo>
-                  <a:lnTo>
-                    <a:pt x="5465589" y="2913981"/>
-                  </a:lnTo>
-                  <a:lnTo>
-                    <a:pt x="5539349" y="2921764"/>
-                  </a:lnTo>
-                  <a:lnTo>
-                    <a:pt x="5613109" y="2929441"/>
-                  </a:lnTo>
-                  <a:lnTo>
-                    <a:pt x="5686869" y="2937013"/>
-                  </a:lnTo>
-                  <a:lnTo>
-                    <a:pt x="5760629" y="2944482"/>
-                  </a:lnTo>
-                  <a:lnTo>
-                    <a:pt x="5834389" y="2951848"/>
-                  </a:lnTo>
-                  <a:lnTo>
-                    <a:pt x="5908149" y="2959114"/>
-                  </a:lnTo>
-                  <a:lnTo>
-                    <a:pt x="5981909" y="2966281"/>
-                  </a:lnTo>
-                  <a:lnTo>
-                    <a:pt x="6055669" y="2973349"/>
-                  </a:lnTo>
-                  <a:lnTo>
-                    <a:pt x="6129429" y="2980322"/>
-                  </a:lnTo>
-                  <a:lnTo>
-                    <a:pt x="6203189" y="2987199"/>
-                  </a:lnTo>
-                  <a:lnTo>
-                    <a:pt x="6276949" y="2993982"/>
-                  </a:lnTo>
-                  <a:lnTo>
-                    <a:pt x="6350709" y="3000672"/>
-                  </a:lnTo>
-                  <a:lnTo>
-                    <a:pt x="6424469" y="3007271"/>
-                  </a:lnTo>
-                  <a:lnTo>
-                    <a:pt x="6498229" y="3013780"/>
-                  </a:lnTo>
-                  <a:lnTo>
-                    <a:pt x="6571989" y="3020200"/>
-                  </a:lnTo>
-                  <a:lnTo>
-                    <a:pt x="6645749" y="3026532"/>
-                  </a:lnTo>
-                  <a:lnTo>
-                    <a:pt x="6719509" y="3032778"/>
-                  </a:lnTo>
-                  <a:lnTo>
-                    <a:pt x="6793269" y="3038938"/>
-                  </a:lnTo>
-                  <a:lnTo>
-                    <a:pt x="6867029" y="3045014"/>
-                  </a:lnTo>
-                  <a:lnTo>
-                    <a:pt x="6940789" y="3051008"/>
-                  </a:lnTo>
-                  <a:lnTo>
-                    <a:pt x="7014550" y="3056919"/>
-                  </a:lnTo>
-                  <a:lnTo>
-                    <a:pt x="7088310" y="3062749"/>
-                  </a:lnTo>
-                  <a:lnTo>
-                    <a:pt x="7162070" y="3068500"/>
-                  </a:lnTo>
-                  <a:lnTo>
-                    <a:pt x="7235830" y="3074173"/>
-                  </a:lnTo>
-                  <a:lnTo>
-                    <a:pt x="7235830" y="3363745"/>
-                  </a:lnTo>
-                  <a:lnTo>
-                    <a:pt x="7162070" y="3359137"/>
-                  </a:lnTo>
-                  <a:lnTo>
-                    <a:pt x="7088310" y="3354352"/>
-                  </a:lnTo>
-                  <a:lnTo>
-                    <a:pt x="7014550" y="3349383"/>
-                  </a:lnTo>
-                  <a:lnTo>
-                    <a:pt x="6940789" y="3344223"/>
-                  </a:lnTo>
-                  <a:lnTo>
-                    <a:pt x="6867029" y="3338865"/>
-                  </a:lnTo>
-                  <a:lnTo>
-                    <a:pt x="6793269" y="3333301"/>
-                  </a:lnTo>
-                  <a:lnTo>
-                    <a:pt x="6719509" y="3327524"/>
-                  </a:lnTo>
-                  <a:lnTo>
-                    <a:pt x="6645749" y="3321525"/>
-                  </a:lnTo>
-                  <a:lnTo>
-                    <a:pt x="6571989" y="3315295"/>
-                  </a:lnTo>
-                  <a:lnTo>
-                    <a:pt x="6498229" y="3308826"/>
-                  </a:lnTo>
-                  <a:lnTo>
-                    <a:pt x="6424469" y="3302109"/>
-                  </a:lnTo>
-                  <a:lnTo>
-                    <a:pt x="6350709" y="3295134"/>
-                  </a:lnTo>
-                  <a:lnTo>
-                    <a:pt x="6276949" y="3287891"/>
-                  </a:lnTo>
-                  <a:lnTo>
-                    <a:pt x="6203189" y="3280370"/>
-                  </a:lnTo>
-                  <a:lnTo>
-                    <a:pt x="6129429" y="3272560"/>
-                  </a:lnTo>
-                  <a:lnTo>
-                    <a:pt x="6055669" y="3264450"/>
-                  </a:lnTo>
-                  <a:lnTo>
-                    <a:pt x="5981909" y="3256028"/>
-                  </a:lnTo>
-                  <a:lnTo>
-                    <a:pt x="5908149" y="3247284"/>
-                  </a:lnTo>
-                  <a:lnTo>
-                    <a:pt x="5834389" y="3238203"/>
-                  </a:lnTo>
-                  <a:lnTo>
-                    <a:pt x="5760629" y="3228774"/>
-                  </a:lnTo>
-                  <a:lnTo>
-                    <a:pt x="5686869" y="3218982"/>
-                  </a:lnTo>
-                  <a:lnTo>
-                    <a:pt x="5613109" y="3208815"/>
-                  </a:lnTo>
-                  <a:lnTo>
-                    <a:pt x="5539349" y="3198257"/>
-                  </a:lnTo>
-                  <a:lnTo>
-                    <a:pt x="5465589" y="3187294"/>
-                  </a:lnTo>
-                  <a:lnTo>
-                    <a:pt x="5391829" y="3175910"/>
-                  </a:lnTo>
-                  <a:lnTo>
-                    <a:pt x="5318069" y="3164088"/>
-                  </a:lnTo>
-                  <a:lnTo>
-                    <a:pt x="5244309" y="3151813"/>
-                  </a:lnTo>
-                  <a:lnTo>
-                    <a:pt x="5170549" y="3139066"/>
-                  </a:lnTo>
-                  <a:lnTo>
-                    <a:pt x="5096789" y="3125830"/>
-                  </a:lnTo>
-                  <a:lnTo>
-                    <a:pt x="5023029" y="3112085"/>
-                  </a:lnTo>
-                  <a:lnTo>
-                    <a:pt x="4949269" y="3097813"/>
-                  </a:lnTo>
-                  <a:lnTo>
-                    <a:pt x="4875509" y="3082992"/>
-                  </a:lnTo>
-                  <a:lnTo>
-                    <a:pt x="4801749" y="3067602"/>
-                  </a:lnTo>
-                  <a:lnTo>
-                    <a:pt x="4727989" y="3051622"/>
-                  </a:lnTo>
-                  <a:lnTo>
-                    <a:pt x="4654229" y="3035027"/>
-                  </a:lnTo>
-                  <a:lnTo>
-                    <a:pt x="4580469" y="3017796"/>
-                  </a:lnTo>
-                  <a:lnTo>
-                    <a:pt x="4506709" y="2999902"/>
-                  </a:lnTo>
-                  <a:lnTo>
-                    <a:pt x="4432949" y="2981322"/>
-                  </a:lnTo>
-                  <a:lnTo>
-                    <a:pt x="4359189" y="2962028"/>
-                  </a:lnTo>
-                  <a:lnTo>
-                    <a:pt x="4285429" y="2941993"/>
-                  </a:lnTo>
-                  <a:lnTo>
-                    <a:pt x="4211669" y="2921189"/>
-                  </a:lnTo>
-                  <a:lnTo>
-                    <a:pt x="4137909" y="2899586"/>
-                  </a:lnTo>
-                  <a:lnTo>
-                    <a:pt x="4064149" y="2877153"/>
-                  </a:lnTo>
-                  <a:lnTo>
-                    <a:pt x="3990388" y="2853859"/>
-                  </a:lnTo>
-                  <a:lnTo>
-                    <a:pt x="3916628" y="2829670"/>
-                  </a:lnTo>
-                  <a:lnTo>
-                    <a:pt x="3842868" y="2804552"/>
-                  </a:lnTo>
-                  <a:lnTo>
-                    <a:pt x="3769108" y="2778470"/>
-                  </a:lnTo>
-                  <a:lnTo>
-                    <a:pt x="3695348" y="2751386"/>
-                  </a:lnTo>
-                  <a:lnTo>
-                    <a:pt x="3621588" y="2723262"/>
-                  </a:lnTo>
-                  <a:lnTo>
-                    <a:pt x="3547828" y="2694058"/>
-                  </a:lnTo>
-                  <a:lnTo>
-                    <a:pt x="3474068" y="2663733"/>
-                  </a:lnTo>
-                  <a:lnTo>
-                    <a:pt x="3400308" y="2646305"/>
-                  </a:lnTo>
-                  <a:lnTo>
-                    <a:pt x="3326548" y="2634707"/>
-                  </a:lnTo>
-                  <a:lnTo>
-                    <a:pt x="3252788" y="2622948"/>
-                  </a:lnTo>
-                  <a:lnTo>
-                    <a:pt x="3179028" y="2611026"/>
-                  </a:lnTo>
-                  <a:lnTo>
-                    <a:pt x="3105268" y="2598940"/>
-                  </a:lnTo>
-                  <a:lnTo>
-                    <a:pt x="3031508" y="2586685"/>
-                  </a:lnTo>
-                  <a:lnTo>
-                    <a:pt x="2957748" y="2574262"/>
-                  </a:lnTo>
-                  <a:lnTo>
-                    <a:pt x="2883988" y="2561666"/>
-                  </a:lnTo>
-                  <a:lnTo>
-                    <a:pt x="2810228" y="2548895"/>
-                  </a:lnTo>
-                  <a:lnTo>
-                    <a:pt x="2736468" y="2535948"/>
-                  </a:lnTo>
-                  <a:lnTo>
-                    <a:pt x="2662708" y="2522821"/>
-                  </a:lnTo>
-                  <a:lnTo>
-                    <a:pt x="2588948" y="2509513"/>
-                  </a:lnTo>
-                  <a:lnTo>
-                    <a:pt x="2515188" y="2496020"/>
-                  </a:lnTo>
-                  <a:lnTo>
-                    <a:pt x="2441428" y="2482341"/>
-                  </a:lnTo>
-                  <a:lnTo>
-                    <a:pt x="2367668" y="2468472"/>
-                  </a:lnTo>
-                  <a:lnTo>
-                    <a:pt x="2293908" y="2454411"/>
-                  </a:lnTo>
-                  <a:lnTo>
-                    <a:pt x="2220148" y="2440155"/>
-                  </a:lnTo>
-                  <a:lnTo>
-                    <a:pt x="2146388" y="2425702"/>
-                  </a:lnTo>
-                  <a:lnTo>
-                    <a:pt x="2072628" y="2411048"/>
-                  </a:lnTo>
-                  <a:lnTo>
-                    <a:pt x="1998868" y="2396192"/>
-                  </a:lnTo>
-                  <a:lnTo>
-                    <a:pt x="1925108" y="2381130"/>
-                  </a:lnTo>
-                  <a:lnTo>
-                    <a:pt x="1851348" y="2365859"/>
-                  </a:lnTo>
-                  <a:lnTo>
-                    <a:pt x="1777588" y="2350377"/>
-                  </a:lnTo>
-                  <a:lnTo>
-                    <a:pt x="1703828" y="2334680"/>
-                  </a:lnTo>
-                  <a:lnTo>
-                    <a:pt x="1630068" y="2318766"/>
-                  </a:lnTo>
-                  <a:lnTo>
-                    <a:pt x="1556308" y="2302632"/>
-                  </a:lnTo>
-                  <a:lnTo>
-                    <a:pt x="1482548" y="2286274"/>
-                  </a:lnTo>
-                  <a:lnTo>
-                    <a:pt x="1408788" y="2269689"/>
-                  </a:lnTo>
-                  <a:lnTo>
-                    <a:pt x="1335028" y="2252875"/>
-                  </a:lnTo>
-                  <a:lnTo>
-                    <a:pt x="1261268" y="2235828"/>
-                  </a:lnTo>
-                  <a:lnTo>
-                    <a:pt x="1187508" y="2218545"/>
-                  </a:lnTo>
-                  <a:lnTo>
-                    <a:pt x="1113747" y="2201023"/>
-                  </a:lnTo>
-                  <a:lnTo>
-                    <a:pt x="1039987" y="2183257"/>
-                  </a:lnTo>
-                  <a:lnTo>
-                    <a:pt x="966227" y="2165246"/>
-                  </a:lnTo>
-                  <a:lnTo>
-                    <a:pt x="892467" y="2146986"/>
-                  </a:lnTo>
-                  <a:lnTo>
-                    <a:pt x="818707" y="2128472"/>
-                  </a:lnTo>
-                  <a:lnTo>
-                    <a:pt x="744947" y="2109702"/>
-                  </a:lnTo>
-                  <a:lnTo>
-                    <a:pt x="671187" y="2090672"/>
-                  </a:lnTo>
-                  <a:lnTo>
-                    <a:pt x="597427" y="2071379"/>
-                  </a:lnTo>
-                  <a:lnTo>
-                    <a:pt x="523667" y="2051818"/>
-                  </a:lnTo>
-                  <a:lnTo>
-                    <a:pt x="449907" y="2031987"/>
-                  </a:lnTo>
-                  <a:lnTo>
-                    <a:pt x="376147" y="2011880"/>
-                  </a:lnTo>
-                  <a:lnTo>
-                    <a:pt x="302387" y="1991496"/>
-                  </a:lnTo>
-                  <a:lnTo>
-                    <a:pt x="228627" y="1970829"/>
-                  </a:lnTo>
-                  <a:lnTo>
-                    <a:pt x="154867" y="1949875"/>
-                  </a:lnTo>
-                  <a:lnTo>
-                    <a:pt x="81107" y="1928632"/>
-                  </a:lnTo>
-                  <a:lnTo>
-                    <a:pt x="7347" y="1907094"/>
-                  </a:lnTo>
-                  <a:lnTo>
-                    <a:pt x="0" y="1904919"/>
+                    <a:pt x="716225" y="50491"/>
+                  </a:lnTo>
+                  <a:lnTo>
+                    <a:pt x="787847" y="177458"/>
+                  </a:lnTo>
+                  <a:lnTo>
+                    <a:pt x="859470" y="299730"/>
+                  </a:lnTo>
+                  <a:lnTo>
+                    <a:pt x="931092" y="417480"/>
+                  </a:lnTo>
+                  <a:lnTo>
+                    <a:pt x="1002715" y="530875"/>
+                  </a:lnTo>
+                  <a:lnTo>
+                    <a:pt x="1074337" y="640077"/>
+                  </a:lnTo>
+                  <a:lnTo>
+                    <a:pt x="1145960" y="745240"/>
+                  </a:lnTo>
+                  <a:lnTo>
+                    <a:pt x="1217582" y="846514"/>
+                  </a:lnTo>
+                  <a:lnTo>
+                    <a:pt x="1289205" y="944043"/>
+                  </a:lnTo>
+                  <a:lnTo>
+                    <a:pt x="1360827" y="1037966"/>
+                  </a:lnTo>
+                  <a:lnTo>
+                    <a:pt x="1432450" y="1128414"/>
+                  </a:lnTo>
+                  <a:lnTo>
+                    <a:pt x="1504073" y="1215518"/>
+                  </a:lnTo>
+                  <a:lnTo>
+                    <a:pt x="1575695" y="1299401"/>
+                  </a:lnTo>
+                  <a:lnTo>
+                    <a:pt x="1647318" y="1380181"/>
+                  </a:lnTo>
+                  <a:lnTo>
+                    <a:pt x="1718940" y="1457975"/>
+                  </a:lnTo>
+                  <a:lnTo>
+                    <a:pt x="1790563" y="1532891"/>
+                  </a:lnTo>
+                  <a:lnTo>
+                    <a:pt x="1862185" y="1605037"/>
+                  </a:lnTo>
+                  <a:lnTo>
+                    <a:pt x="1933808" y="1674514"/>
+                  </a:lnTo>
+                  <a:lnTo>
+                    <a:pt x="2005430" y="1741422"/>
+                  </a:lnTo>
+                  <a:lnTo>
+                    <a:pt x="2077053" y="1805856"/>
+                  </a:lnTo>
+                  <a:lnTo>
+                    <a:pt x="2148675" y="1867907"/>
+                  </a:lnTo>
+                  <a:lnTo>
+                    <a:pt x="2220298" y="1927664"/>
+                  </a:lnTo>
+                  <a:lnTo>
+                    <a:pt x="2291920" y="1985210"/>
+                  </a:lnTo>
+                  <a:lnTo>
+                    <a:pt x="2363543" y="2040628"/>
+                  </a:lnTo>
+                  <a:lnTo>
+                    <a:pt x="2435165" y="2093997"/>
+                  </a:lnTo>
+                  <a:lnTo>
+                    <a:pt x="2506788" y="2145392"/>
+                  </a:lnTo>
+                  <a:lnTo>
+                    <a:pt x="2578410" y="2194886"/>
+                  </a:lnTo>
+                  <a:lnTo>
+                    <a:pt x="2650033" y="2242551"/>
+                  </a:lnTo>
+                  <a:lnTo>
+                    <a:pt x="2721655" y="2288452"/>
+                  </a:lnTo>
+                  <a:lnTo>
+                    <a:pt x="2793278" y="2332656"/>
+                  </a:lnTo>
+                  <a:lnTo>
+                    <a:pt x="2864901" y="2375225"/>
+                  </a:lnTo>
+                  <a:lnTo>
+                    <a:pt x="2936523" y="2416220"/>
+                  </a:lnTo>
+                  <a:lnTo>
+                    <a:pt x="3008146" y="2455699"/>
+                  </a:lnTo>
+                  <a:lnTo>
+                    <a:pt x="3079768" y="2493717"/>
+                  </a:lnTo>
+                  <a:lnTo>
+                    <a:pt x="3151391" y="2530330"/>
+                  </a:lnTo>
+                  <a:lnTo>
+                    <a:pt x="3223013" y="2565589"/>
+                  </a:lnTo>
+                  <a:lnTo>
+                    <a:pt x="3294636" y="2599544"/>
+                  </a:lnTo>
+                  <a:lnTo>
+                    <a:pt x="3366258" y="2632243"/>
+                  </a:lnTo>
+                  <a:lnTo>
+                    <a:pt x="3437881" y="2657745"/>
+                  </a:lnTo>
+                  <a:lnTo>
+                    <a:pt x="3509503" y="2669028"/>
+                  </a:lnTo>
+                  <a:lnTo>
+                    <a:pt x="3581126" y="2680158"/>
+                  </a:lnTo>
+                  <a:lnTo>
+                    <a:pt x="3652748" y="2691135"/>
+                  </a:lnTo>
+                  <a:lnTo>
+                    <a:pt x="3724371" y="2701962"/>
+                  </a:lnTo>
+                  <a:lnTo>
+                    <a:pt x="3795993" y="2712642"/>
+                  </a:lnTo>
+                  <a:lnTo>
+                    <a:pt x="3867616" y="2723175"/>
+                  </a:lnTo>
+                  <a:lnTo>
+                    <a:pt x="3939238" y="2733565"/>
+                  </a:lnTo>
+                  <a:lnTo>
+                    <a:pt x="4010861" y="2743813"/>
+                  </a:lnTo>
+                  <a:lnTo>
+                    <a:pt x="4082483" y="2753920"/>
+                  </a:lnTo>
+                  <a:lnTo>
+                    <a:pt x="4154106" y="2763890"/>
+                  </a:lnTo>
+                  <a:lnTo>
+                    <a:pt x="4225729" y="2773724"/>
+                  </a:lnTo>
+                  <a:lnTo>
+                    <a:pt x="4297351" y="2783423"/>
+                  </a:lnTo>
+                  <a:lnTo>
+                    <a:pt x="4368974" y="2792989"/>
+                  </a:lnTo>
+                  <a:lnTo>
+                    <a:pt x="4440596" y="2802425"/>
+                  </a:lnTo>
+                  <a:lnTo>
+                    <a:pt x="4512219" y="2811733"/>
+                  </a:lnTo>
+                  <a:lnTo>
+                    <a:pt x="4583841" y="2820912"/>
+                  </a:lnTo>
+                  <a:lnTo>
+                    <a:pt x="4655464" y="2829967"/>
+                  </a:lnTo>
+                  <a:lnTo>
+                    <a:pt x="4727086" y="2838898"/>
+                  </a:lnTo>
+                  <a:lnTo>
+                    <a:pt x="4798709" y="2847707"/>
+                  </a:lnTo>
+                  <a:lnTo>
+                    <a:pt x="4870331" y="2856395"/>
+                  </a:lnTo>
+                  <a:lnTo>
+                    <a:pt x="4941954" y="2864965"/>
+                  </a:lnTo>
+                  <a:lnTo>
+                    <a:pt x="5013576" y="2873418"/>
+                  </a:lnTo>
+                  <a:lnTo>
+                    <a:pt x="5085199" y="2881755"/>
+                  </a:lnTo>
+                  <a:lnTo>
+                    <a:pt x="5156821" y="2889979"/>
+                  </a:lnTo>
+                  <a:lnTo>
+                    <a:pt x="5228444" y="2898090"/>
+                  </a:lnTo>
+                  <a:lnTo>
+                    <a:pt x="5300066" y="2906090"/>
+                  </a:lnTo>
+                  <a:lnTo>
+                    <a:pt x="5371689" y="2913981"/>
+                  </a:lnTo>
+                  <a:lnTo>
+                    <a:pt x="5443311" y="2921764"/>
+                  </a:lnTo>
+                  <a:lnTo>
+                    <a:pt x="5514934" y="2929441"/>
+                  </a:lnTo>
+                  <a:lnTo>
+                    <a:pt x="5586557" y="2937013"/>
+                  </a:lnTo>
+                  <a:lnTo>
+                    <a:pt x="5658179" y="2944482"/>
+                  </a:lnTo>
+                  <a:lnTo>
+                    <a:pt x="5729802" y="2951848"/>
+                  </a:lnTo>
+                  <a:lnTo>
+                    <a:pt x="5801424" y="2959114"/>
+                  </a:lnTo>
+                  <a:lnTo>
+                    <a:pt x="5873047" y="2966281"/>
+                  </a:lnTo>
+                  <a:lnTo>
+                    <a:pt x="5944669" y="2973349"/>
+                  </a:lnTo>
+                  <a:lnTo>
+                    <a:pt x="6016292" y="2980322"/>
+                  </a:lnTo>
+                  <a:lnTo>
+                    <a:pt x="6087914" y="2987199"/>
+                  </a:lnTo>
+                  <a:lnTo>
+                    <a:pt x="6159537" y="2993982"/>
+                  </a:lnTo>
+                  <a:lnTo>
+                    <a:pt x="6231159" y="3000672"/>
+                  </a:lnTo>
+                  <a:lnTo>
+                    <a:pt x="6302782" y="3007271"/>
+                  </a:lnTo>
+                  <a:lnTo>
+                    <a:pt x="6374404" y="3013780"/>
+                  </a:lnTo>
+                  <a:lnTo>
+                    <a:pt x="6446027" y="3020200"/>
+                  </a:lnTo>
+                  <a:lnTo>
+                    <a:pt x="6517649" y="3026532"/>
+                  </a:lnTo>
+                  <a:lnTo>
+                    <a:pt x="6589272" y="3032778"/>
+                  </a:lnTo>
+                  <a:lnTo>
+                    <a:pt x="6660894" y="3038938"/>
+                  </a:lnTo>
+                  <a:lnTo>
+                    <a:pt x="6732517" y="3045014"/>
+                  </a:lnTo>
+                  <a:lnTo>
+                    <a:pt x="6804139" y="3051008"/>
+                  </a:lnTo>
+                  <a:lnTo>
+                    <a:pt x="6875762" y="3056919"/>
+                  </a:lnTo>
+                  <a:lnTo>
+                    <a:pt x="6947385" y="3062749"/>
+                  </a:lnTo>
+                  <a:lnTo>
+                    <a:pt x="7019007" y="3068500"/>
+                  </a:lnTo>
+                  <a:lnTo>
+                    <a:pt x="7090630" y="3074173"/>
+                  </a:lnTo>
+                  <a:lnTo>
+                    <a:pt x="7090630" y="3363745"/>
+                  </a:lnTo>
+                  <a:lnTo>
+                    <a:pt x="7019007" y="3359137"/>
+                  </a:lnTo>
+                  <a:lnTo>
+                    <a:pt x="6947385" y="3354352"/>
+                  </a:lnTo>
+                  <a:lnTo>
+                    <a:pt x="6875762" y="3349383"/>
+                  </a:lnTo>
+                  <a:lnTo>
+                    <a:pt x="6804139" y="3344223"/>
+                  </a:lnTo>
+                  <a:lnTo>
+                    <a:pt x="6732517" y="3338865"/>
+                  </a:lnTo>
+                  <a:lnTo>
+                    <a:pt x="6660894" y="3333301"/>
+                  </a:lnTo>
+                  <a:lnTo>
+                    <a:pt x="6589272" y="3327524"/>
+                  </a:lnTo>
+                  <a:lnTo>
+                    <a:pt x="6517649" y="3321525"/>
+                  </a:lnTo>
+                  <a:lnTo>
+                    <a:pt x="6446027" y="3315295"/>
+                  </a:lnTo>
+                  <a:lnTo>
+                    <a:pt x="6374404" y="3308826"/>
+                  </a:lnTo>
+                  <a:lnTo>
+                    <a:pt x="6302782" y="3302109"/>
+                  </a:lnTo>
+                  <a:lnTo>
+                    <a:pt x="6231159" y="3295134"/>
+                  </a:lnTo>
+                  <a:lnTo>
+                    <a:pt x="6159537" y="3287891"/>
+                  </a:lnTo>
+                  <a:lnTo>
+                    <a:pt x="6087914" y="3280370"/>
+                  </a:lnTo>
+                  <a:lnTo>
+                    <a:pt x="6016292" y="3272560"/>
+                  </a:lnTo>
+                  <a:lnTo>
+                    <a:pt x="5944669" y="3264450"/>
+                  </a:lnTo>
+                  <a:lnTo>
+                    <a:pt x="5873047" y="3256028"/>
+                  </a:lnTo>
+                  <a:lnTo>
+                    <a:pt x="5801424" y="3247284"/>
+                  </a:lnTo>
+                  <a:lnTo>
+                    <a:pt x="5729802" y="3238203"/>
+                  </a:lnTo>
+                  <a:lnTo>
+                    <a:pt x="5658179" y="3228774"/>
+                  </a:lnTo>
+                  <a:lnTo>
+                    <a:pt x="5586557" y="3218982"/>
+                  </a:lnTo>
+                  <a:lnTo>
+                    <a:pt x="5514934" y="3208815"/>
+                  </a:lnTo>
+                  <a:lnTo>
+                    <a:pt x="5443311" y="3198257"/>
+                  </a:lnTo>
+                  <a:lnTo>
+                    <a:pt x="5371689" y="3187294"/>
+                  </a:lnTo>
+                  <a:lnTo>
+                    <a:pt x="5300066" y="3175910"/>
+                  </a:lnTo>
+                  <a:lnTo>
+                    <a:pt x="5228444" y="3164088"/>
+                  </a:lnTo>
+                  <a:lnTo>
+                    <a:pt x="5156821" y="3151813"/>
+                  </a:lnTo>
+                  <a:lnTo>
+                    <a:pt x="5085199" y="3139066"/>
+                  </a:lnTo>
+                  <a:lnTo>
+                    <a:pt x="5013576" y="3125830"/>
+                  </a:lnTo>
+                  <a:lnTo>
+                    <a:pt x="4941954" y="3112085"/>
+                  </a:lnTo>
+                  <a:lnTo>
+                    <a:pt x="4870331" y="3097813"/>
+                  </a:lnTo>
+                  <a:lnTo>
+                    <a:pt x="4798709" y="3082992"/>
+                  </a:lnTo>
+                  <a:lnTo>
+                    <a:pt x="4727086" y="3067602"/>
+                  </a:lnTo>
+                  <a:lnTo>
+                    <a:pt x="4655464" y="3051622"/>
+                  </a:lnTo>
+                  <a:lnTo>
+                    <a:pt x="4583841" y="3035027"/>
+                  </a:lnTo>
+                  <a:lnTo>
+                    <a:pt x="4512219" y="3017796"/>
+                  </a:lnTo>
+                  <a:lnTo>
+                    <a:pt x="4440596" y="2999902"/>
+                  </a:lnTo>
+                  <a:lnTo>
+                    <a:pt x="4368974" y="2981322"/>
+                  </a:lnTo>
+                  <a:lnTo>
+                    <a:pt x="4297351" y="2962028"/>
+                  </a:lnTo>
+                  <a:lnTo>
+                    <a:pt x="4225729" y="2941993"/>
+                  </a:lnTo>
+                  <a:lnTo>
+                    <a:pt x="4154106" y="2921189"/>
+                  </a:lnTo>
+                  <a:lnTo>
+                    <a:pt x="4082483" y="2899586"/>
+                  </a:lnTo>
+                  <a:lnTo>
+                    <a:pt x="4010861" y="2877153"/>
+                  </a:lnTo>
+                  <a:lnTo>
+                    <a:pt x="3939238" y="2853859"/>
+                  </a:lnTo>
+                  <a:lnTo>
+                    <a:pt x="3867616" y="2829670"/>
+                  </a:lnTo>
+                  <a:lnTo>
+                    <a:pt x="3795993" y="2804552"/>
+                  </a:lnTo>
+                  <a:lnTo>
+                    <a:pt x="3724371" y="2778470"/>
+                  </a:lnTo>
+                  <a:lnTo>
+                    <a:pt x="3652748" y="2751386"/>
+                  </a:lnTo>
+                  <a:lnTo>
+                    <a:pt x="3581126" y="2723262"/>
+                  </a:lnTo>
+                  <a:lnTo>
+                    <a:pt x="3509503" y="2694058"/>
+                  </a:lnTo>
+                  <a:lnTo>
+                    <a:pt x="3437881" y="2663733"/>
+                  </a:lnTo>
+                  <a:lnTo>
+                    <a:pt x="3366258" y="2646305"/>
+                  </a:lnTo>
+                  <a:lnTo>
+                    <a:pt x="3294636" y="2634707"/>
+                  </a:lnTo>
+                  <a:lnTo>
+                    <a:pt x="3223013" y="2622948"/>
+                  </a:lnTo>
+                  <a:lnTo>
+                    <a:pt x="3151391" y="2611026"/>
+                  </a:lnTo>
+                  <a:lnTo>
+                    <a:pt x="3079768" y="2598940"/>
+                  </a:lnTo>
+                  <a:lnTo>
+                    <a:pt x="3008146" y="2586685"/>
+                  </a:lnTo>
+                  <a:lnTo>
+                    <a:pt x="2936523" y="2574262"/>
+                  </a:lnTo>
+                  <a:lnTo>
+                    <a:pt x="2864901" y="2561666"/>
+                  </a:lnTo>
+                  <a:lnTo>
+                    <a:pt x="2793278" y="2548895"/>
+                  </a:lnTo>
+                  <a:lnTo>
+                    <a:pt x="2721655" y="2535948"/>
+                  </a:lnTo>
+                  <a:lnTo>
+                    <a:pt x="2650033" y="2522821"/>
+                  </a:lnTo>
+                  <a:lnTo>
+                    <a:pt x="2578410" y="2509513"/>
+                  </a:lnTo>
+                  <a:lnTo>
+                    <a:pt x="2506788" y="2496020"/>
+                  </a:lnTo>
+                  <a:lnTo>
+                    <a:pt x="2435165" y="2482341"/>
+                  </a:lnTo>
+                  <a:lnTo>
+                    <a:pt x="2363543" y="2468472"/>
+                  </a:lnTo>
+                  <a:lnTo>
+                    <a:pt x="2291920" y="2454411"/>
+                  </a:lnTo>
+                  <a:lnTo>
+                    <a:pt x="2220298" y="2440155"/>
+                  </a:lnTo>
+                  <a:lnTo>
+                    <a:pt x="2148675" y="2425702"/>
+                  </a:lnTo>
+                  <a:lnTo>
+                    <a:pt x="2077053" y="2411048"/>
+                  </a:lnTo>
+                  <a:lnTo>
+                    <a:pt x="2005430" y="2396192"/>
+                  </a:lnTo>
+                  <a:lnTo>
+                    <a:pt x="1933808" y="2381130"/>
+                  </a:lnTo>
+                  <a:lnTo>
+                    <a:pt x="1862185" y="2365859"/>
+                  </a:lnTo>
+                  <a:lnTo>
+                    <a:pt x="1790563" y="2350377"/>
+                  </a:lnTo>
+                  <a:lnTo>
+                    <a:pt x="1718940" y="2334680"/>
+                  </a:lnTo>
+                  <a:lnTo>
+                    <a:pt x="1647318" y="2318766"/>
+                  </a:lnTo>
+                  <a:lnTo>
+                    <a:pt x="1575695" y="2302632"/>
+                  </a:lnTo>
+                  <a:lnTo>
+                    <a:pt x="1504073" y="2286274"/>
+                  </a:lnTo>
+                  <a:lnTo>
+                    <a:pt x="1432450" y="2269689"/>
+                  </a:lnTo>
+                  <a:lnTo>
+                    <a:pt x="1360827" y="2252875"/>
+                  </a:lnTo>
+                  <a:lnTo>
+                    <a:pt x="1289205" y="2235828"/>
+                  </a:lnTo>
+                  <a:lnTo>
+                    <a:pt x="1217582" y="2218545"/>
+                  </a:lnTo>
+                  <a:lnTo>
+                    <a:pt x="1145960" y="2201023"/>
+                  </a:lnTo>
+                  <a:lnTo>
+                    <a:pt x="1074337" y="2183257"/>
+                  </a:lnTo>
+                  <a:lnTo>
+                    <a:pt x="1002715" y="2165246"/>
+                  </a:lnTo>
+                  <a:lnTo>
+                    <a:pt x="931092" y="2146986"/>
+                  </a:lnTo>
+                  <a:lnTo>
+                    <a:pt x="859470" y="2128472"/>
+                  </a:lnTo>
+                  <a:lnTo>
+                    <a:pt x="787847" y="2109702"/>
+                  </a:lnTo>
+                  <a:lnTo>
+                    <a:pt x="716225" y="2090672"/>
+                  </a:lnTo>
+                  <a:lnTo>
+                    <a:pt x="644602" y="2071379"/>
+                  </a:lnTo>
+                  <a:lnTo>
+                    <a:pt x="572980" y="2051818"/>
+                  </a:lnTo>
+                  <a:lnTo>
+                    <a:pt x="501357" y="2031987"/>
+                  </a:lnTo>
+                  <a:lnTo>
+                    <a:pt x="429735" y="2011880"/>
+                  </a:lnTo>
+                  <a:lnTo>
+                    <a:pt x="358112" y="1991496"/>
+                  </a:lnTo>
+                  <a:lnTo>
+                    <a:pt x="286490" y="1970829"/>
+                  </a:lnTo>
+                  <a:lnTo>
+                    <a:pt x="214867" y="1949875"/>
+                  </a:lnTo>
+                  <a:lnTo>
+                    <a:pt x="143245" y="1928632"/>
+                  </a:lnTo>
+                  <a:lnTo>
+                    <a:pt x="71622" y="1907094"/>
+                  </a:lnTo>
+                  <a:lnTo>
+                    <a:pt x="0" y="1885259"/>
                   </a:lnTo>
                   <a:close/>
                 </a:path>
@@ -3600,291 +3557,616 @@
         </p:sp>
         <p:sp>
           <p:nvSpPr>
+            <p:cNvPr id="21" name="pl21"/>
+            <p:cNvSpPr/>
+            <p:nvPr/>
+          </p:nvSpPr>
+          <p:spPr>
+            <a:xfrm>
+              <a:off x="1860845" y="2073503"/>
+              <a:ext cx="6401833" cy="3074173"/>
+            </a:xfrm>
+            <a:custGeom>
+              <a:avLst/>
+              <a:pathLst>
+                <a:path w="6401833" h="3074173">
+                  <a:moveTo>
+                    <a:pt x="0" y="0"/>
+                  </a:moveTo>
+                  <a:lnTo>
+                    <a:pt x="27429" y="50491"/>
+                  </a:lnTo>
+                  <a:lnTo>
+                    <a:pt x="99051" y="177458"/>
+                  </a:lnTo>
+                  <a:lnTo>
+                    <a:pt x="170674" y="299730"/>
+                  </a:lnTo>
+                  <a:lnTo>
+                    <a:pt x="242296" y="417480"/>
+                  </a:lnTo>
+                  <a:lnTo>
+                    <a:pt x="313919" y="530875"/>
+                  </a:lnTo>
+                  <a:lnTo>
+                    <a:pt x="385541" y="640077"/>
+                  </a:lnTo>
+                  <a:lnTo>
+                    <a:pt x="457164" y="745240"/>
+                  </a:lnTo>
+                  <a:lnTo>
+                    <a:pt x="528786" y="846514"/>
+                  </a:lnTo>
+                  <a:lnTo>
+                    <a:pt x="600409" y="944043"/>
+                  </a:lnTo>
+                  <a:lnTo>
+                    <a:pt x="672031" y="1037966"/>
+                  </a:lnTo>
+                  <a:lnTo>
+                    <a:pt x="743654" y="1128414"/>
+                  </a:lnTo>
+                  <a:lnTo>
+                    <a:pt x="815276" y="1215518"/>
+                  </a:lnTo>
+                  <a:lnTo>
+                    <a:pt x="886899" y="1299401"/>
+                  </a:lnTo>
+                  <a:lnTo>
+                    <a:pt x="958521" y="1380181"/>
+                  </a:lnTo>
+                  <a:lnTo>
+                    <a:pt x="1030144" y="1457975"/>
+                  </a:lnTo>
+                  <a:lnTo>
+                    <a:pt x="1101766" y="1532891"/>
+                  </a:lnTo>
+                  <a:lnTo>
+                    <a:pt x="1173389" y="1605037"/>
+                  </a:lnTo>
+                  <a:lnTo>
+                    <a:pt x="1245011" y="1674514"/>
+                  </a:lnTo>
+                  <a:lnTo>
+                    <a:pt x="1316634" y="1741422"/>
+                  </a:lnTo>
+                  <a:lnTo>
+                    <a:pt x="1388257" y="1805856"/>
+                  </a:lnTo>
+                  <a:lnTo>
+                    <a:pt x="1459879" y="1867907"/>
+                  </a:lnTo>
+                  <a:lnTo>
+                    <a:pt x="1531502" y="1927664"/>
+                  </a:lnTo>
+                  <a:lnTo>
+                    <a:pt x="1603124" y="1985210"/>
+                  </a:lnTo>
+                  <a:lnTo>
+                    <a:pt x="1674747" y="2040628"/>
+                  </a:lnTo>
+                  <a:lnTo>
+                    <a:pt x="1746369" y="2093997"/>
+                  </a:lnTo>
+                  <a:lnTo>
+                    <a:pt x="1817992" y="2145392"/>
+                  </a:lnTo>
+                  <a:lnTo>
+                    <a:pt x="1889614" y="2194886"/>
+                  </a:lnTo>
+                  <a:lnTo>
+                    <a:pt x="1961237" y="2242551"/>
+                  </a:lnTo>
+                  <a:lnTo>
+                    <a:pt x="2032859" y="2288452"/>
+                  </a:lnTo>
+                  <a:lnTo>
+                    <a:pt x="2104482" y="2332656"/>
+                  </a:lnTo>
+                  <a:lnTo>
+                    <a:pt x="2176104" y="2375225"/>
+                  </a:lnTo>
+                  <a:lnTo>
+                    <a:pt x="2247727" y="2416220"/>
+                  </a:lnTo>
+                  <a:lnTo>
+                    <a:pt x="2319349" y="2455699"/>
+                  </a:lnTo>
+                  <a:lnTo>
+                    <a:pt x="2390972" y="2493717"/>
+                  </a:lnTo>
+                  <a:lnTo>
+                    <a:pt x="2462594" y="2530330"/>
+                  </a:lnTo>
+                  <a:lnTo>
+                    <a:pt x="2534217" y="2565589"/>
+                  </a:lnTo>
+                  <a:lnTo>
+                    <a:pt x="2605839" y="2599544"/>
+                  </a:lnTo>
+                  <a:lnTo>
+                    <a:pt x="2677462" y="2632243"/>
+                  </a:lnTo>
+                  <a:lnTo>
+                    <a:pt x="2749085" y="2657745"/>
+                  </a:lnTo>
+                  <a:lnTo>
+                    <a:pt x="2820707" y="2669028"/>
+                  </a:lnTo>
+                  <a:lnTo>
+                    <a:pt x="2892330" y="2680158"/>
+                  </a:lnTo>
+                  <a:lnTo>
+                    <a:pt x="2963952" y="2691135"/>
+                  </a:lnTo>
+                  <a:lnTo>
+                    <a:pt x="3035575" y="2701962"/>
+                  </a:lnTo>
+                  <a:lnTo>
+                    <a:pt x="3107197" y="2712642"/>
+                  </a:lnTo>
+                  <a:lnTo>
+                    <a:pt x="3178820" y="2723175"/>
+                  </a:lnTo>
+                  <a:lnTo>
+                    <a:pt x="3250442" y="2733565"/>
+                  </a:lnTo>
+                  <a:lnTo>
+                    <a:pt x="3322065" y="2743813"/>
+                  </a:lnTo>
+                  <a:lnTo>
+                    <a:pt x="3393687" y="2753920"/>
+                  </a:lnTo>
+                  <a:lnTo>
+                    <a:pt x="3465310" y="2763890"/>
+                  </a:lnTo>
+                  <a:lnTo>
+                    <a:pt x="3536932" y="2773724"/>
+                  </a:lnTo>
+                  <a:lnTo>
+                    <a:pt x="3608555" y="2783423"/>
+                  </a:lnTo>
+                  <a:lnTo>
+                    <a:pt x="3680177" y="2792989"/>
+                  </a:lnTo>
+                  <a:lnTo>
+                    <a:pt x="3751800" y="2802425"/>
+                  </a:lnTo>
+                  <a:lnTo>
+                    <a:pt x="3823422" y="2811733"/>
+                  </a:lnTo>
+                  <a:lnTo>
+                    <a:pt x="3895045" y="2820912"/>
+                  </a:lnTo>
+                  <a:lnTo>
+                    <a:pt x="3966667" y="2829967"/>
+                  </a:lnTo>
+                  <a:lnTo>
+                    <a:pt x="4038290" y="2838898"/>
+                  </a:lnTo>
+                  <a:lnTo>
+                    <a:pt x="4109913" y="2847707"/>
+                  </a:lnTo>
+                  <a:lnTo>
+                    <a:pt x="4181535" y="2856395"/>
+                  </a:lnTo>
+                  <a:lnTo>
+                    <a:pt x="4253158" y="2864965"/>
+                  </a:lnTo>
+                  <a:lnTo>
+                    <a:pt x="4324780" y="2873418"/>
+                  </a:lnTo>
+                  <a:lnTo>
+                    <a:pt x="4396403" y="2881755"/>
+                  </a:lnTo>
+                  <a:lnTo>
+                    <a:pt x="4468025" y="2889979"/>
+                  </a:lnTo>
+                  <a:lnTo>
+                    <a:pt x="4539648" y="2898090"/>
+                  </a:lnTo>
+                  <a:lnTo>
+                    <a:pt x="4611270" y="2906090"/>
+                  </a:lnTo>
+                  <a:lnTo>
+                    <a:pt x="4682893" y="2913981"/>
+                  </a:lnTo>
+                  <a:lnTo>
+                    <a:pt x="4754515" y="2921764"/>
+                  </a:lnTo>
+                  <a:lnTo>
+                    <a:pt x="4826138" y="2929441"/>
+                  </a:lnTo>
+                  <a:lnTo>
+                    <a:pt x="4897760" y="2937013"/>
+                  </a:lnTo>
+                  <a:lnTo>
+                    <a:pt x="4969383" y="2944482"/>
+                  </a:lnTo>
+                  <a:lnTo>
+                    <a:pt x="5041005" y="2951848"/>
+                  </a:lnTo>
+                  <a:lnTo>
+                    <a:pt x="5112628" y="2959114"/>
+                  </a:lnTo>
+                  <a:lnTo>
+                    <a:pt x="5184250" y="2966281"/>
+                  </a:lnTo>
+                  <a:lnTo>
+                    <a:pt x="5255873" y="2973349"/>
+                  </a:lnTo>
+                  <a:lnTo>
+                    <a:pt x="5327495" y="2980322"/>
+                  </a:lnTo>
+                  <a:lnTo>
+                    <a:pt x="5399118" y="2987199"/>
+                  </a:lnTo>
+                  <a:lnTo>
+                    <a:pt x="5470741" y="2993982"/>
+                  </a:lnTo>
+                  <a:lnTo>
+                    <a:pt x="5542363" y="3000672"/>
+                  </a:lnTo>
+                  <a:lnTo>
+                    <a:pt x="5613986" y="3007271"/>
+                  </a:lnTo>
+                  <a:lnTo>
+                    <a:pt x="5685608" y="3013780"/>
+                  </a:lnTo>
+                  <a:lnTo>
+                    <a:pt x="5757231" y="3020200"/>
+                  </a:lnTo>
+                  <a:lnTo>
+                    <a:pt x="5828853" y="3026532"/>
+                  </a:lnTo>
+                  <a:lnTo>
+                    <a:pt x="5900476" y="3032778"/>
+                  </a:lnTo>
+                  <a:lnTo>
+                    <a:pt x="5972098" y="3038938"/>
+                  </a:lnTo>
+                  <a:lnTo>
+                    <a:pt x="6043721" y="3045014"/>
+                  </a:lnTo>
+                  <a:lnTo>
+                    <a:pt x="6115343" y="3051008"/>
+                  </a:lnTo>
+                  <a:lnTo>
+                    <a:pt x="6186966" y="3056919"/>
+                  </a:lnTo>
+                  <a:lnTo>
+                    <a:pt x="6258588" y="3062749"/>
+                  </a:lnTo>
+                  <a:lnTo>
+                    <a:pt x="6330211" y="3068500"/>
+                  </a:lnTo>
+                  <a:lnTo>
+                    <a:pt x="6401833" y="3074173"/>
+                  </a:lnTo>
+                </a:path>
+              </a:pathLst>
+            </a:custGeom>
+          </p:spPr>
+          <p:txBody>
+            <a:bodyPr/>
+            <a:lstStyle/>
+            <a:p/>
+          </p:txBody>
+        </p:sp>
+        <p:sp>
+          <p:nvSpPr>
             <p:cNvPr id="22" name="pl22"/>
             <p:cNvSpPr/>
             <p:nvPr/>
           </p:nvSpPr>
           <p:spPr>
             <a:xfrm>
-              <a:off x="1460458" y="2073503"/>
-              <a:ext cx="6592889" cy="3074173"/>
+              <a:off x="1172049" y="3958762"/>
+              <a:ext cx="7090630" cy="1478486"/>
             </a:xfrm>
             <a:custGeom>
               <a:avLst/>
               <a:pathLst>
-                <a:path w="6592889" h="3074173">
+                <a:path w="7090630" h="1478486">
                   <a:moveTo>
+                    <a:pt x="7090630" y="1478486"/>
+                  </a:moveTo>
+                  <a:lnTo>
+                    <a:pt x="7019007" y="1473878"/>
+                  </a:lnTo>
+                  <a:lnTo>
+                    <a:pt x="6947385" y="1469093"/>
+                  </a:lnTo>
+                  <a:lnTo>
+                    <a:pt x="6875762" y="1464124"/>
+                  </a:lnTo>
+                  <a:lnTo>
+                    <a:pt x="6804139" y="1458964"/>
+                  </a:lnTo>
+                  <a:lnTo>
+                    <a:pt x="6732517" y="1453606"/>
+                  </a:lnTo>
+                  <a:lnTo>
+                    <a:pt x="6660894" y="1448042"/>
+                  </a:lnTo>
+                  <a:lnTo>
+                    <a:pt x="6589272" y="1442265"/>
+                  </a:lnTo>
+                  <a:lnTo>
+                    <a:pt x="6517649" y="1436266"/>
+                  </a:lnTo>
+                  <a:lnTo>
+                    <a:pt x="6446027" y="1430036"/>
+                  </a:lnTo>
+                  <a:lnTo>
+                    <a:pt x="6374404" y="1423567"/>
+                  </a:lnTo>
+                  <a:lnTo>
+                    <a:pt x="6302782" y="1416850"/>
+                  </a:lnTo>
+                  <a:lnTo>
+                    <a:pt x="6231159" y="1409875"/>
+                  </a:lnTo>
+                  <a:lnTo>
+                    <a:pt x="6159537" y="1402632"/>
+                  </a:lnTo>
+                  <a:lnTo>
+                    <a:pt x="6087914" y="1395111"/>
+                  </a:lnTo>
+                  <a:lnTo>
+                    <a:pt x="6016292" y="1387301"/>
+                  </a:lnTo>
+                  <a:lnTo>
+                    <a:pt x="5944669" y="1379191"/>
+                  </a:lnTo>
+                  <a:lnTo>
+                    <a:pt x="5873047" y="1370769"/>
+                  </a:lnTo>
+                  <a:lnTo>
+                    <a:pt x="5801424" y="1362025"/>
+                  </a:lnTo>
+                  <a:lnTo>
+                    <a:pt x="5729802" y="1352944"/>
+                  </a:lnTo>
+                  <a:lnTo>
+                    <a:pt x="5658179" y="1343515"/>
+                  </a:lnTo>
+                  <a:lnTo>
+                    <a:pt x="5586557" y="1333723"/>
+                  </a:lnTo>
+                  <a:lnTo>
+                    <a:pt x="5514934" y="1323556"/>
+                  </a:lnTo>
+                  <a:lnTo>
+                    <a:pt x="5443311" y="1312998"/>
+                  </a:lnTo>
+                  <a:lnTo>
+                    <a:pt x="5371689" y="1302035"/>
+                  </a:lnTo>
+                  <a:lnTo>
+                    <a:pt x="5300066" y="1290651"/>
+                  </a:lnTo>
+                  <a:lnTo>
+                    <a:pt x="5228444" y="1278829"/>
+                  </a:lnTo>
+                  <a:lnTo>
+                    <a:pt x="5156821" y="1266554"/>
+                  </a:lnTo>
+                  <a:lnTo>
+                    <a:pt x="5085199" y="1253807"/>
+                  </a:lnTo>
+                  <a:lnTo>
+                    <a:pt x="5013576" y="1240571"/>
+                  </a:lnTo>
+                  <a:lnTo>
+                    <a:pt x="4941954" y="1226826"/>
+                  </a:lnTo>
+                  <a:lnTo>
+                    <a:pt x="4870331" y="1212553"/>
+                  </a:lnTo>
+                  <a:lnTo>
+                    <a:pt x="4798709" y="1197733"/>
+                  </a:lnTo>
+                  <a:lnTo>
+                    <a:pt x="4727086" y="1182343"/>
+                  </a:lnTo>
+                  <a:lnTo>
+                    <a:pt x="4655464" y="1166363"/>
+                  </a:lnTo>
+                  <a:lnTo>
+                    <a:pt x="4583841" y="1149768"/>
+                  </a:lnTo>
+                  <a:lnTo>
+                    <a:pt x="4512219" y="1132537"/>
+                  </a:lnTo>
+                  <a:lnTo>
+                    <a:pt x="4440596" y="1114643"/>
+                  </a:lnTo>
+                  <a:lnTo>
+                    <a:pt x="4368974" y="1096063"/>
+                  </a:lnTo>
+                  <a:lnTo>
+                    <a:pt x="4297351" y="1076769"/>
+                  </a:lnTo>
+                  <a:lnTo>
+                    <a:pt x="4225729" y="1056734"/>
+                  </a:lnTo>
+                  <a:lnTo>
+                    <a:pt x="4154106" y="1035930"/>
+                  </a:lnTo>
+                  <a:lnTo>
+                    <a:pt x="4082483" y="1014327"/>
+                  </a:lnTo>
+                  <a:lnTo>
+                    <a:pt x="4010861" y="991894"/>
+                  </a:lnTo>
+                  <a:lnTo>
+                    <a:pt x="3939238" y="968600"/>
+                  </a:lnTo>
+                  <a:lnTo>
+                    <a:pt x="3867616" y="944411"/>
+                  </a:lnTo>
+                  <a:lnTo>
+                    <a:pt x="3795993" y="919293"/>
+                  </a:lnTo>
+                  <a:lnTo>
+                    <a:pt x="3724371" y="893211"/>
+                  </a:lnTo>
+                  <a:lnTo>
+                    <a:pt x="3652748" y="866127"/>
+                  </a:lnTo>
+                  <a:lnTo>
+                    <a:pt x="3581126" y="838003"/>
+                  </a:lnTo>
+                  <a:lnTo>
+                    <a:pt x="3509503" y="808799"/>
+                  </a:lnTo>
+                  <a:lnTo>
+                    <a:pt x="3437881" y="778474"/>
+                  </a:lnTo>
+                  <a:lnTo>
+                    <a:pt x="3366258" y="761046"/>
+                  </a:lnTo>
+                  <a:lnTo>
+                    <a:pt x="3294636" y="749448"/>
+                  </a:lnTo>
+                  <a:lnTo>
+                    <a:pt x="3223013" y="737689"/>
+                  </a:lnTo>
+                  <a:lnTo>
+                    <a:pt x="3151391" y="725767"/>
+                  </a:lnTo>
+                  <a:lnTo>
+                    <a:pt x="3079768" y="713681"/>
+                  </a:lnTo>
+                  <a:lnTo>
+                    <a:pt x="3008146" y="701426"/>
+                  </a:lnTo>
+                  <a:lnTo>
+                    <a:pt x="2936523" y="689003"/>
+                  </a:lnTo>
+                  <a:lnTo>
+                    <a:pt x="2864901" y="676407"/>
+                  </a:lnTo>
+                  <a:lnTo>
+                    <a:pt x="2793278" y="663636"/>
+                  </a:lnTo>
+                  <a:lnTo>
+                    <a:pt x="2721655" y="650689"/>
+                  </a:lnTo>
+                  <a:lnTo>
+                    <a:pt x="2650033" y="637562"/>
+                  </a:lnTo>
+                  <a:lnTo>
+                    <a:pt x="2578410" y="624254"/>
+                  </a:lnTo>
+                  <a:lnTo>
+                    <a:pt x="2506788" y="610761"/>
+                  </a:lnTo>
+                  <a:lnTo>
+                    <a:pt x="2435165" y="597082"/>
+                  </a:lnTo>
+                  <a:lnTo>
+                    <a:pt x="2363543" y="583213"/>
+                  </a:lnTo>
+                  <a:lnTo>
+                    <a:pt x="2291920" y="569152"/>
+                  </a:lnTo>
+                  <a:lnTo>
+                    <a:pt x="2220298" y="554896"/>
+                  </a:lnTo>
+                  <a:lnTo>
+                    <a:pt x="2148675" y="540443"/>
+                  </a:lnTo>
+                  <a:lnTo>
+                    <a:pt x="2077053" y="525789"/>
+                  </a:lnTo>
+                  <a:lnTo>
+                    <a:pt x="2005430" y="510933"/>
+                  </a:lnTo>
+                  <a:lnTo>
+                    <a:pt x="1933808" y="495871"/>
+                  </a:lnTo>
+                  <a:lnTo>
+                    <a:pt x="1862185" y="480600"/>
+                  </a:lnTo>
+                  <a:lnTo>
+                    <a:pt x="1790563" y="465118"/>
+                  </a:lnTo>
+                  <a:lnTo>
+                    <a:pt x="1718940" y="449421"/>
+                  </a:lnTo>
+                  <a:lnTo>
+                    <a:pt x="1647318" y="433507"/>
+                  </a:lnTo>
+                  <a:lnTo>
+                    <a:pt x="1575695" y="417373"/>
+                  </a:lnTo>
+                  <a:lnTo>
+                    <a:pt x="1504073" y="401015"/>
+                  </a:lnTo>
+                  <a:lnTo>
+                    <a:pt x="1432450" y="384430"/>
+                  </a:lnTo>
+                  <a:lnTo>
+                    <a:pt x="1360827" y="367616"/>
+                  </a:lnTo>
+                  <a:lnTo>
+                    <a:pt x="1289205" y="350569"/>
+                  </a:lnTo>
+                  <a:lnTo>
+                    <a:pt x="1217582" y="333286"/>
+                  </a:lnTo>
+                  <a:lnTo>
+                    <a:pt x="1145960" y="315763"/>
+                  </a:lnTo>
+                  <a:lnTo>
+                    <a:pt x="1074337" y="297998"/>
+                  </a:lnTo>
+                  <a:lnTo>
+                    <a:pt x="1002715" y="279987"/>
+                  </a:lnTo>
+                  <a:lnTo>
+                    <a:pt x="931092" y="261727"/>
+                  </a:lnTo>
+                  <a:lnTo>
+                    <a:pt x="859470" y="243213"/>
+                  </a:lnTo>
+                  <a:lnTo>
+                    <a:pt x="787847" y="224443"/>
+                  </a:lnTo>
+                  <a:lnTo>
+                    <a:pt x="716225" y="205413"/>
+                  </a:lnTo>
+                  <a:lnTo>
+                    <a:pt x="644602" y="186120"/>
+                  </a:lnTo>
+                  <a:lnTo>
+                    <a:pt x="572980" y="166559"/>
+                  </a:lnTo>
+                  <a:lnTo>
+                    <a:pt x="501357" y="146728"/>
+                  </a:lnTo>
+                  <a:lnTo>
+                    <a:pt x="429735" y="126621"/>
+                  </a:lnTo>
+                  <a:lnTo>
+                    <a:pt x="358112" y="106237"/>
+                  </a:lnTo>
+                  <a:lnTo>
+                    <a:pt x="286490" y="85570"/>
+                  </a:lnTo>
+                  <a:lnTo>
+                    <a:pt x="214867" y="64616"/>
+                  </a:lnTo>
+                  <a:lnTo>
+                    <a:pt x="143245" y="43373"/>
+                  </a:lnTo>
+                  <a:lnTo>
+                    <a:pt x="71622" y="21835"/>
+                  </a:lnTo>
+                  <a:lnTo>
                     <a:pt x="0" y="0"/>
-                  </a:moveTo>
-                  <a:lnTo>
-                    <a:pt x="28247" y="50491"/>
-                  </a:lnTo>
-                  <a:lnTo>
-                    <a:pt x="102007" y="177458"/>
-                  </a:lnTo>
-                  <a:lnTo>
-                    <a:pt x="175767" y="299730"/>
-                  </a:lnTo>
-                  <a:lnTo>
-                    <a:pt x="249527" y="417480"/>
-                  </a:lnTo>
-                  <a:lnTo>
-                    <a:pt x="323287" y="530875"/>
-                  </a:lnTo>
-                  <a:lnTo>
-                    <a:pt x="397047" y="640077"/>
-                  </a:lnTo>
-                  <a:lnTo>
-                    <a:pt x="470807" y="745240"/>
-                  </a:lnTo>
-                  <a:lnTo>
-                    <a:pt x="544567" y="846514"/>
-                  </a:lnTo>
-                  <a:lnTo>
-                    <a:pt x="618327" y="944043"/>
-                  </a:lnTo>
-                  <a:lnTo>
-                    <a:pt x="692087" y="1037966"/>
-                  </a:lnTo>
-                  <a:lnTo>
-                    <a:pt x="765847" y="1128414"/>
-                  </a:lnTo>
-                  <a:lnTo>
-                    <a:pt x="839607" y="1215518"/>
-                  </a:lnTo>
-                  <a:lnTo>
-                    <a:pt x="913367" y="1299401"/>
-                  </a:lnTo>
-                  <a:lnTo>
-                    <a:pt x="987127" y="1380181"/>
-                  </a:lnTo>
-                  <a:lnTo>
-                    <a:pt x="1060887" y="1457975"/>
-                  </a:lnTo>
-                  <a:lnTo>
-                    <a:pt x="1134647" y="1532891"/>
-                  </a:lnTo>
-                  <a:lnTo>
-                    <a:pt x="1208408" y="1605037"/>
-                  </a:lnTo>
-                  <a:lnTo>
-                    <a:pt x="1282168" y="1674514"/>
-                  </a:lnTo>
-                  <a:lnTo>
-                    <a:pt x="1355928" y="1741422"/>
-                  </a:lnTo>
-                  <a:lnTo>
-                    <a:pt x="1429688" y="1805856"/>
-                  </a:lnTo>
-                  <a:lnTo>
-                    <a:pt x="1503448" y="1867907"/>
-                  </a:lnTo>
-                  <a:lnTo>
-                    <a:pt x="1577208" y="1927664"/>
-                  </a:lnTo>
-                  <a:lnTo>
-                    <a:pt x="1650968" y="1985210"/>
-                  </a:lnTo>
-                  <a:lnTo>
-                    <a:pt x="1724728" y="2040628"/>
-                  </a:lnTo>
-                  <a:lnTo>
-                    <a:pt x="1798488" y="2093997"/>
-                  </a:lnTo>
-                  <a:lnTo>
-                    <a:pt x="1872248" y="2145392"/>
-                  </a:lnTo>
-                  <a:lnTo>
-                    <a:pt x="1946008" y="2194886"/>
-                  </a:lnTo>
-                  <a:lnTo>
-                    <a:pt x="2019768" y="2242551"/>
-                  </a:lnTo>
-                  <a:lnTo>
-                    <a:pt x="2093528" y="2288452"/>
-                  </a:lnTo>
-                  <a:lnTo>
-                    <a:pt x="2167288" y="2332656"/>
-                  </a:lnTo>
-                  <a:lnTo>
-                    <a:pt x="2241048" y="2375225"/>
-                  </a:lnTo>
-                  <a:lnTo>
-                    <a:pt x="2314808" y="2416220"/>
-                  </a:lnTo>
-                  <a:lnTo>
-                    <a:pt x="2388568" y="2455699"/>
-                  </a:lnTo>
-                  <a:lnTo>
-                    <a:pt x="2462328" y="2493717"/>
-                  </a:lnTo>
-                  <a:lnTo>
-                    <a:pt x="2536088" y="2530330"/>
-                  </a:lnTo>
-                  <a:lnTo>
-                    <a:pt x="2609848" y="2565589"/>
-                  </a:lnTo>
-                  <a:lnTo>
-                    <a:pt x="2683608" y="2599544"/>
-                  </a:lnTo>
-                  <a:lnTo>
-                    <a:pt x="2757368" y="2632243"/>
-                  </a:lnTo>
-                  <a:lnTo>
-                    <a:pt x="2831128" y="2657745"/>
-                  </a:lnTo>
-                  <a:lnTo>
-                    <a:pt x="2904888" y="2669028"/>
-                  </a:lnTo>
-                  <a:lnTo>
-                    <a:pt x="2978648" y="2680158"/>
-                  </a:lnTo>
-                  <a:lnTo>
-                    <a:pt x="3052408" y="2691135"/>
-                  </a:lnTo>
-                  <a:lnTo>
-                    <a:pt x="3126168" y="2701962"/>
-                  </a:lnTo>
-                  <a:lnTo>
-                    <a:pt x="3199928" y="2712642"/>
-                  </a:lnTo>
-                  <a:lnTo>
-                    <a:pt x="3273688" y="2723175"/>
-                  </a:lnTo>
-                  <a:lnTo>
-                    <a:pt x="3347448" y="2733565"/>
-                  </a:lnTo>
-                  <a:lnTo>
-                    <a:pt x="3421208" y="2743813"/>
-                  </a:lnTo>
-                  <a:lnTo>
-                    <a:pt x="3494968" y="2753920"/>
-                  </a:lnTo>
-                  <a:lnTo>
-                    <a:pt x="3568728" y="2763890"/>
-                  </a:lnTo>
-                  <a:lnTo>
-                    <a:pt x="3642488" y="2773724"/>
-                  </a:lnTo>
-                  <a:lnTo>
-                    <a:pt x="3716248" y="2783423"/>
-                  </a:lnTo>
-                  <a:lnTo>
-                    <a:pt x="3790008" y="2792989"/>
-                  </a:lnTo>
-                  <a:lnTo>
-                    <a:pt x="3863768" y="2802425"/>
-                  </a:lnTo>
-                  <a:lnTo>
-                    <a:pt x="3937528" y="2811733"/>
-                  </a:lnTo>
-                  <a:lnTo>
-                    <a:pt x="4011288" y="2820912"/>
-                  </a:lnTo>
-                  <a:lnTo>
-                    <a:pt x="4085048" y="2829967"/>
-                  </a:lnTo>
-                  <a:lnTo>
-                    <a:pt x="4158809" y="2838898"/>
-                  </a:lnTo>
-                  <a:lnTo>
-                    <a:pt x="4232569" y="2847707"/>
-                  </a:lnTo>
-                  <a:lnTo>
-                    <a:pt x="4306329" y="2856395"/>
-                  </a:lnTo>
-                  <a:lnTo>
-                    <a:pt x="4380089" y="2864965"/>
-                  </a:lnTo>
-                  <a:lnTo>
-                    <a:pt x="4453849" y="2873418"/>
-                  </a:lnTo>
-                  <a:lnTo>
-                    <a:pt x="4527609" y="2881755"/>
-                  </a:lnTo>
-                  <a:lnTo>
-                    <a:pt x="4601369" y="2889979"/>
-                  </a:lnTo>
-                  <a:lnTo>
-                    <a:pt x="4675129" y="2898090"/>
-                  </a:lnTo>
-                  <a:lnTo>
-                    <a:pt x="4748889" y="2906090"/>
-                  </a:lnTo>
-                  <a:lnTo>
-                    <a:pt x="4822649" y="2913981"/>
-                  </a:lnTo>
-                  <a:lnTo>
-                    <a:pt x="4896409" y="2921764"/>
-                  </a:lnTo>
-                  <a:lnTo>
-                    <a:pt x="4970169" y="2929441"/>
-                  </a:lnTo>
-                  <a:lnTo>
-                    <a:pt x="5043929" y="2937013"/>
-                  </a:lnTo>
-                  <a:lnTo>
-                    <a:pt x="5117689" y="2944482"/>
-                  </a:lnTo>
-                  <a:lnTo>
-                    <a:pt x="5191449" y="2951848"/>
-                  </a:lnTo>
-                  <a:lnTo>
-                    <a:pt x="5265209" y="2959114"/>
-                  </a:lnTo>
-                  <a:lnTo>
-                    <a:pt x="5338969" y="2966281"/>
-                  </a:lnTo>
-                  <a:lnTo>
-                    <a:pt x="5412729" y="2973349"/>
-                  </a:lnTo>
-                  <a:lnTo>
-                    <a:pt x="5486489" y="2980322"/>
-                  </a:lnTo>
-                  <a:lnTo>
-                    <a:pt x="5560249" y="2987199"/>
-                  </a:lnTo>
-                  <a:lnTo>
-                    <a:pt x="5634009" y="2993982"/>
-                  </a:lnTo>
-                  <a:lnTo>
-                    <a:pt x="5707769" y="3000672"/>
-                  </a:lnTo>
-                  <a:lnTo>
-                    <a:pt x="5781529" y="3007271"/>
-                  </a:lnTo>
-                  <a:lnTo>
-                    <a:pt x="5855289" y="3013780"/>
-                  </a:lnTo>
-                  <a:lnTo>
-                    <a:pt x="5929049" y="3020200"/>
-                  </a:lnTo>
-                  <a:lnTo>
-                    <a:pt x="6002809" y="3026532"/>
-                  </a:lnTo>
-                  <a:lnTo>
-                    <a:pt x="6076569" y="3032778"/>
-                  </a:lnTo>
-                  <a:lnTo>
-                    <a:pt x="6150329" y="3038938"/>
-                  </a:lnTo>
-                  <a:lnTo>
-                    <a:pt x="6224089" y="3045014"/>
-                  </a:lnTo>
-                  <a:lnTo>
-                    <a:pt x="6297849" y="3051008"/>
-                  </a:lnTo>
-                  <a:lnTo>
-                    <a:pt x="6371609" y="3056919"/>
-                  </a:lnTo>
-                  <a:lnTo>
-                    <a:pt x="6445369" y="3062749"/>
-                  </a:lnTo>
-                  <a:lnTo>
-                    <a:pt x="6519129" y="3068500"/>
-                  </a:lnTo>
-                  <a:lnTo>
-                    <a:pt x="6592889" y="3074173"/>
                   </a:lnTo>
                 </a:path>
               </a:pathLst>
@@ -3904,637 +4186,312 @@
           </p:nvSpPr>
           <p:spPr>
             <a:xfrm>
-              <a:off x="817517" y="3978422"/>
-              <a:ext cx="7235830" cy="1458825"/>
+              <a:off x="1172049" y="2728889"/>
+              <a:ext cx="7090630" cy="2606663"/>
             </a:xfrm>
             <a:custGeom>
               <a:avLst/>
               <a:pathLst>
-                <a:path w="7235830" h="1458825">
-                  <a:moveTo>
-                    <a:pt x="7235830" y="1458825"/>
-                  </a:moveTo>
-                  <a:lnTo>
-                    <a:pt x="7162070" y="1454217"/>
-                  </a:lnTo>
-                  <a:lnTo>
-                    <a:pt x="7088310" y="1449432"/>
-                  </a:lnTo>
-                  <a:lnTo>
-                    <a:pt x="7014550" y="1444463"/>
-                  </a:lnTo>
-                  <a:lnTo>
-                    <a:pt x="6940789" y="1439303"/>
-                  </a:lnTo>
-                  <a:lnTo>
-                    <a:pt x="6867029" y="1433945"/>
-                  </a:lnTo>
-                  <a:lnTo>
-                    <a:pt x="6793269" y="1428382"/>
-                  </a:lnTo>
-                  <a:lnTo>
-                    <a:pt x="6719509" y="1422604"/>
-                  </a:lnTo>
-                  <a:lnTo>
-                    <a:pt x="6645749" y="1416605"/>
-                  </a:lnTo>
-                  <a:lnTo>
-                    <a:pt x="6571989" y="1410375"/>
-                  </a:lnTo>
-                  <a:lnTo>
-                    <a:pt x="6498229" y="1403907"/>
-                  </a:lnTo>
-                  <a:lnTo>
-                    <a:pt x="6424469" y="1397189"/>
-                  </a:lnTo>
-                  <a:lnTo>
-                    <a:pt x="6350709" y="1390214"/>
-                  </a:lnTo>
-                  <a:lnTo>
-                    <a:pt x="6276949" y="1382971"/>
-                  </a:lnTo>
-                  <a:lnTo>
-                    <a:pt x="6203189" y="1375450"/>
-                  </a:lnTo>
-                  <a:lnTo>
-                    <a:pt x="6129429" y="1367640"/>
-                  </a:lnTo>
-                  <a:lnTo>
-                    <a:pt x="6055669" y="1359530"/>
-                  </a:lnTo>
-                  <a:lnTo>
-                    <a:pt x="5981909" y="1351109"/>
-                  </a:lnTo>
-                  <a:lnTo>
-                    <a:pt x="5908149" y="1342364"/>
-                  </a:lnTo>
-                  <a:lnTo>
-                    <a:pt x="5834389" y="1333283"/>
-                  </a:lnTo>
-                  <a:lnTo>
-                    <a:pt x="5760629" y="1323854"/>
-                  </a:lnTo>
-                  <a:lnTo>
-                    <a:pt x="5686869" y="1314063"/>
-                  </a:lnTo>
-                  <a:lnTo>
-                    <a:pt x="5613109" y="1303895"/>
-                  </a:lnTo>
-                  <a:lnTo>
-                    <a:pt x="5539349" y="1293337"/>
-                  </a:lnTo>
-                  <a:lnTo>
-                    <a:pt x="5465589" y="1282374"/>
-                  </a:lnTo>
-                  <a:lnTo>
-                    <a:pt x="5391829" y="1270990"/>
-                  </a:lnTo>
-                  <a:lnTo>
-                    <a:pt x="5318069" y="1259168"/>
-                  </a:lnTo>
-                  <a:lnTo>
-                    <a:pt x="5244309" y="1246893"/>
-                  </a:lnTo>
-                  <a:lnTo>
-                    <a:pt x="5170549" y="1234146"/>
-                  </a:lnTo>
-                  <a:lnTo>
-                    <a:pt x="5096789" y="1220910"/>
-                  </a:lnTo>
-                  <a:lnTo>
-                    <a:pt x="5023029" y="1207165"/>
-                  </a:lnTo>
-                  <a:lnTo>
-                    <a:pt x="4949269" y="1192893"/>
-                  </a:lnTo>
-                  <a:lnTo>
-                    <a:pt x="4875509" y="1178072"/>
-                  </a:lnTo>
-                  <a:lnTo>
-                    <a:pt x="4801749" y="1162683"/>
-                  </a:lnTo>
-                  <a:lnTo>
-                    <a:pt x="4727989" y="1146702"/>
-                  </a:lnTo>
-                  <a:lnTo>
-                    <a:pt x="4654229" y="1130108"/>
-                  </a:lnTo>
-                  <a:lnTo>
-                    <a:pt x="4580469" y="1112876"/>
-                  </a:lnTo>
-                  <a:lnTo>
-                    <a:pt x="4506709" y="1094983"/>
-                  </a:lnTo>
-                  <a:lnTo>
-                    <a:pt x="4432949" y="1076402"/>
-                  </a:lnTo>
-                  <a:lnTo>
-                    <a:pt x="4359189" y="1057108"/>
-                  </a:lnTo>
-                  <a:lnTo>
-                    <a:pt x="4285429" y="1037073"/>
-                  </a:lnTo>
-                  <a:lnTo>
-                    <a:pt x="4211669" y="1016269"/>
-                  </a:lnTo>
-                  <a:lnTo>
-                    <a:pt x="4137909" y="994666"/>
-                  </a:lnTo>
-                  <a:lnTo>
-                    <a:pt x="4064149" y="972233"/>
-                  </a:lnTo>
-                  <a:lnTo>
-                    <a:pt x="3990388" y="948939"/>
-                  </a:lnTo>
-                  <a:lnTo>
-                    <a:pt x="3916628" y="924750"/>
-                  </a:lnTo>
-                  <a:lnTo>
-                    <a:pt x="3842868" y="899633"/>
-                  </a:lnTo>
-                  <a:lnTo>
-                    <a:pt x="3769108" y="873550"/>
-                  </a:lnTo>
-                  <a:lnTo>
-                    <a:pt x="3695348" y="846466"/>
-                  </a:lnTo>
-                  <a:lnTo>
-                    <a:pt x="3621588" y="818343"/>
-                  </a:lnTo>
-                  <a:lnTo>
-                    <a:pt x="3547828" y="789139"/>
-                  </a:lnTo>
-                  <a:lnTo>
-                    <a:pt x="3474068" y="758813"/>
-                  </a:lnTo>
-                  <a:lnTo>
-                    <a:pt x="3400308" y="741385"/>
-                  </a:lnTo>
-                  <a:lnTo>
-                    <a:pt x="3326548" y="729787"/>
-                  </a:lnTo>
-                  <a:lnTo>
-                    <a:pt x="3252788" y="718028"/>
-                  </a:lnTo>
-                  <a:lnTo>
-                    <a:pt x="3179028" y="706107"/>
-                  </a:lnTo>
-                  <a:lnTo>
-                    <a:pt x="3105268" y="694020"/>
-                  </a:lnTo>
-                  <a:lnTo>
-                    <a:pt x="3031508" y="681766"/>
-                  </a:lnTo>
-                  <a:lnTo>
-                    <a:pt x="2957748" y="669342"/>
-                  </a:lnTo>
-                  <a:lnTo>
-                    <a:pt x="2883988" y="656746"/>
-                  </a:lnTo>
-                  <a:lnTo>
-                    <a:pt x="2810228" y="643975"/>
-                  </a:lnTo>
-                  <a:lnTo>
-                    <a:pt x="2736468" y="631028"/>
-                  </a:lnTo>
-                  <a:lnTo>
-                    <a:pt x="2662708" y="617902"/>
-                  </a:lnTo>
-                  <a:lnTo>
-                    <a:pt x="2588948" y="604593"/>
-                  </a:lnTo>
-                  <a:lnTo>
-                    <a:pt x="2515188" y="591101"/>
-                  </a:lnTo>
-                  <a:lnTo>
-                    <a:pt x="2441428" y="577421"/>
-                  </a:lnTo>
-                  <a:lnTo>
-                    <a:pt x="2367668" y="563552"/>
-                  </a:lnTo>
-                  <a:lnTo>
-                    <a:pt x="2293908" y="549491"/>
-                  </a:lnTo>
-                  <a:lnTo>
-                    <a:pt x="2220148" y="535235"/>
-                  </a:lnTo>
-                  <a:lnTo>
-                    <a:pt x="2146388" y="520782"/>
-                  </a:lnTo>
-                  <a:lnTo>
-                    <a:pt x="2072628" y="506128"/>
-                  </a:lnTo>
-                  <a:lnTo>
-                    <a:pt x="1998868" y="491272"/>
-                  </a:lnTo>
-                  <a:lnTo>
-                    <a:pt x="1925108" y="476210"/>
-                  </a:lnTo>
-                  <a:lnTo>
-                    <a:pt x="1851348" y="460939"/>
-                  </a:lnTo>
-                  <a:lnTo>
-                    <a:pt x="1777588" y="445457"/>
-                  </a:lnTo>
-                  <a:lnTo>
-                    <a:pt x="1703828" y="429760"/>
-                  </a:lnTo>
-                  <a:lnTo>
-                    <a:pt x="1630068" y="413846"/>
-                  </a:lnTo>
-                  <a:lnTo>
-                    <a:pt x="1556308" y="397712"/>
-                  </a:lnTo>
-                  <a:lnTo>
-                    <a:pt x="1482548" y="381354"/>
-                  </a:lnTo>
-                  <a:lnTo>
-                    <a:pt x="1408788" y="364769"/>
-                  </a:lnTo>
-                  <a:lnTo>
-                    <a:pt x="1335028" y="347955"/>
-                  </a:lnTo>
-                  <a:lnTo>
-                    <a:pt x="1261268" y="330908"/>
-                  </a:lnTo>
-                  <a:lnTo>
-                    <a:pt x="1187508" y="313625"/>
-                  </a:lnTo>
-                  <a:lnTo>
-                    <a:pt x="1113747" y="296103"/>
-                  </a:lnTo>
-                  <a:lnTo>
-                    <a:pt x="1039987" y="278338"/>
-                  </a:lnTo>
-                  <a:lnTo>
-                    <a:pt x="966227" y="260326"/>
-                  </a:lnTo>
-                  <a:lnTo>
-                    <a:pt x="892467" y="242066"/>
-                  </a:lnTo>
-                  <a:lnTo>
-                    <a:pt x="818707" y="223552"/>
-                  </a:lnTo>
-                  <a:lnTo>
-                    <a:pt x="744947" y="204782"/>
-                  </a:lnTo>
-                  <a:lnTo>
-                    <a:pt x="671187" y="185752"/>
-                  </a:lnTo>
-                  <a:lnTo>
-                    <a:pt x="597427" y="166459"/>
-                  </a:lnTo>
-                  <a:lnTo>
-                    <a:pt x="523667" y="146898"/>
-                  </a:lnTo>
-                  <a:lnTo>
-                    <a:pt x="449907" y="127067"/>
-                  </a:lnTo>
-                  <a:lnTo>
-                    <a:pt x="376147" y="106961"/>
-                  </a:lnTo>
-                  <a:lnTo>
-                    <a:pt x="302387" y="86576"/>
-                  </a:lnTo>
-                  <a:lnTo>
-                    <a:pt x="228627" y="65909"/>
-                  </a:lnTo>
-                  <a:lnTo>
-                    <a:pt x="154867" y="44956"/>
-                  </a:lnTo>
-                  <a:lnTo>
-                    <a:pt x="81107" y="23712"/>
-                  </a:lnTo>
-                  <a:lnTo>
-                    <a:pt x="7347" y="2175"/>
-                  </a:lnTo>
-                  <a:lnTo>
-                    <a:pt x="0" y="0"/>
-                  </a:lnTo>
-                </a:path>
-              </a:pathLst>
-            </a:custGeom>
-          </p:spPr>
-          <p:txBody>
-            <a:bodyPr/>
-            <a:lstStyle/>
-            <a:p/>
-          </p:txBody>
-        </p:sp>
-        <p:sp>
-          <p:nvSpPr>
-            <p:cNvPr id="24" name="pl24"/>
-            <p:cNvSpPr/>
-            <p:nvPr/>
-          </p:nvSpPr>
-          <p:spPr>
-            <a:xfrm>
-              <a:off x="817517" y="2793549"/>
-              <a:ext cx="7235830" cy="2542003"/>
-            </a:xfrm>
-            <a:custGeom>
-              <a:avLst/>
-              <a:pathLst>
-                <a:path w="7235830" h="2542003">
+                <a:path w="7090630" h="2606663">
                   <a:moveTo>
                     <a:pt x="0" y="0"/>
                   </a:moveTo>
                   <a:lnTo>
-                    <a:pt x="7347" y="7153"/>
-                  </a:lnTo>
-                  <a:lnTo>
-                    <a:pt x="81107" y="77144"/>
-                  </a:lnTo>
-                  <a:lnTo>
-                    <a:pt x="154867" y="145358"/>
-                  </a:lnTo>
-                  <a:lnTo>
-                    <a:pt x="228627" y="211839"/>
-                  </a:lnTo>
-                  <a:lnTo>
-                    <a:pt x="302387" y="276633"/>
-                  </a:lnTo>
-                  <a:lnTo>
-                    <a:pt x="376147" y="339781"/>
-                  </a:lnTo>
-                  <a:lnTo>
-                    <a:pt x="449907" y="401326"/>
-                  </a:lnTo>
-                  <a:lnTo>
-                    <a:pt x="523667" y="461308"/>
-                  </a:lnTo>
-                  <a:lnTo>
-                    <a:pt x="597427" y="519768"/>
-                  </a:lnTo>
-                  <a:lnTo>
-                    <a:pt x="671187" y="576743"/>
-                  </a:lnTo>
-                  <a:lnTo>
-                    <a:pt x="744947" y="632271"/>
-                  </a:lnTo>
-                  <a:lnTo>
-                    <a:pt x="818707" y="686390"/>
-                  </a:lnTo>
-                  <a:lnTo>
-                    <a:pt x="892467" y="739134"/>
-                  </a:lnTo>
-                  <a:lnTo>
-                    <a:pt x="966227" y="790539"/>
-                  </a:lnTo>
-                  <a:lnTo>
-                    <a:pt x="1039987" y="840639"/>
-                  </a:lnTo>
-                  <a:lnTo>
-                    <a:pt x="1113747" y="889467"/>
-                  </a:lnTo>
-                  <a:lnTo>
-                    <a:pt x="1187508" y="937055"/>
-                  </a:lnTo>
-                  <a:lnTo>
-                    <a:pt x="1261268" y="983435"/>
-                  </a:lnTo>
-                  <a:lnTo>
-                    <a:pt x="1335028" y="1028637"/>
-                  </a:lnTo>
-                  <a:lnTo>
-                    <a:pt x="1408788" y="1072692"/>
-                  </a:lnTo>
-                  <a:lnTo>
-                    <a:pt x="1482548" y="1115627"/>
-                  </a:lnTo>
-                  <a:lnTo>
-                    <a:pt x="1556308" y="1157473"/>
-                  </a:lnTo>
-                  <a:lnTo>
-                    <a:pt x="1630068" y="1198256"/>
-                  </a:lnTo>
-                  <a:lnTo>
-                    <a:pt x="1703828" y="1238004"/>
-                  </a:lnTo>
-                  <a:lnTo>
-                    <a:pt x="1777588" y="1276743"/>
-                  </a:lnTo>
-                  <a:lnTo>
-                    <a:pt x="1851348" y="1314498"/>
-                  </a:lnTo>
-                  <a:lnTo>
-                    <a:pt x="1925108" y="1351294"/>
-                  </a:lnTo>
-                  <a:lnTo>
-                    <a:pt x="1998868" y="1387156"/>
-                  </a:lnTo>
-                  <a:lnTo>
-                    <a:pt x="2072628" y="1422107"/>
-                  </a:lnTo>
-                  <a:lnTo>
-                    <a:pt x="2146388" y="1456171"/>
-                  </a:lnTo>
-                  <a:lnTo>
-                    <a:pt x="2220148" y="1489370"/>
-                  </a:lnTo>
-                  <a:lnTo>
-                    <a:pt x="2293908" y="1521726"/>
-                  </a:lnTo>
-                  <a:lnTo>
-                    <a:pt x="2367668" y="1553261"/>
-                  </a:lnTo>
-                  <a:lnTo>
-                    <a:pt x="2441428" y="1583995"/>
-                  </a:lnTo>
-                  <a:lnTo>
-                    <a:pt x="2515188" y="1613948"/>
-                  </a:lnTo>
-                  <a:lnTo>
-                    <a:pt x="2588948" y="1643141"/>
-                  </a:lnTo>
-                  <a:lnTo>
-                    <a:pt x="2662708" y="1671593"/>
-                  </a:lnTo>
-                  <a:lnTo>
-                    <a:pt x="2736468" y="1699323"/>
-                  </a:lnTo>
-                  <a:lnTo>
-                    <a:pt x="2810228" y="1726348"/>
-                  </a:lnTo>
-                  <a:lnTo>
-                    <a:pt x="2883988" y="1752687"/>
-                  </a:lnTo>
-                  <a:lnTo>
-                    <a:pt x="2957748" y="1778357"/>
-                  </a:lnTo>
-                  <a:lnTo>
-                    <a:pt x="3031508" y="1803376"/>
-                  </a:lnTo>
-                  <a:lnTo>
-                    <a:pt x="3105268" y="1827759"/>
-                  </a:lnTo>
-                  <a:lnTo>
-                    <a:pt x="3179028" y="1851523"/>
-                  </a:lnTo>
-                  <a:lnTo>
-                    <a:pt x="3252788" y="1874684"/>
-                  </a:lnTo>
-                  <a:lnTo>
-                    <a:pt x="3326548" y="1897257"/>
-                  </a:lnTo>
-                  <a:lnTo>
-                    <a:pt x="3400308" y="1919256"/>
-                  </a:lnTo>
-                  <a:lnTo>
-                    <a:pt x="3474068" y="1940697"/>
-                  </a:lnTo>
-                  <a:lnTo>
-                    <a:pt x="3547828" y="1961594"/>
-                  </a:lnTo>
-                  <a:lnTo>
-                    <a:pt x="3621588" y="1981960"/>
-                  </a:lnTo>
-                  <a:lnTo>
-                    <a:pt x="3695348" y="2001809"/>
-                  </a:lnTo>
-                  <a:lnTo>
-                    <a:pt x="3769108" y="2021154"/>
-                  </a:lnTo>
-                  <a:lnTo>
-                    <a:pt x="3842868" y="2040008"/>
-                  </a:lnTo>
-                  <a:lnTo>
-                    <a:pt x="3916628" y="2058383"/>
-                  </a:lnTo>
-                  <a:lnTo>
-                    <a:pt x="3990388" y="2076291"/>
-                  </a:lnTo>
-                  <a:lnTo>
-                    <a:pt x="4064149" y="2093745"/>
-                  </a:lnTo>
-                  <a:lnTo>
-                    <a:pt x="4137909" y="2110756"/>
-                  </a:lnTo>
-                  <a:lnTo>
-                    <a:pt x="4211669" y="2127334"/>
-                  </a:lnTo>
-                  <a:lnTo>
-                    <a:pt x="4285429" y="2143492"/>
-                  </a:lnTo>
-                  <a:lnTo>
-                    <a:pt x="4359189" y="2159240"/>
-                  </a:lnTo>
-                  <a:lnTo>
-                    <a:pt x="4432949" y="2174587"/>
-                  </a:lnTo>
-                  <a:lnTo>
-                    <a:pt x="4506709" y="2189545"/>
-                  </a:lnTo>
-                  <a:lnTo>
-                    <a:pt x="4580469" y="2204124"/>
-                  </a:lnTo>
-                  <a:lnTo>
-                    <a:pt x="4654229" y="2218332"/>
-                  </a:lnTo>
-                  <a:lnTo>
-                    <a:pt x="4727989" y="2232179"/>
-                  </a:lnTo>
-                  <a:lnTo>
-                    <a:pt x="4801749" y="2245675"/>
-                  </a:lnTo>
-                  <a:lnTo>
-                    <a:pt x="4875509" y="2258828"/>
-                  </a:lnTo>
-                  <a:lnTo>
-                    <a:pt x="4949269" y="2271647"/>
-                  </a:lnTo>
-                  <a:lnTo>
-                    <a:pt x="5023029" y="2284140"/>
-                  </a:lnTo>
-                  <a:lnTo>
-                    <a:pt x="5096789" y="2296317"/>
-                  </a:lnTo>
-                  <a:lnTo>
-                    <a:pt x="5170549" y="2308184"/>
-                  </a:lnTo>
-                  <a:lnTo>
-                    <a:pt x="5244309" y="2319750"/>
-                  </a:lnTo>
-                  <a:lnTo>
-                    <a:pt x="5318069" y="2331022"/>
-                  </a:lnTo>
-                  <a:lnTo>
-                    <a:pt x="5391829" y="2342008"/>
-                  </a:lnTo>
-                  <a:lnTo>
-                    <a:pt x="5465589" y="2352715"/>
-                  </a:lnTo>
-                  <a:lnTo>
-                    <a:pt x="5539349" y="2363150"/>
-                  </a:lnTo>
-                  <a:lnTo>
-                    <a:pt x="5613109" y="2373320"/>
-                  </a:lnTo>
-                  <a:lnTo>
-                    <a:pt x="5686869" y="2383232"/>
-                  </a:lnTo>
-                  <a:lnTo>
-                    <a:pt x="5760629" y="2392893"/>
-                  </a:lnTo>
-                  <a:lnTo>
-                    <a:pt x="5834389" y="2402308"/>
-                  </a:lnTo>
-                  <a:lnTo>
-                    <a:pt x="5908149" y="2411484"/>
-                  </a:lnTo>
-                  <a:lnTo>
-                    <a:pt x="5981909" y="2420427"/>
-                  </a:lnTo>
-                  <a:lnTo>
-                    <a:pt x="6055669" y="2429143"/>
-                  </a:lnTo>
-                  <a:lnTo>
-                    <a:pt x="6129429" y="2437637"/>
-                  </a:lnTo>
-                  <a:lnTo>
-                    <a:pt x="6203189" y="2445916"/>
-                  </a:lnTo>
-                  <a:lnTo>
-                    <a:pt x="6276949" y="2453985"/>
-                  </a:lnTo>
-                  <a:lnTo>
-                    <a:pt x="6350709" y="2461849"/>
-                  </a:lnTo>
-                  <a:lnTo>
-                    <a:pt x="6424469" y="2469513"/>
-                  </a:lnTo>
-                  <a:lnTo>
-                    <a:pt x="6498229" y="2476983"/>
-                  </a:lnTo>
-                  <a:lnTo>
-                    <a:pt x="6571989" y="2484263"/>
-                  </a:lnTo>
-                  <a:lnTo>
-                    <a:pt x="6645749" y="2491358"/>
-                  </a:lnTo>
-                  <a:lnTo>
-                    <a:pt x="6719509" y="2498273"/>
-                  </a:lnTo>
-                  <a:lnTo>
-                    <a:pt x="6793269" y="2505012"/>
-                  </a:lnTo>
-                  <a:lnTo>
-                    <a:pt x="6867029" y="2511580"/>
-                  </a:lnTo>
-                  <a:lnTo>
-                    <a:pt x="6940789" y="2517982"/>
-                  </a:lnTo>
-                  <a:lnTo>
-                    <a:pt x="7014550" y="2524221"/>
-                  </a:lnTo>
-                  <a:lnTo>
-                    <a:pt x="7088310" y="2530301"/>
-                  </a:lnTo>
-                  <a:lnTo>
-                    <a:pt x="7162070" y="2536227"/>
-                  </a:lnTo>
-                  <a:lnTo>
-                    <a:pt x="7235830" y="2542003"/>
+                    <a:pt x="71622" y="71814"/>
+                  </a:lnTo>
+                  <a:lnTo>
+                    <a:pt x="143245" y="141804"/>
+                  </a:lnTo>
+                  <a:lnTo>
+                    <a:pt x="214867" y="210018"/>
+                  </a:lnTo>
+                  <a:lnTo>
+                    <a:pt x="286490" y="276499"/>
+                  </a:lnTo>
+                  <a:lnTo>
+                    <a:pt x="358112" y="341293"/>
+                  </a:lnTo>
+                  <a:lnTo>
+                    <a:pt x="429735" y="404441"/>
+                  </a:lnTo>
+                  <a:lnTo>
+                    <a:pt x="501357" y="465986"/>
+                  </a:lnTo>
+                  <a:lnTo>
+                    <a:pt x="572980" y="525969"/>
+                  </a:lnTo>
+                  <a:lnTo>
+                    <a:pt x="644602" y="584428"/>
+                  </a:lnTo>
+                  <a:lnTo>
+                    <a:pt x="716225" y="641403"/>
+                  </a:lnTo>
+                  <a:lnTo>
+                    <a:pt x="787847" y="696932"/>
+                  </a:lnTo>
+                  <a:lnTo>
+                    <a:pt x="859470" y="751050"/>
+                  </a:lnTo>
+                  <a:lnTo>
+                    <a:pt x="931092" y="803794"/>
+                  </a:lnTo>
+                  <a:lnTo>
+                    <a:pt x="1002715" y="855200"/>
+                  </a:lnTo>
+                  <a:lnTo>
+                    <a:pt x="1074337" y="905299"/>
+                  </a:lnTo>
+                  <a:lnTo>
+                    <a:pt x="1145960" y="954127"/>
+                  </a:lnTo>
+                  <a:lnTo>
+                    <a:pt x="1217582" y="1001715"/>
+                  </a:lnTo>
+                  <a:lnTo>
+                    <a:pt x="1289205" y="1048095"/>
+                  </a:lnTo>
+                  <a:lnTo>
+                    <a:pt x="1360827" y="1093297"/>
+                  </a:lnTo>
+                  <a:lnTo>
+                    <a:pt x="1432450" y="1137352"/>
+                  </a:lnTo>
+                  <a:lnTo>
+                    <a:pt x="1504073" y="1180288"/>
+                  </a:lnTo>
+                  <a:lnTo>
+                    <a:pt x="1575695" y="1222134"/>
+                  </a:lnTo>
+                  <a:lnTo>
+                    <a:pt x="1647318" y="1262917"/>
+                  </a:lnTo>
+                  <a:lnTo>
+                    <a:pt x="1718940" y="1302664"/>
+                  </a:lnTo>
+                  <a:lnTo>
+                    <a:pt x="1790563" y="1341403"/>
+                  </a:lnTo>
+                  <a:lnTo>
+                    <a:pt x="1862185" y="1379158"/>
+                  </a:lnTo>
+                  <a:lnTo>
+                    <a:pt x="1933808" y="1415954"/>
+                  </a:lnTo>
+                  <a:lnTo>
+                    <a:pt x="2005430" y="1451816"/>
+                  </a:lnTo>
+                  <a:lnTo>
+                    <a:pt x="2077053" y="1486768"/>
+                  </a:lnTo>
+                  <a:lnTo>
+                    <a:pt x="2148675" y="1520832"/>
+                  </a:lnTo>
+                  <a:lnTo>
+                    <a:pt x="2220298" y="1554031"/>
+                  </a:lnTo>
+                  <a:lnTo>
+                    <a:pt x="2291920" y="1586387"/>
+                  </a:lnTo>
+                  <a:lnTo>
+                    <a:pt x="2363543" y="1617921"/>
+                  </a:lnTo>
+                  <a:lnTo>
+                    <a:pt x="2435165" y="1648655"/>
+                  </a:lnTo>
+                  <a:lnTo>
+                    <a:pt x="2506788" y="1678609"/>
+                  </a:lnTo>
+                  <a:lnTo>
+                    <a:pt x="2578410" y="1707802"/>
+                  </a:lnTo>
+                  <a:lnTo>
+                    <a:pt x="2650033" y="1736254"/>
+                  </a:lnTo>
+                  <a:lnTo>
+                    <a:pt x="2721655" y="1763983"/>
+                  </a:lnTo>
+                  <a:lnTo>
+                    <a:pt x="2793278" y="1791008"/>
+                  </a:lnTo>
+                  <a:lnTo>
+                    <a:pt x="2864901" y="1817347"/>
+                  </a:lnTo>
+                  <a:lnTo>
+                    <a:pt x="2936523" y="1843018"/>
+                  </a:lnTo>
+                  <a:lnTo>
+                    <a:pt x="3008146" y="1868036"/>
+                  </a:lnTo>
+                  <a:lnTo>
+                    <a:pt x="3079768" y="1892419"/>
+                  </a:lnTo>
+                  <a:lnTo>
+                    <a:pt x="3151391" y="1916184"/>
+                  </a:lnTo>
+                  <a:lnTo>
+                    <a:pt x="3223013" y="1939344"/>
+                  </a:lnTo>
+                  <a:lnTo>
+                    <a:pt x="3294636" y="1961917"/>
+                  </a:lnTo>
+                  <a:lnTo>
+                    <a:pt x="3366258" y="1983917"/>
+                  </a:lnTo>
+                  <a:lnTo>
+                    <a:pt x="3437881" y="2005358"/>
+                  </a:lnTo>
+                  <a:lnTo>
+                    <a:pt x="3509503" y="2026254"/>
+                  </a:lnTo>
+                  <a:lnTo>
+                    <a:pt x="3581126" y="2046620"/>
+                  </a:lnTo>
+                  <a:lnTo>
+                    <a:pt x="3652748" y="2066469"/>
+                  </a:lnTo>
+                  <a:lnTo>
+                    <a:pt x="3724371" y="2085814"/>
+                  </a:lnTo>
+                  <a:lnTo>
+                    <a:pt x="3795993" y="2104668"/>
+                  </a:lnTo>
+                  <a:lnTo>
+                    <a:pt x="3867616" y="2123043"/>
+                  </a:lnTo>
+                  <a:lnTo>
+                    <a:pt x="3939238" y="2140952"/>
+                  </a:lnTo>
+                  <a:lnTo>
+                    <a:pt x="4010861" y="2158405"/>
+                  </a:lnTo>
+                  <a:lnTo>
+                    <a:pt x="4082483" y="2175416"/>
+                  </a:lnTo>
+                  <a:lnTo>
+                    <a:pt x="4154106" y="2191995"/>
+                  </a:lnTo>
+                  <a:lnTo>
+                    <a:pt x="4225729" y="2208152"/>
+                  </a:lnTo>
+                  <a:lnTo>
+                    <a:pt x="4297351" y="2223900"/>
+                  </a:lnTo>
+                  <a:lnTo>
+                    <a:pt x="4368974" y="2239248"/>
+                  </a:lnTo>
+                  <a:lnTo>
+                    <a:pt x="4440596" y="2254206"/>
+                  </a:lnTo>
+                  <a:lnTo>
+                    <a:pt x="4512219" y="2268784"/>
+                  </a:lnTo>
+                  <a:lnTo>
+                    <a:pt x="4583841" y="2282992"/>
+                  </a:lnTo>
+                  <a:lnTo>
+                    <a:pt x="4655464" y="2296839"/>
+                  </a:lnTo>
+                  <a:lnTo>
+                    <a:pt x="4727086" y="2310335"/>
+                  </a:lnTo>
+                  <a:lnTo>
+                    <a:pt x="4798709" y="2323488"/>
+                  </a:lnTo>
+                  <a:lnTo>
+                    <a:pt x="4870331" y="2336307"/>
+                  </a:lnTo>
+                  <a:lnTo>
+                    <a:pt x="4941954" y="2348800"/>
+                  </a:lnTo>
+                  <a:lnTo>
+                    <a:pt x="5013576" y="2360977"/>
+                  </a:lnTo>
+                  <a:lnTo>
+                    <a:pt x="5085199" y="2372844"/>
+                  </a:lnTo>
+                  <a:lnTo>
+                    <a:pt x="5156821" y="2384410"/>
+                  </a:lnTo>
+                  <a:lnTo>
+                    <a:pt x="5228444" y="2395682"/>
+                  </a:lnTo>
+                  <a:lnTo>
+                    <a:pt x="5300066" y="2406668"/>
+                  </a:lnTo>
+                  <a:lnTo>
+                    <a:pt x="5371689" y="2417375"/>
+                  </a:lnTo>
+                  <a:lnTo>
+                    <a:pt x="5443311" y="2427810"/>
+                  </a:lnTo>
+                  <a:lnTo>
+                    <a:pt x="5514934" y="2437981"/>
+                  </a:lnTo>
+                  <a:lnTo>
+                    <a:pt x="5586557" y="2447893"/>
+                  </a:lnTo>
+                  <a:lnTo>
+                    <a:pt x="5658179" y="2457553"/>
+                  </a:lnTo>
+                  <a:lnTo>
+                    <a:pt x="5729802" y="2466968"/>
+                  </a:lnTo>
+                  <a:lnTo>
+                    <a:pt x="5801424" y="2476144"/>
+                  </a:lnTo>
+                  <a:lnTo>
+                    <a:pt x="5873047" y="2485087"/>
+                  </a:lnTo>
+                  <a:lnTo>
+                    <a:pt x="5944669" y="2493803"/>
+                  </a:lnTo>
+                  <a:lnTo>
+                    <a:pt x="6016292" y="2502298"/>
+                  </a:lnTo>
+                  <a:lnTo>
+                    <a:pt x="6087914" y="2510577"/>
+                  </a:lnTo>
+                  <a:lnTo>
+                    <a:pt x="6159537" y="2518645"/>
+                  </a:lnTo>
+                  <a:lnTo>
+                    <a:pt x="6231159" y="2526509"/>
+                  </a:lnTo>
+                  <a:lnTo>
+                    <a:pt x="6302782" y="2534173"/>
+                  </a:lnTo>
+                  <a:lnTo>
+                    <a:pt x="6374404" y="2541643"/>
+                  </a:lnTo>
+                  <a:lnTo>
+                    <a:pt x="6446027" y="2548923"/>
+                  </a:lnTo>
+                  <a:lnTo>
+                    <a:pt x="6517649" y="2556018"/>
+                  </a:lnTo>
+                  <a:lnTo>
+                    <a:pt x="6589272" y="2562933"/>
+                  </a:lnTo>
+                  <a:lnTo>
+                    <a:pt x="6660894" y="2569672"/>
+                  </a:lnTo>
+                  <a:lnTo>
+                    <a:pt x="6732517" y="2576241"/>
+                  </a:lnTo>
+                  <a:lnTo>
+                    <a:pt x="6804139" y="2582642"/>
+                  </a:lnTo>
+                  <a:lnTo>
+                    <a:pt x="6875762" y="2588881"/>
+                  </a:lnTo>
+                  <a:lnTo>
+                    <a:pt x="6947385" y="2594962"/>
+                  </a:lnTo>
+                  <a:lnTo>
+                    <a:pt x="7019007" y="2600888"/>
+                  </a:lnTo>
+                  <a:lnTo>
+                    <a:pt x="7090630" y="2606663"/>
                   </a:lnTo>
                 </a:path>
               </a:pathLst>
@@ -4557,7 +4514,7 @@
         </p:sp>
         <p:sp>
           <p:nvSpPr>
-            <p:cNvPr id="25" name="pl25"/>
+            <p:cNvPr id="24" name="pl24"/>
             <p:cNvSpPr/>
             <p:nvPr/>
           </p:nvSpPr>
@@ -4600,13 +4557,13 @@
         </p:sp>
         <p:sp>
           <p:nvSpPr>
-            <p:cNvPr id="26" name="pl26"/>
+            <p:cNvPr id="25" name="pl25"/>
             <p:cNvSpPr/>
             <p:nvPr/>
           </p:nvSpPr>
           <p:spPr>
             <a:xfrm>
-              <a:off x="4269157" y="2073503"/>
+              <a:off x="4588151" y="2073503"/>
               <a:ext cx="0" cy="3649639"/>
             </a:xfrm>
             <a:custGeom>
@@ -4643,7 +4600,7 @@
         </p:sp>
         <p:sp>
           <p:nvSpPr>
-            <p:cNvPr id="27" name="tx27"/>
+            <p:cNvPr id="26" name="tx26"/>
             <p:cNvSpPr/>
             <p:nvPr/>
           </p:nvSpPr>
@@ -4689,7 +4646,7 @@
         </p:sp>
         <p:sp>
           <p:nvSpPr>
-            <p:cNvPr id="28" name="tx28"/>
+            <p:cNvPr id="27" name="tx27"/>
             <p:cNvSpPr/>
             <p:nvPr/>
           </p:nvSpPr>
@@ -4735,7 +4692,7 @@
         </p:sp>
         <p:sp>
           <p:nvSpPr>
-            <p:cNvPr id="29" name="tx29"/>
+            <p:cNvPr id="28" name="tx28"/>
             <p:cNvSpPr/>
             <p:nvPr/>
           </p:nvSpPr>
@@ -4781,7 +4738,7 @@
         </p:sp>
         <p:sp>
           <p:nvSpPr>
-            <p:cNvPr id="30" name="tx30"/>
+            <p:cNvPr id="29" name="tx29"/>
             <p:cNvSpPr/>
             <p:nvPr/>
           </p:nvSpPr>
@@ -4827,7 +4784,7 @@
         </p:sp>
         <p:sp>
           <p:nvSpPr>
-            <p:cNvPr id="31" name="tx31"/>
+            <p:cNvPr id="30" name="tx30"/>
             <p:cNvSpPr/>
             <p:nvPr/>
           </p:nvSpPr>
@@ -4873,14 +4830,14 @@
         </p:sp>
         <p:sp>
           <p:nvSpPr>
-            <p:cNvPr id="32" name="tx32"/>
+            <p:cNvPr id="31" name="tx31"/>
             <p:cNvSpPr/>
             <p:nvPr/>
           </p:nvSpPr>
           <p:spPr>
             <a:xfrm>
-              <a:off x="2423864" y="5785772"/>
-              <a:ext cx="155356" cy="80101"/>
+              <a:off x="2360651" y="5785772"/>
+              <a:ext cx="161574" cy="80101"/>
             </a:xfrm>
             <a:prstGeom prst="rect">
               <a:avLst/>
@@ -4912,21 +4869,21 @@
                   <a:latin typeface="Helvetica"/>
                   <a:cs typeface="Helvetica"/>
                 </a:rPr>
-                <a:t>0.8</a:t>
+                <a:t>-25</a:t>
               </a:r>
             </a:p>
           </p:txBody>
         </p:sp>
         <p:sp>
           <p:nvSpPr>
-            <p:cNvPr id="33" name="tx33"/>
+            <p:cNvPr id="32" name="tx32"/>
             <p:cNvSpPr/>
             <p:nvPr/>
           </p:nvSpPr>
           <p:spPr>
             <a:xfrm>
-              <a:off x="4196521" y="5785772"/>
-              <a:ext cx="155356" cy="80101"/>
+              <a:off x="4561958" y="5785772"/>
+              <a:ext cx="62179" cy="80101"/>
             </a:xfrm>
             <a:prstGeom prst="rect">
               <a:avLst/>
@@ -4958,21 +4915,21 @@
                   <a:latin typeface="Helvetica"/>
                   <a:cs typeface="Helvetica"/>
                 </a:rPr>
-                <a:t>1.0</a:t>
+                <a:t>0</a:t>
               </a:r>
             </a:p>
           </p:txBody>
         </p:sp>
         <p:sp>
           <p:nvSpPr>
-            <p:cNvPr id="34" name="tx34"/>
+            <p:cNvPr id="33" name="tx33"/>
             <p:cNvSpPr/>
             <p:nvPr/>
           </p:nvSpPr>
           <p:spPr>
             <a:xfrm>
-              <a:off x="5969179" y="5785772"/>
-              <a:ext cx="155356" cy="80101"/>
+              <a:off x="6682478" y="5785772"/>
+              <a:ext cx="124358" cy="80101"/>
             </a:xfrm>
             <a:prstGeom prst="rect">
               <a:avLst/>
@@ -5004,67 +4961,21 @@
                   <a:latin typeface="Helvetica"/>
                   <a:cs typeface="Helvetica"/>
                 </a:rPr>
-                <a:t>1.2</a:t>
+                <a:t>25</a:t>
               </a:r>
             </a:p>
           </p:txBody>
         </p:sp>
         <p:sp>
           <p:nvSpPr>
-            <p:cNvPr id="35" name="tx35"/>
+            <p:cNvPr id="34" name="tx34"/>
             <p:cNvSpPr/>
             <p:nvPr/>
           </p:nvSpPr>
           <p:spPr>
             <a:xfrm>
-              <a:off x="7741836" y="5785772"/>
-              <a:ext cx="155356" cy="80101"/>
-            </a:xfrm>
-            <a:prstGeom prst="rect">
-              <a:avLst/>
-            </a:prstGeom>
-            <a:noFill/>
-          </p:spPr>
-          <p:txBody>
-            <a:bodyPr lIns="0" rIns="0" tIns="0" bIns="0" anchorCtr="1" anchor="ctr" wrap="none"/>
-            <a:lstStyle/>
-            <a:p>
-              <a:pPr algn="l" marL="0" marR="0" indent="0">
-                <a:lnSpc>
-                  <a:spcPts val="880"/>
-                </a:lnSpc>
-                <a:spcBef>
-                  <a:spcPts val="0"/>
-                </a:spcBef>
-                <a:spcAft>
-                  <a:spcPts val="0"/>
-                </a:spcAft>
-              </a:pPr>
-              <a:r>
-                <a:rPr sz="880">
-                  <a:solidFill>
-                    <a:srgbClr val="4D4D4D">
-                      <a:alpha val="100000"/>
-                    </a:srgbClr>
-                  </a:solidFill>
-                  <a:latin typeface="Helvetica"/>
-                  <a:cs typeface="Helvetica"/>
-                </a:rPr>
-                <a:t>1.4</a:t>
-              </a:r>
-            </a:p>
-          </p:txBody>
-        </p:sp>
-        <p:sp>
-          <p:nvSpPr>
-            <p:cNvPr id="36" name="tx36"/>
-            <p:cNvSpPr/>
-            <p:nvPr/>
-          </p:nvSpPr>
-          <p:spPr>
-            <a:xfrm>
-              <a:off x="3879271" y="5925448"/>
-              <a:ext cx="1676186" cy="100218"/>
+              <a:off x="2928340" y="5925448"/>
+              <a:ext cx="3578047" cy="100218"/>
             </a:xfrm>
             <a:prstGeom prst="rect">
               <a:avLst/>
@@ -5096,14 +5007,14 @@
                   <a:latin typeface="Helvetica"/>
                   <a:cs typeface="Helvetica"/>
                 </a:rPr>
-                <a:t>CKD-EPI Cr-Cys / CG ratio</a:t>
+                <a:t>eGFR difference (%): 100 × (CKD-EPI Cr-Cys − CG) / CG</a:t>
               </a:r>
             </a:p>
           </p:txBody>
         </p:sp>
         <p:sp>
           <p:nvSpPr>
-            <p:cNvPr id="37" name="tx37"/>
+            <p:cNvPr id="35" name="tx35"/>
             <p:cNvSpPr/>
             <p:nvPr/>
           </p:nvSpPr>
@@ -5149,14 +5060,14 @@
         </p:sp>
         <p:sp>
           <p:nvSpPr>
-            <p:cNvPr id="38" name="tx38"/>
+            <p:cNvPr id="36" name="tx36"/>
             <p:cNvSpPr/>
             <p:nvPr/>
           </p:nvSpPr>
           <p:spPr>
             <a:xfrm>
               <a:off x="817517" y="1896563"/>
-              <a:ext cx="6899879" cy="82021"/>
+              <a:ext cx="7052127" cy="82021"/>
             </a:xfrm>
             <a:prstGeom prst="rect">
               <a:avLst/>
@@ -5188,14 +5099,14 @@
                   <a:latin typeface="Helvetica"/>
                   <a:cs typeface="Helvetica"/>
                 </a:rPr>
-                <a:t>subHR per 0.1 ratio decline: 1.36 (1.18-1.57), p_Bonf = &lt;0.001 (n = 6)  |  per IQR decline (Δ = 0.29): 2.47 (1.62-3.76)  |  IQR: [0.85, 1.15]</a:t>
+                <a:t>subHR per 10 % decline: 1.36 (1.18-1.57), p_Bonf = &lt;0.001 (n = 6)  |  per IQR decline (Δ = 29.3 %): 2.47 (1.62-3.76)  |  IQR: [-14.6, 14.7] %</a:t>
               </a:r>
             </a:p>
           </p:txBody>
         </p:sp>
         <p:sp>
           <p:nvSpPr>
-            <p:cNvPr id="39" name="tx39"/>
+            <p:cNvPr id="37" name="tx37"/>
             <p:cNvSpPr/>
             <p:nvPr/>
           </p:nvSpPr>

--- a/docs/pptx/whole/jx-linsubhr-ratio-anemia3.pptx
+++ b/docs/pptx/whole/jx-linsubhr-ratio-anemia3.pptx
@@ -2265,34 +2265,26 @@
         </p:sp>
         <p:sp>
           <p:nvSpPr>
-            <p:cNvPr id="4" name="pl4"/>
+            <p:cNvPr id="4" name="rc4"/>
             <p:cNvSpPr/>
             <p:nvPr/>
           </p:nvSpPr>
           <p:spPr>
             <a:xfrm>
-              <a:off x="817517" y="5142518"/>
-              <a:ext cx="7799693" cy="0"/>
+              <a:off x="457200" y="1600200"/>
+              <a:ext cx="8229600" cy="4525962"/>
             </a:xfrm>
-            <a:custGeom>
+            <a:prstGeom prst="rect">
               <a:avLst/>
-              <a:pathLst>
-                <a:path w="7799693" h="0">
-                  <a:moveTo>
-                    <a:pt x="0" y="0"/>
-                  </a:moveTo>
-                  <a:lnTo>
-                    <a:pt x="7799693" y="0"/>
-                  </a:lnTo>
-                  <a:lnTo>
-                    <a:pt x="7799693" y="0"/>
-                  </a:lnTo>
-                </a:path>
-              </a:pathLst>
-            </a:custGeom>
-            <a:ln w="6775" cap="flat">
+            </a:prstGeom>
+            <a:solidFill>
+              <a:srgbClr val="FFFFFF">
+                <a:alpha val="100000"/>
+              </a:srgbClr>
+            </a:solidFill>
+            <a:ln w="13550" cap="rnd">
               <a:solidFill>
-                <a:srgbClr val="EBEBEB">
+                <a:srgbClr val="FFFFFF">
                   <a:alpha val="100000"/>
                 </a:srgbClr>
               </a:solidFill>
@@ -2314,21 +2306,21 @@
           </p:nvSpPr>
           <p:spPr>
             <a:xfrm>
-              <a:off x="817517" y="4313054"/>
-              <a:ext cx="7799693" cy="0"/>
+              <a:off x="887106" y="3250627"/>
+              <a:ext cx="7660515" cy="0"/>
             </a:xfrm>
             <a:custGeom>
               <a:avLst/>
               <a:pathLst>
-                <a:path w="7799693" h="0">
+                <a:path w="7660515" h="0">
                   <a:moveTo>
                     <a:pt x="0" y="0"/>
                   </a:moveTo>
                   <a:lnTo>
-                    <a:pt x="7799693" y="0"/>
-                  </a:lnTo>
-                  <a:lnTo>
-                    <a:pt x="7799693" y="0"/>
+                    <a:pt x="7660515" y="0"/>
+                  </a:lnTo>
+                  <a:lnTo>
+                    <a:pt x="7660515" y="0"/>
                   </a:lnTo>
                 </a:path>
               </a:pathLst>
@@ -2357,21 +2349,21 @@
           </p:nvSpPr>
           <p:spPr>
             <a:xfrm>
-              <a:off x="817517" y="3483591"/>
-              <a:ext cx="7799693" cy="0"/>
+              <a:off x="887106" y="2951293"/>
+              <a:ext cx="7660515" cy="0"/>
             </a:xfrm>
             <a:custGeom>
               <a:avLst/>
               <a:pathLst>
-                <a:path w="7799693" h="0">
+                <a:path w="7660515" h="0">
                   <a:moveTo>
                     <a:pt x="0" y="0"/>
                   </a:moveTo>
                   <a:lnTo>
-                    <a:pt x="7799693" y="0"/>
-                  </a:lnTo>
-                  <a:lnTo>
-                    <a:pt x="7799693" y="0"/>
+                    <a:pt x="7660515" y="0"/>
+                  </a:lnTo>
+                  <a:lnTo>
+                    <a:pt x="7660515" y="0"/>
                   </a:lnTo>
                 </a:path>
               </a:pathLst>
@@ -2400,21 +2392,21 @@
           </p:nvSpPr>
           <p:spPr>
             <a:xfrm>
-              <a:off x="817517" y="2654127"/>
-              <a:ext cx="7799693" cy="0"/>
+              <a:off x="887106" y="2651959"/>
+              <a:ext cx="7660515" cy="0"/>
             </a:xfrm>
             <a:custGeom>
               <a:avLst/>
               <a:pathLst>
-                <a:path w="7799693" h="0">
+                <a:path w="7660515" h="0">
                   <a:moveTo>
                     <a:pt x="0" y="0"/>
                   </a:moveTo>
                   <a:lnTo>
-                    <a:pt x="7799693" y="0"/>
-                  </a:lnTo>
-                  <a:lnTo>
-                    <a:pt x="7799693" y="0"/>
+                    <a:pt x="7660515" y="0"/>
+                  </a:lnTo>
+                  <a:lnTo>
+                    <a:pt x="7660515" y="0"/>
                   </a:lnTo>
                 </a:path>
               </a:pathLst>
@@ -2443,21 +2435,21 @@
           </p:nvSpPr>
           <p:spPr>
             <a:xfrm>
-              <a:off x="1365633" y="2073503"/>
-              <a:ext cx="0" cy="3649639"/>
+              <a:off x="887106" y="2352625"/>
+              <a:ext cx="7660515" cy="0"/>
             </a:xfrm>
             <a:custGeom>
               <a:avLst/>
               <a:pathLst>
-                <a:path w="0" h="3649639">
+                <a:path w="7660515" h="0">
                   <a:moveTo>
-                    <a:pt x="0" y="3649639"/>
+                    <a:pt x="0" y="0"/>
                   </a:moveTo>
                   <a:lnTo>
-                    <a:pt x="0" y="0"/>
-                  </a:lnTo>
-                  <a:lnTo>
-                    <a:pt x="0" y="0"/>
+                    <a:pt x="7660515" y="0"/>
+                  </a:lnTo>
+                  <a:lnTo>
+                    <a:pt x="7660515" y="0"/>
                   </a:lnTo>
                 </a:path>
               </a:pathLst>
@@ -2486,15 +2478,15 @@
           </p:nvSpPr>
           <p:spPr>
             <a:xfrm>
-              <a:off x="3517243" y="2073503"/>
-              <a:ext cx="0" cy="3649639"/>
+              <a:off x="1425442" y="2143092"/>
+              <a:ext cx="0" cy="1317069"/>
             </a:xfrm>
             <a:custGeom>
               <a:avLst/>
               <a:pathLst>
-                <a:path w="0" h="3649639">
+                <a:path w="0" h="1317069">
                   <a:moveTo>
-                    <a:pt x="0" y="3649639"/>
+                    <a:pt x="0" y="1317069"/>
                   </a:moveTo>
                   <a:lnTo>
                     <a:pt x="0" y="0"/>
@@ -2529,15 +2521,15 @@
           </p:nvSpPr>
           <p:spPr>
             <a:xfrm>
-              <a:off x="5668852" y="2073503"/>
-              <a:ext cx="0" cy="3649639"/>
+              <a:off x="3538658" y="2143092"/>
+              <a:ext cx="0" cy="1317069"/>
             </a:xfrm>
             <a:custGeom>
               <a:avLst/>
               <a:pathLst>
-                <a:path w="0" h="3649639">
+                <a:path w="0" h="1317069">
                   <a:moveTo>
-                    <a:pt x="0" y="3649639"/>
+                    <a:pt x="0" y="1317069"/>
                   </a:moveTo>
                   <a:lnTo>
                     <a:pt x="0" y="0"/>
@@ -2572,15 +2564,15 @@
           </p:nvSpPr>
           <p:spPr>
             <a:xfrm>
-              <a:off x="7820461" y="2073503"/>
-              <a:ext cx="0" cy="3649639"/>
+              <a:off x="5651874" y="2143092"/>
+              <a:ext cx="0" cy="1317069"/>
             </a:xfrm>
             <a:custGeom>
               <a:avLst/>
               <a:pathLst>
-                <a:path w="0" h="3649639">
+                <a:path w="0" h="1317069">
                   <a:moveTo>
-                    <a:pt x="0" y="3649639"/>
+                    <a:pt x="0" y="1317069"/>
                   </a:moveTo>
                   <a:lnTo>
                     <a:pt x="0" y="0"/>
@@ -2615,26 +2607,26 @@
           </p:nvSpPr>
           <p:spPr>
             <a:xfrm>
-              <a:off x="817517" y="5557249"/>
-              <a:ext cx="7799693" cy="0"/>
+              <a:off x="7765090" y="2143092"/>
+              <a:ext cx="0" cy="1317069"/>
             </a:xfrm>
             <a:custGeom>
               <a:avLst/>
               <a:pathLst>
-                <a:path w="7799693" h="0">
+                <a:path w="0" h="1317069">
                   <a:moveTo>
+                    <a:pt x="0" y="1317069"/>
+                  </a:moveTo>
+                  <a:lnTo>
                     <a:pt x="0" y="0"/>
-                  </a:moveTo>
-                  <a:lnTo>
-                    <a:pt x="7799693" y="0"/>
-                  </a:lnTo>
-                  <a:lnTo>
-                    <a:pt x="7799693" y="0"/>
+                  </a:lnTo>
+                  <a:lnTo>
+                    <a:pt x="0" y="0"/>
                   </a:lnTo>
                 </a:path>
               </a:pathLst>
             </a:custGeom>
-            <a:ln w="13550" cap="flat">
+            <a:ln w="6775" cap="flat">
               <a:solidFill>
                 <a:srgbClr val="EBEBEB">
                   <a:alpha val="100000"/>
@@ -2658,21 +2650,21 @@
           </p:nvSpPr>
           <p:spPr>
             <a:xfrm>
-              <a:off x="817517" y="4727786"/>
-              <a:ext cx="7799693" cy="0"/>
+              <a:off x="887106" y="3400294"/>
+              <a:ext cx="7660515" cy="0"/>
             </a:xfrm>
             <a:custGeom>
               <a:avLst/>
               <a:pathLst>
-                <a:path w="7799693" h="0">
+                <a:path w="7660515" h="0">
                   <a:moveTo>
                     <a:pt x="0" y="0"/>
                   </a:moveTo>
                   <a:lnTo>
-                    <a:pt x="7799693" y="0"/>
-                  </a:lnTo>
-                  <a:lnTo>
-                    <a:pt x="7799693" y="0"/>
+                    <a:pt x="7660515" y="0"/>
+                  </a:lnTo>
+                  <a:lnTo>
+                    <a:pt x="7660515" y="0"/>
                   </a:lnTo>
                 </a:path>
               </a:pathLst>
@@ -2701,21 +2693,21 @@
           </p:nvSpPr>
           <p:spPr>
             <a:xfrm>
-              <a:off x="817517" y="3898322"/>
-              <a:ext cx="7799693" cy="0"/>
+              <a:off x="887106" y="3100960"/>
+              <a:ext cx="7660515" cy="0"/>
             </a:xfrm>
             <a:custGeom>
               <a:avLst/>
               <a:pathLst>
-                <a:path w="7799693" h="0">
+                <a:path w="7660515" h="0">
                   <a:moveTo>
                     <a:pt x="0" y="0"/>
                   </a:moveTo>
                   <a:lnTo>
-                    <a:pt x="7799693" y="0"/>
-                  </a:lnTo>
-                  <a:lnTo>
-                    <a:pt x="7799693" y="0"/>
+                    <a:pt x="7660515" y="0"/>
+                  </a:lnTo>
+                  <a:lnTo>
+                    <a:pt x="7660515" y="0"/>
                   </a:lnTo>
                 </a:path>
               </a:pathLst>
@@ -2744,21 +2736,21 @@
           </p:nvSpPr>
           <p:spPr>
             <a:xfrm>
-              <a:off x="817517" y="3068859"/>
-              <a:ext cx="7799693" cy="0"/>
+              <a:off x="887106" y="2801626"/>
+              <a:ext cx="7660515" cy="0"/>
             </a:xfrm>
             <a:custGeom>
               <a:avLst/>
               <a:pathLst>
-                <a:path w="7799693" h="0">
+                <a:path w="7660515" h="0">
                   <a:moveTo>
                     <a:pt x="0" y="0"/>
                   </a:moveTo>
                   <a:lnTo>
-                    <a:pt x="7799693" y="0"/>
-                  </a:lnTo>
-                  <a:lnTo>
-                    <a:pt x="7799693" y="0"/>
+                    <a:pt x="7660515" y="0"/>
+                  </a:lnTo>
+                  <a:lnTo>
+                    <a:pt x="7660515" y="0"/>
                   </a:lnTo>
                 </a:path>
               </a:pathLst>
@@ -2787,21 +2779,21 @@
           </p:nvSpPr>
           <p:spPr>
             <a:xfrm>
-              <a:off x="817517" y="2239395"/>
-              <a:ext cx="7799693" cy="0"/>
+              <a:off x="887106" y="2502292"/>
+              <a:ext cx="7660515" cy="0"/>
             </a:xfrm>
             <a:custGeom>
               <a:avLst/>
               <a:pathLst>
-                <a:path w="7799693" h="0">
+                <a:path w="7660515" h="0">
                   <a:moveTo>
                     <a:pt x="0" y="0"/>
                   </a:moveTo>
                   <a:lnTo>
-                    <a:pt x="7799693" y="0"/>
-                  </a:lnTo>
-                  <a:lnTo>
-                    <a:pt x="7799693" y="0"/>
+                    <a:pt x="7660515" y="0"/>
+                  </a:lnTo>
+                  <a:lnTo>
+                    <a:pt x="7660515" y="0"/>
                   </a:lnTo>
                 </a:path>
               </a:pathLst>
@@ -2830,21 +2822,21 @@
           </p:nvSpPr>
           <p:spPr>
             <a:xfrm>
-              <a:off x="2441438" y="2073503"/>
-              <a:ext cx="0" cy="3649639"/>
+              <a:off x="887106" y="2202958"/>
+              <a:ext cx="7660515" cy="0"/>
             </a:xfrm>
             <a:custGeom>
               <a:avLst/>
               <a:pathLst>
-                <a:path w="0" h="3649639">
+                <a:path w="7660515" h="0">
                   <a:moveTo>
-                    <a:pt x="0" y="3649639"/>
+                    <a:pt x="0" y="0"/>
                   </a:moveTo>
                   <a:lnTo>
-                    <a:pt x="0" y="0"/>
-                  </a:lnTo>
-                  <a:lnTo>
-                    <a:pt x="0" y="0"/>
+                    <a:pt x="7660515" y="0"/>
+                  </a:lnTo>
+                  <a:lnTo>
+                    <a:pt x="7660515" y="0"/>
                   </a:lnTo>
                 </a:path>
               </a:pathLst>
@@ -2873,15 +2865,15 @@
           </p:nvSpPr>
           <p:spPr>
             <a:xfrm>
-              <a:off x="4593047" y="2073503"/>
-              <a:ext cx="0" cy="3649639"/>
+              <a:off x="2482050" y="2143092"/>
+              <a:ext cx="0" cy="1317069"/>
             </a:xfrm>
             <a:custGeom>
               <a:avLst/>
               <a:pathLst>
-                <a:path w="0" h="3649639">
+                <a:path w="0" h="1317069">
                   <a:moveTo>
-                    <a:pt x="0" y="3649639"/>
+                    <a:pt x="0" y="1317069"/>
                   </a:moveTo>
                   <a:lnTo>
                     <a:pt x="0" y="0"/>
@@ -2916,15 +2908,15 @@
           </p:nvSpPr>
           <p:spPr>
             <a:xfrm>
-              <a:off x="6744657" y="2073503"/>
-              <a:ext cx="0" cy="3649639"/>
+              <a:off x="4595266" y="2143092"/>
+              <a:ext cx="0" cy="1317069"/>
             </a:xfrm>
             <a:custGeom>
               <a:avLst/>
               <a:pathLst>
-                <a:path w="0" h="3649639">
+                <a:path w="0" h="1317069">
                   <a:moveTo>
-                    <a:pt x="0" y="3649639"/>
+                    <a:pt x="0" y="1317069"/>
                   </a:moveTo>
                   <a:lnTo>
                     <a:pt x="0" y="0"/>
@@ -2953,591 +2945,634 @@
         </p:sp>
         <p:sp>
           <p:nvSpPr>
-            <p:cNvPr id="20" name="pg20"/>
+            <p:cNvPr id="20" name="pl20"/>
             <p:cNvSpPr/>
             <p:nvPr/>
           </p:nvSpPr>
           <p:spPr>
             <a:xfrm>
-              <a:off x="1172049" y="2073503"/>
-              <a:ext cx="7090630" cy="3363745"/>
+              <a:off x="6708482" y="2143092"/>
+              <a:ext cx="0" cy="1317069"/>
             </a:xfrm>
             <a:custGeom>
               <a:avLst/>
               <a:pathLst>
-                <a:path w="7090630" h="3363745">
+                <a:path w="0" h="1317069">
                   <a:moveTo>
-                    <a:pt x="688796" y="0"/>
+                    <a:pt x="0" y="1317069"/>
                   </a:moveTo>
                   <a:lnTo>
-                    <a:pt x="716225" y="50491"/>
-                  </a:lnTo>
-                  <a:lnTo>
-                    <a:pt x="787847" y="177458"/>
-                  </a:lnTo>
-                  <a:lnTo>
-                    <a:pt x="859470" y="299730"/>
-                  </a:lnTo>
-                  <a:lnTo>
-                    <a:pt x="931092" y="417480"/>
-                  </a:lnTo>
-                  <a:lnTo>
-                    <a:pt x="1002715" y="530875"/>
-                  </a:lnTo>
-                  <a:lnTo>
-                    <a:pt x="1074337" y="640077"/>
-                  </a:lnTo>
-                  <a:lnTo>
-                    <a:pt x="1145960" y="745240"/>
-                  </a:lnTo>
-                  <a:lnTo>
-                    <a:pt x="1217582" y="846514"/>
-                  </a:lnTo>
-                  <a:lnTo>
-                    <a:pt x="1289205" y="944043"/>
-                  </a:lnTo>
-                  <a:lnTo>
-                    <a:pt x="1360827" y="1037966"/>
-                  </a:lnTo>
-                  <a:lnTo>
-                    <a:pt x="1432450" y="1128414"/>
-                  </a:lnTo>
-                  <a:lnTo>
-                    <a:pt x="1504073" y="1215518"/>
-                  </a:lnTo>
-                  <a:lnTo>
-                    <a:pt x="1575695" y="1299401"/>
-                  </a:lnTo>
-                  <a:lnTo>
-                    <a:pt x="1647318" y="1380181"/>
-                  </a:lnTo>
-                  <a:lnTo>
-                    <a:pt x="1718940" y="1457975"/>
-                  </a:lnTo>
-                  <a:lnTo>
-                    <a:pt x="1790563" y="1532891"/>
-                  </a:lnTo>
-                  <a:lnTo>
-                    <a:pt x="1862185" y="1605037"/>
-                  </a:lnTo>
-                  <a:lnTo>
-                    <a:pt x="1933808" y="1674514"/>
-                  </a:lnTo>
-                  <a:lnTo>
-                    <a:pt x="2005430" y="1741422"/>
-                  </a:lnTo>
-                  <a:lnTo>
-                    <a:pt x="2077053" y="1805856"/>
-                  </a:lnTo>
-                  <a:lnTo>
-                    <a:pt x="2148675" y="1867907"/>
-                  </a:lnTo>
-                  <a:lnTo>
-                    <a:pt x="2220298" y="1927664"/>
-                  </a:lnTo>
-                  <a:lnTo>
-                    <a:pt x="2291920" y="1985210"/>
-                  </a:lnTo>
-                  <a:lnTo>
-                    <a:pt x="2363543" y="2040628"/>
-                  </a:lnTo>
-                  <a:lnTo>
-                    <a:pt x="2435165" y="2093997"/>
-                  </a:lnTo>
-                  <a:lnTo>
-                    <a:pt x="2506788" y="2145392"/>
-                  </a:lnTo>
-                  <a:lnTo>
-                    <a:pt x="2578410" y="2194886"/>
-                  </a:lnTo>
-                  <a:lnTo>
-                    <a:pt x="2650033" y="2242551"/>
-                  </a:lnTo>
-                  <a:lnTo>
-                    <a:pt x="2721655" y="2288452"/>
-                  </a:lnTo>
-                  <a:lnTo>
-                    <a:pt x="2793278" y="2332656"/>
-                  </a:lnTo>
-                  <a:lnTo>
-                    <a:pt x="2864901" y="2375225"/>
-                  </a:lnTo>
-                  <a:lnTo>
-                    <a:pt x="2936523" y="2416220"/>
-                  </a:lnTo>
-                  <a:lnTo>
-                    <a:pt x="3008146" y="2455699"/>
-                  </a:lnTo>
-                  <a:lnTo>
-                    <a:pt x="3079768" y="2493717"/>
-                  </a:lnTo>
-                  <a:lnTo>
-                    <a:pt x="3151391" y="2530330"/>
-                  </a:lnTo>
-                  <a:lnTo>
-                    <a:pt x="3223013" y="2565589"/>
-                  </a:lnTo>
-                  <a:lnTo>
-                    <a:pt x="3294636" y="2599544"/>
-                  </a:lnTo>
-                  <a:lnTo>
-                    <a:pt x="3366258" y="2632243"/>
-                  </a:lnTo>
-                  <a:lnTo>
-                    <a:pt x="3437881" y="2657745"/>
-                  </a:lnTo>
-                  <a:lnTo>
-                    <a:pt x="3509503" y="2669028"/>
-                  </a:lnTo>
-                  <a:lnTo>
-                    <a:pt x="3581126" y="2680158"/>
-                  </a:lnTo>
-                  <a:lnTo>
-                    <a:pt x="3652748" y="2691135"/>
-                  </a:lnTo>
-                  <a:lnTo>
-                    <a:pt x="3724371" y="2701962"/>
-                  </a:lnTo>
-                  <a:lnTo>
-                    <a:pt x="3795993" y="2712642"/>
-                  </a:lnTo>
-                  <a:lnTo>
-                    <a:pt x="3867616" y="2723175"/>
-                  </a:lnTo>
-                  <a:lnTo>
-                    <a:pt x="3939238" y="2733565"/>
-                  </a:lnTo>
-                  <a:lnTo>
-                    <a:pt x="4010861" y="2743813"/>
-                  </a:lnTo>
-                  <a:lnTo>
-                    <a:pt x="4082483" y="2753920"/>
-                  </a:lnTo>
-                  <a:lnTo>
-                    <a:pt x="4154106" y="2763890"/>
-                  </a:lnTo>
-                  <a:lnTo>
-                    <a:pt x="4225729" y="2773724"/>
-                  </a:lnTo>
-                  <a:lnTo>
-                    <a:pt x="4297351" y="2783423"/>
-                  </a:lnTo>
-                  <a:lnTo>
-                    <a:pt x="4368974" y="2792989"/>
-                  </a:lnTo>
-                  <a:lnTo>
-                    <a:pt x="4440596" y="2802425"/>
-                  </a:lnTo>
-                  <a:lnTo>
-                    <a:pt x="4512219" y="2811733"/>
-                  </a:lnTo>
-                  <a:lnTo>
-                    <a:pt x="4583841" y="2820912"/>
-                  </a:lnTo>
-                  <a:lnTo>
-                    <a:pt x="4655464" y="2829967"/>
-                  </a:lnTo>
-                  <a:lnTo>
-                    <a:pt x="4727086" y="2838898"/>
-                  </a:lnTo>
-                  <a:lnTo>
-                    <a:pt x="4798709" y="2847707"/>
-                  </a:lnTo>
-                  <a:lnTo>
-                    <a:pt x="4870331" y="2856395"/>
-                  </a:lnTo>
-                  <a:lnTo>
-                    <a:pt x="4941954" y="2864965"/>
-                  </a:lnTo>
-                  <a:lnTo>
-                    <a:pt x="5013576" y="2873418"/>
-                  </a:lnTo>
-                  <a:lnTo>
-                    <a:pt x="5085199" y="2881755"/>
-                  </a:lnTo>
-                  <a:lnTo>
-                    <a:pt x="5156821" y="2889979"/>
-                  </a:lnTo>
-                  <a:lnTo>
-                    <a:pt x="5228444" y="2898090"/>
-                  </a:lnTo>
-                  <a:lnTo>
-                    <a:pt x="5300066" y="2906090"/>
-                  </a:lnTo>
-                  <a:lnTo>
-                    <a:pt x="5371689" y="2913981"/>
-                  </a:lnTo>
-                  <a:lnTo>
-                    <a:pt x="5443311" y="2921764"/>
-                  </a:lnTo>
-                  <a:lnTo>
-                    <a:pt x="5514934" y="2929441"/>
-                  </a:lnTo>
-                  <a:lnTo>
-                    <a:pt x="5586557" y="2937013"/>
-                  </a:lnTo>
-                  <a:lnTo>
-                    <a:pt x="5658179" y="2944482"/>
-                  </a:lnTo>
-                  <a:lnTo>
-                    <a:pt x="5729802" y="2951848"/>
-                  </a:lnTo>
-                  <a:lnTo>
-                    <a:pt x="5801424" y="2959114"/>
-                  </a:lnTo>
-                  <a:lnTo>
-                    <a:pt x="5873047" y="2966281"/>
-                  </a:lnTo>
-                  <a:lnTo>
-                    <a:pt x="5944669" y="2973349"/>
-                  </a:lnTo>
-                  <a:lnTo>
-                    <a:pt x="6016292" y="2980322"/>
-                  </a:lnTo>
-                  <a:lnTo>
-                    <a:pt x="6087914" y="2987199"/>
-                  </a:lnTo>
-                  <a:lnTo>
-                    <a:pt x="6159537" y="2993982"/>
-                  </a:lnTo>
-                  <a:lnTo>
-                    <a:pt x="6231159" y="3000672"/>
-                  </a:lnTo>
-                  <a:lnTo>
-                    <a:pt x="6302782" y="3007271"/>
-                  </a:lnTo>
-                  <a:lnTo>
-                    <a:pt x="6374404" y="3013780"/>
-                  </a:lnTo>
-                  <a:lnTo>
-                    <a:pt x="6446027" y="3020200"/>
-                  </a:lnTo>
-                  <a:lnTo>
-                    <a:pt x="6517649" y="3026532"/>
-                  </a:lnTo>
-                  <a:lnTo>
-                    <a:pt x="6589272" y="3032778"/>
-                  </a:lnTo>
-                  <a:lnTo>
-                    <a:pt x="6660894" y="3038938"/>
-                  </a:lnTo>
-                  <a:lnTo>
-                    <a:pt x="6732517" y="3045014"/>
-                  </a:lnTo>
-                  <a:lnTo>
-                    <a:pt x="6804139" y="3051008"/>
-                  </a:lnTo>
-                  <a:lnTo>
-                    <a:pt x="6875762" y="3056919"/>
-                  </a:lnTo>
-                  <a:lnTo>
-                    <a:pt x="6947385" y="3062749"/>
-                  </a:lnTo>
-                  <a:lnTo>
-                    <a:pt x="7019007" y="3068500"/>
-                  </a:lnTo>
-                  <a:lnTo>
-                    <a:pt x="7090630" y="3074173"/>
-                  </a:lnTo>
-                  <a:lnTo>
-                    <a:pt x="7090630" y="3363745"/>
-                  </a:lnTo>
-                  <a:lnTo>
-                    <a:pt x="7019007" y="3359137"/>
-                  </a:lnTo>
-                  <a:lnTo>
-                    <a:pt x="6947385" y="3354352"/>
-                  </a:lnTo>
-                  <a:lnTo>
-                    <a:pt x="6875762" y="3349383"/>
-                  </a:lnTo>
-                  <a:lnTo>
-                    <a:pt x="6804139" y="3344223"/>
-                  </a:lnTo>
-                  <a:lnTo>
-                    <a:pt x="6732517" y="3338865"/>
-                  </a:lnTo>
-                  <a:lnTo>
-                    <a:pt x="6660894" y="3333301"/>
-                  </a:lnTo>
-                  <a:lnTo>
-                    <a:pt x="6589272" y="3327524"/>
-                  </a:lnTo>
-                  <a:lnTo>
-                    <a:pt x="6517649" y="3321525"/>
-                  </a:lnTo>
-                  <a:lnTo>
-                    <a:pt x="6446027" y="3315295"/>
-                  </a:lnTo>
-                  <a:lnTo>
-                    <a:pt x="6374404" y="3308826"/>
-                  </a:lnTo>
-                  <a:lnTo>
-                    <a:pt x="6302782" y="3302109"/>
-                  </a:lnTo>
-                  <a:lnTo>
-                    <a:pt x="6231159" y="3295134"/>
-                  </a:lnTo>
-                  <a:lnTo>
-                    <a:pt x="6159537" y="3287891"/>
-                  </a:lnTo>
-                  <a:lnTo>
-                    <a:pt x="6087914" y="3280370"/>
-                  </a:lnTo>
-                  <a:lnTo>
-                    <a:pt x="6016292" y="3272560"/>
-                  </a:lnTo>
-                  <a:lnTo>
-                    <a:pt x="5944669" y="3264450"/>
-                  </a:lnTo>
-                  <a:lnTo>
-                    <a:pt x="5873047" y="3256028"/>
-                  </a:lnTo>
-                  <a:lnTo>
-                    <a:pt x="5801424" y="3247284"/>
-                  </a:lnTo>
-                  <a:lnTo>
-                    <a:pt x="5729802" y="3238203"/>
-                  </a:lnTo>
-                  <a:lnTo>
-                    <a:pt x="5658179" y="3228774"/>
-                  </a:lnTo>
-                  <a:lnTo>
-                    <a:pt x="5586557" y="3218982"/>
-                  </a:lnTo>
-                  <a:lnTo>
-                    <a:pt x="5514934" y="3208815"/>
-                  </a:lnTo>
-                  <a:lnTo>
-                    <a:pt x="5443311" y="3198257"/>
-                  </a:lnTo>
-                  <a:lnTo>
-                    <a:pt x="5371689" y="3187294"/>
-                  </a:lnTo>
-                  <a:lnTo>
-                    <a:pt x="5300066" y="3175910"/>
-                  </a:lnTo>
-                  <a:lnTo>
-                    <a:pt x="5228444" y="3164088"/>
-                  </a:lnTo>
-                  <a:lnTo>
-                    <a:pt x="5156821" y="3151813"/>
-                  </a:lnTo>
-                  <a:lnTo>
-                    <a:pt x="5085199" y="3139066"/>
-                  </a:lnTo>
-                  <a:lnTo>
-                    <a:pt x="5013576" y="3125830"/>
-                  </a:lnTo>
-                  <a:lnTo>
-                    <a:pt x="4941954" y="3112085"/>
-                  </a:lnTo>
-                  <a:lnTo>
-                    <a:pt x="4870331" y="3097813"/>
-                  </a:lnTo>
-                  <a:lnTo>
-                    <a:pt x="4798709" y="3082992"/>
-                  </a:lnTo>
-                  <a:lnTo>
-                    <a:pt x="4727086" y="3067602"/>
-                  </a:lnTo>
-                  <a:lnTo>
-                    <a:pt x="4655464" y="3051622"/>
-                  </a:lnTo>
-                  <a:lnTo>
-                    <a:pt x="4583841" y="3035027"/>
-                  </a:lnTo>
-                  <a:lnTo>
-                    <a:pt x="4512219" y="3017796"/>
-                  </a:lnTo>
-                  <a:lnTo>
-                    <a:pt x="4440596" y="2999902"/>
-                  </a:lnTo>
-                  <a:lnTo>
-                    <a:pt x="4368974" y="2981322"/>
-                  </a:lnTo>
-                  <a:lnTo>
-                    <a:pt x="4297351" y="2962028"/>
-                  </a:lnTo>
-                  <a:lnTo>
-                    <a:pt x="4225729" y="2941993"/>
-                  </a:lnTo>
-                  <a:lnTo>
-                    <a:pt x="4154106" y="2921189"/>
-                  </a:lnTo>
-                  <a:lnTo>
-                    <a:pt x="4082483" y="2899586"/>
-                  </a:lnTo>
-                  <a:lnTo>
-                    <a:pt x="4010861" y="2877153"/>
-                  </a:lnTo>
-                  <a:lnTo>
-                    <a:pt x="3939238" y="2853859"/>
-                  </a:lnTo>
-                  <a:lnTo>
-                    <a:pt x="3867616" y="2829670"/>
-                  </a:lnTo>
-                  <a:lnTo>
-                    <a:pt x="3795993" y="2804552"/>
-                  </a:lnTo>
-                  <a:lnTo>
-                    <a:pt x="3724371" y="2778470"/>
-                  </a:lnTo>
-                  <a:lnTo>
-                    <a:pt x="3652748" y="2751386"/>
-                  </a:lnTo>
-                  <a:lnTo>
-                    <a:pt x="3581126" y="2723262"/>
-                  </a:lnTo>
-                  <a:lnTo>
-                    <a:pt x="3509503" y="2694058"/>
-                  </a:lnTo>
-                  <a:lnTo>
-                    <a:pt x="3437881" y="2663733"/>
-                  </a:lnTo>
-                  <a:lnTo>
-                    <a:pt x="3366258" y="2646305"/>
-                  </a:lnTo>
-                  <a:lnTo>
-                    <a:pt x="3294636" y="2634707"/>
-                  </a:lnTo>
-                  <a:lnTo>
-                    <a:pt x="3223013" y="2622948"/>
-                  </a:lnTo>
-                  <a:lnTo>
-                    <a:pt x="3151391" y="2611026"/>
-                  </a:lnTo>
-                  <a:lnTo>
-                    <a:pt x="3079768" y="2598940"/>
-                  </a:lnTo>
-                  <a:lnTo>
-                    <a:pt x="3008146" y="2586685"/>
-                  </a:lnTo>
-                  <a:lnTo>
-                    <a:pt x="2936523" y="2574262"/>
-                  </a:lnTo>
-                  <a:lnTo>
-                    <a:pt x="2864901" y="2561666"/>
-                  </a:lnTo>
-                  <a:lnTo>
-                    <a:pt x="2793278" y="2548895"/>
-                  </a:lnTo>
-                  <a:lnTo>
-                    <a:pt x="2721655" y="2535948"/>
-                  </a:lnTo>
-                  <a:lnTo>
-                    <a:pt x="2650033" y="2522821"/>
-                  </a:lnTo>
-                  <a:lnTo>
-                    <a:pt x="2578410" y="2509513"/>
-                  </a:lnTo>
-                  <a:lnTo>
-                    <a:pt x="2506788" y="2496020"/>
-                  </a:lnTo>
-                  <a:lnTo>
-                    <a:pt x="2435165" y="2482341"/>
-                  </a:lnTo>
-                  <a:lnTo>
-                    <a:pt x="2363543" y="2468472"/>
-                  </a:lnTo>
-                  <a:lnTo>
-                    <a:pt x="2291920" y="2454411"/>
-                  </a:lnTo>
-                  <a:lnTo>
-                    <a:pt x="2220298" y="2440155"/>
-                  </a:lnTo>
-                  <a:lnTo>
-                    <a:pt x="2148675" y="2425702"/>
-                  </a:lnTo>
-                  <a:lnTo>
-                    <a:pt x="2077053" y="2411048"/>
-                  </a:lnTo>
-                  <a:lnTo>
-                    <a:pt x="2005430" y="2396192"/>
-                  </a:lnTo>
-                  <a:lnTo>
-                    <a:pt x="1933808" y="2381130"/>
-                  </a:lnTo>
-                  <a:lnTo>
-                    <a:pt x="1862185" y="2365859"/>
-                  </a:lnTo>
-                  <a:lnTo>
-                    <a:pt x="1790563" y="2350377"/>
-                  </a:lnTo>
-                  <a:lnTo>
-                    <a:pt x="1718940" y="2334680"/>
-                  </a:lnTo>
-                  <a:lnTo>
-                    <a:pt x="1647318" y="2318766"/>
-                  </a:lnTo>
-                  <a:lnTo>
-                    <a:pt x="1575695" y="2302632"/>
-                  </a:lnTo>
-                  <a:lnTo>
-                    <a:pt x="1504073" y="2286274"/>
-                  </a:lnTo>
-                  <a:lnTo>
-                    <a:pt x="1432450" y="2269689"/>
-                  </a:lnTo>
-                  <a:lnTo>
-                    <a:pt x="1360827" y="2252875"/>
-                  </a:lnTo>
-                  <a:lnTo>
-                    <a:pt x="1289205" y="2235828"/>
-                  </a:lnTo>
-                  <a:lnTo>
-                    <a:pt x="1217582" y="2218545"/>
-                  </a:lnTo>
-                  <a:lnTo>
-                    <a:pt x="1145960" y="2201023"/>
-                  </a:lnTo>
-                  <a:lnTo>
-                    <a:pt x="1074337" y="2183257"/>
-                  </a:lnTo>
-                  <a:lnTo>
-                    <a:pt x="1002715" y="2165246"/>
-                  </a:lnTo>
-                  <a:lnTo>
-                    <a:pt x="931092" y="2146986"/>
-                  </a:lnTo>
-                  <a:lnTo>
-                    <a:pt x="859470" y="2128472"/>
-                  </a:lnTo>
-                  <a:lnTo>
-                    <a:pt x="787847" y="2109702"/>
-                  </a:lnTo>
-                  <a:lnTo>
-                    <a:pt x="716225" y="2090672"/>
-                  </a:lnTo>
-                  <a:lnTo>
-                    <a:pt x="644602" y="2071379"/>
-                  </a:lnTo>
-                  <a:lnTo>
-                    <a:pt x="572980" y="2051818"/>
-                  </a:lnTo>
-                  <a:lnTo>
-                    <a:pt x="501357" y="2031987"/>
-                  </a:lnTo>
-                  <a:lnTo>
-                    <a:pt x="429735" y="2011880"/>
-                  </a:lnTo>
-                  <a:lnTo>
-                    <a:pt x="358112" y="1991496"/>
-                  </a:lnTo>
-                  <a:lnTo>
-                    <a:pt x="286490" y="1970829"/>
-                  </a:lnTo>
-                  <a:lnTo>
-                    <a:pt x="214867" y="1949875"/>
-                  </a:lnTo>
-                  <a:lnTo>
-                    <a:pt x="143245" y="1928632"/>
-                  </a:lnTo>
-                  <a:lnTo>
-                    <a:pt x="71622" y="1907094"/>
-                  </a:lnTo>
-                  <a:lnTo>
-                    <a:pt x="0" y="1885259"/>
+                    <a:pt x="0" y="0"/>
+                  </a:lnTo>
+                  <a:lnTo>
+                    <a:pt x="0" y="0"/>
+                  </a:lnTo>
+                </a:path>
+              </a:pathLst>
+            </a:custGeom>
+            <a:ln w="13550" cap="flat">
+              <a:solidFill>
+                <a:srgbClr val="EBEBEB">
+                  <a:alpha val="100000"/>
+                </a:srgbClr>
+              </a:solidFill>
+              <a:prstDash val="solid"/>
+              <a:round/>
+            </a:ln>
+          </p:spPr>
+          <p:txBody>
+            <a:bodyPr/>
+            <a:lstStyle/>
+            <a:p/>
+          </p:txBody>
+        </p:sp>
+        <p:sp>
+          <p:nvSpPr>
+            <p:cNvPr id="21" name="pg21"/>
+            <p:cNvSpPr/>
+            <p:nvPr/>
+          </p:nvSpPr>
+          <p:spPr>
+            <a:xfrm>
+              <a:off x="1235312" y="2143092"/>
+              <a:ext cx="6964104" cy="1213896"/>
+            </a:xfrm>
+            <a:custGeom>
+              <a:avLst/>
+              <a:pathLst>
+                <a:path w="6964104" h="1213896">
+                  <a:moveTo>
+                    <a:pt x="676505" y="0"/>
+                  </a:moveTo>
+                  <a:lnTo>
+                    <a:pt x="703444" y="18221"/>
+                  </a:lnTo>
+                  <a:lnTo>
+                    <a:pt x="773789" y="64040"/>
+                  </a:lnTo>
+                  <a:lnTo>
+                    <a:pt x="844133" y="108165"/>
+                  </a:lnTo>
+                  <a:lnTo>
+                    <a:pt x="914478" y="150658"/>
+                  </a:lnTo>
+                  <a:lnTo>
+                    <a:pt x="984822" y="191580"/>
+                  </a:lnTo>
+                  <a:lnTo>
+                    <a:pt x="1055167" y="230988"/>
+                  </a:lnTo>
+                  <a:lnTo>
+                    <a:pt x="1125511" y="268939"/>
+                  </a:lnTo>
+                  <a:lnTo>
+                    <a:pt x="1195856" y="305487"/>
+                  </a:lnTo>
+                  <a:lnTo>
+                    <a:pt x="1266200" y="340683"/>
+                  </a:lnTo>
+                  <a:lnTo>
+                    <a:pt x="1336545" y="374577"/>
+                  </a:lnTo>
+                  <a:lnTo>
+                    <a:pt x="1406889" y="407218"/>
+                  </a:lnTo>
+                  <a:lnTo>
+                    <a:pt x="1477234" y="438652"/>
+                  </a:lnTo>
+                  <a:lnTo>
+                    <a:pt x="1547578" y="468923"/>
+                  </a:lnTo>
+                  <a:lnTo>
+                    <a:pt x="1617923" y="498075"/>
+                  </a:lnTo>
+                  <a:lnTo>
+                    <a:pt x="1688267" y="526148"/>
+                  </a:lnTo>
+                  <a:lnTo>
+                    <a:pt x="1758612" y="553184"/>
+                  </a:lnTo>
+                  <a:lnTo>
+                    <a:pt x="1828956" y="579220"/>
+                  </a:lnTo>
+                  <a:lnTo>
+                    <a:pt x="1899301" y="604292"/>
+                  </a:lnTo>
+                  <a:lnTo>
+                    <a:pt x="1969645" y="628438"/>
+                  </a:lnTo>
+                  <a:lnTo>
+                    <a:pt x="2039990" y="651691"/>
+                  </a:lnTo>
+                  <a:lnTo>
+                    <a:pt x="2110334" y="674083"/>
+                  </a:lnTo>
+                  <a:lnTo>
+                    <a:pt x="2180679" y="695648"/>
+                  </a:lnTo>
+                  <a:lnTo>
+                    <a:pt x="2251023" y="716415"/>
+                  </a:lnTo>
+                  <a:lnTo>
+                    <a:pt x="2321368" y="736414"/>
+                  </a:lnTo>
+                  <a:lnTo>
+                    <a:pt x="2391712" y="755674"/>
+                  </a:lnTo>
+                  <a:lnTo>
+                    <a:pt x="2462057" y="774221"/>
+                  </a:lnTo>
+                  <a:lnTo>
+                    <a:pt x="2532401" y="792083"/>
+                  </a:lnTo>
+                  <a:lnTo>
+                    <a:pt x="2602746" y="809283"/>
+                  </a:lnTo>
+                  <a:lnTo>
+                    <a:pt x="2673090" y="825848"/>
+                  </a:lnTo>
+                  <a:lnTo>
+                    <a:pt x="2743435" y="841800"/>
+                  </a:lnTo>
+                  <a:lnTo>
+                    <a:pt x="2813779" y="857162"/>
+                  </a:lnTo>
+                  <a:lnTo>
+                    <a:pt x="2884124" y="871957"/>
+                  </a:lnTo>
+                  <a:lnTo>
+                    <a:pt x="2954468" y="886204"/>
+                  </a:lnTo>
+                  <a:lnTo>
+                    <a:pt x="3024813" y="899924"/>
+                  </a:lnTo>
+                  <a:lnTo>
+                    <a:pt x="3095157" y="913136"/>
+                  </a:lnTo>
+                  <a:lnTo>
+                    <a:pt x="3165502" y="925860"/>
+                  </a:lnTo>
+                  <a:lnTo>
+                    <a:pt x="3235846" y="938114"/>
+                  </a:lnTo>
+                  <a:lnTo>
+                    <a:pt x="3306191" y="949914"/>
+                  </a:lnTo>
+                  <a:lnTo>
+                    <a:pt x="3376535" y="959117"/>
+                  </a:lnTo>
+                  <a:lnTo>
+                    <a:pt x="3446880" y="963189"/>
+                  </a:lnTo>
+                  <a:lnTo>
+                    <a:pt x="3517224" y="967206"/>
+                  </a:lnTo>
+                  <a:lnTo>
+                    <a:pt x="3587569" y="971167"/>
+                  </a:lnTo>
+                  <a:lnTo>
+                    <a:pt x="3657913" y="975074"/>
+                  </a:lnTo>
+                  <a:lnTo>
+                    <a:pt x="3728257" y="978928"/>
+                  </a:lnTo>
+                  <a:lnTo>
+                    <a:pt x="3798602" y="982730"/>
+                  </a:lnTo>
+                  <a:lnTo>
+                    <a:pt x="3868946" y="986479"/>
+                  </a:lnTo>
+                  <a:lnTo>
+                    <a:pt x="3939291" y="990177"/>
+                  </a:lnTo>
+                  <a:lnTo>
+                    <a:pt x="4009635" y="993825"/>
+                  </a:lnTo>
+                  <a:lnTo>
+                    <a:pt x="4079980" y="997423"/>
+                  </a:lnTo>
+                  <a:lnTo>
+                    <a:pt x="4150324" y="1000971"/>
+                  </a:lnTo>
+                  <a:lnTo>
+                    <a:pt x="4220669" y="1004471"/>
+                  </a:lnTo>
+                  <a:lnTo>
+                    <a:pt x="4291013" y="1007924"/>
+                  </a:lnTo>
+                  <a:lnTo>
+                    <a:pt x="4361358" y="1011329"/>
+                  </a:lnTo>
+                  <a:lnTo>
+                    <a:pt x="4431702" y="1014688"/>
+                  </a:lnTo>
+                  <a:lnTo>
+                    <a:pt x="4502047" y="1018001"/>
+                  </a:lnTo>
+                  <a:lnTo>
+                    <a:pt x="4572391" y="1021268"/>
+                  </a:lnTo>
+                  <a:lnTo>
+                    <a:pt x="4642736" y="1024491"/>
+                  </a:lnTo>
+                  <a:lnTo>
+                    <a:pt x="4713080" y="1027670"/>
+                  </a:lnTo>
+                  <a:lnTo>
+                    <a:pt x="4783425" y="1030806"/>
+                  </a:lnTo>
+                  <a:lnTo>
+                    <a:pt x="4853769" y="1033898"/>
+                  </a:lnTo>
+                  <a:lnTo>
+                    <a:pt x="4924114" y="1036949"/>
+                  </a:lnTo>
+                  <a:lnTo>
+                    <a:pt x="4994458" y="1039957"/>
+                  </a:lnTo>
+                  <a:lnTo>
+                    <a:pt x="5064803" y="1042925"/>
+                  </a:lnTo>
+                  <a:lnTo>
+                    <a:pt x="5135147" y="1045852"/>
+                  </a:lnTo>
+                  <a:lnTo>
+                    <a:pt x="5205492" y="1048739"/>
+                  </a:lnTo>
+                  <a:lnTo>
+                    <a:pt x="5275836" y="1051587"/>
+                  </a:lnTo>
+                  <a:lnTo>
+                    <a:pt x="5346181" y="1054396"/>
+                  </a:lnTo>
+                  <a:lnTo>
+                    <a:pt x="5416525" y="1057166"/>
+                  </a:lnTo>
+                  <a:lnTo>
+                    <a:pt x="5486870" y="1059899"/>
+                  </a:lnTo>
+                  <a:lnTo>
+                    <a:pt x="5557214" y="1062594"/>
+                  </a:lnTo>
+                  <a:lnTo>
+                    <a:pt x="5627559" y="1065252"/>
+                  </a:lnTo>
+                  <a:lnTo>
+                    <a:pt x="5697903" y="1067874"/>
+                  </a:lnTo>
+                  <a:lnTo>
+                    <a:pt x="5768248" y="1070461"/>
+                  </a:lnTo>
+                  <a:lnTo>
+                    <a:pt x="5838592" y="1073012"/>
+                  </a:lnTo>
+                  <a:lnTo>
+                    <a:pt x="5908937" y="1075528"/>
+                  </a:lnTo>
+                  <a:lnTo>
+                    <a:pt x="5979281" y="1078009"/>
+                  </a:lnTo>
+                  <a:lnTo>
+                    <a:pt x="6049626" y="1080457"/>
+                  </a:lnTo>
+                  <a:lnTo>
+                    <a:pt x="6119970" y="1082872"/>
+                  </a:lnTo>
+                  <a:lnTo>
+                    <a:pt x="6190315" y="1085253"/>
+                  </a:lnTo>
+                  <a:lnTo>
+                    <a:pt x="6260659" y="1087602"/>
+                  </a:lnTo>
+                  <a:lnTo>
+                    <a:pt x="6331004" y="1089919"/>
+                  </a:lnTo>
+                  <a:lnTo>
+                    <a:pt x="6401348" y="1092204"/>
+                  </a:lnTo>
+                  <a:lnTo>
+                    <a:pt x="6471693" y="1094458"/>
+                  </a:lnTo>
+                  <a:lnTo>
+                    <a:pt x="6542037" y="1096681"/>
+                  </a:lnTo>
+                  <a:lnTo>
+                    <a:pt x="6612382" y="1098874"/>
+                  </a:lnTo>
+                  <a:lnTo>
+                    <a:pt x="6682726" y="1101037"/>
+                  </a:lnTo>
+                  <a:lnTo>
+                    <a:pt x="6753071" y="1103170"/>
+                  </a:lnTo>
+                  <a:lnTo>
+                    <a:pt x="6823415" y="1105274"/>
+                  </a:lnTo>
+                  <a:lnTo>
+                    <a:pt x="6893760" y="1107349"/>
+                  </a:lnTo>
+                  <a:lnTo>
+                    <a:pt x="6964104" y="1109396"/>
+                  </a:lnTo>
+                  <a:lnTo>
+                    <a:pt x="6964104" y="1213896"/>
+                  </a:lnTo>
+                  <a:lnTo>
+                    <a:pt x="6893760" y="1212233"/>
+                  </a:lnTo>
+                  <a:lnTo>
+                    <a:pt x="6823415" y="1210506"/>
+                  </a:lnTo>
+                  <a:lnTo>
+                    <a:pt x="6753071" y="1208713"/>
+                  </a:lnTo>
+                  <a:lnTo>
+                    <a:pt x="6682726" y="1206851"/>
+                  </a:lnTo>
+                  <a:lnTo>
+                    <a:pt x="6612382" y="1204918"/>
+                  </a:lnTo>
+                  <a:lnTo>
+                    <a:pt x="6542037" y="1202910"/>
+                  </a:lnTo>
+                  <a:lnTo>
+                    <a:pt x="6471693" y="1200825"/>
+                  </a:lnTo>
+                  <a:lnTo>
+                    <a:pt x="6401348" y="1198660"/>
+                  </a:lnTo>
+                  <a:lnTo>
+                    <a:pt x="6331004" y="1196412"/>
+                  </a:lnTo>
+                  <a:lnTo>
+                    <a:pt x="6260659" y="1194077"/>
+                  </a:lnTo>
+                  <a:lnTo>
+                    <a:pt x="6190315" y="1191653"/>
+                  </a:lnTo>
+                  <a:lnTo>
+                    <a:pt x="6119970" y="1189136"/>
+                  </a:lnTo>
+                  <a:lnTo>
+                    <a:pt x="6049626" y="1186522"/>
+                  </a:lnTo>
+                  <a:lnTo>
+                    <a:pt x="5979281" y="1183808"/>
+                  </a:lnTo>
+                  <a:lnTo>
+                    <a:pt x="5908937" y="1180990"/>
+                  </a:lnTo>
+                  <a:lnTo>
+                    <a:pt x="5838592" y="1178063"/>
+                  </a:lnTo>
+                  <a:lnTo>
+                    <a:pt x="5768248" y="1175024"/>
+                  </a:lnTo>
+                  <a:lnTo>
+                    <a:pt x="5697903" y="1171868"/>
+                  </a:lnTo>
+                  <a:lnTo>
+                    <a:pt x="5627559" y="1168591"/>
+                  </a:lnTo>
+                  <a:lnTo>
+                    <a:pt x="5557214" y="1165188"/>
+                  </a:lnTo>
+                  <a:lnTo>
+                    <a:pt x="5486870" y="1161655"/>
+                  </a:lnTo>
+                  <a:lnTo>
+                    <a:pt x="5416525" y="1157986"/>
+                  </a:lnTo>
+                  <a:lnTo>
+                    <a:pt x="5346181" y="1154175"/>
+                  </a:lnTo>
+                  <a:lnTo>
+                    <a:pt x="5275836" y="1150219"/>
+                  </a:lnTo>
+                  <a:lnTo>
+                    <a:pt x="5205492" y="1146111"/>
+                  </a:lnTo>
+                  <a:lnTo>
+                    <a:pt x="5135147" y="1141845"/>
+                  </a:lnTo>
+                  <a:lnTo>
+                    <a:pt x="5064803" y="1137415"/>
+                  </a:lnTo>
+                  <a:lnTo>
+                    <a:pt x="4994458" y="1132815"/>
+                  </a:lnTo>
+                  <a:lnTo>
+                    <a:pt x="4924114" y="1128038"/>
+                  </a:lnTo>
+                  <a:lnTo>
+                    <a:pt x="4853769" y="1123078"/>
+                  </a:lnTo>
+                  <a:lnTo>
+                    <a:pt x="4783425" y="1117927"/>
+                  </a:lnTo>
+                  <a:lnTo>
+                    <a:pt x="4713080" y="1112579"/>
+                  </a:lnTo>
+                  <a:lnTo>
+                    <a:pt x="4642736" y="1107025"/>
+                  </a:lnTo>
+                  <a:lnTo>
+                    <a:pt x="4572391" y="1101258"/>
+                  </a:lnTo>
+                  <a:lnTo>
+                    <a:pt x="4502047" y="1095270"/>
+                  </a:lnTo>
+                  <a:lnTo>
+                    <a:pt x="4431702" y="1089051"/>
+                  </a:lnTo>
+                  <a:lnTo>
+                    <a:pt x="4361358" y="1082594"/>
+                  </a:lnTo>
+                  <a:lnTo>
+                    <a:pt x="4291013" y="1075889"/>
+                  </a:lnTo>
+                  <a:lnTo>
+                    <a:pt x="4220669" y="1068926"/>
+                  </a:lnTo>
+                  <a:lnTo>
+                    <a:pt x="4150324" y="1061696"/>
+                  </a:lnTo>
+                  <a:lnTo>
+                    <a:pt x="4079980" y="1054188"/>
+                  </a:lnTo>
+                  <a:lnTo>
+                    <a:pt x="4009635" y="1046392"/>
+                  </a:lnTo>
+                  <a:lnTo>
+                    <a:pt x="3939291" y="1038296"/>
+                  </a:lnTo>
+                  <a:lnTo>
+                    <a:pt x="3868946" y="1029890"/>
+                  </a:lnTo>
+                  <a:lnTo>
+                    <a:pt x="3798602" y="1021161"/>
+                  </a:lnTo>
+                  <a:lnTo>
+                    <a:pt x="3728257" y="1012097"/>
+                  </a:lnTo>
+                  <a:lnTo>
+                    <a:pt x="3657913" y="1002684"/>
+                  </a:lnTo>
+                  <a:lnTo>
+                    <a:pt x="3587569" y="992910"/>
+                  </a:lnTo>
+                  <a:lnTo>
+                    <a:pt x="3517224" y="982761"/>
+                  </a:lnTo>
+                  <a:lnTo>
+                    <a:pt x="3446880" y="972222"/>
+                  </a:lnTo>
+                  <a:lnTo>
+                    <a:pt x="3376535" y="961278"/>
+                  </a:lnTo>
+                  <a:lnTo>
+                    <a:pt x="3306191" y="954989"/>
+                  </a:lnTo>
+                  <a:lnTo>
+                    <a:pt x="3235846" y="950803"/>
+                  </a:lnTo>
+                  <a:lnTo>
+                    <a:pt x="3165502" y="946560"/>
+                  </a:lnTo>
+                  <a:lnTo>
+                    <a:pt x="3095157" y="942258"/>
+                  </a:lnTo>
+                  <a:lnTo>
+                    <a:pt x="3024813" y="937896"/>
+                  </a:lnTo>
+                  <a:lnTo>
+                    <a:pt x="2954468" y="933474"/>
+                  </a:lnTo>
+                  <a:lnTo>
+                    <a:pt x="2884124" y="928990"/>
+                  </a:lnTo>
+                  <a:lnTo>
+                    <a:pt x="2813779" y="924445"/>
+                  </a:lnTo>
+                  <a:lnTo>
+                    <a:pt x="2743435" y="919836"/>
+                  </a:lnTo>
+                  <a:lnTo>
+                    <a:pt x="2673090" y="915164"/>
+                  </a:lnTo>
+                  <a:lnTo>
+                    <a:pt x="2602746" y="910427"/>
+                  </a:lnTo>
+                  <a:lnTo>
+                    <a:pt x="2532401" y="905624"/>
+                  </a:lnTo>
+                  <a:lnTo>
+                    <a:pt x="2462057" y="900755"/>
+                  </a:lnTo>
+                  <a:lnTo>
+                    <a:pt x="2391712" y="895818"/>
+                  </a:lnTo>
+                  <a:lnTo>
+                    <a:pt x="2321368" y="890813"/>
+                  </a:lnTo>
+                  <a:lnTo>
+                    <a:pt x="2251023" y="885739"/>
+                  </a:lnTo>
+                  <a:lnTo>
+                    <a:pt x="2180679" y="880594"/>
+                  </a:lnTo>
+                  <a:lnTo>
+                    <a:pt x="2110334" y="875378"/>
+                  </a:lnTo>
+                  <a:lnTo>
+                    <a:pt x="2039990" y="870090"/>
+                  </a:lnTo>
+                  <a:lnTo>
+                    <a:pt x="1969645" y="864729"/>
+                  </a:lnTo>
+                  <a:lnTo>
+                    <a:pt x="1899301" y="859293"/>
+                  </a:lnTo>
+                  <a:lnTo>
+                    <a:pt x="1828956" y="853783"/>
+                  </a:lnTo>
+                  <a:lnTo>
+                    <a:pt x="1758612" y="848195"/>
+                  </a:lnTo>
+                  <a:lnTo>
+                    <a:pt x="1688267" y="842531"/>
+                  </a:lnTo>
+                  <a:lnTo>
+                    <a:pt x="1617923" y="836788"/>
+                  </a:lnTo>
+                  <a:lnTo>
+                    <a:pt x="1547578" y="830965"/>
+                  </a:lnTo>
+                  <a:lnTo>
+                    <a:pt x="1477234" y="825062"/>
+                  </a:lnTo>
+                  <a:lnTo>
+                    <a:pt x="1406889" y="819077"/>
+                  </a:lnTo>
+                  <a:lnTo>
+                    <a:pt x="1336545" y="813009"/>
+                  </a:lnTo>
+                  <a:lnTo>
+                    <a:pt x="1266200" y="806857"/>
+                  </a:lnTo>
+                  <a:lnTo>
+                    <a:pt x="1195856" y="800620"/>
+                  </a:lnTo>
+                  <a:lnTo>
+                    <a:pt x="1125511" y="794297"/>
+                  </a:lnTo>
+                  <a:lnTo>
+                    <a:pt x="1055167" y="787886"/>
+                  </a:lnTo>
+                  <a:lnTo>
+                    <a:pt x="984822" y="781386"/>
+                  </a:lnTo>
+                  <a:lnTo>
+                    <a:pt x="914478" y="774796"/>
+                  </a:lnTo>
+                  <a:lnTo>
+                    <a:pt x="844133" y="768115"/>
+                  </a:lnTo>
+                  <a:lnTo>
+                    <a:pt x="773789" y="761342"/>
+                  </a:lnTo>
+                  <a:lnTo>
+                    <a:pt x="703444" y="754474"/>
+                  </a:lnTo>
+                  <a:lnTo>
+                    <a:pt x="633100" y="747512"/>
+                  </a:lnTo>
+                  <a:lnTo>
+                    <a:pt x="562755" y="740453"/>
+                  </a:lnTo>
+                  <a:lnTo>
+                    <a:pt x="492411" y="733296"/>
+                  </a:lnTo>
+                  <a:lnTo>
+                    <a:pt x="422066" y="726040"/>
+                  </a:lnTo>
+                  <a:lnTo>
+                    <a:pt x="351722" y="718684"/>
+                  </a:lnTo>
+                  <a:lnTo>
+                    <a:pt x="281377" y="711225"/>
+                  </a:lnTo>
+                  <a:lnTo>
+                    <a:pt x="211033" y="703664"/>
+                  </a:lnTo>
+                  <a:lnTo>
+                    <a:pt x="140688" y="695998"/>
+                  </a:lnTo>
+                  <a:lnTo>
+                    <a:pt x="70344" y="688225"/>
+                  </a:lnTo>
+                  <a:lnTo>
+                    <a:pt x="0" y="680345"/>
                   </a:lnTo>
                   <a:close/>
                 </a:path>
@@ -3557,616 +3592,291 @@
         </p:sp>
         <p:sp>
           <p:nvSpPr>
-            <p:cNvPr id="21" name="pl21"/>
-            <p:cNvSpPr/>
-            <p:nvPr/>
-          </p:nvSpPr>
-          <p:spPr>
-            <a:xfrm>
-              <a:off x="1860845" y="2073503"/>
-              <a:ext cx="6401833" cy="3074173"/>
-            </a:xfrm>
-            <a:custGeom>
-              <a:avLst/>
-              <a:pathLst>
-                <a:path w="6401833" h="3074173">
-                  <a:moveTo>
-                    <a:pt x="0" y="0"/>
-                  </a:moveTo>
-                  <a:lnTo>
-                    <a:pt x="27429" y="50491"/>
-                  </a:lnTo>
-                  <a:lnTo>
-                    <a:pt x="99051" y="177458"/>
-                  </a:lnTo>
-                  <a:lnTo>
-                    <a:pt x="170674" y="299730"/>
-                  </a:lnTo>
-                  <a:lnTo>
-                    <a:pt x="242296" y="417480"/>
-                  </a:lnTo>
-                  <a:lnTo>
-                    <a:pt x="313919" y="530875"/>
-                  </a:lnTo>
-                  <a:lnTo>
-                    <a:pt x="385541" y="640077"/>
-                  </a:lnTo>
-                  <a:lnTo>
-                    <a:pt x="457164" y="745240"/>
-                  </a:lnTo>
-                  <a:lnTo>
-                    <a:pt x="528786" y="846514"/>
-                  </a:lnTo>
-                  <a:lnTo>
-                    <a:pt x="600409" y="944043"/>
-                  </a:lnTo>
-                  <a:lnTo>
-                    <a:pt x="672031" y="1037966"/>
-                  </a:lnTo>
-                  <a:lnTo>
-                    <a:pt x="743654" y="1128414"/>
-                  </a:lnTo>
-                  <a:lnTo>
-                    <a:pt x="815276" y="1215518"/>
-                  </a:lnTo>
-                  <a:lnTo>
-                    <a:pt x="886899" y="1299401"/>
-                  </a:lnTo>
-                  <a:lnTo>
-                    <a:pt x="958521" y="1380181"/>
-                  </a:lnTo>
-                  <a:lnTo>
-                    <a:pt x="1030144" y="1457975"/>
-                  </a:lnTo>
-                  <a:lnTo>
-                    <a:pt x="1101766" y="1532891"/>
-                  </a:lnTo>
-                  <a:lnTo>
-                    <a:pt x="1173389" y="1605037"/>
-                  </a:lnTo>
-                  <a:lnTo>
-                    <a:pt x="1245011" y="1674514"/>
-                  </a:lnTo>
-                  <a:lnTo>
-                    <a:pt x="1316634" y="1741422"/>
-                  </a:lnTo>
-                  <a:lnTo>
-                    <a:pt x="1388257" y="1805856"/>
-                  </a:lnTo>
-                  <a:lnTo>
-                    <a:pt x="1459879" y="1867907"/>
-                  </a:lnTo>
-                  <a:lnTo>
-                    <a:pt x="1531502" y="1927664"/>
-                  </a:lnTo>
-                  <a:lnTo>
-                    <a:pt x="1603124" y="1985210"/>
-                  </a:lnTo>
-                  <a:lnTo>
-                    <a:pt x="1674747" y="2040628"/>
-                  </a:lnTo>
-                  <a:lnTo>
-                    <a:pt x="1746369" y="2093997"/>
-                  </a:lnTo>
-                  <a:lnTo>
-                    <a:pt x="1817992" y="2145392"/>
-                  </a:lnTo>
-                  <a:lnTo>
-                    <a:pt x="1889614" y="2194886"/>
-                  </a:lnTo>
-                  <a:lnTo>
-                    <a:pt x="1961237" y="2242551"/>
-                  </a:lnTo>
-                  <a:lnTo>
-                    <a:pt x="2032859" y="2288452"/>
-                  </a:lnTo>
-                  <a:lnTo>
-                    <a:pt x="2104482" y="2332656"/>
-                  </a:lnTo>
-                  <a:lnTo>
-                    <a:pt x="2176104" y="2375225"/>
-                  </a:lnTo>
-                  <a:lnTo>
-                    <a:pt x="2247727" y="2416220"/>
-                  </a:lnTo>
-                  <a:lnTo>
-                    <a:pt x="2319349" y="2455699"/>
-                  </a:lnTo>
-                  <a:lnTo>
-                    <a:pt x="2390972" y="2493717"/>
-                  </a:lnTo>
-                  <a:lnTo>
-                    <a:pt x="2462594" y="2530330"/>
-                  </a:lnTo>
-                  <a:lnTo>
-                    <a:pt x="2534217" y="2565589"/>
-                  </a:lnTo>
-                  <a:lnTo>
-                    <a:pt x="2605839" y="2599544"/>
-                  </a:lnTo>
-                  <a:lnTo>
-                    <a:pt x="2677462" y="2632243"/>
-                  </a:lnTo>
-                  <a:lnTo>
-                    <a:pt x="2749085" y="2657745"/>
-                  </a:lnTo>
-                  <a:lnTo>
-                    <a:pt x="2820707" y="2669028"/>
-                  </a:lnTo>
-                  <a:lnTo>
-                    <a:pt x="2892330" y="2680158"/>
-                  </a:lnTo>
-                  <a:lnTo>
-                    <a:pt x="2963952" y="2691135"/>
-                  </a:lnTo>
-                  <a:lnTo>
-                    <a:pt x="3035575" y="2701962"/>
-                  </a:lnTo>
-                  <a:lnTo>
-                    <a:pt x="3107197" y="2712642"/>
-                  </a:lnTo>
-                  <a:lnTo>
-                    <a:pt x="3178820" y="2723175"/>
-                  </a:lnTo>
-                  <a:lnTo>
-                    <a:pt x="3250442" y="2733565"/>
-                  </a:lnTo>
-                  <a:lnTo>
-                    <a:pt x="3322065" y="2743813"/>
-                  </a:lnTo>
-                  <a:lnTo>
-                    <a:pt x="3393687" y="2753920"/>
-                  </a:lnTo>
-                  <a:lnTo>
-                    <a:pt x="3465310" y="2763890"/>
-                  </a:lnTo>
-                  <a:lnTo>
-                    <a:pt x="3536932" y="2773724"/>
-                  </a:lnTo>
-                  <a:lnTo>
-                    <a:pt x="3608555" y="2783423"/>
-                  </a:lnTo>
-                  <a:lnTo>
-                    <a:pt x="3680177" y="2792989"/>
-                  </a:lnTo>
-                  <a:lnTo>
-                    <a:pt x="3751800" y="2802425"/>
-                  </a:lnTo>
-                  <a:lnTo>
-                    <a:pt x="3823422" y="2811733"/>
-                  </a:lnTo>
-                  <a:lnTo>
-                    <a:pt x="3895045" y="2820912"/>
-                  </a:lnTo>
-                  <a:lnTo>
-                    <a:pt x="3966667" y="2829967"/>
-                  </a:lnTo>
-                  <a:lnTo>
-                    <a:pt x="4038290" y="2838898"/>
-                  </a:lnTo>
-                  <a:lnTo>
-                    <a:pt x="4109913" y="2847707"/>
-                  </a:lnTo>
-                  <a:lnTo>
-                    <a:pt x="4181535" y="2856395"/>
-                  </a:lnTo>
-                  <a:lnTo>
-                    <a:pt x="4253158" y="2864965"/>
-                  </a:lnTo>
-                  <a:lnTo>
-                    <a:pt x="4324780" y="2873418"/>
-                  </a:lnTo>
-                  <a:lnTo>
-                    <a:pt x="4396403" y="2881755"/>
-                  </a:lnTo>
-                  <a:lnTo>
-                    <a:pt x="4468025" y="2889979"/>
-                  </a:lnTo>
-                  <a:lnTo>
-                    <a:pt x="4539648" y="2898090"/>
-                  </a:lnTo>
-                  <a:lnTo>
-                    <a:pt x="4611270" y="2906090"/>
-                  </a:lnTo>
-                  <a:lnTo>
-                    <a:pt x="4682893" y="2913981"/>
-                  </a:lnTo>
-                  <a:lnTo>
-                    <a:pt x="4754515" y="2921764"/>
-                  </a:lnTo>
-                  <a:lnTo>
-                    <a:pt x="4826138" y="2929441"/>
-                  </a:lnTo>
-                  <a:lnTo>
-                    <a:pt x="4897760" y="2937013"/>
-                  </a:lnTo>
-                  <a:lnTo>
-                    <a:pt x="4969383" y="2944482"/>
-                  </a:lnTo>
-                  <a:lnTo>
-                    <a:pt x="5041005" y="2951848"/>
-                  </a:lnTo>
-                  <a:lnTo>
-                    <a:pt x="5112628" y="2959114"/>
-                  </a:lnTo>
-                  <a:lnTo>
-                    <a:pt x="5184250" y="2966281"/>
-                  </a:lnTo>
-                  <a:lnTo>
-                    <a:pt x="5255873" y="2973349"/>
-                  </a:lnTo>
-                  <a:lnTo>
-                    <a:pt x="5327495" y="2980322"/>
-                  </a:lnTo>
-                  <a:lnTo>
-                    <a:pt x="5399118" y="2987199"/>
-                  </a:lnTo>
-                  <a:lnTo>
-                    <a:pt x="5470741" y="2993982"/>
-                  </a:lnTo>
-                  <a:lnTo>
-                    <a:pt x="5542363" y="3000672"/>
-                  </a:lnTo>
-                  <a:lnTo>
-                    <a:pt x="5613986" y="3007271"/>
-                  </a:lnTo>
-                  <a:lnTo>
-                    <a:pt x="5685608" y="3013780"/>
-                  </a:lnTo>
-                  <a:lnTo>
-                    <a:pt x="5757231" y="3020200"/>
-                  </a:lnTo>
-                  <a:lnTo>
-                    <a:pt x="5828853" y="3026532"/>
-                  </a:lnTo>
-                  <a:lnTo>
-                    <a:pt x="5900476" y="3032778"/>
-                  </a:lnTo>
-                  <a:lnTo>
-                    <a:pt x="5972098" y="3038938"/>
-                  </a:lnTo>
-                  <a:lnTo>
-                    <a:pt x="6043721" y="3045014"/>
-                  </a:lnTo>
-                  <a:lnTo>
-                    <a:pt x="6115343" y="3051008"/>
-                  </a:lnTo>
-                  <a:lnTo>
-                    <a:pt x="6186966" y="3056919"/>
-                  </a:lnTo>
-                  <a:lnTo>
-                    <a:pt x="6258588" y="3062749"/>
-                  </a:lnTo>
-                  <a:lnTo>
-                    <a:pt x="6330211" y="3068500"/>
-                  </a:lnTo>
-                  <a:lnTo>
-                    <a:pt x="6401833" y="3074173"/>
-                  </a:lnTo>
-                </a:path>
-              </a:pathLst>
-            </a:custGeom>
-          </p:spPr>
-          <p:txBody>
-            <a:bodyPr/>
-            <a:lstStyle/>
-            <a:p/>
-          </p:txBody>
-        </p:sp>
-        <p:sp>
-          <p:nvSpPr>
             <p:cNvPr id="22" name="pl22"/>
             <p:cNvSpPr/>
             <p:nvPr/>
           </p:nvSpPr>
           <p:spPr>
             <a:xfrm>
-              <a:off x="1172049" y="3958762"/>
-              <a:ext cx="7090630" cy="1478486"/>
+              <a:off x="1911817" y="2143092"/>
+              <a:ext cx="6287599" cy="1109396"/>
             </a:xfrm>
             <a:custGeom>
               <a:avLst/>
               <a:pathLst>
-                <a:path w="7090630" h="1478486">
+                <a:path w="6287599" h="1109396">
                   <a:moveTo>
-                    <a:pt x="7090630" y="1478486"/>
+                    <a:pt x="0" y="0"/>
                   </a:moveTo>
                   <a:lnTo>
-                    <a:pt x="7019007" y="1473878"/>
-                  </a:lnTo>
-                  <a:lnTo>
-                    <a:pt x="6947385" y="1469093"/>
-                  </a:lnTo>
-                  <a:lnTo>
-                    <a:pt x="6875762" y="1464124"/>
-                  </a:lnTo>
-                  <a:lnTo>
-                    <a:pt x="6804139" y="1458964"/>
-                  </a:lnTo>
-                  <a:lnTo>
-                    <a:pt x="6732517" y="1453606"/>
-                  </a:lnTo>
-                  <a:lnTo>
-                    <a:pt x="6660894" y="1448042"/>
-                  </a:lnTo>
-                  <a:lnTo>
-                    <a:pt x="6589272" y="1442265"/>
-                  </a:lnTo>
-                  <a:lnTo>
-                    <a:pt x="6517649" y="1436266"/>
-                  </a:lnTo>
-                  <a:lnTo>
-                    <a:pt x="6446027" y="1430036"/>
-                  </a:lnTo>
-                  <a:lnTo>
-                    <a:pt x="6374404" y="1423567"/>
-                  </a:lnTo>
-                  <a:lnTo>
-                    <a:pt x="6302782" y="1416850"/>
-                  </a:lnTo>
-                  <a:lnTo>
-                    <a:pt x="6231159" y="1409875"/>
-                  </a:lnTo>
-                  <a:lnTo>
-                    <a:pt x="6159537" y="1402632"/>
-                  </a:lnTo>
-                  <a:lnTo>
-                    <a:pt x="6087914" y="1395111"/>
-                  </a:lnTo>
-                  <a:lnTo>
-                    <a:pt x="6016292" y="1387301"/>
-                  </a:lnTo>
-                  <a:lnTo>
-                    <a:pt x="5944669" y="1379191"/>
-                  </a:lnTo>
-                  <a:lnTo>
-                    <a:pt x="5873047" y="1370769"/>
-                  </a:lnTo>
-                  <a:lnTo>
-                    <a:pt x="5801424" y="1362025"/>
-                  </a:lnTo>
-                  <a:lnTo>
-                    <a:pt x="5729802" y="1352944"/>
-                  </a:lnTo>
-                  <a:lnTo>
-                    <a:pt x="5658179" y="1343515"/>
-                  </a:lnTo>
-                  <a:lnTo>
-                    <a:pt x="5586557" y="1333723"/>
-                  </a:lnTo>
-                  <a:lnTo>
-                    <a:pt x="5514934" y="1323556"/>
-                  </a:lnTo>
-                  <a:lnTo>
-                    <a:pt x="5443311" y="1312998"/>
-                  </a:lnTo>
-                  <a:lnTo>
-                    <a:pt x="5371689" y="1302035"/>
-                  </a:lnTo>
-                  <a:lnTo>
-                    <a:pt x="5300066" y="1290651"/>
-                  </a:lnTo>
-                  <a:lnTo>
-                    <a:pt x="5228444" y="1278829"/>
-                  </a:lnTo>
-                  <a:lnTo>
-                    <a:pt x="5156821" y="1266554"/>
-                  </a:lnTo>
-                  <a:lnTo>
-                    <a:pt x="5085199" y="1253807"/>
-                  </a:lnTo>
-                  <a:lnTo>
-                    <a:pt x="5013576" y="1240571"/>
-                  </a:lnTo>
-                  <a:lnTo>
-                    <a:pt x="4941954" y="1226826"/>
-                  </a:lnTo>
-                  <a:lnTo>
-                    <a:pt x="4870331" y="1212553"/>
-                  </a:lnTo>
-                  <a:lnTo>
-                    <a:pt x="4798709" y="1197733"/>
-                  </a:lnTo>
-                  <a:lnTo>
-                    <a:pt x="4727086" y="1182343"/>
-                  </a:lnTo>
-                  <a:lnTo>
-                    <a:pt x="4655464" y="1166363"/>
-                  </a:lnTo>
-                  <a:lnTo>
-                    <a:pt x="4583841" y="1149768"/>
-                  </a:lnTo>
-                  <a:lnTo>
-                    <a:pt x="4512219" y="1132537"/>
-                  </a:lnTo>
-                  <a:lnTo>
-                    <a:pt x="4440596" y="1114643"/>
-                  </a:lnTo>
-                  <a:lnTo>
-                    <a:pt x="4368974" y="1096063"/>
-                  </a:lnTo>
-                  <a:lnTo>
-                    <a:pt x="4297351" y="1076769"/>
-                  </a:lnTo>
-                  <a:lnTo>
-                    <a:pt x="4225729" y="1056734"/>
-                  </a:lnTo>
-                  <a:lnTo>
-                    <a:pt x="4154106" y="1035930"/>
-                  </a:lnTo>
-                  <a:lnTo>
-                    <a:pt x="4082483" y="1014327"/>
-                  </a:lnTo>
-                  <a:lnTo>
-                    <a:pt x="4010861" y="991894"/>
-                  </a:lnTo>
-                  <a:lnTo>
-                    <a:pt x="3939238" y="968600"/>
-                  </a:lnTo>
-                  <a:lnTo>
-                    <a:pt x="3867616" y="944411"/>
-                  </a:lnTo>
-                  <a:lnTo>
-                    <a:pt x="3795993" y="919293"/>
-                  </a:lnTo>
-                  <a:lnTo>
-                    <a:pt x="3724371" y="893211"/>
-                  </a:lnTo>
-                  <a:lnTo>
-                    <a:pt x="3652748" y="866127"/>
-                  </a:lnTo>
-                  <a:lnTo>
-                    <a:pt x="3581126" y="838003"/>
-                  </a:lnTo>
-                  <a:lnTo>
-                    <a:pt x="3509503" y="808799"/>
-                  </a:lnTo>
-                  <a:lnTo>
-                    <a:pt x="3437881" y="778474"/>
-                  </a:lnTo>
-                  <a:lnTo>
-                    <a:pt x="3366258" y="761046"/>
-                  </a:lnTo>
-                  <a:lnTo>
-                    <a:pt x="3294636" y="749448"/>
-                  </a:lnTo>
-                  <a:lnTo>
-                    <a:pt x="3223013" y="737689"/>
-                  </a:lnTo>
-                  <a:lnTo>
-                    <a:pt x="3151391" y="725767"/>
-                  </a:lnTo>
-                  <a:lnTo>
-                    <a:pt x="3079768" y="713681"/>
-                  </a:lnTo>
-                  <a:lnTo>
-                    <a:pt x="3008146" y="701426"/>
-                  </a:lnTo>
-                  <a:lnTo>
-                    <a:pt x="2936523" y="689003"/>
-                  </a:lnTo>
-                  <a:lnTo>
-                    <a:pt x="2864901" y="676407"/>
-                  </a:lnTo>
-                  <a:lnTo>
-                    <a:pt x="2793278" y="663636"/>
-                  </a:lnTo>
-                  <a:lnTo>
-                    <a:pt x="2721655" y="650689"/>
-                  </a:lnTo>
-                  <a:lnTo>
-                    <a:pt x="2650033" y="637562"/>
-                  </a:lnTo>
-                  <a:lnTo>
-                    <a:pt x="2578410" y="624254"/>
-                  </a:lnTo>
-                  <a:lnTo>
-                    <a:pt x="2506788" y="610761"/>
-                  </a:lnTo>
-                  <a:lnTo>
-                    <a:pt x="2435165" y="597082"/>
-                  </a:lnTo>
-                  <a:lnTo>
-                    <a:pt x="2363543" y="583213"/>
-                  </a:lnTo>
-                  <a:lnTo>
-                    <a:pt x="2291920" y="569152"/>
-                  </a:lnTo>
-                  <a:lnTo>
-                    <a:pt x="2220298" y="554896"/>
-                  </a:lnTo>
-                  <a:lnTo>
-                    <a:pt x="2148675" y="540443"/>
-                  </a:lnTo>
-                  <a:lnTo>
-                    <a:pt x="2077053" y="525789"/>
-                  </a:lnTo>
-                  <a:lnTo>
-                    <a:pt x="2005430" y="510933"/>
-                  </a:lnTo>
-                  <a:lnTo>
-                    <a:pt x="1933808" y="495871"/>
-                  </a:lnTo>
-                  <a:lnTo>
-                    <a:pt x="1862185" y="480600"/>
-                  </a:lnTo>
-                  <a:lnTo>
-                    <a:pt x="1790563" y="465118"/>
-                  </a:lnTo>
-                  <a:lnTo>
-                    <a:pt x="1718940" y="449421"/>
-                  </a:lnTo>
-                  <a:lnTo>
-                    <a:pt x="1647318" y="433507"/>
-                  </a:lnTo>
-                  <a:lnTo>
-                    <a:pt x="1575695" y="417373"/>
-                  </a:lnTo>
-                  <a:lnTo>
-                    <a:pt x="1504073" y="401015"/>
-                  </a:lnTo>
-                  <a:lnTo>
-                    <a:pt x="1432450" y="384430"/>
-                  </a:lnTo>
-                  <a:lnTo>
-                    <a:pt x="1360827" y="367616"/>
-                  </a:lnTo>
-                  <a:lnTo>
-                    <a:pt x="1289205" y="350569"/>
-                  </a:lnTo>
-                  <a:lnTo>
-                    <a:pt x="1217582" y="333286"/>
-                  </a:lnTo>
-                  <a:lnTo>
-                    <a:pt x="1145960" y="315763"/>
-                  </a:lnTo>
-                  <a:lnTo>
-                    <a:pt x="1074337" y="297998"/>
-                  </a:lnTo>
-                  <a:lnTo>
-                    <a:pt x="1002715" y="279987"/>
-                  </a:lnTo>
-                  <a:lnTo>
-                    <a:pt x="931092" y="261727"/>
-                  </a:lnTo>
-                  <a:lnTo>
-                    <a:pt x="859470" y="243213"/>
-                  </a:lnTo>
-                  <a:lnTo>
-                    <a:pt x="787847" y="224443"/>
-                  </a:lnTo>
-                  <a:lnTo>
-                    <a:pt x="716225" y="205413"/>
-                  </a:lnTo>
-                  <a:lnTo>
-                    <a:pt x="644602" y="186120"/>
-                  </a:lnTo>
-                  <a:lnTo>
-                    <a:pt x="572980" y="166559"/>
-                  </a:lnTo>
-                  <a:lnTo>
-                    <a:pt x="501357" y="146728"/>
-                  </a:lnTo>
-                  <a:lnTo>
-                    <a:pt x="429735" y="126621"/>
-                  </a:lnTo>
-                  <a:lnTo>
-                    <a:pt x="358112" y="106237"/>
-                  </a:lnTo>
-                  <a:lnTo>
-                    <a:pt x="286490" y="85570"/>
-                  </a:lnTo>
-                  <a:lnTo>
-                    <a:pt x="214867" y="64616"/>
-                  </a:lnTo>
-                  <a:lnTo>
-                    <a:pt x="143245" y="43373"/>
-                  </a:lnTo>
-                  <a:lnTo>
-                    <a:pt x="71622" y="21835"/>
-                  </a:lnTo>
-                  <a:lnTo>
-                    <a:pt x="0" y="0"/>
+                    <a:pt x="26939" y="18221"/>
+                  </a:lnTo>
+                  <a:lnTo>
+                    <a:pt x="97284" y="64040"/>
+                  </a:lnTo>
+                  <a:lnTo>
+                    <a:pt x="167628" y="108165"/>
+                  </a:lnTo>
+                  <a:lnTo>
+                    <a:pt x="237973" y="150658"/>
+                  </a:lnTo>
+                  <a:lnTo>
+                    <a:pt x="308317" y="191580"/>
+                  </a:lnTo>
+                  <a:lnTo>
+                    <a:pt x="378662" y="230988"/>
+                  </a:lnTo>
+                  <a:lnTo>
+                    <a:pt x="449006" y="268939"/>
+                  </a:lnTo>
+                  <a:lnTo>
+                    <a:pt x="519351" y="305487"/>
+                  </a:lnTo>
+                  <a:lnTo>
+                    <a:pt x="589695" y="340683"/>
+                  </a:lnTo>
+                  <a:lnTo>
+                    <a:pt x="660039" y="374577"/>
+                  </a:lnTo>
+                  <a:lnTo>
+                    <a:pt x="730384" y="407218"/>
+                  </a:lnTo>
+                  <a:lnTo>
+                    <a:pt x="800728" y="438652"/>
+                  </a:lnTo>
+                  <a:lnTo>
+                    <a:pt x="871073" y="468923"/>
+                  </a:lnTo>
+                  <a:lnTo>
+                    <a:pt x="941417" y="498075"/>
+                  </a:lnTo>
+                  <a:lnTo>
+                    <a:pt x="1011762" y="526148"/>
+                  </a:lnTo>
+                  <a:lnTo>
+                    <a:pt x="1082106" y="553184"/>
+                  </a:lnTo>
+                  <a:lnTo>
+                    <a:pt x="1152451" y="579220"/>
+                  </a:lnTo>
+                  <a:lnTo>
+                    <a:pt x="1222795" y="604292"/>
+                  </a:lnTo>
+                  <a:lnTo>
+                    <a:pt x="1293140" y="628438"/>
+                  </a:lnTo>
+                  <a:lnTo>
+                    <a:pt x="1363484" y="651691"/>
+                  </a:lnTo>
+                  <a:lnTo>
+                    <a:pt x="1433829" y="674083"/>
+                  </a:lnTo>
+                  <a:lnTo>
+                    <a:pt x="1504173" y="695648"/>
+                  </a:lnTo>
+                  <a:lnTo>
+                    <a:pt x="1574518" y="716415"/>
+                  </a:lnTo>
+                  <a:lnTo>
+                    <a:pt x="1644862" y="736414"/>
+                  </a:lnTo>
+                  <a:lnTo>
+                    <a:pt x="1715207" y="755674"/>
+                  </a:lnTo>
+                  <a:lnTo>
+                    <a:pt x="1785551" y="774221"/>
+                  </a:lnTo>
+                  <a:lnTo>
+                    <a:pt x="1855896" y="792083"/>
+                  </a:lnTo>
+                  <a:lnTo>
+                    <a:pt x="1926240" y="809283"/>
+                  </a:lnTo>
+                  <a:lnTo>
+                    <a:pt x="1996585" y="825848"/>
+                  </a:lnTo>
+                  <a:lnTo>
+                    <a:pt x="2066929" y="841800"/>
+                  </a:lnTo>
+                  <a:lnTo>
+                    <a:pt x="2137274" y="857162"/>
+                  </a:lnTo>
+                  <a:lnTo>
+                    <a:pt x="2207618" y="871957"/>
+                  </a:lnTo>
+                  <a:lnTo>
+                    <a:pt x="2277963" y="886204"/>
+                  </a:lnTo>
+                  <a:lnTo>
+                    <a:pt x="2348307" y="899924"/>
+                  </a:lnTo>
+                  <a:lnTo>
+                    <a:pt x="2418652" y="913136"/>
+                  </a:lnTo>
+                  <a:lnTo>
+                    <a:pt x="2488996" y="925860"/>
+                  </a:lnTo>
+                  <a:lnTo>
+                    <a:pt x="2559341" y="938114"/>
+                  </a:lnTo>
+                  <a:lnTo>
+                    <a:pt x="2629685" y="949914"/>
+                  </a:lnTo>
+                  <a:lnTo>
+                    <a:pt x="2700030" y="959117"/>
+                  </a:lnTo>
+                  <a:lnTo>
+                    <a:pt x="2770374" y="963189"/>
+                  </a:lnTo>
+                  <a:lnTo>
+                    <a:pt x="2840719" y="967206"/>
+                  </a:lnTo>
+                  <a:lnTo>
+                    <a:pt x="2911063" y="971167"/>
+                  </a:lnTo>
+                  <a:lnTo>
+                    <a:pt x="2981408" y="975074"/>
+                  </a:lnTo>
+                  <a:lnTo>
+                    <a:pt x="3051752" y="978928"/>
+                  </a:lnTo>
+                  <a:lnTo>
+                    <a:pt x="3122097" y="982730"/>
+                  </a:lnTo>
+                  <a:lnTo>
+                    <a:pt x="3192441" y="986479"/>
+                  </a:lnTo>
+                  <a:lnTo>
+                    <a:pt x="3262786" y="990177"/>
+                  </a:lnTo>
+                  <a:lnTo>
+                    <a:pt x="3333130" y="993825"/>
+                  </a:lnTo>
+                  <a:lnTo>
+                    <a:pt x="3403475" y="997423"/>
+                  </a:lnTo>
+                  <a:lnTo>
+                    <a:pt x="3473819" y="1000971"/>
+                  </a:lnTo>
+                  <a:lnTo>
+                    <a:pt x="3544164" y="1004471"/>
+                  </a:lnTo>
+                  <a:lnTo>
+                    <a:pt x="3614508" y="1007924"/>
+                  </a:lnTo>
+                  <a:lnTo>
+                    <a:pt x="3684853" y="1011329"/>
+                  </a:lnTo>
+                  <a:lnTo>
+                    <a:pt x="3755197" y="1014688"/>
+                  </a:lnTo>
+                  <a:lnTo>
+                    <a:pt x="3825542" y="1018001"/>
+                  </a:lnTo>
+                  <a:lnTo>
+                    <a:pt x="3895886" y="1021268"/>
+                  </a:lnTo>
+                  <a:lnTo>
+                    <a:pt x="3966231" y="1024491"/>
+                  </a:lnTo>
+                  <a:lnTo>
+                    <a:pt x="4036575" y="1027670"/>
+                  </a:lnTo>
+                  <a:lnTo>
+                    <a:pt x="4106920" y="1030806"/>
+                  </a:lnTo>
+                  <a:lnTo>
+                    <a:pt x="4177264" y="1033898"/>
+                  </a:lnTo>
+                  <a:lnTo>
+                    <a:pt x="4247609" y="1036949"/>
+                  </a:lnTo>
+                  <a:lnTo>
+                    <a:pt x="4317953" y="1039957"/>
+                  </a:lnTo>
+                  <a:lnTo>
+                    <a:pt x="4388297" y="1042925"/>
+                  </a:lnTo>
+                  <a:lnTo>
+                    <a:pt x="4458642" y="1045852"/>
+                  </a:lnTo>
+                  <a:lnTo>
+                    <a:pt x="4528986" y="1048739"/>
+                  </a:lnTo>
+                  <a:lnTo>
+                    <a:pt x="4599331" y="1051587"/>
+                  </a:lnTo>
+                  <a:lnTo>
+                    <a:pt x="4669675" y="1054396"/>
+                  </a:lnTo>
+                  <a:lnTo>
+                    <a:pt x="4740020" y="1057166"/>
+                  </a:lnTo>
+                  <a:lnTo>
+                    <a:pt x="4810364" y="1059899"/>
+                  </a:lnTo>
+                  <a:lnTo>
+                    <a:pt x="4880709" y="1062594"/>
+                  </a:lnTo>
+                  <a:lnTo>
+                    <a:pt x="4951053" y="1065252"/>
+                  </a:lnTo>
+                  <a:lnTo>
+                    <a:pt x="5021398" y="1067874"/>
+                  </a:lnTo>
+                  <a:lnTo>
+                    <a:pt x="5091742" y="1070461"/>
+                  </a:lnTo>
+                  <a:lnTo>
+                    <a:pt x="5162087" y="1073012"/>
+                  </a:lnTo>
+                  <a:lnTo>
+                    <a:pt x="5232431" y="1075528"/>
+                  </a:lnTo>
+                  <a:lnTo>
+                    <a:pt x="5302776" y="1078009"/>
+                  </a:lnTo>
+                  <a:lnTo>
+                    <a:pt x="5373120" y="1080457"/>
+                  </a:lnTo>
+                  <a:lnTo>
+                    <a:pt x="5443465" y="1082872"/>
+                  </a:lnTo>
+                  <a:lnTo>
+                    <a:pt x="5513809" y="1085253"/>
+                  </a:lnTo>
+                  <a:lnTo>
+                    <a:pt x="5584154" y="1087602"/>
+                  </a:lnTo>
+                  <a:lnTo>
+                    <a:pt x="5654498" y="1089919"/>
+                  </a:lnTo>
+                  <a:lnTo>
+                    <a:pt x="5724843" y="1092204"/>
+                  </a:lnTo>
+                  <a:lnTo>
+                    <a:pt x="5795187" y="1094458"/>
+                  </a:lnTo>
+                  <a:lnTo>
+                    <a:pt x="5865532" y="1096681"/>
+                  </a:lnTo>
+                  <a:lnTo>
+                    <a:pt x="5935876" y="1098874"/>
+                  </a:lnTo>
+                  <a:lnTo>
+                    <a:pt x="6006221" y="1101037"/>
+                  </a:lnTo>
+                  <a:lnTo>
+                    <a:pt x="6076565" y="1103170"/>
+                  </a:lnTo>
+                  <a:lnTo>
+                    <a:pt x="6146910" y="1105274"/>
+                  </a:lnTo>
+                  <a:lnTo>
+                    <a:pt x="6217254" y="1107349"/>
+                  </a:lnTo>
+                  <a:lnTo>
+                    <a:pt x="6287599" y="1109396"/>
                   </a:lnTo>
                 </a:path>
               </a:pathLst>
@@ -4186,312 +3896,637 @@
           </p:nvSpPr>
           <p:spPr>
             <a:xfrm>
-              <a:off x="1172049" y="2728889"/>
-              <a:ext cx="7090630" cy="2606663"/>
+              <a:off x="1235312" y="2823437"/>
+              <a:ext cx="6964104" cy="533551"/>
             </a:xfrm>
             <a:custGeom>
               <a:avLst/>
               <a:pathLst>
-                <a:path w="7090630" h="2606663">
+                <a:path w="6964104" h="533551">
+                  <a:moveTo>
+                    <a:pt x="6964104" y="533551"/>
+                  </a:moveTo>
+                  <a:lnTo>
+                    <a:pt x="6893760" y="531888"/>
+                  </a:lnTo>
+                  <a:lnTo>
+                    <a:pt x="6823415" y="530161"/>
+                  </a:lnTo>
+                  <a:lnTo>
+                    <a:pt x="6753071" y="528367"/>
+                  </a:lnTo>
+                  <a:lnTo>
+                    <a:pt x="6682726" y="526505"/>
+                  </a:lnTo>
+                  <a:lnTo>
+                    <a:pt x="6612382" y="524572"/>
+                  </a:lnTo>
+                  <a:lnTo>
+                    <a:pt x="6542037" y="522564"/>
+                  </a:lnTo>
+                  <a:lnTo>
+                    <a:pt x="6471693" y="520479"/>
+                  </a:lnTo>
+                  <a:lnTo>
+                    <a:pt x="6401348" y="518314"/>
+                  </a:lnTo>
+                  <a:lnTo>
+                    <a:pt x="6331004" y="516066"/>
+                  </a:lnTo>
+                  <a:lnTo>
+                    <a:pt x="6260659" y="513732"/>
+                  </a:lnTo>
+                  <a:lnTo>
+                    <a:pt x="6190315" y="511308"/>
+                  </a:lnTo>
+                  <a:lnTo>
+                    <a:pt x="6119970" y="508790"/>
+                  </a:lnTo>
+                  <a:lnTo>
+                    <a:pt x="6049626" y="506177"/>
+                  </a:lnTo>
+                  <a:lnTo>
+                    <a:pt x="5979281" y="503462"/>
+                  </a:lnTo>
+                  <a:lnTo>
+                    <a:pt x="5908937" y="500644"/>
+                  </a:lnTo>
+                  <a:lnTo>
+                    <a:pt x="5838592" y="497717"/>
+                  </a:lnTo>
+                  <a:lnTo>
+                    <a:pt x="5768248" y="494678"/>
+                  </a:lnTo>
+                  <a:lnTo>
+                    <a:pt x="5697903" y="491522"/>
+                  </a:lnTo>
+                  <a:lnTo>
+                    <a:pt x="5627559" y="488245"/>
+                  </a:lnTo>
+                  <a:lnTo>
+                    <a:pt x="5557214" y="484843"/>
+                  </a:lnTo>
+                  <a:lnTo>
+                    <a:pt x="5486870" y="481309"/>
+                  </a:lnTo>
+                  <a:lnTo>
+                    <a:pt x="5416525" y="477640"/>
+                  </a:lnTo>
+                  <a:lnTo>
+                    <a:pt x="5346181" y="473830"/>
+                  </a:lnTo>
+                  <a:lnTo>
+                    <a:pt x="5275836" y="469873"/>
+                  </a:lnTo>
+                  <a:lnTo>
+                    <a:pt x="5205492" y="465765"/>
+                  </a:lnTo>
+                  <a:lnTo>
+                    <a:pt x="5135147" y="461499"/>
+                  </a:lnTo>
+                  <a:lnTo>
+                    <a:pt x="5064803" y="457069"/>
+                  </a:lnTo>
+                  <a:lnTo>
+                    <a:pt x="4994458" y="452469"/>
+                  </a:lnTo>
+                  <a:lnTo>
+                    <a:pt x="4924114" y="447692"/>
+                  </a:lnTo>
+                  <a:lnTo>
+                    <a:pt x="4853769" y="442732"/>
+                  </a:lnTo>
+                  <a:lnTo>
+                    <a:pt x="4783425" y="437582"/>
+                  </a:lnTo>
+                  <a:lnTo>
+                    <a:pt x="4713080" y="432233"/>
+                  </a:lnTo>
+                  <a:lnTo>
+                    <a:pt x="4642736" y="426680"/>
+                  </a:lnTo>
+                  <a:lnTo>
+                    <a:pt x="4572391" y="420913"/>
+                  </a:lnTo>
+                  <a:lnTo>
+                    <a:pt x="4502047" y="414924"/>
+                  </a:lnTo>
+                  <a:lnTo>
+                    <a:pt x="4431702" y="408706"/>
+                  </a:lnTo>
+                  <a:lnTo>
+                    <a:pt x="4361358" y="402248"/>
+                  </a:lnTo>
+                  <a:lnTo>
+                    <a:pt x="4291013" y="395543"/>
+                  </a:lnTo>
+                  <a:lnTo>
+                    <a:pt x="4220669" y="388580"/>
+                  </a:lnTo>
+                  <a:lnTo>
+                    <a:pt x="4150324" y="381350"/>
+                  </a:lnTo>
+                  <a:lnTo>
+                    <a:pt x="4079980" y="373842"/>
+                  </a:lnTo>
+                  <a:lnTo>
+                    <a:pt x="4009635" y="366046"/>
+                  </a:lnTo>
+                  <a:lnTo>
+                    <a:pt x="3939291" y="357951"/>
+                  </a:lnTo>
+                  <a:lnTo>
+                    <a:pt x="3868946" y="349545"/>
+                  </a:lnTo>
+                  <a:lnTo>
+                    <a:pt x="3798602" y="340815"/>
+                  </a:lnTo>
+                  <a:lnTo>
+                    <a:pt x="3728257" y="331751"/>
+                  </a:lnTo>
+                  <a:lnTo>
+                    <a:pt x="3657913" y="322339"/>
+                  </a:lnTo>
+                  <a:lnTo>
+                    <a:pt x="3587569" y="312565"/>
+                  </a:lnTo>
+                  <a:lnTo>
+                    <a:pt x="3517224" y="302415"/>
+                  </a:lnTo>
+                  <a:lnTo>
+                    <a:pt x="3446880" y="291876"/>
+                  </a:lnTo>
+                  <a:lnTo>
+                    <a:pt x="3376535" y="280933"/>
+                  </a:lnTo>
+                  <a:lnTo>
+                    <a:pt x="3306191" y="274643"/>
+                  </a:lnTo>
+                  <a:lnTo>
+                    <a:pt x="3235846" y="270458"/>
+                  </a:lnTo>
+                  <a:lnTo>
+                    <a:pt x="3165502" y="266214"/>
+                  </a:lnTo>
+                  <a:lnTo>
+                    <a:pt x="3095157" y="261912"/>
+                  </a:lnTo>
+                  <a:lnTo>
+                    <a:pt x="3024813" y="257550"/>
+                  </a:lnTo>
+                  <a:lnTo>
+                    <a:pt x="2954468" y="253128"/>
+                  </a:lnTo>
+                  <a:lnTo>
+                    <a:pt x="2884124" y="248644"/>
+                  </a:lnTo>
+                  <a:lnTo>
+                    <a:pt x="2813779" y="244099"/>
+                  </a:lnTo>
+                  <a:lnTo>
+                    <a:pt x="2743435" y="239490"/>
+                  </a:lnTo>
+                  <a:lnTo>
+                    <a:pt x="2673090" y="234818"/>
+                  </a:lnTo>
+                  <a:lnTo>
+                    <a:pt x="2602746" y="230081"/>
+                  </a:lnTo>
+                  <a:lnTo>
+                    <a:pt x="2532401" y="225278"/>
+                  </a:lnTo>
+                  <a:lnTo>
+                    <a:pt x="2462057" y="220409"/>
+                  </a:lnTo>
+                  <a:lnTo>
+                    <a:pt x="2391712" y="215472"/>
+                  </a:lnTo>
+                  <a:lnTo>
+                    <a:pt x="2321368" y="210467"/>
+                  </a:lnTo>
+                  <a:lnTo>
+                    <a:pt x="2251023" y="205393"/>
+                  </a:lnTo>
+                  <a:lnTo>
+                    <a:pt x="2180679" y="200249"/>
+                  </a:lnTo>
+                  <a:lnTo>
+                    <a:pt x="2110334" y="195033"/>
+                  </a:lnTo>
+                  <a:lnTo>
+                    <a:pt x="2039990" y="189745"/>
+                  </a:lnTo>
+                  <a:lnTo>
+                    <a:pt x="1969645" y="184383"/>
+                  </a:lnTo>
+                  <a:lnTo>
+                    <a:pt x="1899301" y="178948"/>
+                  </a:lnTo>
+                  <a:lnTo>
+                    <a:pt x="1828956" y="173437"/>
+                  </a:lnTo>
+                  <a:lnTo>
+                    <a:pt x="1758612" y="167850"/>
+                  </a:lnTo>
+                  <a:lnTo>
+                    <a:pt x="1688267" y="162185"/>
+                  </a:lnTo>
+                  <a:lnTo>
+                    <a:pt x="1617923" y="156442"/>
+                  </a:lnTo>
+                  <a:lnTo>
+                    <a:pt x="1547578" y="150620"/>
+                  </a:lnTo>
+                  <a:lnTo>
+                    <a:pt x="1477234" y="144716"/>
+                  </a:lnTo>
+                  <a:lnTo>
+                    <a:pt x="1406889" y="138731"/>
+                  </a:lnTo>
+                  <a:lnTo>
+                    <a:pt x="1336545" y="132664"/>
+                  </a:lnTo>
+                  <a:lnTo>
+                    <a:pt x="1266200" y="126512"/>
+                  </a:lnTo>
+                  <a:lnTo>
+                    <a:pt x="1195856" y="120275"/>
+                  </a:lnTo>
+                  <a:lnTo>
+                    <a:pt x="1125511" y="113951"/>
+                  </a:lnTo>
+                  <a:lnTo>
+                    <a:pt x="1055167" y="107540"/>
+                  </a:lnTo>
+                  <a:lnTo>
+                    <a:pt x="984822" y="101040"/>
+                  </a:lnTo>
+                  <a:lnTo>
+                    <a:pt x="914478" y="94451"/>
+                  </a:lnTo>
+                  <a:lnTo>
+                    <a:pt x="844133" y="87770"/>
+                  </a:lnTo>
+                  <a:lnTo>
+                    <a:pt x="773789" y="80996"/>
+                  </a:lnTo>
+                  <a:lnTo>
+                    <a:pt x="703444" y="74128"/>
+                  </a:lnTo>
+                  <a:lnTo>
+                    <a:pt x="633100" y="67166"/>
+                  </a:lnTo>
+                  <a:lnTo>
+                    <a:pt x="562755" y="60107"/>
+                  </a:lnTo>
+                  <a:lnTo>
+                    <a:pt x="492411" y="52950"/>
+                  </a:lnTo>
+                  <a:lnTo>
+                    <a:pt x="422066" y="45694"/>
+                  </a:lnTo>
+                  <a:lnTo>
+                    <a:pt x="351722" y="38338"/>
+                  </a:lnTo>
+                  <a:lnTo>
+                    <a:pt x="281377" y="30880"/>
+                  </a:lnTo>
+                  <a:lnTo>
+                    <a:pt x="211033" y="23318"/>
+                  </a:lnTo>
+                  <a:lnTo>
+                    <a:pt x="140688" y="15652"/>
+                  </a:lnTo>
+                  <a:lnTo>
+                    <a:pt x="70344" y="7880"/>
+                  </a:lnTo>
+                  <a:lnTo>
+                    <a:pt x="0" y="0"/>
+                  </a:lnTo>
+                </a:path>
+              </a:pathLst>
+            </a:custGeom>
+          </p:spPr>
+          <p:txBody>
+            <a:bodyPr/>
+            <a:lstStyle/>
+            <a:p/>
+          </p:txBody>
+        </p:sp>
+        <p:sp>
+          <p:nvSpPr>
+            <p:cNvPr id="24" name="pl24"/>
+            <p:cNvSpPr/>
+            <p:nvPr/>
+          </p:nvSpPr>
+          <p:spPr>
+            <a:xfrm>
+              <a:off x="1235312" y="2379605"/>
+              <a:ext cx="6964104" cy="940683"/>
+            </a:xfrm>
+            <a:custGeom>
+              <a:avLst/>
+              <a:pathLst>
+                <a:path w="6964104" h="940683">
                   <a:moveTo>
                     <a:pt x="0" y="0"/>
                   </a:moveTo>
                   <a:lnTo>
-                    <a:pt x="71622" y="71814"/>
-                  </a:lnTo>
-                  <a:lnTo>
-                    <a:pt x="143245" y="141804"/>
-                  </a:lnTo>
-                  <a:lnTo>
-                    <a:pt x="214867" y="210018"/>
-                  </a:lnTo>
-                  <a:lnTo>
-                    <a:pt x="286490" y="276499"/>
-                  </a:lnTo>
-                  <a:lnTo>
-                    <a:pt x="358112" y="341293"/>
-                  </a:lnTo>
-                  <a:lnTo>
-                    <a:pt x="429735" y="404441"/>
-                  </a:lnTo>
-                  <a:lnTo>
-                    <a:pt x="501357" y="465986"/>
-                  </a:lnTo>
-                  <a:lnTo>
-                    <a:pt x="572980" y="525969"/>
-                  </a:lnTo>
-                  <a:lnTo>
-                    <a:pt x="644602" y="584428"/>
-                  </a:lnTo>
-                  <a:lnTo>
-                    <a:pt x="716225" y="641403"/>
-                  </a:lnTo>
-                  <a:lnTo>
-                    <a:pt x="787847" y="696932"/>
-                  </a:lnTo>
-                  <a:lnTo>
-                    <a:pt x="859470" y="751050"/>
-                  </a:lnTo>
-                  <a:lnTo>
-                    <a:pt x="931092" y="803794"/>
-                  </a:lnTo>
-                  <a:lnTo>
-                    <a:pt x="1002715" y="855200"/>
-                  </a:lnTo>
-                  <a:lnTo>
-                    <a:pt x="1074337" y="905299"/>
-                  </a:lnTo>
-                  <a:lnTo>
-                    <a:pt x="1145960" y="954127"/>
-                  </a:lnTo>
-                  <a:lnTo>
-                    <a:pt x="1217582" y="1001715"/>
-                  </a:lnTo>
-                  <a:lnTo>
-                    <a:pt x="1289205" y="1048095"/>
-                  </a:lnTo>
-                  <a:lnTo>
-                    <a:pt x="1360827" y="1093297"/>
-                  </a:lnTo>
-                  <a:lnTo>
-                    <a:pt x="1432450" y="1137352"/>
-                  </a:lnTo>
-                  <a:lnTo>
-                    <a:pt x="1504073" y="1180288"/>
-                  </a:lnTo>
-                  <a:lnTo>
-                    <a:pt x="1575695" y="1222134"/>
-                  </a:lnTo>
-                  <a:lnTo>
-                    <a:pt x="1647318" y="1262917"/>
-                  </a:lnTo>
-                  <a:lnTo>
-                    <a:pt x="1718940" y="1302664"/>
-                  </a:lnTo>
-                  <a:lnTo>
-                    <a:pt x="1790563" y="1341403"/>
-                  </a:lnTo>
-                  <a:lnTo>
-                    <a:pt x="1862185" y="1379158"/>
-                  </a:lnTo>
-                  <a:lnTo>
-                    <a:pt x="1933808" y="1415954"/>
-                  </a:lnTo>
-                  <a:lnTo>
-                    <a:pt x="2005430" y="1451816"/>
-                  </a:lnTo>
-                  <a:lnTo>
-                    <a:pt x="2077053" y="1486768"/>
-                  </a:lnTo>
-                  <a:lnTo>
-                    <a:pt x="2148675" y="1520832"/>
-                  </a:lnTo>
-                  <a:lnTo>
-                    <a:pt x="2220298" y="1554031"/>
-                  </a:lnTo>
-                  <a:lnTo>
-                    <a:pt x="2291920" y="1586387"/>
-                  </a:lnTo>
-                  <a:lnTo>
-                    <a:pt x="2363543" y="1617921"/>
-                  </a:lnTo>
-                  <a:lnTo>
-                    <a:pt x="2435165" y="1648655"/>
-                  </a:lnTo>
-                  <a:lnTo>
-                    <a:pt x="2506788" y="1678609"/>
-                  </a:lnTo>
-                  <a:lnTo>
-                    <a:pt x="2578410" y="1707802"/>
-                  </a:lnTo>
-                  <a:lnTo>
-                    <a:pt x="2650033" y="1736254"/>
-                  </a:lnTo>
-                  <a:lnTo>
-                    <a:pt x="2721655" y="1763983"/>
-                  </a:lnTo>
-                  <a:lnTo>
-                    <a:pt x="2793278" y="1791008"/>
-                  </a:lnTo>
-                  <a:lnTo>
-                    <a:pt x="2864901" y="1817347"/>
-                  </a:lnTo>
-                  <a:lnTo>
-                    <a:pt x="2936523" y="1843018"/>
-                  </a:lnTo>
-                  <a:lnTo>
-                    <a:pt x="3008146" y="1868036"/>
-                  </a:lnTo>
-                  <a:lnTo>
-                    <a:pt x="3079768" y="1892419"/>
-                  </a:lnTo>
-                  <a:lnTo>
-                    <a:pt x="3151391" y="1916184"/>
-                  </a:lnTo>
-                  <a:lnTo>
-                    <a:pt x="3223013" y="1939344"/>
-                  </a:lnTo>
-                  <a:lnTo>
-                    <a:pt x="3294636" y="1961917"/>
-                  </a:lnTo>
-                  <a:lnTo>
-                    <a:pt x="3366258" y="1983917"/>
-                  </a:lnTo>
-                  <a:lnTo>
-                    <a:pt x="3437881" y="2005358"/>
-                  </a:lnTo>
-                  <a:lnTo>
-                    <a:pt x="3509503" y="2026254"/>
-                  </a:lnTo>
-                  <a:lnTo>
-                    <a:pt x="3581126" y="2046620"/>
-                  </a:lnTo>
-                  <a:lnTo>
-                    <a:pt x="3652748" y="2066469"/>
-                  </a:lnTo>
-                  <a:lnTo>
-                    <a:pt x="3724371" y="2085814"/>
-                  </a:lnTo>
-                  <a:lnTo>
-                    <a:pt x="3795993" y="2104668"/>
-                  </a:lnTo>
-                  <a:lnTo>
-                    <a:pt x="3867616" y="2123043"/>
-                  </a:lnTo>
-                  <a:lnTo>
-                    <a:pt x="3939238" y="2140952"/>
-                  </a:lnTo>
-                  <a:lnTo>
-                    <a:pt x="4010861" y="2158405"/>
-                  </a:lnTo>
-                  <a:lnTo>
-                    <a:pt x="4082483" y="2175416"/>
-                  </a:lnTo>
-                  <a:lnTo>
-                    <a:pt x="4154106" y="2191995"/>
-                  </a:lnTo>
-                  <a:lnTo>
-                    <a:pt x="4225729" y="2208152"/>
-                  </a:lnTo>
-                  <a:lnTo>
-                    <a:pt x="4297351" y="2223900"/>
-                  </a:lnTo>
-                  <a:lnTo>
-                    <a:pt x="4368974" y="2239248"/>
-                  </a:lnTo>
-                  <a:lnTo>
-                    <a:pt x="4440596" y="2254206"/>
-                  </a:lnTo>
-                  <a:lnTo>
-                    <a:pt x="4512219" y="2268784"/>
-                  </a:lnTo>
-                  <a:lnTo>
-                    <a:pt x="4583841" y="2282992"/>
-                  </a:lnTo>
-                  <a:lnTo>
-                    <a:pt x="4655464" y="2296839"/>
-                  </a:lnTo>
-                  <a:lnTo>
-                    <a:pt x="4727086" y="2310335"/>
-                  </a:lnTo>
-                  <a:lnTo>
-                    <a:pt x="4798709" y="2323488"/>
-                  </a:lnTo>
-                  <a:lnTo>
-                    <a:pt x="4870331" y="2336307"/>
-                  </a:lnTo>
-                  <a:lnTo>
-                    <a:pt x="4941954" y="2348800"/>
-                  </a:lnTo>
-                  <a:lnTo>
-                    <a:pt x="5013576" y="2360977"/>
-                  </a:lnTo>
-                  <a:lnTo>
-                    <a:pt x="5085199" y="2372844"/>
-                  </a:lnTo>
-                  <a:lnTo>
-                    <a:pt x="5156821" y="2384410"/>
-                  </a:lnTo>
-                  <a:lnTo>
-                    <a:pt x="5228444" y="2395682"/>
-                  </a:lnTo>
-                  <a:lnTo>
-                    <a:pt x="5300066" y="2406668"/>
-                  </a:lnTo>
-                  <a:lnTo>
-                    <a:pt x="5371689" y="2417375"/>
-                  </a:lnTo>
-                  <a:lnTo>
-                    <a:pt x="5443311" y="2427810"/>
-                  </a:lnTo>
-                  <a:lnTo>
-                    <a:pt x="5514934" y="2437981"/>
-                  </a:lnTo>
-                  <a:lnTo>
-                    <a:pt x="5586557" y="2447893"/>
-                  </a:lnTo>
-                  <a:lnTo>
-                    <a:pt x="5658179" y="2457553"/>
-                  </a:lnTo>
-                  <a:lnTo>
-                    <a:pt x="5729802" y="2466968"/>
-                  </a:lnTo>
-                  <a:lnTo>
-                    <a:pt x="5801424" y="2476144"/>
-                  </a:lnTo>
-                  <a:lnTo>
-                    <a:pt x="5873047" y="2485087"/>
-                  </a:lnTo>
-                  <a:lnTo>
-                    <a:pt x="5944669" y="2493803"/>
-                  </a:lnTo>
-                  <a:lnTo>
-                    <a:pt x="6016292" y="2502298"/>
-                  </a:lnTo>
-                  <a:lnTo>
-                    <a:pt x="6087914" y="2510577"/>
-                  </a:lnTo>
-                  <a:lnTo>
-                    <a:pt x="6159537" y="2518645"/>
-                  </a:lnTo>
-                  <a:lnTo>
-                    <a:pt x="6231159" y="2526509"/>
-                  </a:lnTo>
-                  <a:lnTo>
-                    <a:pt x="6302782" y="2534173"/>
-                  </a:lnTo>
-                  <a:lnTo>
-                    <a:pt x="6374404" y="2541643"/>
-                  </a:lnTo>
-                  <a:lnTo>
-                    <a:pt x="6446027" y="2548923"/>
-                  </a:lnTo>
-                  <a:lnTo>
-                    <a:pt x="6517649" y="2556018"/>
-                  </a:lnTo>
-                  <a:lnTo>
-                    <a:pt x="6589272" y="2562933"/>
-                  </a:lnTo>
-                  <a:lnTo>
-                    <a:pt x="6660894" y="2569672"/>
-                  </a:lnTo>
-                  <a:lnTo>
-                    <a:pt x="6732517" y="2576241"/>
-                  </a:lnTo>
-                  <a:lnTo>
-                    <a:pt x="6804139" y="2582642"/>
-                  </a:lnTo>
-                  <a:lnTo>
-                    <a:pt x="6875762" y="2588881"/>
-                  </a:lnTo>
-                  <a:lnTo>
-                    <a:pt x="6947385" y="2594962"/>
-                  </a:lnTo>
-                  <a:lnTo>
-                    <a:pt x="7019007" y="2600888"/>
-                  </a:lnTo>
-                  <a:lnTo>
-                    <a:pt x="7090630" y="2606663"/>
+                    <a:pt x="70344" y="25916"/>
+                  </a:lnTo>
+                  <a:lnTo>
+                    <a:pt x="140688" y="51174"/>
+                  </a:lnTo>
+                  <a:lnTo>
+                    <a:pt x="211033" y="75790"/>
+                  </a:lnTo>
+                  <a:lnTo>
+                    <a:pt x="281377" y="99782"/>
+                  </a:lnTo>
+                  <a:lnTo>
+                    <a:pt x="351722" y="123164"/>
+                  </a:lnTo>
+                  <a:lnTo>
+                    <a:pt x="422066" y="145953"/>
+                  </a:lnTo>
+                  <a:lnTo>
+                    <a:pt x="492411" y="168163"/>
+                  </a:lnTo>
+                  <a:lnTo>
+                    <a:pt x="562755" y="189809"/>
+                  </a:lnTo>
+                  <a:lnTo>
+                    <a:pt x="633100" y="210906"/>
+                  </a:lnTo>
+                  <a:lnTo>
+                    <a:pt x="703444" y="231467"/>
+                  </a:lnTo>
+                  <a:lnTo>
+                    <a:pt x="773789" y="251506"/>
+                  </a:lnTo>
+                  <a:lnTo>
+                    <a:pt x="844133" y="271036"/>
+                  </a:lnTo>
+                  <a:lnTo>
+                    <a:pt x="914478" y="290070"/>
+                  </a:lnTo>
+                  <a:lnTo>
+                    <a:pt x="984822" y="308621"/>
+                  </a:lnTo>
+                  <a:lnTo>
+                    <a:pt x="1055167" y="326701"/>
+                  </a:lnTo>
+                  <a:lnTo>
+                    <a:pt x="1125511" y="344322"/>
+                  </a:lnTo>
+                  <a:lnTo>
+                    <a:pt x="1195856" y="361495"/>
+                  </a:lnTo>
+                  <a:lnTo>
+                    <a:pt x="1266200" y="378233"/>
+                  </a:lnTo>
+                  <a:lnTo>
+                    <a:pt x="1336545" y="394545"/>
+                  </a:lnTo>
+                  <a:lnTo>
+                    <a:pt x="1406889" y="410443"/>
+                  </a:lnTo>
+                  <a:lnTo>
+                    <a:pt x="1477234" y="425938"/>
+                  </a:lnTo>
+                  <a:lnTo>
+                    <a:pt x="1547578" y="441039"/>
+                  </a:lnTo>
+                  <a:lnTo>
+                    <a:pt x="1617923" y="455757"/>
+                  </a:lnTo>
+                  <a:lnTo>
+                    <a:pt x="1688267" y="470101"/>
+                  </a:lnTo>
+                  <a:lnTo>
+                    <a:pt x="1758612" y="484080"/>
+                  </a:lnTo>
+                  <a:lnTo>
+                    <a:pt x="1828956" y="497705"/>
+                  </a:lnTo>
+                  <a:lnTo>
+                    <a:pt x="1899301" y="510984"/>
+                  </a:lnTo>
+                  <a:lnTo>
+                    <a:pt x="1969645" y="523926"/>
+                  </a:lnTo>
+                  <a:lnTo>
+                    <a:pt x="2039990" y="536539"/>
+                  </a:lnTo>
+                  <a:lnTo>
+                    <a:pt x="2110334" y="548832"/>
+                  </a:lnTo>
+                  <a:lnTo>
+                    <a:pt x="2180679" y="560813"/>
+                  </a:lnTo>
+                  <a:lnTo>
+                    <a:pt x="2251023" y="572489"/>
+                  </a:lnTo>
+                  <a:lnTo>
+                    <a:pt x="2321368" y="583869"/>
+                  </a:lnTo>
+                  <a:lnTo>
+                    <a:pt x="2391712" y="594961"/>
+                  </a:lnTo>
+                  <a:lnTo>
+                    <a:pt x="2462057" y="605770"/>
+                  </a:lnTo>
+                  <a:lnTo>
+                    <a:pt x="2532401" y="616305"/>
+                  </a:lnTo>
+                  <a:lnTo>
+                    <a:pt x="2602746" y="626573"/>
+                  </a:lnTo>
+                  <a:lnTo>
+                    <a:pt x="2673090" y="636580"/>
+                  </a:lnTo>
+                  <a:lnTo>
+                    <a:pt x="2743435" y="646332"/>
+                  </a:lnTo>
+                  <a:lnTo>
+                    <a:pt x="2813779" y="655838"/>
+                  </a:lnTo>
+                  <a:lnTo>
+                    <a:pt x="2884124" y="665101"/>
+                  </a:lnTo>
+                  <a:lnTo>
+                    <a:pt x="2954468" y="674130"/>
+                  </a:lnTo>
+                  <a:lnTo>
+                    <a:pt x="3024813" y="682929"/>
+                  </a:lnTo>
+                  <a:lnTo>
+                    <a:pt x="3095157" y="691505"/>
+                  </a:lnTo>
+                  <a:lnTo>
+                    <a:pt x="3165502" y="699863"/>
+                  </a:lnTo>
+                  <a:lnTo>
+                    <a:pt x="3235846" y="708009"/>
+                  </a:lnTo>
+                  <a:lnTo>
+                    <a:pt x="3306191" y="715949"/>
+                  </a:lnTo>
+                  <a:lnTo>
+                    <a:pt x="3376535" y="723686"/>
+                  </a:lnTo>
+                  <a:lnTo>
+                    <a:pt x="3446880" y="731227"/>
+                  </a:lnTo>
+                  <a:lnTo>
+                    <a:pt x="3517224" y="738577"/>
+                  </a:lnTo>
+                  <a:lnTo>
+                    <a:pt x="3587569" y="745740"/>
+                  </a:lnTo>
+                  <a:lnTo>
+                    <a:pt x="3657913" y="752721"/>
+                  </a:lnTo>
+                  <a:lnTo>
+                    <a:pt x="3728257" y="759525"/>
+                  </a:lnTo>
+                  <a:lnTo>
+                    <a:pt x="3798602" y="766156"/>
+                  </a:lnTo>
+                  <a:lnTo>
+                    <a:pt x="3868946" y="772619"/>
+                  </a:lnTo>
+                  <a:lnTo>
+                    <a:pt x="3939291" y="778917"/>
+                  </a:lnTo>
+                  <a:lnTo>
+                    <a:pt x="4009635" y="785056"/>
+                  </a:lnTo>
+                  <a:lnTo>
+                    <a:pt x="4079980" y="791039"/>
+                  </a:lnTo>
+                  <a:lnTo>
+                    <a:pt x="4150324" y="796870"/>
+                  </a:lnTo>
+                  <a:lnTo>
+                    <a:pt x="4220669" y="802553"/>
+                  </a:lnTo>
+                  <a:lnTo>
+                    <a:pt x="4291013" y="808091"/>
+                  </a:lnTo>
+                  <a:lnTo>
+                    <a:pt x="4361358" y="813489"/>
+                  </a:lnTo>
+                  <a:lnTo>
+                    <a:pt x="4431702" y="818750"/>
+                  </a:lnTo>
+                  <a:lnTo>
+                    <a:pt x="4502047" y="823878"/>
+                  </a:lnTo>
+                  <a:lnTo>
+                    <a:pt x="4572391" y="828875"/>
+                  </a:lnTo>
+                  <a:lnTo>
+                    <a:pt x="4642736" y="833745"/>
+                  </a:lnTo>
+                  <a:lnTo>
+                    <a:pt x="4713080" y="838492"/>
+                  </a:lnTo>
+                  <a:lnTo>
+                    <a:pt x="4783425" y="843118"/>
+                  </a:lnTo>
+                  <a:lnTo>
+                    <a:pt x="4853769" y="847627"/>
+                  </a:lnTo>
+                  <a:lnTo>
+                    <a:pt x="4924114" y="852021"/>
+                  </a:lnTo>
+                  <a:lnTo>
+                    <a:pt x="4994458" y="856303"/>
+                  </a:lnTo>
+                  <a:lnTo>
+                    <a:pt x="5064803" y="860477"/>
+                  </a:lnTo>
+                  <a:lnTo>
+                    <a:pt x="5135147" y="864545"/>
+                  </a:lnTo>
+                  <a:lnTo>
+                    <a:pt x="5205492" y="868510"/>
+                  </a:lnTo>
+                  <a:lnTo>
+                    <a:pt x="5275836" y="872374"/>
+                  </a:lnTo>
+                  <a:lnTo>
+                    <a:pt x="5346181" y="876139"/>
+                  </a:lnTo>
+                  <a:lnTo>
+                    <a:pt x="5416525" y="879810"/>
+                  </a:lnTo>
+                  <a:lnTo>
+                    <a:pt x="5486870" y="883387"/>
+                  </a:lnTo>
+                  <a:lnTo>
+                    <a:pt x="5557214" y="886873"/>
+                  </a:lnTo>
+                  <a:lnTo>
+                    <a:pt x="5627559" y="890270"/>
+                  </a:lnTo>
+                  <a:lnTo>
+                    <a:pt x="5697903" y="893582"/>
+                  </a:lnTo>
+                  <a:lnTo>
+                    <a:pt x="5768248" y="896809"/>
+                  </a:lnTo>
+                  <a:lnTo>
+                    <a:pt x="5838592" y="899954"/>
+                  </a:lnTo>
+                  <a:lnTo>
+                    <a:pt x="5908937" y="903020"/>
+                  </a:lnTo>
+                  <a:lnTo>
+                    <a:pt x="5979281" y="906008"/>
+                  </a:lnTo>
+                  <a:lnTo>
+                    <a:pt x="6049626" y="908920"/>
+                  </a:lnTo>
+                  <a:lnTo>
+                    <a:pt x="6119970" y="911757"/>
+                  </a:lnTo>
+                  <a:lnTo>
+                    <a:pt x="6190315" y="914523"/>
+                  </a:lnTo>
+                  <a:lnTo>
+                    <a:pt x="6260659" y="917219"/>
+                  </a:lnTo>
+                  <a:lnTo>
+                    <a:pt x="6331004" y="919846"/>
+                  </a:lnTo>
+                  <a:lnTo>
+                    <a:pt x="6401348" y="922406"/>
+                  </a:lnTo>
+                  <a:lnTo>
+                    <a:pt x="6471693" y="924902"/>
+                  </a:lnTo>
+                  <a:lnTo>
+                    <a:pt x="6542037" y="927334"/>
+                  </a:lnTo>
+                  <a:lnTo>
+                    <a:pt x="6612382" y="929704"/>
+                  </a:lnTo>
+                  <a:lnTo>
+                    <a:pt x="6682726" y="932014"/>
+                  </a:lnTo>
+                  <a:lnTo>
+                    <a:pt x="6753071" y="934266"/>
+                  </a:lnTo>
+                  <a:lnTo>
+                    <a:pt x="6823415" y="936460"/>
+                  </a:lnTo>
+                  <a:lnTo>
+                    <a:pt x="6893760" y="938599"/>
+                  </a:lnTo>
+                  <a:lnTo>
+                    <a:pt x="6964104" y="940683"/>
                   </a:lnTo>
                 </a:path>
               </a:pathLst>
@@ -4514,27 +4549,27 @@
         </p:sp>
         <p:sp>
           <p:nvSpPr>
-            <p:cNvPr id="24" name="pl24"/>
+            <p:cNvPr id="25" name="pl25"/>
             <p:cNvSpPr/>
             <p:nvPr/>
           </p:nvSpPr>
           <p:spPr>
             <a:xfrm>
-              <a:off x="817517" y="4727786"/>
-              <a:ext cx="7799693" cy="0"/>
+              <a:off x="887106" y="3100960"/>
+              <a:ext cx="7660515" cy="0"/>
             </a:xfrm>
             <a:custGeom>
               <a:avLst/>
               <a:pathLst>
-                <a:path w="7799693" h="0">
+                <a:path w="7660515" h="0">
                   <a:moveTo>
                     <a:pt x="0" y="0"/>
                   </a:moveTo>
                   <a:lnTo>
-                    <a:pt x="7799693" y="0"/>
-                  </a:lnTo>
-                  <a:lnTo>
-                    <a:pt x="7799693" y="0"/>
+                    <a:pt x="7660515" y="0"/>
+                  </a:lnTo>
+                  <a:lnTo>
+                    <a:pt x="7660515" y="0"/>
                   </a:lnTo>
                 </a:path>
               </a:pathLst>
@@ -4557,21 +4592,21 @@
         </p:sp>
         <p:sp>
           <p:nvSpPr>
-            <p:cNvPr id="25" name="pl25"/>
+            <p:cNvPr id="26" name="pl26"/>
             <p:cNvSpPr/>
             <p:nvPr/>
           </p:nvSpPr>
           <p:spPr>
             <a:xfrm>
-              <a:off x="4588151" y="2073503"/>
-              <a:ext cx="0" cy="3649639"/>
+              <a:off x="4590457" y="2143092"/>
+              <a:ext cx="0" cy="1317069"/>
             </a:xfrm>
             <a:custGeom>
               <a:avLst/>
               <a:pathLst>
-                <a:path w="0" h="3649639">
+                <a:path w="0" h="1317069">
                   <a:moveTo>
-                    <a:pt x="0" y="3649639"/>
+                    <a:pt x="0" y="1317069"/>
                   </a:moveTo>
                   <a:lnTo>
                     <a:pt x="0" y="0"/>
@@ -4600,13 +4635,13 @@
         </p:sp>
         <p:sp>
           <p:nvSpPr>
-            <p:cNvPr id="26" name="tx26"/>
+            <p:cNvPr id="27" name="tx27"/>
             <p:cNvSpPr/>
             <p:nvPr/>
           </p:nvSpPr>
           <p:spPr>
             <a:xfrm>
-              <a:off x="692708" y="5517199"/>
+              <a:off x="762297" y="3360243"/>
               <a:ext cx="62179" cy="80101"/>
             </a:xfrm>
             <a:prstGeom prst="rect">
@@ -4646,13 +4681,13 @@
         </p:sp>
         <p:sp>
           <p:nvSpPr>
-            <p:cNvPr id="27" name="tx27"/>
+            <p:cNvPr id="28" name="tx28"/>
             <p:cNvSpPr/>
             <p:nvPr/>
           </p:nvSpPr>
           <p:spPr>
             <a:xfrm>
-              <a:off x="692708" y="4687735"/>
+              <a:off x="762297" y="3060909"/>
               <a:ext cx="62179" cy="80101"/>
             </a:xfrm>
             <a:prstGeom prst="rect">
@@ -4692,13 +4727,13 @@
         </p:sp>
         <p:sp>
           <p:nvSpPr>
-            <p:cNvPr id="28" name="tx28"/>
+            <p:cNvPr id="29" name="tx29"/>
             <p:cNvSpPr/>
             <p:nvPr/>
           </p:nvSpPr>
           <p:spPr>
             <a:xfrm>
-              <a:off x="692708" y="3858272"/>
+              <a:off x="762297" y="2761575"/>
               <a:ext cx="62179" cy="80101"/>
             </a:xfrm>
             <a:prstGeom prst="rect">
@@ -4738,13 +4773,13 @@
         </p:sp>
         <p:sp>
           <p:nvSpPr>
-            <p:cNvPr id="29" name="tx29"/>
+            <p:cNvPr id="30" name="tx30"/>
             <p:cNvSpPr/>
             <p:nvPr/>
           </p:nvSpPr>
           <p:spPr>
             <a:xfrm>
-              <a:off x="692708" y="3028808"/>
+              <a:off x="762297" y="2462242"/>
               <a:ext cx="62179" cy="80101"/>
             </a:xfrm>
             <a:prstGeom prst="rect">
@@ -4784,13 +4819,13 @@
         </p:sp>
         <p:sp>
           <p:nvSpPr>
-            <p:cNvPr id="30" name="tx30"/>
+            <p:cNvPr id="31" name="tx31"/>
             <p:cNvSpPr/>
             <p:nvPr/>
           </p:nvSpPr>
           <p:spPr>
             <a:xfrm>
-              <a:off x="692708" y="2199345"/>
+              <a:off x="762297" y="2162908"/>
               <a:ext cx="62179" cy="80101"/>
             </a:xfrm>
             <a:prstGeom prst="rect">
@@ -4830,13 +4865,13 @@
         </p:sp>
         <p:sp>
           <p:nvSpPr>
-            <p:cNvPr id="31" name="tx31"/>
+            <p:cNvPr id="32" name="tx32"/>
             <p:cNvSpPr/>
             <p:nvPr/>
           </p:nvSpPr>
           <p:spPr>
             <a:xfrm>
-              <a:off x="2360651" y="5785772"/>
+              <a:off x="2401262" y="3522791"/>
               <a:ext cx="161574" cy="80101"/>
             </a:xfrm>
             <a:prstGeom prst="rect">
@@ -4876,13 +4911,13 @@
         </p:sp>
         <p:sp>
           <p:nvSpPr>
-            <p:cNvPr id="32" name="tx32"/>
+            <p:cNvPr id="33" name="tx33"/>
             <p:cNvSpPr/>
             <p:nvPr/>
           </p:nvSpPr>
           <p:spPr>
             <a:xfrm>
-              <a:off x="4561958" y="5785772"/>
+              <a:off x="4564176" y="3522791"/>
               <a:ext cx="62179" cy="80101"/>
             </a:xfrm>
             <a:prstGeom prst="rect">
@@ -4922,13 +4957,13 @@
         </p:sp>
         <p:sp>
           <p:nvSpPr>
-            <p:cNvPr id="33" name="tx33"/>
+            <p:cNvPr id="34" name="tx34"/>
             <p:cNvSpPr/>
             <p:nvPr/>
           </p:nvSpPr>
           <p:spPr>
             <a:xfrm>
-              <a:off x="6682478" y="5785772"/>
+              <a:off x="6646302" y="3522791"/>
               <a:ext cx="124358" cy="80101"/>
             </a:xfrm>
             <a:prstGeom prst="rect">
@@ -4968,13 +5003,13 @@
         </p:sp>
         <p:sp>
           <p:nvSpPr>
-            <p:cNvPr id="34" name="tx34"/>
+            <p:cNvPr id="35" name="tx35"/>
             <p:cNvSpPr/>
             <p:nvPr/>
           </p:nvSpPr>
           <p:spPr>
             <a:xfrm>
-              <a:off x="2928340" y="5925448"/>
+              <a:off x="2928340" y="3662467"/>
               <a:ext cx="3578047" cy="100218"/>
             </a:xfrm>
             <a:prstGeom prst="rect">
@@ -5014,13 +5049,13 @@
         </p:sp>
         <p:sp>
           <p:nvSpPr>
-            <p:cNvPr id="35" name="tx35"/>
+            <p:cNvPr id="36" name="tx36"/>
             <p:cNvSpPr/>
             <p:nvPr/>
           </p:nvSpPr>
           <p:spPr>
             <a:xfrm rot="-5400000">
-              <a:off x="68446" y="3848213"/>
+              <a:off x="138035" y="2751517"/>
               <a:ext cx="1016904" cy="100218"/>
             </a:xfrm>
             <a:prstGeom prst="rect">
@@ -5060,13 +5095,13 @@
         </p:sp>
         <p:sp>
           <p:nvSpPr>
-            <p:cNvPr id="36" name="tx36"/>
+            <p:cNvPr id="37" name="tx37"/>
             <p:cNvSpPr/>
             <p:nvPr/>
           </p:nvSpPr>
           <p:spPr>
             <a:xfrm>
-              <a:off x="817517" y="1896563"/>
+              <a:off x="887106" y="1966152"/>
               <a:ext cx="7052127" cy="82021"/>
             </a:xfrm>
             <a:prstGeom prst="rect">
@@ -5106,13 +5141,3649 @@
         </p:sp>
         <p:sp>
           <p:nvSpPr>
-            <p:cNvPr id="37" name="tx37"/>
+            <p:cNvPr id="38" name="tx38"/>
             <p:cNvSpPr/>
             <p:nvPr/>
           </p:nvSpPr>
           <p:spPr>
             <a:xfrm>
-              <a:off x="817517" y="1669789"/>
+              <a:off x="887106" y="1739378"/>
+              <a:ext cx="1219901" cy="120152"/>
+            </a:xfrm>
+            <a:prstGeom prst="rect">
+              <a:avLst/>
+            </a:prstGeom>
+            <a:noFill/>
+          </p:spPr>
+          <p:txBody>
+            <a:bodyPr lIns="0" rIns="0" tIns="0" bIns="0" anchorCtr="1" anchor="ctr" wrap="none"/>
+            <a:lstStyle/>
+            <a:p>
+              <a:pPr algn="l" marL="0" marR="0" indent="0">
+                <a:lnSpc>
+                  <a:spcPts val="1320"/>
+                </a:lnSpc>
+                <a:spcBef>
+                  <a:spcPts val="0"/>
+                </a:spcBef>
+                <a:spcAft>
+                  <a:spcPts val="0"/>
+                </a:spcAft>
+              </a:pPr>
+              <a:r>
+                <a:rPr sz="1320">
+                  <a:solidFill>
+                    <a:srgbClr val="000000">
+                      <a:alpha val="100000"/>
+                    </a:srgbClr>
+                  </a:solidFill>
+                  <a:latin typeface="Helvetica"/>
+                  <a:cs typeface="Helvetica"/>
+                </a:rPr>
+                <a:t>Anemia Grade 3</a:t>
+              </a:r>
+            </a:p>
+          </p:txBody>
+        </p:sp>
+        <p:sp>
+          <p:nvSpPr>
+            <p:cNvPr id="39" name="pl39"/>
+            <p:cNvSpPr/>
+            <p:nvPr/>
+          </p:nvSpPr>
+          <p:spPr>
+            <a:xfrm>
+              <a:off x="887106" y="5444019"/>
+              <a:ext cx="7660515" cy="0"/>
+            </a:xfrm>
+            <a:custGeom>
+              <a:avLst/>
+              <a:pathLst>
+                <a:path w="7660515" h="0">
+                  <a:moveTo>
+                    <a:pt x="0" y="0"/>
+                  </a:moveTo>
+                  <a:lnTo>
+                    <a:pt x="7660515" y="0"/>
+                  </a:lnTo>
+                  <a:lnTo>
+                    <a:pt x="7660515" y="0"/>
+                  </a:lnTo>
+                </a:path>
+              </a:pathLst>
+            </a:custGeom>
+            <a:ln w="6775" cap="flat">
+              <a:solidFill>
+                <a:srgbClr val="EBEBEB">
+                  <a:alpha val="100000"/>
+                </a:srgbClr>
+              </a:solidFill>
+              <a:prstDash val="solid"/>
+              <a:round/>
+            </a:ln>
+          </p:spPr>
+          <p:txBody>
+            <a:bodyPr/>
+            <a:lstStyle/>
+            <a:p/>
+          </p:txBody>
+        </p:sp>
+        <p:sp>
+          <p:nvSpPr>
+            <p:cNvPr id="40" name="pl40"/>
+            <p:cNvSpPr/>
+            <p:nvPr/>
+          </p:nvSpPr>
+          <p:spPr>
+            <a:xfrm>
+              <a:off x="887106" y="5144686"/>
+              <a:ext cx="7660515" cy="0"/>
+            </a:xfrm>
+            <a:custGeom>
+              <a:avLst/>
+              <a:pathLst>
+                <a:path w="7660515" h="0">
+                  <a:moveTo>
+                    <a:pt x="0" y="0"/>
+                  </a:moveTo>
+                  <a:lnTo>
+                    <a:pt x="7660515" y="0"/>
+                  </a:lnTo>
+                  <a:lnTo>
+                    <a:pt x="7660515" y="0"/>
+                  </a:lnTo>
+                </a:path>
+              </a:pathLst>
+            </a:custGeom>
+            <a:ln w="6775" cap="flat">
+              <a:solidFill>
+                <a:srgbClr val="EBEBEB">
+                  <a:alpha val="100000"/>
+                </a:srgbClr>
+              </a:solidFill>
+              <a:prstDash val="solid"/>
+              <a:round/>
+            </a:ln>
+          </p:spPr>
+          <p:txBody>
+            <a:bodyPr/>
+            <a:lstStyle/>
+            <a:p/>
+          </p:txBody>
+        </p:sp>
+        <p:sp>
+          <p:nvSpPr>
+            <p:cNvPr id="41" name="pl41"/>
+            <p:cNvSpPr/>
+            <p:nvPr/>
+          </p:nvSpPr>
+          <p:spPr>
+            <a:xfrm>
+              <a:off x="887106" y="4845352"/>
+              <a:ext cx="7660515" cy="0"/>
+            </a:xfrm>
+            <a:custGeom>
+              <a:avLst/>
+              <a:pathLst>
+                <a:path w="7660515" h="0">
+                  <a:moveTo>
+                    <a:pt x="0" y="0"/>
+                  </a:moveTo>
+                  <a:lnTo>
+                    <a:pt x="7660515" y="0"/>
+                  </a:lnTo>
+                  <a:lnTo>
+                    <a:pt x="7660515" y="0"/>
+                  </a:lnTo>
+                </a:path>
+              </a:pathLst>
+            </a:custGeom>
+            <a:ln w="6775" cap="flat">
+              <a:solidFill>
+                <a:srgbClr val="EBEBEB">
+                  <a:alpha val="100000"/>
+                </a:srgbClr>
+              </a:solidFill>
+              <a:prstDash val="solid"/>
+              <a:round/>
+            </a:ln>
+          </p:spPr>
+          <p:txBody>
+            <a:bodyPr/>
+            <a:lstStyle/>
+            <a:p/>
+          </p:txBody>
+        </p:sp>
+        <p:sp>
+          <p:nvSpPr>
+            <p:cNvPr id="42" name="pl42"/>
+            <p:cNvSpPr/>
+            <p:nvPr/>
+          </p:nvSpPr>
+          <p:spPr>
+            <a:xfrm>
+              <a:off x="887106" y="4546018"/>
+              <a:ext cx="7660515" cy="0"/>
+            </a:xfrm>
+            <a:custGeom>
+              <a:avLst/>
+              <a:pathLst>
+                <a:path w="7660515" h="0">
+                  <a:moveTo>
+                    <a:pt x="0" y="0"/>
+                  </a:moveTo>
+                  <a:lnTo>
+                    <a:pt x="7660515" y="0"/>
+                  </a:lnTo>
+                  <a:lnTo>
+                    <a:pt x="7660515" y="0"/>
+                  </a:lnTo>
+                </a:path>
+              </a:pathLst>
+            </a:custGeom>
+            <a:ln w="6775" cap="flat">
+              <a:solidFill>
+                <a:srgbClr val="EBEBEB">
+                  <a:alpha val="100000"/>
+                </a:srgbClr>
+              </a:solidFill>
+              <a:prstDash val="solid"/>
+              <a:round/>
+            </a:ln>
+          </p:spPr>
+          <p:txBody>
+            <a:bodyPr/>
+            <a:lstStyle/>
+            <a:p/>
+          </p:txBody>
+        </p:sp>
+        <p:sp>
+          <p:nvSpPr>
+            <p:cNvPr id="43" name="pl43"/>
+            <p:cNvSpPr/>
+            <p:nvPr/>
+          </p:nvSpPr>
+          <p:spPr>
+            <a:xfrm>
+              <a:off x="1636763" y="4336484"/>
+              <a:ext cx="0" cy="1317069"/>
+            </a:xfrm>
+            <a:custGeom>
+              <a:avLst/>
+              <a:pathLst>
+                <a:path w="0" h="1317069">
+                  <a:moveTo>
+                    <a:pt x="0" y="1317069"/>
+                  </a:moveTo>
+                  <a:lnTo>
+                    <a:pt x="0" y="0"/>
+                  </a:lnTo>
+                  <a:lnTo>
+                    <a:pt x="0" y="0"/>
+                  </a:lnTo>
+                </a:path>
+              </a:pathLst>
+            </a:custGeom>
+            <a:ln w="6775" cap="flat">
+              <a:solidFill>
+                <a:srgbClr val="EBEBEB">
+                  <a:alpha val="100000"/>
+                </a:srgbClr>
+              </a:solidFill>
+              <a:prstDash val="solid"/>
+              <a:round/>
+            </a:ln>
+          </p:spPr>
+          <p:txBody>
+            <a:bodyPr/>
+            <a:lstStyle/>
+            <a:p/>
+          </p:txBody>
+        </p:sp>
+        <p:sp>
+          <p:nvSpPr>
+            <p:cNvPr id="44" name="pl44"/>
+            <p:cNvSpPr/>
+            <p:nvPr/>
+          </p:nvSpPr>
+          <p:spPr>
+            <a:xfrm>
+              <a:off x="2482050" y="4336484"/>
+              <a:ext cx="0" cy="1317069"/>
+            </a:xfrm>
+            <a:custGeom>
+              <a:avLst/>
+              <a:pathLst>
+                <a:path w="0" h="1317069">
+                  <a:moveTo>
+                    <a:pt x="0" y="1317069"/>
+                  </a:moveTo>
+                  <a:lnTo>
+                    <a:pt x="0" y="0"/>
+                  </a:lnTo>
+                  <a:lnTo>
+                    <a:pt x="0" y="0"/>
+                  </a:lnTo>
+                </a:path>
+              </a:pathLst>
+            </a:custGeom>
+            <a:ln w="6775" cap="flat">
+              <a:solidFill>
+                <a:srgbClr val="EBEBEB">
+                  <a:alpha val="100000"/>
+                </a:srgbClr>
+              </a:solidFill>
+              <a:prstDash val="solid"/>
+              <a:round/>
+            </a:ln>
+          </p:spPr>
+          <p:txBody>
+            <a:bodyPr/>
+            <a:lstStyle/>
+            <a:p/>
+          </p:txBody>
+        </p:sp>
+        <p:sp>
+          <p:nvSpPr>
+            <p:cNvPr id="45" name="pl45"/>
+            <p:cNvSpPr/>
+            <p:nvPr/>
+          </p:nvSpPr>
+          <p:spPr>
+            <a:xfrm>
+              <a:off x="3327336" y="4336484"/>
+              <a:ext cx="0" cy="1317069"/>
+            </a:xfrm>
+            <a:custGeom>
+              <a:avLst/>
+              <a:pathLst>
+                <a:path w="0" h="1317069">
+                  <a:moveTo>
+                    <a:pt x="0" y="1317069"/>
+                  </a:moveTo>
+                  <a:lnTo>
+                    <a:pt x="0" y="0"/>
+                  </a:lnTo>
+                  <a:lnTo>
+                    <a:pt x="0" y="0"/>
+                  </a:lnTo>
+                </a:path>
+              </a:pathLst>
+            </a:custGeom>
+            <a:ln w="6775" cap="flat">
+              <a:solidFill>
+                <a:srgbClr val="EBEBEB">
+                  <a:alpha val="100000"/>
+                </a:srgbClr>
+              </a:solidFill>
+              <a:prstDash val="solid"/>
+              <a:round/>
+            </a:ln>
+          </p:spPr>
+          <p:txBody>
+            <a:bodyPr/>
+            <a:lstStyle/>
+            <a:p/>
+          </p:txBody>
+        </p:sp>
+        <p:sp>
+          <p:nvSpPr>
+            <p:cNvPr id="46" name="pl46"/>
+            <p:cNvSpPr/>
+            <p:nvPr/>
+          </p:nvSpPr>
+          <p:spPr>
+            <a:xfrm>
+              <a:off x="4172622" y="4336484"/>
+              <a:ext cx="0" cy="1317069"/>
+            </a:xfrm>
+            <a:custGeom>
+              <a:avLst/>
+              <a:pathLst>
+                <a:path w="0" h="1317069">
+                  <a:moveTo>
+                    <a:pt x="0" y="1317069"/>
+                  </a:moveTo>
+                  <a:lnTo>
+                    <a:pt x="0" y="0"/>
+                  </a:lnTo>
+                  <a:lnTo>
+                    <a:pt x="0" y="0"/>
+                  </a:lnTo>
+                </a:path>
+              </a:pathLst>
+            </a:custGeom>
+            <a:ln w="6775" cap="flat">
+              <a:solidFill>
+                <a:srgbClr val="EBEBEB">
+                  <a:alpha val="100000"/>
+                </a:srgbClr>
+              </a:solidFill>
+              <a:prstDash val="solid"/>
+              <a:round/>
+            </a:ln>
+          </p:spPr>
+          <p:txBody>
+            <a:bodyPr/>
+            <a:lstStyle/>
+            <a:p/>
+          </p:txBody>
+        </p:sp>
+        <p:sp>
+          <p:nvSpPr>
+            <p:cNvPr id="47" name="pl47"/>
+            <p:cNvSpPr/>
+            <p:nvPr/>
+          </p:nvSpPr>
+          <p:spPr>
+            <a:xfrm>
+              <a:off x="5017909" y="4336484"/>
+              <a:ext cx="0" cy="1317069"/>
+            </a:xfrm>
+            <a:custGeom>
+              <a:avLst/>
+              <a:pathLst>
+                <a:path w="0" h="1317069">
+                  <a:moveTo>
+                    <a:pt x="0" y="1317069"/>
+                  </a:moveTo>
+                  <a:lnTo>
+                    <a:pt x="0" y="0"/>
+                  </a:lnTo>
+                  <a:lnTo>
+                    <a:pt x="0" y="0"/>
+                  </a:lnTo>
+                </a:path>
+              </a:pathLst>
+            </a:custGeom>
+            <a:ln w="6775" cap="flat">
+              <a:solidFill>
+                <a:srgbClr val="EBEBEB">
+                  <a:alpha val="100000"/>
+                </a:srgbClr>
+              </a:solidFill>
+              <a:prstDash val="solid"/>
+              <a:round/>
+            </a:ln>
+          </p:spPr>
+          <p:txBody>
+            <a:bodyPr/>
+            <a:lstStyle/>
+            <a:p/>
+          </p:txBody>
+        </p:sp>
+        <p:sp>
+          <p:nvSpPr>
+            <p:cNvPr id="48" name="pl48"/>
+            <p:cNvSpPr/>
+            <p:nvPr/>
+          </p:nvSpPr>
+          <p:spPr>
+            <a:xfrm>
+              <a:off x="5863195" y="4336484"/>
+              <a:ext cx="0" cy="1317069"/>
+            </a:xfrm>
+            <a:custGeom>
+              <a:avLst/>
+              <a:pathLst>
+                <a:path w="0" h="1317069">
+                  <a:moveTo>
+                    <a:pt x="0" y="1317069"/>
+                  </a:moveTo>
+                  <a:lnTo>
+                    <a:pt x="0" y="0"/>
+                  </a:lnTo>
+                  <a:lnTo>
+                    <a:pt x="0" y="0"/>
+                  </a:lnTo>
+                </a:path>
+              </a:pathLst>
+            </a:custGeom>
+            <a:ln w="6775" cap="flat">
+              <a:solidFill>
+                <a:srgbClr val="EBEBEB">
+                  <a:alpha val="100000"/>
+                </a:srgbClr>
+              </a:solidFill>
+              <a:prstDash val="solid"/>
+              <a:round/>
+            </a:ln>
+          </p:spPr>
+          <p:txBody>
+            <a:bodyPr/>
+            <a:lstStyle/>
+            <a:p/>
+          </p:txBody>
+        </p:sp>
+        <p:sp>
+          <p:nvSpPr>
+            <p:cNvPr id="49" name="pl49"/>
+            <p:cNvSpPr/>
+            <p:nvPr/>
+          </p:nvSpPr>
+          <p:spPr>
+            <a:xfrm>
+              <a:off x="6708482" y="4336484"/>
+              <a:ext cx="0" cy="1317069"/>
+            </a:xfrm>
+            <a:custGeom>
+              <a:avLst/>
+              <a:pathLst>
+                <a:path w="0" h="1317069">
+                  <a:moveTo>
+                    <a:pt x="0" y="1317069"/>
+                  </a:moveTo>
+                  <a:lnTo>
+                    <a:pt x="0" y="0"/>
+                  </a:lnTo>
+                  <a:lnTo>
+                    <a:pt x="0" y="0"/>
+                  </a:lnTo>
+                </a:path>
+              </a:pathLst>
+            </a:custGeom>
+            <a:ln w="6775" cap="flat">
+              <a:solidFill>
+                <a:srgbClr val="EBEBEB">
+                  <a:alpha val="100000"/>
+                </a:srgbClr>
+              </a:solidFill>
+              <a:prstDash val="solid"/>
+              <a:round/>
+            </a:ln>
+          </p:spPr>
+          <p:txBody>
+            <a:bodyPr/>
+            <a:lstStyle/>
+            <a:p/>
+          </p:txBody>
+        </p:sp>
+        <p:sp>
+          <p:nvSpPr>
+            <p:cNvPr id="50" name="pl50"/>
+            <p:cNvSpPr/>
+            <p:nvPr/>
+          </p:nvSpPr>
+          <p:spPr>
+            <a:xfrm>
+              <a:off x="7553768" y="4336484"/>
+              <a:ext cx="0" cy="1317069"/>
+            </a:xfrm>
+            <a:custGeom>
+              <a:avLst/>
+              <a:pathLst>
+                <a:path w="0" h="1317069">
+                  <a:moveTo>
+                    <a:pt x="0" y="1317069"/>
+                  </a:moveTo>
+                  <a:lnTo>
+                    <a:pt x="0" y="0"/>
+                  </a:lnTo>
+                  <a:lnTo>
+                    <a:pt x="0" y="0"/>
+                  </a:lnTo>
+                </a:path>
+              </a:pathLst>
+            </a:custGeom>
+            <a:ln w="6775" cap="flat">
+              <a:solidFill>
+                <a:srgbClr val="EBEBEB">
+                  <a:alpha val="100000"/>
+                </a:srgbClr>
+              </a:solidFill>
+              <a:prstDash val="solid"/>
+              <a:round/>
+            </a:ln>
+          </p:spPr>
+          <p:txBody>
+            <a:bodyPr/>
+            <a:lstStyle/>
+            <a:p/>
+          </p:txBody>
+        </p:sp>
+        <p:sp>
+          <p:nvSpPr>
+            <p:cNvPr id="51" name="pl51"/>
+            <p:cNvSpPr/>
+            <p:nvPr/>
+          </p:nvSpPr>
+          <p:spPr>
+            <a:xfrm>
+              <a:off x="8399054" y="4336484"/>
+              <a:ext cx="0" cy="1317069"/>
+            </a:xfrm>
+            <a:custGeom>
+              <a:avLst/>
+              <a:pathLst>
+                <a:path w="0" h="1317069">
+                  <a:moveTo>
+                    <a:pt x="0" y="1317069"/>
+                  </a:moveTo>
+                  <a:lnTo>
+                    <a:pt x="0" y="0"/>
+                  </a:lnTo>
+                  <a:lnTo>
+                    <a:pt x="0" y="0"/>
+                  </a:lnTo>
+                </a:path>
+              </a:pathLst>
+            </a:custGeom>
+            <a:ln w="6775" cap="flat">
+              <a:solidFill>
+                <a:srgbClr val="EBEBEB">
+                  <a:alpha val="100000"/>
+                </a:srgbClr>
+              </a:solidFill>
+              <a:prstDash val="solid"/>
+              <a:round/>
+            </a:ln>
+          </p:spPr>
+          <p:txBody>
+            <a:bodyPr/>
+            <a:lstStyle/>
+            <a:p/>
+          </p:txBody>
+        </p:sp>
+        <p:sp>
+          <p:nvSpPr>
+            <p:cNvPr id="52" name="pl52"/>
+            <p:cNvSpPr/>
+            <p:nvPr/>
+          </p:nvSpPr>
+          <p:spPr>
+            <a:xfrm>
+              <a:off x="887106" y="5593686"/>
+              <a:ext cx="7660515" cy="0"/>
+            </a:xfrm>
+            <a:custGeom>
+              <a:avLst/>
+              <a:pathLst>
+                <a:path w="7660515" h="0">
+                  <a:moveTo>
+                    <a:pt x="0" y="0"/>
+                  </a:moveTo>
+                  <a:lnTo>
+                    <a:pt x="7660515" y="0"/>
+                  </a:lnTo>
+                  <a:lnTo>
+                    <a:pt x="7660515" y="0"/>
+                  </a:lnTo>
+                </a:path>
+              </a:pathLst>
+            </a:custGeom>
+            <a:ln w="13550" cap="flat">
+              <a:solidFill>
+                <a:srgbClr val="EBEBEB">
+                  <a:alpha val="100000"/>
+                </a:srgbClr>
+              </a:solidFill>
+              <a:prstDash val="solid"/>
+              <a:round/>
+            </a:ln>
+          </p:spPr>
+          <p:txBody>
+            <a:bodyPr/>
+            <a:lstStyle/>
+            <a:p/>
+          </p:txBody>
+        </p:sp>
+        <p:sp>
+          <p:nvSpPr>
+            <p:cNvPr id="53" name="pl53"/>
+            <p:cNvSpPr/>
+            <p:nvPr/>
+          </p:nvSpPr>
+          <p:spPr>
+            <a:xfrm>
+              <a:off x="887106" y="5294352"/>
+              <a:ext cx="7660515" cy="0"/>
+            </a:xfrm>
+            <a:custGeom>
+              <a:avLst/>
+              <a:pathLst>
+                <a:path w="7660515" h="0">
+                  <a:moveTo>
+                    <a:pt x="0" y="0"/>
+                  </a:moveTo>
+                  <a:lnTo>
+                    <a:pt x="7660515" y="0"/>
+                  </a:lnTo>
+                  <a:lnTo>
+                    <a:pt x="7660515" y="0"/>
+                  </a:lnTo>
+                </a:path>
+              </a:pathLst>
+            </a:custGeom>
+            <a:ln w="13550" cap="flat">
+              <a:solidFill>
+                <a:srgbClr val="EBEBEB">
+                  <a:alpha val="100000"/>
+                </a:srgbClr>
+              </a:solidFill>
+              <a:prstDash val="solid"/>
+              <a:round/>
+            </a:ln>
+          </p:spPr>
+          <p:txBody>
+            <a:bodyPr/>
+            <a:lstStyle/>
+            <a:p/>
+          </p:txBody>
+        </p:sp>
+        <p:sp>
+          <p:nvSpPr>
+            <p:cNvPr id="54" name="pl54"/>
+            <p:cNvSpPr/>
+            <p:nvPr/>
+          </p:nvSpPr>
+          <p:spPr>
+            <a:xfrm>
+              <a:off x="887106" y="4995019"/>
+              <a:ext cx="7660515" cy="0"/>
+            </a:xfrm>
+            <a:custGeom>
+              <a:avLst/>
+              <a:pathLst>
+                <a:path w="7660515" h="0">
+                  <a:moveTo>
+                    <a:pt x="0" y="0"/>
+                  </a:moveTo>
+                  <a:lnTo>
+                    <a:pt x="7660515" y="0"/>
+                  </a:lnTo>
+                  <a:lnTo>
+                    <a:pt x="7660515" y="0"/>
+                  </a:lnTo>
+                </a:path>
+              </a:pathLst>
+            </a:custGeom>
+            <a:ln w="13550" cap="flat">
+              <a:solidFill>
+                <a:srgbClr val="EBEBEB">
+                  <a:alpha val="100000"/>
+                </a:srgbClr>
+              </a:solidFill>
+              <a:prstDash val="solid"/>
+              <a:round/>
+            </a:ln>
+          </p:spPr>
+          <p:txBody>
+            <a:bodyPr/>
+            <a:lstStyle/>
+            <a:p/>
+          </p:txBody>
+        </p:sp>
+        <p:sp>
+          <p:nvSpPr>
+            <p:cNvPr id="55" name="pl55"/>
+            <p:cNvSpPr/>
+            <p:nvPr/>
+          </p:nvSpPr>
+          <p:spPr>
+            <a:xfrm>
+              <a:off x="887106" y="4695685"/>
+              <a:ext cx="7660515" cy="0"/>
+            </a:xfrm>
+            <a:custGeom>
+              <a:avLst/>
+              <a:pathLst>
+                <a:path w="7660515" h="0">
+                  <a:moveTo>
+                    <a:pt x="0" y="0"/>
+                  </a:moveTo>
+                  <a:lnTo>
+                    <a:pt x="7660515" y="0"/>
+                  </a:lnTo>
+                  <a:lnTo>
+                    <a:pt x="7660515" y="0"/>
+                  </a:lnTo>
+                </a:path>
+              </a:pathLst>
+            </a:custGeom>
+            <a:ln w="13550" cap="flat">
+              <a:solidFill>
+                <a:srgbClr val="EBEBEB">
+                  <a:alpha val="100000"/>
+                </a:srgbClr>
+              </a:solidFill>
+              <a:prstDash val="solid"/>
+              <a:round/>
+            </a:ln>
+          </p:spPr>
+          <p:txBody>
+            <a:bodyPr/>
+            <a:lstStyle/>
+            <a:p/>
+          </p:txBody>
+        </p:sp>
+        <p:sp>
+          <p:nvSpPr>
+            <p:cNvPr id="56" name="pl56"/>
+            <p:cNvSpPr/>
+            <p:nvPr/>
+          </p:nvSpPr>
+          <p:spPr>
+            <a:xfrm>
+              <a:off x="887106" y="4396351"/>
+              <a:ext cx="7660515" cy="0"/>
+            </a:xfrm>
+            <a:custGeom>
+              <a:avLst/>
+              <a:pathLst>
+                <a:path w="7660515" h="0">
+                  <a:moveTo>
+                    <a:pt x="0" y="0"/>
+                  </a:moveTo>
+                  <a:lnTo>
+                    <a:pt x="7660515" y="0"/>
+                  </a:lnTo>
+                  <a:lnTo>
+                    <a:pt x="7660515" y="0"/>
+                  </a:lnTo>
+                </a:path>
+              </a:pathLst>
+            </a:custGeom>
+            <a:ln w="13550" cap="flat">
+              <a:solidFill>
+                <a:srgbClr val="EBEBEB">
+                  <a:alpha val="100000"/>
+                </a:srgbClr>
+              </a:solidFill>
+              <a:prstDash val="solid"/>
+              <a:round/>
+            </a:ln>
+          </p:spPr>
+          <p:txBody>
+            <a:bodyPr/>
+            <a:lstStyle/>
+            <a:p/>
+          </p:txBody>
+        </p:sp>
+        <p:sp>
+          <p:nvSpPr>
+            <p:cNvPr id="57" name="pl57"/>
+            <p:cNvSpPr/>
+            <p:nvPr/>
+          </p:nvSpPr>
+          <p:spPr>
+            <a:xfrm>
+              <a:off x="1214120" y="4336484"/>
+              <a:ext cx="0" cy="1317069"/>
+            </a:xfrm>
+            <a:custGeom>
+              <a:avLst/>
+              <a:pathLst>
+                <a:path w="0" h="1317069">
+                  <a:moveTo>
+                    <a:pt x="0" y="1317069"/>
+                  </a:moveTo>
+                  <a:lnTo>
+                    <a:pt x="0" y="0"/>
+                  </a:lnTo>
+                  <a:lnTo>
+                    <a:pt x="0" y="0"/>
+                  </a:lnTo>
+                </a:path>
+              </a:pathLst>
+            </a:custGeom>
+            <a:ln w="13550" cap="flat">
+              <a:solidFill>
+                <a:srgbClr val="EBEBEB">
+                  <a:alpha val="100000"/>
+                </a:srgbClr>
+              </a:solidFill>
+              <a:prstDash val="solid"/>
+              <a:round/>
+            </a:ln>
+          </p:spPr>
+          <p:txBody>
+            <a:bodyPr/>
+            <a:lstStyle/>
+            <a:p/>
+          </p:txBody>
+        </p:sp>
+        <p:sp>
+          <p:nvSpPr>
+            <p:cNvPr id="58" name="pl58"/>
+            <p:cNvSpPr/>
+            <p:nvPr/>
+          </p:nvSpPr>
+          <p:spPr>
+            <a:xfrm>
+              <a:off x="2059406" y="4336484"/>
+              <a:ext cx="0" cy="1317069"/>
+            </a:xfrm>
+            <a:custGeom>
+              <a:avLst/>
+              <a:pathLst>
+                <a:path w="0" h="1317069">
+                  <a:moveTo>
+                    <a:pt x="0" y="1317069"/>
+                  </a:moveTo>
+                  <a:lnTo>
+                    <a:pt x="0" y="0"/>
+                  </a:lnTo>
+                  <a:lnTo>
+                    <a:pt x="0" y="0"/>
+                  </a:lnTo>
+                </a:path>
+              </a:pathLst>
+            </a:custGeom>
+            <a:ln w="13550" cap="flat">
+              <a:solidFill>
+                <a:srgbClr val="EBEBEB">
+                  <a:alpha val="100000"/>
+                </a:srgbClr>
+              </a:solidFill>
+              <a:prstDash val="solid"/>
+              <a:round/>
+            </a:ln>
+          </p:spPr>
+          <p:txBody>
+            <a:bodyPr/>
+            <a:lstStyle/>
+            <a:p/>
+          </p:txBody>
+        </p:sp>
+        <p:sp>
+          <p:nvSpPr>
+            <p:cNvPr id="59" name="pl59"/>
+            <p:cNvSpPr/>
+            <p:nvPr/>
+          </p:nvSpPr>
+          <p:spPr>
+            <a:xfrm>
+              <a:off x="2904693" y="4336484"/>
+              <a:ext cx="0" cy="1317069"/>
+            </a:xfrm>
+            <a:custGeom>
+              <a:avLst/>
+              <a:pathLst>
+                <a:path w="0" h="1317069">
+                  <a:moveTo>
+                    <a:pt x="0" y="1317069"/>
+                  </a:moveTo>
+                  <a:lnTo>
+                    <a:pt x="0" y="0"/>
+                  </a:lnTo>
+                  <a:lnTo>
+                    <a:pt x="0" y="0"/>
+                  </a:lnTo>
+                </a:path>
+              </a:pathLst>
+            </a:custGeom>
+            <a:ln w="13550" cap="flat">
+              <a:solidFill>
+                <a:srgbClr val="EBEBEB">
+                  <a:alpha val="100000"/>
+                </a:srgbClr>
+              </a:solidFill>
+              <a:prstDash val="solid"/>
+              <a:round/>
+            </a:ln>
+          </p:spPr>
+          <p:txBody>
+            <a:bodyPr/>
+            <a:lstStyle/>
+            <a:p/>
+          </p:txBody>
+        </p:sp>
+        <p:sp>
+          <p:nvSpPr>
+            <p:cNvPr id="60" name="pl60"/>
+            <p:cNvSpPr/>
+            <p:nvPr/>
+          </p:nvSpPr>
+          <p:spPr>
+            <a:xfrm>
+              <a:off x="3749979" y="4336484"/>
+              <a:ext cx="0" cy="1317069"/>
+            </a:xfrm>
+            <a:custGeom>
+              <a:avLst/>
+              <a:pathLst>
+                <a:path w="0" h="1317069">
+                  <a:moveTo>
+                    <a:pt x="0" y="1317069"/>
+                  </a:moveTo>
+                  <a:lnTo>
+                    <a:pt x="0" y="0"/>
+                  </a:lnTo>
+                  <a:lnTo>
+                    <a:pt x="0" y="0"/>
+                  </a:lnTo>
+                </a:path>
+              </a:pathLst>
+            </a:custGeom>
+            <a:ln w="13550" cap="flat">
+              <a:solidFill>
+                <a:srgbClr val="EBEBEB">
+                  <a:alpha val="100000"/>
+                </a:srgbClr>
+              </a:solidFill>
+              <a:prstDash val="solid"/>
+              <a:round/>
+            </a:ln>
+          </p:spPr>
+          <p:txBody>
+            <a:bodyPr/>
+            <a:lstStyle/>
+            <a:p/>
+          </p:txBody>
+        </p:sp>
+        <p:sp>
+          <p:nvSpPr>
+            <p:cNvPr id="61" name="pl61"/>
+            <p:cNvSpPr/>
+            <p:nvPr/>
+          </p:nvSpPr>
+          <p:spPr>
+            <a:xfrm>
+              <a:off x="4595266" y="4336484"/>
+              <a:ext cx="0" cy="1317069"/>
+            </a:xfrm>
+            <a:custGeom>
+              <a:avLst/>
+              <a:pathLst>
+                <a:path w="0" h="1317069">
+                  <a:moveTo>
+                    <a:pt x="0" y="1317069"/>
+                  </a:moveTo>
+                  <a:lnTo>
+                    <a:pt x="0" y="0"/>
+                  </a:lnTo>
+                  <a:lnTo>
+                    <a:pt x="0" y="0"/>
+                  </a:lnTo>
+                </a:path>
+              </a:pathLst>
+            </a:custGeom>
+            <a:ln w="13550" cap="flat">
+              <a:solidFill>
+                <a:srgbClr val="EBEBEB">
+                  <a:alpha val="100000"/>
+                </a:srgbClr>
+              </a:solidFill>
+              <a:prstDash val="solid"/>
+              <a:round/>
+            </a:ln>
+          </p:spPr>
+          <p:txBody>
+            <a:bodyPr/>
+            <a:lstStyle/>
+            <a:p/>
+          </p:txBody>
+        </p:sp>
+        <p:sp>
+          <p:nvSpPr>
+            <p:cNvPr id="62" name="pl62"/>
+            <p:cNvSpPr/>
+            <p:nvPr/>
+          </p:nvSpPr>
+          <p:spPr>
+            <a:xfrm>
+              <a:off x="5440552" y="4336484"/>
+              <a:ext cx="0" cy="1317069"/>
+            </a:xfrm>
+            <a:custGeom>
+              <a:avLst/>
+              <a:pathLst>
+                <a:path w="0" h="1317069">
+                  <a:moveTo>
+                    <a:pt x="0" y="1317069"/>
+                  </a:moveTo>
+                  <a:lnTo>
+                    <a:pt x="0" y="0"/>
+                  </a:lnTo>
+                  <a:lnTo>
+                    <a:pt x="0" y="0"/>
+                  </a:lnTo>
+                </a:path>
+              </a:pathLst>
+            </a:custGeom>
+            <a:ln w="13550" cap="flat">
+              <a:solidFill>
+                <a:srgbClr val="EBEBEB">
+                  <a:alpha val="100000"/>
+                </a:srgbClr>
+              </a:solidFill>
+              <a:prstDash val="solid"/>
+              <a:round/>
+            </a:ln>
+          </p:spPr>
+          <p:txBody>
+            <a:bodyPr/>
+            <a:lstStyle/>
+            <a:p/>
+          </p:txBody>
+        </p:sp>
+        <p:sp>
+          <p:nvSpPr>
+            <p:cNvPr id="63" name="pl63"/>
+            <p:cNvSpPr/>
+            <p:nvPr/>
+          </p:nvSpPr>
+          <p:spPr>
+            <a:xfrm>
+              <a:off x="6285838" y="4336484"/>
+              <a:ext cx="0" cy="1317069"/>
+            </a:xfrm>
+            <a:custGeom>
+              <a:avLst/>
+              <a:pathLst>
+                <a:path w="0" h="1317069">
+                  <a:moveTo>
+                    <a:pt x="0" y="1317069"/>
+                  </a:moveTo>
+                  <a:lnTo>
+                    <a:pt x="0" y="0"/>
+                  </a:lnTo>
+                  <a:lnTo>
+                    <a:pt x="0" y="0"/>
+                  </a:lnTo>
+                </a:path>
+              </a:pathLst>
+            </a:custGeom>
+            <a:ln w="13550" cap="flat">
+              <a:solidFill>
+                <a:srgbClr val="EBEBEB">
+                  <a:alpha val="100000"/>
+                </a:srgbClr>
+              </a:solidFill>
+              <a:prstDash val="solid"/>
+              <a:round/>
+            </a:ln>
+          </p:spPr>
+          <p:txBody>
+            <a:bodyPr/>
+            <a:lstStyle/>
+            <a:p/>
+          </p:txBody>
+        </p:sp>
+        <p:sp>
+          <p:nvSpPr>
+            <p:cNvPr id="64" name="pl64"/>
+            <p:cNvSpPr/>
+            <p:nvPr/>
+          </p:nvSpPr>
+          <p:spPr>
+            <a:xfrm>
+              <a:off x="7131125" y="4336484"/>
+              <a:ext cx="0" cy="1317069"/>
+            </a:xfrm>
+            <a:custGeom>
+              <a:avLst/>
+              <a:pathLst>
+                <a:path w="0" h="1317069">
+                  <a:moveTo>
+                    <a:pt x="0" y="1317069"/>
+                  </a:moveTo>
+                  <a:lnTo>
+                    <a:pt x="0" y="0"/>
+                  </a:lnTo>
+                  <a:lnTo>
+                    <a:pt x="0" y="0"/>
+                  </a:lnTo>
+                </a:path>
+              </a:pathLst>
+            </a:custGeom>
+            <a:ln w="13550" cap="flat">
+              <a:solidFill>
+                <a:srgbClr val="EBEBEB">
+                  <a:alpha val="100000"/>
+                </a:srgbClr>
+              </a:solidFill>
+              <a:prstDash val="solid"/>
+              <a:round/>
+            </a:ln>
+          </p:spPr>
+          <p:txBody>
+            <a:bodyPr/>
+            <a:lstStyle/>
+            <a:p/>
+          </p:txBody>
+        </p:sp>
+        <p:sp>
+          <p:nvSpPr>
+            <p:cNvPr id="65" name="pl65"/>
+            <p:cNvSpPr/>
+            <p:nvPr/>
+          </p:nvSpPr>
+          <p:spPr>
+            <a:xfrm>
+              <a:off x="7976411" y="4336484"/>
+              <a:ext cx="0" cy="1317069"/>
+            </a:xfrm>
+            <a:custGeom>
+              <a:avLst/>
+              <a:pathLst>
+                <a:path w="0" h="1317069">
+                  <a:moveTo>
+                    <a:pt x="0" y="1317069"/>
+                  </a:moveTo>
+                  <a:lnTo>
+                    <a:pt x="0" y="0"/>
+                  </a:lnTo>
+                  <a:lnTo>
+                    <a:pt x="0" y="0"/>
+                  </a:lnTo>
+                </a:path>
+              </a:pathLst>
+            </a:custGeom>
+            <a:ln w="13550" cap="flat">
+              <a:solidFill>
+                <a:srgbClr val="EBEBEB">
+                  <a:alpha val="100000"/>
+                </a:srgbClr>
+              </a:solidFill>
+              <a:prstDash val="solid"/>
+              <a:round/>
+            </a:ln>
+          </p:spPr>
+          <p:txBody>
+            <a:bodyPr/>
+            <a:lstStyle/>
+            <a:p/>
+          </p:txBody>
+        </p:sp>
+        <p:sp>
+          <p:nvSpPr>
+            <p:cNvPr id="66" name="pg66"/>
+            <p:cNvSpPr/>
+            <p:nvPr/>
+          </p:nvSpPr>
+          <p:spPr>
+            <a:xfrm>
+              <a:off x="1235312" y="4336484"/>
+              <a:ext cx="6964104" cy="1213896"/>
+            </a:xfrm>
+            <a:custGeom>
+              <a:avLst/>
+              <a:pathLst>
+                <a:path w="6964104" h="1213896">
+                  <a:moveTo>
+                    <a:pt x="676505" y="0"/>
+                  </a:moveTo>
+                  <a:lnTo>
+                    <a:pt x="703444" y="18221"/>
+                  </a:lnTo>
+                  <a:lnTo>
+                    <a:pt x="773789" y="64040"/>
+                  </a:lnTo>
+                  <a:lnTo>
+                    <a:pt x="844133" y="108165"/>
+                  </a:lnTo>
+                  <a:lnTo>
+                    <a:pt x="914478" y="150658"/>
+                  </a:lnTo>
+                  <a:lnTo>
+                    <a:pt x="984822" y="191580"/>
+                  </a:lnTo>
+                  <a:lnTo>
+                    <a:pt x="1055167" y="230988"/>
+                  </a:lnTo>
+                  <a:lnTo>
+                    <a:pt x="1125511" y="268939"/>
+                  </a:lnTo>
+                  <a:lnTo>
+                    <a:pt x="1195856" y="305487"/>
+                  </a:lnTo>
+                  <a:lnTo>
+                    <a:pt x="1266200" y="340683"/>
+                  </a:lnTo>
+                  <a:lnTo>
+                    <a:pt x="1336545" y="374577"/>
+                  </a:lnTo>
+                  <a:lnTo>
+                    <a:pt x="1406889" y="407218"/>
+                  </a:lnTo>
+                  <a:lnTo>
+                    <a:pt x="1477234" y="438652"/>
+                  </a:lnTo>
+                  <a:lnTo>
+                    <a:pt x="1547578" y="468923"/>
+                  </a:lnTo>
+                  <a:lnTo>
+                    <a:pt x="1617923" y="498075"/>
+                  </a:lnTo>
+                  <a:lnTo>
+                    <a:pt x="1688267" y="526148"/>
+                  </a:lnTo>
+                  <a:lnTo>
+                    <a:pt x="1758612" y="553184"/>
+                  </a:lnTo>
+                  <a:lnTo>
+                    <a:pt x="1828956" y="579220"/>
+                  </a:lnTo>
+                  <a:lnTo>
+                    <a:pt x="1899301" y="604292"/>
+                  </a:lnTo>
+                  <a:lnTo>
+                    <a:pt x="1969645" y="628438"/>
+                  </a:lnTo>
+                  <a:lnTo>
+                    <a:pt x="2039990" y="651691"/>
+                  </a:lnTo>
+                  <a:lnTo>
+                    <a:pt x="2110334" y="674083"/>
+                  </a:lnTo>
+                  <a:lnTo>
+                    <a:pt x="2180679" y="695648"/>
+                  </a:lnTo>
+                  <a:lnTo>
+                    <a:pt x="2251023" y="716415"/>
+                  </a:lnTo>
+                  <a:lnTo>
+                    <a:pt x="2321368" y="736414"/>
+                  </a:lnTo>
+                  <a:lnTo>
+                    <a:pt x="2391712" y="755674"/>
+                  </a:lnTo>
+                  <a:lnTo>
+                    <a:pt x="2462057" y="774221"/>
+                  </a:lnTo>
+                  <a:lnTo>
+                    <a:pt x="2532401" y="792083"/>
+                  </a:lnTo>
+                  <a:lnTo>
+                    <a:pt x="2602746" y="809283"/>
+                  </a:lnTo>
+                  <a:lnTo>
+                    <a:pt x="2673090" y="825848"/>
+                  </a:lnTo>
+                  <a:lnTo>
+                    <a:pt x="2743435" y="841800"/>
+                  </a:lnTo>
+                  <a:lnTo>
+                    <a:pt x="2813779" y="857162"/>
+                  </a:lnTo>
+                  <a:lnTo>
+                    <a:pt x="2884124" y="871957"/>
+                  </a:lnTo>
+                  <a:lnTo>
+                    <a:pt x="2954468" y="886204"/>
+                  </a:lnTo>
+                  <a:lnTo>
+                    <a:pt x="3024813" y="899924"/>
+                  </a:lnTo>
+                  <a:lnTo>
+                    <a:pt x="3095157" y="913136"/>
+                  </a:lnTo>
+                  <a:lnTo>
+                    <a:pt x="3165502" y="925860"/>
+                  </a:lnTo>
+                  <a:lnTo>
+                    <a:pt x="3235846" y="938114"/>
+                  </a:lnTo>
+                  <a:lnTo>
+                    <a:pt x="3306191" y="949914"/>
+                  </a:lnTo>
+                  <a:lnTo>
+                    <a:pt x="3376535" y="959117"/>
+                  </a:lnTo>
+                  <a:lnTo>
+                    <a:pt x="3446880" y="963189"/>
+                  </a:lnTo>
+                  <a:lnTo>
+                    <a:pt x="3517224" y="967206"/>
+                  </a:lnTo>
+                  <a:lnTo>
+                    <a:pt x="3587569" y="971167"/>
+                  </a:lnTo>
+                  <a:lnTo>
+                    <a:pt x="3657913" y="975074"/>
+                  </a:lnTo>
+                  <a:lnTo>
+                    <a:pt x="3728257" y="978928"/>
+                  </a:lnTo>
+                  <a:lnTo>
+                    <a:pt x="3798602" y="982730"/>
+                  </a:lnTo>
+                  <a:lnTo>
+                    <a:pt x="3868946" y="986479"/>
+                  </a:lnTo>
+                  <a:lnTo>
+                    <a:pt x="3939291" y="990177"/>
+                  </a:lnTo>
+                  <a:lnTo>
+                    <a:pt x="4009635" y="993825"/>
+                  </a:lnTo>
+                  <a:lnTo>
+                    <a:pt x="4079980" y="997423"/>
+                  </a:lnTo>
+                  <a:lnTo>
+                    <a:pt x="4150324" y="1000971"/>
+                  </a:lnTo>
+                  <a:lnTo>
+                    <a:pt x="4220669" y="1004471"/>
+                  </a:lnTo>
+                  <a:lnTo>
+                    <a:pt x="4291013" y="1007924"/>
+                  </a:lnTo>
+                  <a:lnTo>
+                    <a:pt x="4361358" y="1011329"/>
+                  </a:lnTo>
+                  <a:lnTo>
+                    <a:pt x="4431702" y="1014688"/>
+                  </a:lnTo>
+                  <a:lnTo>
+                    <a:pt x="4502047" y="1018001"/>
+                  </a:lnTo>
+                  <a:lnTo>
+                    <a:pt x="4572391" y="1021268"/>
+                  </a:lnTo>
+                  <a:lnTo>
+                    <a:pt x="4642736" y="1024491"/>
+                  </a:lnTo>
+                  <a:lnTo>
+                    <a:pt x="4713080" y="1027670"/>
+                  </a:lnTo>
+                  <a:lnTo>
+                    <a:pt x="4783425" y="1030806"/>
+                  </a:lnTo>
+                  <a:lnTo>
+                    <a:pt x="4853769" y="1033898"/>
+                  </a:lnTo>
+                  <a:lnTo>
+                    <a:pt x="4924114" y="1036949"/>
+                  </a:lnTo>
+                  <a:lnTo>
+                    <a:pt x="4994458" y="1039957"/>
+                  </a:lnTo>
+                  <a:lnTo>
+                    <a:pt x="5064803" y="1042925"/>
+                  </a:lnTo>
+                  <a:lnTo>
+                    <a:pt x="5135147" y="1045852"/>
+                  </a:lnTo>
+                  <a:lnTo>
+                    <a:pt x="5205492" y="1048739"/>
+                  </a:lnTo>
+                  <a:lnTo>
+                    <a:pt x="5275836" y="1051587"/>
+                  </a:lnTo>
+                  <a:lnTo>
+                    <a:pt x="5346181" y="1054396"/>
+                  </a:lnTo>
+                  <a:lnTo>
+                    <a:pt x="5416525" y="1057166"/>
+                  </a:lnTo>
+                  <a:lnTo>
+                    <a:pt x="5486870" y="1059899"/>
+                  </a:lnTo>
+                  <a:lnTo>
+                    <a:pt x="5557214" y="1062594"/>
+                  </a:lnTo>
+                  <a:lnTo>
+                    <a:pt x="5627559" y="1065252"/>
+                  </a:lnTo>
+                  <a:lnTo>
+                    <a:pt x="5697903" y="1067874"/>
+                  </a:lnTo>
+                  <a:lnTo>
+                    <a:pt x="5768248" y="1070461"/>
+                  </a:lnTo>
+                  <a:lnTo>
+                    <a:pt x="5838592" y="1073012"/>
+                  </a:lnTo>
+                  <a:lnTo>
+                    <a:pt x="5908937" y="1075528"/>
+                  </a:lnTo>
+                  <a:lnTo>
+                    <a:pt x="5979281" y="1078009"/>
+                  </a:lnTo>
+                  <a:lnTo>
+                    <a:pt x="6049626" y="1080457"/>
+                  </a:lnTo>
+                  <a:lnTo>
+                    <a:pt x="6119970" y="1082872"/>
+                  </a:lnTo>
+                  <a:lnTo>
+                    <a:pt x="6190315" y="1085253"/>
+                  </a:lnTo>
+                  <a:lnTo>
+                    <a:pt x="6260659" y="1087602"/>
+                  </a:lnTo>
+                  <a:lnTo>
+                    <a:pt x="6331004" y="1089919"/>
+                  </a:lnTo>
+                  <a:lnTo>
+                    <a:pt x="6401348" y="1092204"/>
+                  </a:lnTo>
+                  <a:lnTo>
+                    <a:pt x="6471693" y="1094458"/>
+                  </a:lnTo>
+                  <a:lnTo>
+                    <a:pt x="6542037" y="1096681"/>
+                  </a:lnTo>
+                  <a:lnTo>
+                    <a:pt x="6612382" y="1098874"/>
+                  </a:lnTo>
+                  <a:lnTo>
+                    <a:pt x="6682726" y="1101037"/>
+                  </a:lnTo>
+                  <a:lnTo>
+                    <a:pt x="6753071" y="1103170"/>
+                  </a:lnTo>
+                  <a:lnTo>
+                    <a:pt x="6823415" y="1105274"/>
+                  </a:lnTo>
+                  <a:lnTo>
+                    <a:pt x="6893760" y="1107349"/>
+                  </a:lnTo>
+                  <a:lnTo>
+                    <a:pt x="6964104" y="1109396"/>
+                  </a:lnTo>
+                  <a:lnTo>
+                    <a:pt x="6964104" y="1213896"/>
+                  </a:lnTo>
+                  <a:lnTo>
+                    <a:pt x="6893760" y="1212233"/>
+                  </a:lnTo>
+                  <a:lnTo>
+                    <a:pt x="6823415" y="1210506"/>
+                  </a:lnTo>
+                  <a:lnTo>
+                    <a:pt x="6753071" y="1208713"/>
+                  </a:lnTo>
+                  <a:lnTo>
+                    <a:pt x="6682726" y="1206851"/>
+                  </a:lnTo>
+                  <a:lnTo>
+                    <a:pt x="6612382" y="1204918"/>
+                  </a:lnTo>
+                  <a:lnTo>
+                    <a:pt x="6542037" y="1202910"/>
+                  </a:lnTo>
+                  <a:lnTo>
+                    <a:pt x="6471693" y="1200825"/>
+                  </a:lnTo>
+                  <a:lnTo>
+                    <a:pt x="6401348" y="1198660"/>
+                  </a:lnTo>
+                  <a:lnTo>
+                    <a:pt x="6331004" y="1196412"/>
+                  </a:lnTo>
+                  <a:lnTo>
+                    <a:pt x="6260659" y="1194077"/>
+                  </a:lnTo>
+                  <a:lnTo>
+                    <a:pt x="6190315" y="1191653"/>
+                  </a:lnTo>
+                  <a:lnTo>
+                    <a:pt x="6119970" y="1189136"/>
+                  </a:lnTo>
+                  <a:lnTo>
+                    <a:pt x="6049626" y="1186522"/>
+                  </a:lnTo>
+                  <a:lnTo>
+                    <a:pt x="5979281" y="1183808"/>
+                  </a:lnTo>
+                  <a:lnTo>
+                    <a:pt x="5908937" y="1180990"/>
+                  </a:lnTo>
+                  <a:lnTo>
+                    <a:pt x="5838592" y="1178063"/>
+                  </a:lnTo>
+                  <a:lnTo>
+                    <a:pt x="5768248" y="1175024"/>
+                  </a:lnTo>
+                  <a:lnTo>
+                    <a:pt x="5697903" y="1171868"/>
+                  </a:lnTo>
+                  <a:lnTo>
+                    <a:pt x="5627559" y="1168591"/>
+                  </a:lnTo>
+                  <a:lnTo>
+                    <a:pt x="5557214" y="1165188"/>
+                  </a:lnTo>
+                  <a:lnTo>
+                    <a:pt x="5486870" y="1161655"/>
+                  </a:lnTo>
+                  <a:lnTo>
+                    <a:pt x="5416525" y="1157986"/>
+                  </a:lnTo>
+                  <a:lnTo>
+                    <a:pt x="5346181" y="1154175"/>
+                  </a:lnTo>
+                  <a:lnTo>
+                    <a:pt x="5275836" y="1150219"/>
+                  </a:lnTo>
+                  <a:lnTo>
+                    <a:pt x="5205492" y="1146111"/>
+                  </a:lnTo>
+                  <a:lnTo>
+                    <a:pt x="5135147" y="1141845"/>
+                  </a:lnTo>
+                  <a:lnTo>
+                    <a:pt x="5064803" y="1137415"/>
+                  </a:lnTo>
+                  <a:lnTo>
+                    <a:pt x="4994458" y="1132815"/>
+                  </a:lnTo>
+                  <a:lnTo>
+                    <a:pt x="4924114" y="1128038"/>
+                  </a:lnTo>
+                  <a:lnTo>
+                    <a:pt x="4853769" y="1123078"/>
+                  </a:lnTo>
+                  <a:lnTo>
+                    <a:pt x="4783425" y="1117927"/>
+                  </a:lnTo>
+                  <a:lnTo>
+                    <a:pt x="4713080" y="1112579"/>
+                  </a:lnTo>
+                  <a:lnTo>
+                    <a:pt x="4642736" y="1107025"/>
+                  </a:lnTo>
+                  <a:lnTo>
+                    <a:pt x="4572391" y="1101258"/>
+                  </a:lnTo>
+                  <a:lnTo>
+                    <a:pt x="4502047" y="1095270"/>
+                  </a:lnTo>
+                  <a:lnTo>
+                    <a:pt x="4431702" y="1089051"/>
+                  </a:lnTo>
+                  <a:lnTo>
+                    <a:pt x="4361358" y="1082594"/>
+                  </a:lnTo>
+                  <a:lnTo>
+                    <a:pt x="4291013" y="1075889"/>
+                  </a:lnTo>
+                  <a:lnTo>
+                    <a:pt x="4220669" y="1068926"/>
+                  </a:lnTo>
+                  <a:lnTo>
+                    <a:pt x="4150324" y="1061696"/>
+                  </a:lnTo>
+                  <a:lnTo>
+                    <a:pt x="4079980" y="1054188"/>
+                  </a:lnTo>
+                  <a:lnTo>
+                    <a:pt x="4009635" y="1046392"/>
+                  </a:lnTo>
+                  <a:lnTo>
+                    <a:pt x="3939291" y="1038296"/>
+                  </a:lnTo>
+                  <a:lnTo>
+                    <a:pt x="3868946" y="1029890"/>
+                  </a:lnTo>
+                  <a:lnTo>
+                    <a:pt x="3798602" y="1021161"/>
+                  </a:lnTo>
+                  <a:lnTo>
+                    <a:pt x="3728257" y="1012097"/>
+                  </a:lnTo>
+                  <a:lnTo>
+                    <a:pt x="3657913" y="1002684"/>
+                  </a:lnTo>
+                  <a:lnTo>
+                    <a:pt x="3587569" y="992910"/>
+                  </a:lnTo>
+                  <a:lnTo>
+                    <a:pt x="3517224" y="982761"/>
+                  </a:lnTo>
+                  <a:lnTo>
+                    <a:pt x="3446880" y="972222"/>
+                  </a:lnTo>
+                  <a:lnTo>
+                    <a:pt x="3376535" y="961278"/>
+                  </a:lnTo>
+                  <a:lnTo>
+                    <a:pt x="3306191" y="954989"/>
+                  </a:lnTo>
+                  <a:lnTo>
+                    <a:pt x="3235846" y="950803"/>
+                  </a:lnTo>
+                  <a:lnTo>
+                    <a:pt x="3165502" y="946560"/>
+                  </a:lnTo>
+                  <a:lnTo>
+                    <a:pt x="3095157" y="942258"/>
+                  </a:lnTo>
+                  <a:lnTo>
+                    <a:pt x="3024813" y="937896"/>
+                  </a:lnTo>
+                  <a:lnTo>
+                    <a:pt x="2954468" y="933474"/>
+                  </a:lnTo>
+                  <a:lnTo>
+                    <a:pt x="2884124" y="928990"/>
+                  </a:lnTo>
+                  <a:lnTo>
+                    <a:pt x="2813779" y="924445"/>
+                  </a:lnTo>
+                  <a:lnTo>
+                    <a:pt x="2743435" y="919836"/>
+                  </a:lnTo>
+                  <a:lnTo>
+                    <a:pt x="2673090" y="915164"/>
+                  </a:lnTo>
+                  <a:lnTo>
+                    <a:pt x="2602746" y="910427"/>
+                  </a:lnTo>
+                  <a:lnTo>
+                    <a:pt x="2532401" y="905624"/>
+                  </a:lnTo>
+                  <a:lnTo>
+                    <a:pt x="2462057" y="900755"/>
+                  </a:lnTo>
+                  <a:lnTo>
+                    <a:pt x="2391712" y="895818"/>
+                  </a:lnTo>
+                  <a:lnTo>
+                    <a:pt x="2321368" y="890813"/>
+                  </a:lnTo>
+                  <a:lnTo>
+                    <a:pt x="2251023" y="885739"/>
+                  </a:lnTo>
+                  <a:lnTo>
+                    <a:pt x="2180679" y="880594"/>
+                  </a:lnTo>
+                  <a:lnTo>
+                    <a:pt x="2110334" y="875378"/>
+                  </a:lnTo>
+                  <a:lnTo>
+                    <a:pt x="2039990" y="870090"/>
+                  </a:lnTo>
+                  <a:lnTo>
+                    <a:pt x="1969645" y="864729"/>
+                  </a:lnTo>
+                  <a:lnTo>
+                    <a:pt x="1899301" y="859293"/>
+                  </a:lnTo>
+                  <a:lnTo>
+                    <a:pt x="1828956" y="853783"/>
+                  </a:lnTo>
+                  <a:lnTo>
+                    <a:pt x="1758612" y="848195"/>
+                  </a:lnTo>
+                  <a:lnTo>
+                    <a:pt x="1688267" y="842531"/>
+                  </a:lnTo>
+                  <a:lnTo>
+                    <a:pt x="1617923" y="836788"/>
+                  </a:lnTo>
+                  <a:lnTo>
+                    <a:pt x="1547578" y="830965"/>
+                  </a:lnTo>
+                  <a:lnTo>
+                    <a:pt x="1477234" y="825062"/>
+                  </a:lnTo>
+                  <a:lnTo>
+                    <a:pt x="1406889" y="819077"/>
+                  </a:lnTo>
+                  <a:lnTo>
+                    <a:pt x="1336545" y="813009"/>
+                  </a:lnTo>
+                  <a:lnTo>
+                    <a:pt x="1266200" y="806857"/>
+                  </a:lnTo>
+                  <a:lnTo>
+                    <a:pt x="1195856" y="800620"/>
+                  </a:lnTo>
+                  <a:lnTo>
+                    <a:pt x="1125511" y="794297"/>
+                  </a:lnTo>
+                  <a:lnTo>
+                    <a:pt x="1055167" y="787886"/>
+                  </a:lnTo>
+                  <a:lnTo>
+                    <a:pt x="984822" y="781386"/>
+                  </a:lnTo>
+                  <a:lnTo>
+                    <a:pt x="914478" y="774796"/>
+                  </a:lnTo>
+                  <a:lnTo>
+                    <a:pt x="844133" y="768115"/>
+                  </a:lnTo>
+                  <a:lnTo>
+                    <a:pt x="773789" y="761342"/>
+                  </a:lnTo>
+                  <a:lnTo>
+                    <a:pt x="703444" y="754474"/>
+                  </a:lnTo>
+                  <a:lnTo>
+                    <a:pt x="633100" y="747512"/>
+                  </a:lnTo>
+                  <a:lnTo>
+                    <a:pt x="562755" y="740453"/>
+                  </a:lnTo>
+                  <a:lnTo>
+                    <a:pt x="492411" y="733296"/>
+                  </a:lnTo>
+                  <a:lnTo>
+                    <a:pt x="422066" y="726040"/>
+                  </a:lnTo>
+                  <a:lnTo>
+                    <a:pt x="351722" y="718684"/>
+                  </a:lnTo>
+                  <a:lnTo>
+                    <a:pt x="281377" y="711225"/>
+                  </a:lnTo>
+                  <a:lnTo>
+                    <a:pt x="211033" y="703664"/>
+                  </a:lnTo>
+                  <a:lnTo>
+                    <a:pt x="140688" y="695998"/>
+                  </a:lnTo>
+                  <a:lnTo>
+                    <a:pt x="70344" y="688225"/>
+                  </a:lnTo>
+                  <a:lnTo>
+                    <a:pt x="0" y="680345"/>
+                  </a:lnTo>
+                  <a:close/>
+                </a:path>
+              </a:pathLst>
+            </a:custGeom>
+            <a:solidFill>
+              <a:srgbClr val="FF8C00">
+                <a:alpha val="20000"/>
+              </a:srgbClr>
+            </a:solidFill>
+          </p:spPr>
+          <p:txBody>
+            <a:bodyPr/>
+            <a:lstStyle/>
+            <a:p/>
+          </p:txBody>
+        </p:sp>
+        <p:sp>
+          <p:nvSpPr>
+            <p:cNvPr id="67" name="pl67"/>
+            <p:cNvSpPr/>
+            <p:nvPr/>
+          </p:nvSpPr>
+          <p:spPr>
+            <a:xfrm>
+              <a:off x="1911817" y="4336484"/>
+              <a:ext cx="6287599" cy="1109396"/>
+            </a:xfrm>
+            <a:custGeom>
+              <a:avLst/>
+              <a:pathLst>
+                <a:path w="6287599" h="1109396">
+                  <a:moveTo>
+                    <a:pt x="0" y="0"/>
+                  </a:moveTo>
+                  <a:lnTo>
+                    <a:pt x="26939" y="18221"/>
+                  </a:lnTo>
+                  <a:lnTo>
+                    <a:pt x="97284" y="64040"/>
+                  </a:lnTo>
+                  <a:lnTo>
+                    <a:pt x="167628" y="108165"/>
+                  </a:lnTo>
+                  <a:lnTo>
+                    <a:pt x="237973" y="150658"/>
+                  </a:lnTo>
+                  <a:lnTo>
+                    <a:pt x="308317" y="191580"/>
+                  </a:lnTo>
+                  <a:lnTo>
+                    <a:pt x="378662" y="230988"/>
+                  </a:lnTo>
+                  <a:lnTo>
+                    <a:pt x="449006" y="268939"/>
+                  </a:lnTo>
+                  <a:lnTo>
+                    <a:pt x="519351" y="305487"/>
+                  </a:lnTo>
+                  <a:lnTo>
+                    <a:pt x="589695" y="340683"/>
+                  </a:lnTo>
+                  <a:lnTo>
+                    <a:pt x="660039" y="374577"/>
+                  </a:lnTo>
+                  <a:lnTo>
+                    <a:pt x="730384" y="407218"/>
+                  </a:lnTo>
+                  <a:lnTo>
+                    <a:pt x="800728" y="438652"/>
+                  </a:lnTo>
+                  <a:lnTo>
+                    <a:pt x="871073" y="468923"/>
+                  </a:lnTo>
+                  <a:lnTo>
+                    <a:pt x="941417" y="498075"/>
+                  </a:lnTo>
+                  <a:lnTo>
+                    <a:pt x="1011762" y="526148"/>
+                  </a:lnTo>
+                  <a:lnTo>
+                    <a:pt x="1082106" y="553184"/>
+                  </a:lnTo>
+                  <a:lnTo>
+                    <a:pt x="1152451" y="579220"/>
+                  </a:lnTo>
+                  <a:lnTo>
+                    <a:pt x="1222795" y="604292"/>
+                  </a:lnTo>
+                  <a:lnTo>
+                    <a:pt x="1293140" y="628438"/>
+                  </a:lnTo>
+                  <a:lnTo>
+                    <a:pt x="1363484" y="651691"/>
+                  </a:lnTo>
+                  <a:lnTo>
+                    <a:pt x="1433829" y="674083"/>
+                  </a:lnTo>
+                  <a:lnTo>
+                    <a:pt x="1504173" y="695648"/>
+                  </a:lnTo>
+                  <a:lnTo>
+                    <a:pt x="1574518" y="716415"/>
+                  </a:lnTo>
+                  <a:lnTo>
+                    <a:pt x="1644862" y="736414"/>
+                  </a:lnTo>
+                  <a:lnTo>
+                    <a:pt x="1715207" y="755674"/>
+                  </a:lnTo>
+                  <a:lnTo>
+                    <a:pt x="1785551" y="774221"/>
+                  </a:lnTo>
+                  <a:lnTo>
+                    <a:pt x="1855896" y="792083"/>
+                  </a:lnTo>
+                  <a:lnTo>
+                    <a:pt x="1926240" y="809283"/>
+                  </a:lnTo>
+                  <a:lnTo>
+                    <a:pt x="1996585" y="825848"/>
+                  </a:lnTo>
+                  <a:lnTo>
+                    <a:pt x="2066929" y="841800"/>
+                  </a:lnTo>
+                  <a:lnTo>
+                    <a:pt x="2137274" y="857162"/>
+                  </a:lnTo>
+                  <a:lnTo>
+                    <a:pt x="2207618" y="871957"/>
+                  </a:lnTo>
+                  <a:lnTo>
+                    <a:pt x="2277963" y="886204"/>
+                  </a:lnTo>
+                  <a:lnTo>
+                    <a:pt x="2348307" y="899924"/>
+                  </a:lnTo>
+                  <a:lnTo>
+                    <a:pt x="2418652" y="913136"/>
+                  </a:lnTo>
+                  <a:lnTo>
+                    <a:pt x="2488996" y="925860"/>
+                  </a:lnTo>
+                  <a:lnTo>
+                    <a:pt x="2559341" y="938114"/>
+                  </a:lnTo>
+                  <a:lnTo>
+                    <a:pt x="2629685" y="949914"/>
+                  </a:lnTo>
+                  <a:lnTo>
+                    <a:pt x="2700030" y="959117"/>
+                  </a:lnTo>
+                  <a:lnTo>
+                    <a:pt x="2770374" y="963189"/>
+                  </a:lnTo>
+                  <a:lnTo>
+                    <a:pt x="2840719" y="967206"/>
+                  </a:lnTo>
+                  <a:lnTo>
+                    <a:pt x="2911063" y="971167"/>
+                  </a:lnTo>
+                  <a:lnTo>
+                    <a:pt x="2981408" y="975074"/>
+                  </a:lnTo>
+                  <a:lnTo>
+                    <a:pt x="3051752" y="978928"/>
+                  </a:lnTo>
+                  <a:lnTo>
+                    <a:pt x="3122097" y="982730"/>
+                  </a:lnTo>
+                  <a:lnTo>
+                    <a:pt x="3192441" y="986479"/>
+                  </a:lnTo>
+                  <a:lnTo>
+                    <a:pt x="3262786" y="990177"/>
+                  </a:lnTo>
+                  <a:lnTo>
+                    <a:pt x="3333130" y="993825"/>
+                  </a:lnTo>
+                  <a:lnTo>
+                    <a:pt x="3403475" y="997423"/>
+                  </a:lnTo>
+                  <a:lnTo>
+                    <a:pt x="3473819" y="1000971"/>
+                  </a:lnTo>
+                  <a:lnTo>
+                    <a:pt x="3544164" y="1004471"/>
+                  </a:lnTo>
+                  <a:lnTo>
+                    <a:pt x="3614508" y="1007924"/>
+                  </a:lnTo>
+                  <a:lnTo>
+                    <a:pt x="3684853" y="1011329"/>
+                  </a:lnTo>
+                  <a:lnTo>
+                    <a:pt x="3755197" y="1014688"/>
+                  </a:lnTo>
+                  <a:lnTo>
+                    <a:pt x="3825542" y="1018001"/>
+                  </a:lnTo>
+                  <a:lnTo>
+                    <a:pt x="3895886" y="1021268"/>
+                  </a:lnTo>
+                  <a:lnTo>
+                    <a:pt x="3966231" y="1024491"/>
+                  </a:lnTo>
+                  <a:lnTo>
+                    <a:pt x="4036575" y="1027670"/>
+                  </a:lnTo>
+                  <a:lnTo>
+                    <a:pt x="4106920" y="1030806"/>
+                  </a:lnTo>
+                  <a:lnTo>
+                    <a:pt x="4177264" y="1033898"/>
+                  </a:lnTo>
+                  <a:lnTo>
+                    <a:pt x="4247609" y="1036949"/>
+                  </a:lnTo>
+                  <a:lnTo>
+                    <a:pt x="4317953" y="1039957"/>
+                  </a:lnTo>
+                  <a:lnTo>
+                    <a:pt x="4388297" y="1042925"/>
+                  </a:lnTo>
+                  <a:lnTo>
+                    <a:pt x="4458642" y="1045852"/>
+                  </a:lnTo>
+                  <a:lnTo>
+                    <a:pt x="4528986" y="1048739"/>
+                  </a:lnTo>
+                  <a:lnTo>
+                    <a:pt x="4599331" y="1051587"/>
+                  </a:lnTo>
+                  <a:lnTo>
+                    <a:pt x="4669675" y="1054396"/>
+                  </a:lnTo>
+                  <a:lnTo>
+                    <a:pt x="4740020" y="1057166"/>
+                  </a:lnTo>
+                  <a:lnTo>
+                    <a:pt x="4810364" y="1059899"/>
+                  </a:lnTo>
+                  <a:lnTo>
+                    <a:pt x="4880709" y="1062594"/>
+                  </a:lnTo>
+                  <a:lnTo>
+                    <a:pt x="4951053" y="1065252"/>
+                  </a:lnTo>
+                  <a:lnTo>
+                    <a:pt x="5021398" y="1067874"/>
+                  </a:lnTo>
+                  <a:lnTo>
+                    <a:pt x="5091742" y="1070461"/>
+                  </a:lnTo>
+                  <a:lnTo>
+                    <a:pt x="5162087" y="1073012"/>
+                  </a:lnTo>
+                  <a:lnTo>
+                    <a:pt x="5232431" y="1075528"/>
+                  </a:lnTo>
+                  <a:lnTo>
+                    <a:pt x="5302776" y="1078009"/>
+                  </a:lnTo>
+                  <a:lnTo>
+                    <a:pt x="5373120" y="1080457"/>
+                  </a:lnTo>
+                  <a:lnTo>
+                    <a:pt x="5443465" y="1082872"/>
+                  </a:lnTo>
+                  <a:lnTo>
+                    <a:pt x="5513809" y="1085253"/>
+                  </a:lnTo>
+                  <a:lnTo>
+                    <a:pt x="5584154" y="1087602"/>
+                  </a:lnTo>
+                  <a:lnTo>
+                    <a:pt x="5654498" y="1089919"/>
+                  </a:lnTo>
+                  <a:lnTo>
+                    <a:pt x="5724843" y="1092204"/>
+                  </a:lnTo>
+                  <a:lnTo>
+                    <a:pt x="5795187" y="1094458"/>
+                  </a:lnTo>
+                  <a:lnTo>
+                    <a:pt x="5865532" y="1096681"/>
+                  </a:lnTo>
+                  <a:lnTo>
+                    <a:pt x="5935876" y="1098874"/>
+                  </a:lnTo>
+                  <a:lnTo>
+                    <a:pt x="6006221" y="1101037"/>
+                  </a:lnTo>
+                  <a:lnTo>
+                    <a:pt x="6076565" y="1103170"/>
+                  </a:lnTo>
+                  <a:lnTo>
+                    <a:pt x="6146910" y="1105274"/>
+                  </a:lnTo>
+                  <a:lnTo>
+                    <a:pt x="6217254" y="1107349"/>
+                  </a:lnTo>
+                  <a:lnTo>
+                    <a:pt x="6287599" y="1109396"/>
+                  </a:lnTo>
+                </a:path>
+              </a:pathLst>
+            </a:custGeom>
+          </p:spPr>
+          <p:txBody>
+            <a:bodyPr/>
+            <a:lstStyle/>
+            <a:p/>
+          </p:txBody>
+        </p:sp>
+        <p:sp>
+          <p:nvSpPr>
+            <p:cNvPr id="68" name="pl68"/>
+            <p:cNvSpPr/>
+            <p:nvPr/>
+          </p:nvSpPr>
+          <p:spPr>
+            <a:xfrm>
+              <a:off x="1235312" y="5016830"/>
+              <a:ext cx="6964104" cy="533551"/>
+            </a:xfrm>
+            <a:custGeom>
+              <a:avLst/>
+              <a:pathLst>
+                <a:path w="6964104" h="533551">
+                  <a:moveTo>
+                    <a:pt x="6964104" y="533551"/>
+                  </a:moveTo>
+                  <a:lnTo>
+                    <a:pt x="6893760" y="531888"/>
+                  </a:lnTo>
+                  <a:lnTo>
+                    <a:pt x="6823415" y="530161"/>
+                  </a:lnTo>
+                  <a:lnTo>
+                    <a:pt x="6753071" y="528367"/>
+                  </a:lnTo>
+                  <a:lnTo>
+                    <a:pt x="6682726" y="526505"/>
+                  </a:lnTo>
+                  <a:lnTo>
+                    <a:pt x="6612382" y="524572"/>
+                  </a:lnTo>
+                  <a:lnTo>
+                    <a:pt x="6542037" y="522564"/>
+                  </a:lnTo>
+                  <a:lnTo>
+                    <a:pt x="6471693" y="520479"/>
+                  </a:lnTo>
+                  <a:lnTo>
+                    <a:pt x="6401348" y="518314"/>
+                  </a:lnTo>
+                  <a:lnTo>
+                    <a:pt x="6331004" y="516066"/>
+                  </a:lnTo>
+                  <a:lnTo>
+                    <a:pt x="6260659" y="513732"/>
+                  </a:lnTo>
+                  <a:lnTo>
+                    <a:pt x="6190315" y="511308"/>
+                  </a:lnTo>
+                  <a:lnTo>
+                    <a:pt x="6119970" y="508790"/>
+                  </a:lnTo>
+                  <a:lnTo>
+                    <a:pt x="6049626" y="506177"/>
+                  </a:lnTo>
+                  <a:lnTo>
+                    <a:pt x="5979281" y="503462"/>
+                  </a:lnTo>
+                  <a:lnTo>
+                    <a:pt x="5908937" y="500644"/>
+                  </a:lnTo>
+                  <a:lnTo>
+                    <a:pt x="5838592" y="497717"/>
+                  </a:lnTo>
+                  <a:lnTo>
+                    <a:pt x="5768248" y="494678"/>
+                  </a:lnTo>
+                  <a:lnTo>
+                    <a:pt x="5697903" y="491522"/>
+                  </a:lnTo>
+                  <a:lnTo>
+                    <a:pt x="5627559" y="488245"/>
+                  </a:lnTo>
+                  <a:lnTo>
+                    <a:pt x="5557214" y="484843"/>
+                  </a:lnTo>
+                  <a:lnTo>
+                    <a:pt x="5486870" y="481309"/>
+                  </a:lnTo>
+                  <a:lnTo>
+                    <a:pt x="5416525" y="477640"/>
+                  </a:lnTo>
+                  <a:lnTo>
+                    <a:pt x="5346181" y="473830"/>
+                  </a:lnTo>
+                  <a:lnTo>
+                    <a:pt x="5275836" y="469873"/>
+                  </a:lnTo>
+                  <a:lnTo>
+                    <a:pt x="5205492" y="465765"/>
+                  </a:lnTo>
+                  <a:lnTo>
+                    <a:pt x="5135147" y="461499"/>
+                  </a:lnTo>
+                  <a:lnTo>
+                    <a:pt x="5064803" y="457069"/>
+                  </a:lnTo>
+                  <a:lnTo>
+                    <a:pt x="4994458" y="452469"/>
+                  </a:lnTo>
+                  <a:lnTo>
+                    <a:pt x="4924114" y="447692"/>
+                  </a:lnTo>
+                  <a:lnTo>
+                    <a:pt x="4853769" y="442732"/>
+                  </a:lnTo>
+                  <a:lnTo>
+                    <a:pt x="4783425" y="437582"/>
+                  </a:lnTo>
+                  <a:lnTo>
+                    <a:pt x="4713080" y="432233"/>
+                  </a:lnTo>
+                  <a:lnTo>
+                    <a:pt x="4642736" y="426680"/>
+                  </a:lnTo>
+                  <a:lnTo>
+                    <a:pt x="4572391" y="420913"/>
+                  </a:lnTo>
+                  <a:lnTo>
+                    <a:pt x="4502047" y="414924"/>
+                  </a:lnTo>
+                  <a:lnTo>
+                    <a:pt x="4431702" y="408706"/>
+                  </a:lnTo>
+                  <a:lnTo>
+                    <a:pt x="4361358" y="402248"/>
+                  </a:lnTo>
+                  <a:lnTo>
+                    <a:pt x="4291013" y="395543"/>
+                  </a:lnTo>
+                  <a:lnTo>
+                    <a:pt x="4220669" y="388580"/>
+                  </a:lnTo>
+                  <a:lnTo>
+                    <a:pt x="4150324" y="381350"/>
+                  </a:lnTo>
+                  <a:lnTo>
+                    <a:pt x="4079980" y="373842"/>
+                  </a:lnTo>
+                  <a:lnTo>
+                    <a:pt x="4009635" y="366046"/>
+                  </a:lnTo>
+                  <a:lnTo>
+                    <a:pt x="3939291" y="357951"/>
+                  </a:lnTo>
+                  <a:lnTo>
+                    <a:pt x="3868946" y="349545"/>
+                  </a:lnTo>
+                  <a:lnTo>
+                    <a:pt x="3798602" y="340815"/>
+                  </a:lnTo>
+                  <a:lnTo>
+                    <a:pt x="3728257" y="331751"/>
+                  </a:lnTo>
+                  <a:lnTo>
+                    <a:pt x="3657913" y="322339"/>
+                  </a:lnTo>
+                  <a:lnTo>
+                    <a:pt x="3587569" y="312565"/>
+                  </a:lnTo>
+                  <a:lnTo>
+                    <a:pt x="3517224" y="302415"/>
+                  </a:lnTo>
+                  <a:lnTo>
+                    <a:pt x="3446880" y="291876"/>
+                  </a:lnTo>
+                  <a:lnTo>
+                    <a:pt x="3376535" y="280933"/>
+                  </a:lnTo>
+                  <a:lnTo>
+                    <a:pt x="3306191" y="274643"/>
+                  </a:lnTo>
+                  <a:lnTo>
+                    <a:pt x="3235846" y="270458"/>
+                  </a:lnTo>
+                  <a:lnTo>
+                    <a:pt x="3165502" y="266214"/>
+                  </a:lnTo>
+                  <a:lnTo>
+                    <a:pt x="3095157" y="261912"/>
+                  </a:lnTo>
+                  <a:lnTo>
+                    <a:pt x="3024813" y="257550"/>
+                  </a:lnTo>
+                  <a:lnTo>
+                    <a:pt x="2954468" y="253128"/>
+                  </a:lnTo>
+                  <a:lnTo>
+                    <a:pt x="2884124" y="248644"/>
+                  </a:lnTo>
+                  <a:lnTo>
+                    <a:pt x="2813779" y="244099"/>
+                  </a:lnTo>
+                  <a:lnTo>
+                    <a:pt x="2743435" y="239490"/>
+                  </a:lnTo>
+                  <a:lnTo>
+                    <a:pt x="2673090" y="234818"/>
+                  </a:lnTo>
+                  <a:lnTo>
+                    <a:pt x="2602746" y="230081"/>
+                  </a:lnTo>
+                  <a:lnTo>
+                    <a:pt x="2532401" y="225278"/>
+                  </a:lnTo>
+                  <a:lnTo>
+                    <a:pt x="2462057" y="220409"/>
+                  </a:lnTo>
+                  <a:lnTo>
+                    <a:pt x="2391712" y="215472"/>
+                  </a:lnTo>
+                  <a:lnTo>
+                    <a:pt x="2321368" y="210467"/>
+                  </a:lnTo>
+                  <a:lnTo>
+                    <a:pt x="2251023" y="205393"/>
+                  </a:lnTo>
+                  <a:lnTo>
+                    <a:pt x="2180679" y="200249"/>
+                  </a:lnTo>
+                  <a:lnTo>
+                    <a:pt x="2110334" y="195033"/>
+                  </a:lnTo>
+                  <a:lnTo>
+                    <a:pt x="2039990" y="189745"/>
+                  </a:lnTo>
+                  <a:lnTo>
+                    <a:pt x="1969645" y="184383"/>
+                  </a:lnTo>
+                  <a:lnTo>
+                    <a:pt x="1899301" y="178948"/>
+                  </a:lnTo>
+                  <a:lnTo>
+                    <a:pt x="1828956" y="173437"/>
+                  </a:lnTo>
+                  <a:lnTo>
+                    <a:pt x="1758612" y="167850"/>
+                  </a:lnTo>
+                  <a:lnTo>
+                    <a:pt x="1688267" y="162185"/>
+                  </a:lnTo>
+                  <a:lnTo>
+                    <a:pt x="1617923" y="156442"/>
+                  </a:lnTo>
+                  <a:lnTo>
+                    <a:pt x="1547578" y="150620"/>
+                  </a:lnTo>
+                  <a:lnTo>
+                    <a:pt x="1477234" y="144716"/>
+                  </a:lnTo>
+                  <a:lnTo>
+                    <a:pt x="1406889" y="138731"/>
+                  </a:lnTo>
+                  <a:lnTo>
+                    <a:pt x="1336545" y="132664"/>
+                  </a:lnTo>
+                  <a:lnTo>
+                    <a:pt x="1266200" y="126512"/>
+                  </a:lnTo>
+                  <a:lnTo>
+                    <a:pt x="1195856" y="120275"/>
+                  </a:lnTo>
+                  <a:lnTo>
+                    <a:pt x="1125511" y="113951"/>
+                  </a:lnTo>
+                  <a:lnTo>
+                    <a:pt x="1055167" y="107540"/>
+                  </a:lnTo>
+                  <a:lnTo>
+                    <a:pt x="984822" y="101040"/>
+                  </a:lnTo>
+                  <a:lnTo>
+                    <a:pt x="914478" y="94451"/>
+                  </a:lnTo>
+                  <a:lnTo>
+                    <a:pt x="844133" y="87770"/>
+                  </a:lnTo>
+                  <a:lnTo>
+                    <a:pt x="773789" y="80996"/>
+                  </a:lnTo>
+                  <a:lnTo>
+                    <a:pt x="703444" y="74128"/>
+                  </a:lnTo>
+                  <a:lnTo>
+                    <a:pt x="633100" y="67166"/>
+                  </a:lnTo>
+                  <a:lnTo>
+                    <a:pt x="562755" y="60107"/>
+                  </a:lnTo>
+                  <a:lnTo>
+                    <a:pt x="492411" y="52950"/>
+                  </a:lnTo>
+                  <a:lnTo>
+                    <a:pt x="422066" y="45694"/>
+                  </a:lnTo>
+                  <a:lnTo>
+                    <a:pt x="351722" y="38338"/>
+                  </a:lnTo>
+                  <a:lnTo>
+                    <a:pt x="281377" y="30880"/>
+                  </a:lnTo>
+                  <a:lnTo>
+                    <a:pt x="211033" y="23318"/>
+                  </a:lnTo>
+                  <a:lnTo>
+                    <a:pt x="140688" y="15652"/>
+                  </a:lnTo>
+                  <a:lnTo>
+                    <a:pt x="70344" y="7880"/>
+                  </a:lnTo>
+                  <a:lnTo>
+                    <a:pt x="0" y="0"/>
+                  </a:lnTo>
+                </a:path>
+              </a:pathLst>
+            </a:custGeom>
+          </p:spPr>
+          <p:txBody>
+            <a:bodyPr/>
+            <a:lstStyle/>
+            <a:p/>
+          </p:txBody>
+        </p:sp>
+        <p:sp>
+          <p:nvSpPr>
+            <p:cNvPr id="69" name="pl69"/>
+            <p:cNvSpPr/>
+            <p:nvPr/>
+          </p:nvSpPr>
+          <p:spPr>
+            <a:xfrm>
+              <a:off x="1235312" y="4572998"/>
+              <a:ext cx="6964104" cy="940683"/>
+            </a:xfrm>
+            <a:custGeom>
+              <a:avLst/>
+              <a:pathLst>
+                <a:path w="6964104" h="940683">
+                  <a:moveTo>
+                    <a:pt x="0" y="0"/>
+                  </a:moveTo>
+                  <a:lnTo>
+                    <a:pt x="70344" y="25916"/>
+                  </a:lnTo>
+                  <a:lnTo>
+                    <a:pt x="140688" y="51174"/>
+                  </a:lnTo>
+                  <a:lnTo>
+                    <a:pt x="211033" y="75790"/>
+                  </a:lnTo>
+                  <a:lnTo>
+                    <a:pt x="281377" y="99782"/>
+                  </a:lnTo>
+                  <a:lnTo>
+                    <a:pt x="351722" y="123164"/>
+                  </a:lnTo>
+                  <a:lnTo>
+                    <a:pt x="422066" y="145953"/>
+                  </a:lnTo>
+                  <a:lnTo>
+                    <a:pt x="492411" y="168163"/>
+                  </a:lnTo>
+                  <a:lnTo>
+                    <a:pt x="562755" y="189809"/>
+                  </a:lnTo>
+                  <a:lnTo>
+                    <a:pt x="633100" y="210906"/>
+                  </a:lnTo>
+                  <a:lnTo>
+                    <a:pt x="703444" y="231467"/>
+                  </a:lnTo>
+                  <a:lnTo>
+                    <a:pt x="773789" y="251506"/>
+                  </a:lnTo>
+                  <a:lnTo>
+                    <a:pt x="844133" y="271036"/>
+                  </a:lnTo>
+                  <a:lnTo>
+                    <a:pt x="914478" y="290070"/>
+                  </a:lnTo>
+                  <a:lnTo>
+                    <a:pt x="984822" y="308621"/>
+                  </a:lnTo>
+                  <a:lnTo>
+                    <a:pt x="1055167" y="326701"/>
+                  </a:lnTo>
+                  <a:lnTo>
+                    <a:pt x="1125511" y="344322"/>
+                  </a:lnTo>
+                  <a:lnTo>
+                    <a:pt x="1195856" y="361495"/>
+                  </a:lnTo>
+                  <a:lnTo>
+                    <a:pt x="1266200" y="378233"/>
+                  </a:lnTo>
+                  <a:lnTo>
+                    <a:pt x="1336545" y="394545"/>
+                  </a:lnTo>
+                  <a:lnTo>
+                    <a:pt x="1406889" y="410443"/>
+                  </a:lnTo>
+                  <a:lnTo>
+                    <a:pt x="1477234" y="425938"/>
+                  </a:lnTo>
+                  <a:lnTo>
+                    <a:pt x="1547578" y="441039"/>
+                  </a:lnTo>
+                  <a:lnTo>
+                    <a:pt x="1617923" y="455757"/>
+                  </a:lnTo>
+                  <a:lnTo>
+                    <a:pt x="1688267" y="470101"/>
+                  </a:lnTo>
+                  <a:lnTo>
+                    <a:pt x="1758612" y="484080"/>
+                  </a:lnTo>
+                  <a:lnTo>
+                    <a:pt x="1828956" y="497705"/>
+                  </a:lnTo>
+                  <a:lnTo>
+                    <a:pt x="1899301" y="510984"/>
+                  </a:lnTo>
+                  <a:lnTo>
+                    <a:pt x="1969645" y="523926"/>
+                  </a:lnTo>
+                  <a:lnTo>
+                    <a:pt x="2039990" y="536539"/>
+                  </a:lnTo>
+                  <a:lnTo>
+                    <a:pt x="2110334" y="548832"/>
+                  </a:lnTo>
+                  <a:lnTo>
+                    <a:pt x="2180679" y="560813"/>
+                  </a:lnTo>
+                  <a:lnTo>
+                    <a:pt x="2251023" y="572489"/>
+                  </a:lnTo>
+                  <a:lnTo>
+                    <a:pt x="2321368" y="583869"/>
+                  </a:lnTo>
+                  <a:lnTo>
+                    <a:pt x="2391712" y="594961"/>
+                  </a:lnTo>
+                  <a:lnTo>
+                    <a:pt x="2462057" y="605770"/>
+                  </a:lnTo>
+                  <a:lnTo>
+                    <a:pt x="2532401" y="616305"/>
+                  </a:lnTo>
+                  <a:lnTo>
+                    <a:pt x="2602746" y="626573"/>
+                  </a:lnTo>
+                  <a:lnTo>
+                    <a:pt x="2673090" y="636580"/>
+                  </a:lnTo>
+                  <a:lnTo>
+                    <a:pt x="2743435" y="646332"/>
+                  </a:lnTo>
+                  <a:lnTo>
+                    <a:pt x="2813779" y="655838"/>
+                  </a:lnTo>
+                  <a:lnTo>
+                    <a:pt x="2884124" y="665101"/>
+                  </a:lnTo>
+                  <a:lnTo>
+                    <a:pt x="2954468" y="674130"/>
+                  </a:lnTo>
+                  <a:lnTo>
+                    <a:pt x="3024813" y="682929"/>
+                  </a:lnTo>
+                  <a:lnTo>
+                    <a:pt x="3095157" y="691505"/>
+                  </a:lnTo>
+                  <a:lnTo>
+                    <a:pt x="3165502" y="699863"/>
+                  </a:lnTo>
+                  <a:lnTo>
+                    <a:pt x="3235846" y="708009"/>
+                  </a:lnTo>
+                  <a:lnTo>
+                    <a:pt x="3306191" y="715949"/>
+                  </a:lnTo>
+                  <a:lnTo>
+                    <a:pt x="3376535" y="723686"/>
+                  </a:lnTo>
+                  <a:lnTo>
+                    <a:pt x="3446880" y="731227"/>
+                  </a:lnTo>
+                  <a:lnTo>
+                    <a:pt x="3517224" y="738577"/>
+                  </a:lnTo>
+                  <a:lnTo>
+                    <a:pt x="3587569" y="745740"/>
+                  </a:lnTo>
+                  <a:lnTo>
+                    <a:pt x="3657913" y="752721"/>
+                  </a:lnTo>
+                  <a:lnTo>
+                    <a:pt x="3728257" y="759525"/>
+                  </a:lnTo>
+                  <a:lnTo>
+                    <a:pt x="3798602" y="766156"/>
+                  </a:lnTo>
+                  <a:lnTo>
+                    <a:pt x="3868946" y="772619"/>
+                  </a:lnTo>
+                  <a:lnTo>
+                    <a:pt x="3939291" y="778917"/>
+                  </a:lnTo>
+                  <a:lnTo>
+                    <a:pt x="4009635" y="785056"/>
+                  </a:lnTo>
+                  <a:lnTo>
+                    <a:pt x="4079980" y="791039"/>
+                  </a:lnTo>
+                  <a:lnTo>
+                    <a:pt x="4150324" y="796870"/>
+                  </a:lnTo>
+                  <a:lnTo>
+                    <a:pt x="4220669" y="802553"/>
+                  </a:lnTo>
+                  <a:lnTo>
+                    <a:pt x="4291013" y="808091"/>
+                  </a:lnTo>
+                  <a:lnTo>
+                    <a:pt x="4361358" y="813489"/>
+                  </a:lnTo>
+                  <a:lnTo>
+                    <a:pt x="4431702" y="818750"/>
+                  </a:lnTo>
+                  <a:lnTo>
+                    <a:pt x="4502047" y="823878"/>
+                  </a:lnTo>
+                  <a:lnTo>
+                    <a:pt x="4572391" y="828875"/>
+                  </a:lnTo>
+                  <a:lnTo>
+                    <a:pt x="4642736" y="833745"/>
+                  </a:lnTo>
+                  <a:lnTo>
+                    <a:pt x="4713080" y="838492"/>
+                  </a:lnTo>
+                  <a:lnTo>
+                    <a:pt x="4783425" y="843118"/>
+                  </a:lnTo>
+                  <a:lnTo>
+                    <a:pt x="4853769" y="847627"/>
+                  </a:lnTo>
+                  <a:lnTo>
+                    <a:pt x="4924114" y="852021"/>
+                  </a:lnTo>
+                  <a:lnTo>
+                    <a:pt x="4994458" y="856303"/>
+                  </a:lnTo>
+                  <a:lnTo>
+                    <a:pt x="5064803" y="860477"/>
+                  </a:lnTo>
+                  <a:lnTo>
+                    <a:pt x="5135147" y="864545"/>
+                  </a:lnTo>
+                  <a:lnTo>
+                    <a:pt x="5205492" y="868510"/>
+                  </a:lnTo>
+                  <a:lnTo>
+                    <a:pt x="5275836" y="872374"/>
+                  </a:lnTo>
+                  <a:lnTo>
+                    <a:pt x="5346181" y="876139"/>
+                  </a:lnTo>
+                  <a:lnTo>
+                    <a:pt x="5416525" y="879810"/>
+                  </a:lnTo>
+                  <a:lnTo>
+                    <a:pt x="5486870" y="883387"/>
+                  </a:lnTo>
+                  <a:lnTo>
+                    <a:pt x="5557214" y="886873"/>
+                  </a:lnTo>
+                  <a:lnTo>
+                    <a:pt x="5627559" y="890270"/>
+                  </a:lnTo>
+                  <a:lnTo>
+                    <a:pt x="5697903" y="893582"/>
+                  </a:lnTo>
+                  <a:lnTo>
+                    <a:pt x="5768248" y="896809"/>
+                  </a:lnTo>
+                  <a:lnTo>
+                    <a:pt x="5838592" y="899954"/>
+                  </a:lnTo>
+                  <a:lnTo>
+                    <a:pt x="5908937" y="903020"/>
+                  </a:lnTo>
+                  <a:lnTo>
+                    <a:pt x="5979281" y="906008"/>
+                  </a:lnTo>
+                  <a:lnTo>
+                    <a:pt x="6049626" y="908920"/>
+                  </a:lnTo>
+                  <a:lnTo>
+                    <a:pt x="6119970" y="911757"/>
+                  </a:lnTo>
+                  <a:lnTo>
+                    <a:pt x="6190315" y="914523"/>
+                  </a:lnTo>
+                  <a:lnTo>
+                    <a:pt x="6260659" y="917219"/>
+                  </a:lnTo>
+                  <a:lnTo>
+                    <a:pt x="6331004" y="919846"/>
+                  </a:lnTo>
+                  <a:lnTo>
+                    <a:pt x="6401348" y="922406"/>
+                  </a:lnTo>
+                  <a:lnTo>
+                    <a:pt x="6471693" y="924902"/>
+                  </a:lnTo>
+                  <a:lnTo>
+                    <a:pt x="6542037" y="927334"/>
+                  </a:lnTo>
+                  <a:lnTo>
+                    <a:pt x="6612382" y="929704"/>
+                  </a:lnTo>
+                  <a:lnTo>
+                    <a:pt x="6682726" y="932014"/>
+                  </a:lnTo>
+                  <a:lnTo>
+                    <a:pt x="6753071" y="934266"/>
+                  </a:lnTo>
+                  <a:lnTo>
+                    <a:pt x="6823415" y="936460"/>
+                  </a:lnTo>
+                  <a:lnTo>
+                    <a:pt x="6893760" y="938599"/>
+                  </a:lnTo>
+                  <a:lnTo>
+                    <a:pt x="6964104" y="940683"/>
+                  </a:lnTo>
+                </a:path>
+              </a:pathLst>
+            </a:custGeom>
+            <a:ln w="27101" cap="flat">
+              <a:solidFill>
+                <a:srgbClr val="FF8C00">
+                  <a:alpha val="100000"/>
+                </a:srgbClr>
+              </a:solidFill>
+              <a:prstDash val="solid"/>
+              <a:round/>
+            </a:ln>
+          </p:spPr>
+          <p:txBody>
+            <a:bodyPr/>
+            <a:lstStyle/>
+            <a:p/>
+          </p:txBody>
+        </p:sp>
+        <p:sp>
+          <p:nvSpPr>
+            <p:cNvPr id="70" name="pl70"/>
+            <p:cNvSpPr/>
+            <p:nvPr/>
+          </p:nvSpPr>
+          <p:spPr>
+            <a:xfrm>
+              <a:off x="887106" y="5294352"/>
+              <a:ext cx="7660515" cy="0"/>
+            </a:xfrm>
+            <a:custGeom>
+              <a:avLst/>
+              <a:pathLst>
+                <a:path w="7660515" h="0">
+                  <a:moveTo>
+                    <a:pt x="0" y="0"/>
+                  </a:moveTo>
+                  <a:lnTo>
+                    <a:pt x="7660515" y="0"/>
+                  </a:lnTo>
+                  <a:lnTo>
+                    <a:pt x="7660515" y="0"/>
+                  </a:lnTo>
+                </a:path>
+              </a:pathLst>
+            </a:custGeom>
+            <a:ln w="13550" cap="flat">
+              <a:solidFill>
+                <a:srgbClr val="7F7F7F">
+                  <a:alpha val="100000"/>
+                </a:srgbClr>
+              </a:solidFill>
+              <a:prstDash val="dash"/>
+              <a:round/>
+            </a:ln>
+          </p:spPr>
+          <p:txBody>
+            <a:bodyPr/>
+            <a:lstStyle/>
+            <a:p/>
+          </p:txBody>
+        </p:sp>
+        <p:sp>
+          <p:nvSpPr>
+            <p:cNvPr id="71" name="pl71"/>
+            <p:cNvSpPr/>
+            <p:nvPr/>
+          </p:nvSpPr>
+          <p:spPr>
+            <a:xfrm>
+              <a:off x="4590457" y="4336484"/>
+              <a:ext cx="0" cy="1317069"/>
+            </a:xfrm>
+            <a:custGeom>
+              <a:avLst/>
+              <a:pathLst>
+                <a:path w="0" h="1317069">
+                  <a:moveTo>
+                    <a:pt x="0" y="1317069"/>
+                  </a:moveTo>
+                  <a:lnTo>
+                    <a:pt x="0" y="0"/>
+                  </a:lnTo>
+                  <a:lnTo>
+                    <a:pt x="0" y="0"/>
+                  </a:lnTo>
+                </a:path>
+              </a:pathLst>
+            </a:custGeom>
+            <a:ln w="13550" cap="flat">
+              <a:solidFill>
+                <a:srgbClr val="666666">
+                  <a:alpha val="100000"/>
+                </a:srgbClr>
+              </a:solidFill>
+              <a:prstDash val="dot"/>
+              <a:round/>
+            </a:ln>
+          </p:spPr>
+          <p:txBody>
+            <a:bodyPr/>
+            <a:lstStyle/>
+            <a:p/>
+          </p:txBody>
+        </p:sp>
+        <p:sp>
+          <p:nvSpPr>
+            <p:cNvPr id="72" name="tx72"/>
+            <p:cNvSpPr/>
+            <p:nvPr/>
+          </p:nvSpPr>
+          <p:spPr>
+            <a:xfrm>
+              <a:off x="762297" y="5553636"/>
+              <a:ext cx="62179" cy="80101"/>
+            </a:xfrm>
+            <a:prstGeom prst="rect">
+              <a:avLst/>
+            </a:prstGeom>
+            <a:noFill/>
+          </p:spPr>
+          <p:txBody>
+            <a:bodyPr lIns="0" rIns="0" tIns="0" bIns="0" anchorCtr="1" anchor="ctr" wrap="none"/>
+            <a:lstStyle/>
+            <a:p>
+              <a:pPr algn="l" marL="0" marR="0" indent="0">
+                <a:lnSpc>
+                  <a:spcPts val="880"/>
+                </a:lnSpc>
+                <a:spcBef>
+                  <a:spcPts val="0"/>
+                </a:spcBef>
+                <a:spcAft>
+                  <a:spcPts val="0"/>
+                </a:spcAft>
+              </a:pPr>
+              <a:r>
+                <a:rPr sz="880">
+                  <a:solidFill>
+                    <a:srgbClr val="4D4D4D">
+                      <a:alpha val="100000"/>
+                    </a:srgbClr>
+                  </a:solidFill>
+                  <a:latin typeface="Helvetica"/>
+                  <a:cs typeface="Helvetica"/>
+                </a:rPr>
+                <a:t>0</a:t>
+              </a:r>
+            </a:p>
+          </p:txBody>
+        </p:sp>
+        <p:sp>
+          <p:nvSpPr>
+            <p:cNvPr id="73" name="tx73"/>
+            <p:cNvSpPr/>
+            <p:nvPr/>
+          </p:nvSpPr>
+          <p:spPr>
+            <a:xfrm>
+              <a:off x="762297" y="5254302"/>
+              <a:ext cx="62179" cy="80101"/>
+            </a:xfrm>
+            <a:prstGeom prst="rect">
+              <a:avLst/>
+            </a:prstGeom>
+            <a:noFill/>
+          </p:spPr>
+          <p:txBody>
+            <a:bodyPr lIns="0" rIns="0" tIns="0" bIns="0" anchorCtr="1" anchor="ctr" wrap="none"/>
+            <a:lstStyle/>
+            <a:p>
+              <a:pPr algn="l" marL="0" marR="0" indent="0">
+                <a:lnSpc>
+                  <a:spcPts val="880"/>
+                </a:lnSpc>
+                <a:spcBef>
+                  <a:spcPts val="0"/>
+                </a:spcBef>
+                <a:spcAft>
+                  <a:spcPts val="0"/>
+                </a:spcAft>
+              </a:pPr>
+              <a:r>
+                <a:rPr sz="880">
+                  <a:solidFill>
+                    <a:srgbClr val="4D4D4D">
+                      <a:alpha val="100000"/>
+                    </a:srgbClr>
+                  </a:solidFill>
+                  <a:latin typeface="Helvetica"/>
+                  <a:cs typeface="Helvetica"/>
+                </a:rPr>
+                <a:t>1</a:t>
+              </a:r>
+            </a:p>
+          </p:txBody>
+        </p:sp>
+        <p:sp>
+          <p:nvSpPr>
+            <p:cNvPr id="74" name="tx74"/>
+            <p:cNvSpPr/>
+            <p:nvPr/>
+          </p:nvSpPr>
+          <p:spPr>
+            <a:xfrm>
+              <a:off x="762297" y="4954968"/>
+              <a:ext cx="62179" cy="80101"/>
+            </a:xfrm>
+            <a:prstGeom prst="rect">
+              <a:avLst/>
+            </a:prstGeom>
+            <a:noFill/>
+          </p:spPr>
+          <p:txBody>
+            <a:bodyPr lIns="0" rIns="0" tIns="0" bIns="0" anchorCtr="1" anchor="ctr" wrap="none"/>
+            <a:lstStyle/>
+            <a:p>
+              <a:pPr algn="l" marL="0" marR="0" indent="0">
+                <a:lnSpc>
+                  <a:spcPts val="880"/>
+                </a:lnSpc>
+                <a:spcBef>
+                  <a:spcPts val="0"/>
+                </a:spcBef>
+                <a:spcAft>
+                  <a:spcPts val="0"/>
+                </a:spcAft>
+              </a:pPr>
+              <a:r>
+                <a:rPr sz="880">
+                  <a:solidFill>
+                    <a:srgbClr val="4D4D4D">
+                      <a:alpha val="100000"/>
+                    </a:srgbClr>
+                  </a:solidFill>
+                  <a:latin typeface="Helvetica"/>
+                  <a:cs typeface="Helvetica"/>
+                </a:rPr>
+                <a:t>2</a:t>
+              </a:r>
+            </a:p>
+          </p:txBody>
+        </p:sp>
+        <p:sp>
+          <p:nvSpPr>
+            <p:cNvPr id="75" name="tx75"/>
+            <p:cNvSpPr/>
+            <p:nvPr/>
+          </p:nvSpPr>
+          <p:spPr>
+            <a:xfrm>
+              <a:off x="762297" y="4655634"/>
+              <a:ext cx="62179" cy="80101"/>
+            </a:xfrm>
+            <a:prstGeom prst="rect">
+              <a:avLst/>
+            </a:prstGeom>
+            <a:noFill/>
+          </p:spPr>
+          <p:txBody>
+            <a:bodyPr lIns="0" rIns="0" tIns="0" bIns="0" anchorCtr="1" anchor="ctr" wrap="none"/>
+            <a:lstStyle/>
+            <a:p>
+              <a:pPr algn="l" marL="0" marR="0" indent="0">
+                <a:lnSpc>
+                  <a:spcPts val="880"/>
+                </a:lnSpc>
+                <a:spcBef>
+                  <a:spcPts val="0"/>
+                </a:spcBef>
+                <a:spcAft>
+                  <a:spcPts val="0"/>
+                </a:spcAft>
+              </a:pPr>
+              <a:r>
+                <a:rPr sz="880">
+                  <a:solidFill>
+                    <a:srgbClr val="4D4D4D">
+                      <a:alpha val="100000"/>
+                    </a:srgbClr>
+                  </a:solidFill>
+                  <a:latin typeface="Helvetica"/>
+                  <a:cs typeface="Helvetica"/>
+                </a:rPr>
+                <a:t>3</a:t>
+              </a:r>
+            </a:p>
+          </p:txBody>
+        </p:sp>
+        <p:sp>
+          <p:nvSpPr>
+            <p:cNvPr id="76" name="tx76"/>
+            <p:cNvSpPr/>
+            <p:nvPr/>
+          </p:nvSpPr>
+          <p:spPr>
+            <a:xfrm>
+              <a:off x="762297" y="4356300"/>
+              <a:ext cx="62179" cy="80101"/>
+            </a:xfrm>
+            <a:prstGeom prst="rect">
+              <a:avLst/>
+            </a:prstGeom>
+            <a:noFill/>
+          </p:spPr>
+          <p:txBody>
+            <a:bodyPr lIns="0" rIns="0" tIns="0" bIns="0" anchorCtr="1" anchor="ctr" wrap="none"/>
+            <a:lstStyle/>
+            <a:p>
+              <a:pPr algn="l" marL="0" marR="0" indent="0">
+                <a:lnSpc>
+                  <a:spcPts val="880"/>
+                </a:lnSpc>
+                <a:spcBef>
+                  <a:spcPts val="0"/>
+                </a:spcBef>
+                <a:spcAft>
+                  <a:spcPts val="0"/>
+                </a:spcAft>
+              </a:pPr>
+              <a:r>
+                <a:rPr sz="880">
+                  <a:solidFill>
+                    <a:srgbClr val="4D4D4D">
+                      <a:alpha val="100000"/>
+                    </a:srgbClr>
+                  </a:solidFill>
+                  <a:latin typeface="Helvetica"/>
+                  <a:cs typeface="Helvetica"/>
+                </a:rPr>
+                <a:t>4</a:t>
+              </a:r>
+            </a:p>
+          </p:txBody>
+        </p:sp>
+        <p:sp>
+          <p:nvSpPr>
+            <p:cNvPr id="77" name="tx77"/>
+            <p:cNvSpPr/>
+            <p:nvPr/>
+          </p:nvSpPr>
+          <p:spPr>
+            <a:xfrm>
+              <a:off x="1133333" y="5716183"/>
+              <a:ext cx="161574" cy="80101"/>
+            </a:xfrm>
+            <a:prstGeom prst="rect">
+              <a:avLst/>
+            </a:prstGeom>
+            <a:noFill/>
+          </p:spPr>
+          <p:txBody>
+            <a:bodyPr lIns="0" rIns="0" tIns="0" bIns="0" anchorCtr="1" anchor="ctr" wrap="none"/>
+            <a:lstStyle/>
+            <a:p>
+              <a:pPr algn="l" marL="0" marR="0" indent="0">
+                <a:lnSpc>
+                  <a:spcPts val="880"/>
+                </a:lnSpc>
+                <a:spcBef>
+                  <a:spcPts val="0"/>
+                </a:spcBef>
+                <a:spcAft>
+                  <a:spcPts val="0"/>
+                </a:spcAft>
+              </a:pPr>
+              <a:r>
+                <a:rPr sz="880">
+                  <a:solidFill>
+                    <a:srgbClr val="4D4D4D">
+                      <a:alpha val="100000"/>
+                    </a:srgbClr>
+                  </a:solidFill>
+                  <a:latin typeface="Helvetica"/>
+                  <a:cs typeface="Helvetica"/>
+                </a:rPr>
+                <a:t>-40</a:t>
+              </a:r>
+            </a:p>
+          </p:txBody>
+        </p:sp>
+        <p:sp>
+          <p:nvSpPr>
+            <p:cNvPr id="78" name="tx78"/>
+            <p:cNvSpPr/>
+            <p:nvPr/>
+          </p:nvSpPr>
+          <p:spPr>
+            <a:xfrm>
+              <a:off x="1978619" y="5716183"/>
+              <a:ext cx="161574" cy="80101"/>
+            </a:xfrm>
+            <a:prstGeom prst="rect">
+              <a:avLst/>
+            </a:prstGeom>
+            <a:noFill/>
+          </p:spPr>
+          <p:txBody>
+            <a:bodyPr lIns="0" rIns="0" tIns="0" bIns="0" anchorCtr="1" anchor="ctr" wrap="none"/>
+            <a:lstStyle/>
+            <a:p>
+              <a:pPr algn="l" marL="0" marR="0" indent="0">
+                <a:lnSpc>
+                  <a:spcPts val="880"/>
+                </a:lnSpc>
+                <a:spcBef>
+                  <a:spcPts val="0"/>
+                </a:spcBef>
+                <a:spcAft>
+                  <a:spcPts val="0"/>
+                </a:spcAft>
+              </a:pPr>
+              <a:r>
+                <a:rPr sz="880">
+                  <a:solidFill>
+                    <a:srgbClr val="4D4D4D">
+                      <a:alpha val="100000"/>
+                    </a:srgbClr>
+                  </a:solidFill>
+                  <a:latin typeface="Helvetica"/>
+                  <a:cs typeface="Helvetica"/>
+                </a:rPr>
+                <a:t>-30</a:t>
+              </a:r>
+            </a:p>
+          </p:txBody>
+        </p:sp>
+        <p:sp>
+          <p:nvSpPr>
+            <p:cNvPr id="79" name="tx79"/>
+            <p:cNvSpPr/>
+            <p:nvPr/>
+          </p:nvSpPr>
+          <p:spPr>
+            <a:xfrm>
+              <a:off x="2823906" y="5716183"/>
+              <a:ext cx="161574" cy="80101"/>
+            </a:xfrm>
+            <a:prstGeom prst="rect">
+              <a:avLst/>
+            </a:prstGeom>
+            <a:noFill/>
+          </p:spPr>
+          <p:txBody>
+            <a:bodyPr lIns="0" rIns="0" tIns="0" bIns="0" anchorCtr="1" anchor="ctr" wrap="none"/>
+            <a:lstStyle/>
+            <a:p>
+              <a:pPr algn="l" marL="0" marR="0" indent="0">
+                <a:lnSpc>
+                  <a:spcPts val="880"/>
+                </a:lnSpc>
+                <a:spcBef>
+                  <a:spcPts val="0"/>
+                </a:spcBef>
+                <a:spcAft>
+                  <a:spcPts val="0"/>
+                </a:spcAft>
+              </a:pPr>
+              <a:r>
+                <a:rPr sz="880">
+                  <a:solidFill>
+                    <a:srgbClr val="4D4D4D">
+                      <a:alpha val="100000"/>
+                    </a:srgbClr>
+                  </a:solidFill>
+                  <a:latin typeface="Helvetica"/>
+                  <a:cs typeface="Helvetica"/>
+                </a:rPr>
+                <a:t>-20</a:t>
+              </a:r>
+            </a:p>
+          </p:txBody>
+        </p:sp>
+        <p:sp>
+          <p:nvSpPr>
+            <p:cNvPr id="80" name="tx80"/>
+            <p:cNvSpPr/>
+            <p:nvPr/>
+          </p:nvSpPr>
+          <p:spPr>
+            <a:xfrm>
+              <a:off x="3669192" y="5716183"/>
+              <a:ext cx="161574" cy="80101"/>
+            </a:xfrm>
+            <a:prstGeom prst="rect">
+              <a:avLst/>
+            </a:prstGeom>
+            <a:noFill/>
+          </p:spPr>
+          <p:txBody>
+            <a:bodyPr lIns="0" rIns="0" tIns="0" bIns="0" anchorCtr="1" anchor="ctr" wrap="none"/>
+            <a:lstStyle/>
+            <a:p>
+              <a:pPr algn="l" marL="0" marR="0" indent="0">
+                <a:lnSpc>
+                  <a:spcPts val="880"/>
+                </a:lnSpc>
+                <a:spcBef>
+                  <a:spcPts val="0"/>
+                </a:spcBef>
+                <a:spcAft>
+                  <a:spcPts val="0"/>
+                </a:spcAft>
+              </a:pPr>
+              <a:r>
+                <a:rPr sz="880">
+                  <a:solidFill>
+                    <a:srgbClr val="4D4D4D">
+                      <a:alpha val="100000"/>
+                    </a:srgbClr>
+                  </a:solidFill>
+                  <a:latin typeface="Helvetica"/>
+                  <a:cs typeface="Helvetica"/>
+                </a:rPr>
+                <a:t>-10</a:t>
+              </a:r>
+            </a:p>
+          </p:txBody>
+        </p:sp>
+        <p:sp>
+          <p:nvSpPr>
+            <p:cNvPr id="81" name="tx81"/>
+            <p:cNvSpPr/>
+            <p:nvPr/>
+          </p:nvSpPr>
+          <p:spPr>
+            <a:xfrm>
+              <a:off x="4564176" y="5716183"/>
+              <a:ext cx="62179" cy="80101"/>
+            </a:xfrm>
+            <a:prstGeom prst="rect">
+              <a:avLst/>
+            </a:prstGeom>
+            <a:noFill/>
+          </p:spPr>
+          <p:txBody>
+            <a:bodyPr lIns="0" rIns="0" tIns="0" bIns="0" anchorCtr="1" anchor="ctr" wrap="none"/>
+            <a:lstStyle/>
+            <a:p>
+              <a:pPr algn="l" marL="0" marR="0" indent="0">
+                <a:lnSpc>
+                  <a:spcPts val="880"/>
+                </a:lnSpc>
+                <a:spcBef>
+                  <a:spcPts val="0"/>
+                </a:spcBef>
+                <a:spcAft>
+                  <a:spcPts val="0"/>
+                </a:spcAft>
+              </a:pPr>
+              <a:r>
+                <a:rPr sz="880">
+                  <a:solidFill>
+                    <a:srgbClr val="4D4D4D">
+                      <a:alpha val="100000"/>
+                    </a:srgbClr>
+                  </a:solidFill>
+                  <a:latin typeface="Helvetica"/>
+                  <a:cs typeface="Helvetica"/>
+                </a:rPr>
+                <a:t>0</a:t>
+              </a:r>
+            </a:p>
+          </p:txBody>
+        </p:sp>
+        <p:sp>
+          <p:nvSpPr>
+            <p:cNvPr id="82" name="tx82"/>
+            <p:cNvSpPr/>
+            <p:nvPr/>
+          </p:nvSpPr>
+          <p:spPr>
+            <a:xfrm>
+              <a:off x="5378373" y="5716183"/>
+              <a:ext cx="124358" cy="80101"/>
+            </a:xfrm>
+            <a:prstGeom prst="rect">
+              <a:avLst/>
+            </a:prstGeom>
+            <a:noFill/>
+          </p:spPr>
+          <p:txBody>
+            <a:bodyPr lIns="0" rIns="0" tIns="0" bIns="0" anchorCtr="1" anchor="ctr" wrap="none"/>
+            <a:lstStyle/>
+            <a:p>
+              <a:pPr algn="l" marL="0" marR="0" indent="0">
+                <a:lnSpc>
+                  <a:spcPts val="880"/>
+                </a:lnSpc>
+                <a:spcBef>
+                  <a:spcPts val="0"/>
+                </a:spcBef>
+                <a:spcAft>
+                  <a:spcPts val="0"/>
+                </a:spcAft>
+              </a:pPr>
+              <a:r>
+                <a:rPr sz="880">
+                  <a:solidFill>
+                    <a:srgbClr val="4D4D4D">
+                      <a:alpha val="100000"/>
+                    </a:srgbClr>
+                  </a:solidFill>
+                  <a:latin typeface="Helvetica"/>
+                  <a:cs typeface="Helvetica"/>
+                </a:rPr>
+                <a:t>10</a:t>
+              </a:r>
+            </a:p>
+          </p:txBody>
+        </p:sp>
+        <p:sp>
+          <p:nvSpPr>
+            <p:cNvPr id="83" name="tx83"/>
+            <p:cNvSpPr/>
+            <p:nvPr/>
+          </p:nvSpPr>
+          <p:spPr>
+            <a:xfrm>
+              <a:off x="6223659" y="5716183"/>
+              <a:ext cx="124358" cy="80101"/>
+            </a:xfrm>
+            <a:prstGeom prst="rect">
+              <a:avLst/>
+            </a:prstGeom>
+            <a:noFill/>
+          </p:spPr>
+          <p:txBody>
+            <a:bodyPr lIns="0" rIns="0" tIns="0" bIns="0" anchorCtr="1" anchor="ctr" wrap="none"/>
+            <a:lstStyle/>
+            <a:p>
+              <a:pPr algn="l" marL="0" marR="0" indent="0">
+                <a:lnSpc>
+                  <a:spcPts val="880"/>
+                </a:lnSpc>
+                <a:spcBef>
+                  <a:spcPts val="0"/>
+                </a:spcBef>
+                <a:spcAft>
+                  <a:spcPts val="0"/>
+                </a:spcAft>
+              </a:pPr>
+              <a:r>
+                <a:rPr sz="880">
+                  <a:solidFill>
+                    <a:srgbClr val="4D4D4D">
+                      <a:alpha val="100000"/>
+                    </a:srgbClr>
+                  </a:solidFill>
+                  <a:latin typeface="Helvetica"/>
+                  <a:cs typeface="Helvetica"/>
+                </a:rPr>
+                <a:t>20</a:t>
+              </a:r>
+            </a:p>
+          </p:txBody>
+        </p:sp>
+        <p:sp>
+          <p:nvSpPr>
+            <p:cNvPr id="84" name="tx84"/>
+            <p:cNvSpPr/>
+            <p:nvPr/>
+          </p:nvSpPr>
+          <p:spPr>
+            <a:xfrm>
+              <a:off x="7068946" y="5716183"/>
+              <a:ext cx="124358" cy="80101"/>
+            </a:xfrm>
+            <a:prstGeom prst="rect">
+              <a:avLst/>
+            </a:prstGeom>
+            <a:noFill/>
+          </p:spPr>
+          <p:txBody>
+            <a:bodyPr lIns="0" rIns="0" tIns="0" bIns="0" anchorCtr="1" anchor="ctr" wrap="none"/>
+            <a:lstStyle/>
+            <a:p>
+              <a:pPr algn="l" marL="0" marR="0" indent="0">
+                <a:lnSpc>
+                  <a:spcPts val="880"/>
+                </a:lnSpc>
+                <a:spcBef>
+                  <a:spcPts val="0"/>
+                </a:spcBef>
+                <a:spcAft>
+                  <a:spcPts val="0"/>
+                </a:spcAft>
+              </a:pPr>
+              <a:r>
+                <a:rPr sz="880">
+                  <a:solidFill>
+                    <a:srgbClr val="4D4D4D">
+                      <a:alpha val="100000"/>
+                    </a:srgbClr>
+                  </a:solidFill>
+                  <a:latin typeface="Helvetica"/>
+                  <a:cs typeface="Helvetica"/>
+                </a:rPr>
+                <a:t>30</a:t>
+              </a:r>
+            </a:p>
+          </p:txBody>
+        </p:sp>
+        <p:sp>
+          <p:nvSpPr>
+            <p:cNvPr id="85" name="tx85"/>
+            <p:cNvSpPr/>
+            <p:nvPr/>
+          </p:nvSpPr>
+          <p:spPr>
+            <a:xfrm>
+              <a:off x="7914232" y="5716183"/>
+              <a:ext cx="124358" cy="80101"/>
+            </a:xfrm>
+            <a:prstGeom prst="rect">
+              <a:avLst/>
+            </a:prstGeom>
+            <a:noFill/>
+          </p:spPr>
+          <p:txBody>
+            <a:bodyPr lIns="0" rIns="0" tIns="0" bIns="0" anchorCtr="1" anchor="ctr" wrap="none"/>
+            <a:lstStyle/>
+            <a:p>
+              <a:pPr algn="l" marL="0" marR="0" indent="0">
+                <a:lnSpc>
+                  <a:spcPts val="880"/>
+                </a:lnSpc>
+                <a:spcBef>
+                  <a:spcPts val="0"/>
+                </a:spcBef>
+                <a:spcAft>
+                  <a:spcPts val="0"/>
+                </a:spcAft>
+              </a:pPr>
+              <a:r>
+                <a:rPr sz="880">
+                  <a:solidFill>
+                    <a:srgbClr val="4D4D4D">
+                      <a:alpha val="100000"/>
+                    </a:srgbClr>
+                  </a:solidFill>
+                  <a:latin typeface="Helvetica"/>
+                  <a:cs typeface="Helvetica"/>
+                </a:rPr>
+                <a:t>40</a:t>
+              </a:r>
+            </a:p>
+          </p:txBody>
+        </p:sp>
+        <p:sp>
+          <p:nvSpPr>
+            <p:cNvPr id="86" name="tx86"/>
+            <p:cNvSpPr/>
+            <p:nvPr/>
+          </p:nvSpPr>
+          <p:spPr>
+            <a:xfrm>
+              <a:off x="2928340" y="5855859"/>
+              <a:ext cx="3578047" cy="100218"/>
+            </a:xfrm>
+            <a:prstGeom prst="rect">
+              <a:avLst/>
+            </a:prstGeom>
+            <a:noFill/>
+          </p:spPr>
+          <p:txBody>
+            <a:bodyPr lIns="0" rIns="0" tIns="0" bIns="0" anchorCtr="1" anchor="ctr" wrap="none"/>
+            <a:lstStyle/>
+            <a:p>
+              <a:pPr algn="l" marL="0" marR="0" indent="0">
+                <a:lnSpc>
+                  <a:spcPts val="1100"/>
+                </a:lnSpc>
+                <a:spcBef>
+                  <a:spcPts val="0"/>
+                </a:spcBef>
+                <a:spcAft>
+                  <a:spcPts val="0"/>
+                </a:spcAft>
+              </a:pPr>
+              <a:r>
+                <a:rPr sz="1100">
+                  <a:solidFill>
+                    <a:srgbClr val="000000">
+                      <a:alpha val="100000"/>
+                    </a:srgbClr>
+                  </a:solidFill>
+                  <a:latin typeface="Helvetica"/>
+                  <a:cs typeface="Helvetica"/>
+                </a:rPr>
+                <a:t>eGFR difference (%): 100 × (CKD-EPI Cr-Cys − CG) / CG</a:t>
+              </a:r>
+            </a:p>
+          </p:txBody>
+        </p:sp>
+        <p:sp>
+          <p:nvSpPr>
+            <p:cNvPr id="87" name="tx87"/>
+            <p:cNvSpPr/>
+            <p:nvPr/>
+          </p:nvSpPr>
+          <p:spPr>
+            <a:xfrm rot="-5400000">
+              <a:off x="138035" y="4944909"/>
+              <a:ext cx="1016904" cy="100218"/>
+            </a:xfrm>
+            <a:prstGeom prst="rect">
+              <a:avLst/>
+            </a:prstGeom>
+            <a:noFill/>
+          </p:spPr>
+          <p:txBody>
+            <a:bodyPr lIns="0" rIns="0" tIns="0" bIns="0" anchorCtr="1" anchor="ctr" wrap="none"/>
+            <a:lstStyle/>
+            <a:p>
+              <a:pPr algn="l" marL="0" marR="0" indent="0">
+                <a:lnSpc>
+                  <a:spcPts val="1100"/>
+                </a:lnSpc>
+                <a:spcBef>
+                  <a:spcPts val="0"/>
+                </a:spcBef>
+                <a:spcAft>
+                  <a:spcPts val="0"/>
+                </a:spcAft>
+              </a:pPr>
+              <a:r>
+                <a:rPr sz="1100">
+                  <a:solidFill>
+                    <a:srgbClr val="000000">
+                      <a:alpha val="100000"/>
+                    </a:srgbClr>
+                  </a:solidFill>
+                  <a:latin typeface="Helvetica"/>
+                  <a:cs typeface="Helvetica"/>
+                </a:rPr>
+                <a:t>subHR (95% CI)</a:t>
+              </a:r>
+            </a:p>
+          </p:txBody>
+        </p:sp>
+        <p:sp>
+          <p:nvSpPr>
+            <p:cNvPr id="88" name="tx88"/>
+            <p:cNvSpPr/>
+            <p:nvPr/>
+          </p:nvSpPr>
+          <p:spPr>
+            <a:xfrm>
+              <a:off x="887106" y="4159544"/>
+              <a:ext cx="7052127" cy="82021"/>
+            </a:xfrm>
+            <a:prstGeom prst="rect">
+              <a:avLst/>
+            </a:prstGeom>
+            <a:noFill/>
+          </p:spPr>
+          <p:txBody>
+            <a:bodyPr lIns="0" rIns="0" tIns="0" bIns="0" anchorCtr="1" anchor="ctr" wrap="none"/>
+            <a:lstStyle/>
+            <a:p>
+              <a:pPr algn="l" marL="0" marR="0" indent="0">
+                <a:lnSpc>
+                  <a:spcPts val="900"/>
+                </a:lnSpc>
+                <a:spcBef>
+                  <a:spcPts val="0"/>
+                </a:spcBef>
+                <a:spcAft>
+                  <a:spcPts val="0"/>
+                </a:spcAft>
+              </a:pPr>
+              <a:r>
+                <a:rPr sz="900">
+                  <a:solidFill>
+                    <a:srgbClr val="404040">
+                      <a:alpha val="100000"/>
+                    </a:srgbClr>
+                  </a:solidFill>
+                  <a:latin typeface="Helvetica"/>
+                  <a:cs typeface="Helvetica"/>
+                </a:rPr>
+                <a:t>subHR per 10 % decline: 1.36 (1.18-1.57), p_Bonf = &lt;0.001 (n = 6)  |  per IQR decline (Δ = 29.3 %): 2.47 (1.62-3.76)  |  IQR: [-14.6, 14.7] %</a:t>
+              </a:r>
+            </a:p>
+          </p:txBody>
+        </p:sp>
+        <p:sp>
+          <p:nvSpPr>
+            <p:cNvPr id="89" name="tx89"/>
+            <p:cNvSpPr/>
+            <p:nvPr/>
+          </p:nvSpPr>
+          <p:spPr>
+            <a:xfrm>
+              <a:off x="887106" y="3932770"/>
               <a:ext cx="1219901" cy="120152"/>
             </a:xfrm>
             <a:prstGeom prst="rect">
